--- a/presentations/hummingbird-overview.pptx
+++ b/presentations/hummingbird-overview.pptx
@@ -38,9 +38,13 @@
     <p:sldId id="286" r:id="rId32"/>
     <p:sldId id="287" r:id="rId33"/>
     <p:sldId id="288" r:id="rId34"/>
+    <p:sldId id="289" r:id="rId35"/>
+    <p:sldId id="290" r:id="rId36"/>
+    <p:sldId id="291" r:id="rId37"/>
+    <p:sldId id="292" r:id="rId38"/>
   </p:sldIdLst>
   <p:notesMasterIdLst>
-    <p:notesMasterId r:id="rId35"/>
+    <p:notesMasterId r:id="rId39"/>
   </p:notesMasterIdLst>
   <p:sldSz cx="12192000" cy="6858000"/>
   <p:notesSz cx="6858000" cy="12192000"/>
@@ -2822,7 +2826,7 @@
           <a:p>
             <a:r>
               <a:rPr lang="en-US" dirty="0"/>
-              <a:t>Recap the arc and point to where to go deeper. One idea drives everything — rebuild instead of patch — and it gives you distroless, near-zero-CVE images on a trust chain you may already rely on. The entire workflow fits on a laptop with Podman. The strongest closing note for an admin audience: near-zero CVE isn't something to take on faith — it's one Grype command away from being your own measurement, and the work that remains is the tractable part, keeping your own dependencies current. And it's not all-or-nothing: use Hummingbird where minimalism wins and UBI where breadth does. Everything in this deck — chapters, runnable examples, and the demos — lives in the tutorial repo and site.</a:t>
+              <a:t>This close-out borrows the canonical container supply-chain threat model from Liz Rice's Container Security (2nd edition, chapter 7) and reframes it for Podman, OpenShift, and RHEL. The goal for the audience: Hummingbird is, in large part, an answer to this model — it closes the hardest vectors by construction — while source/Containerfile integrity, host and platform hardening, and the admission gate stay the operator's job.</a:t>
             </a:r>
             <a:endParaRPr lang="en-US" dirty="0"/>
           </a:p>
@@ -2846,6 +2850,358 @@
             <a:fld id="{F7021451-1387-4CA6-816F-3879F97B5CBC}" type="slidenum">
               <a:rPr lang="en-US"/>
               <a:t>33</a:t>
+            </a:fld>
+            <a:endParaRPr lang="en-US"/>
+          </a:p>
+        </p:txBody>
+      </p:sp>
+    </p:spTree>
+    <p:extLst>
+      <p:ext uri="{BB962C8B-B14F-4D97-AF65-F5344CB8AC3E}">
+        <p14:creationId xmlns:p14="http://schemas.microsoft.com/office/powerpoint/2010/main" val="1024086991"/>
+      </p:ext>
+    </p:extLst>
+  </p:cSld>
+  <p:clrMapOvr>
+    <a:masterClrMapping/>
+  </p:clrMapOvr>
+</p:notes>
+</file>
+
+<file path=ppt/notesSlides/notesSlide34.xml><?xml version="1.0" encoding="utf-8"?>
+<p:notes xmlns:a="http://schemas.openxmlformats.org/drawingml/2006/main" xmlns:r="http://schemas.openxmlformats.org/officeDocument/2006/relationships" xmlns:p="http://schemas.openxmlformats.org/presentationml/2006/main">
+  <p:cSld>
+    <p:spTree>
+      <p:nvGrpSpPr>
+        <p:cNvPr id="1" name=""/>
+        <p:cNvGrpSpPr/>
+        <p:nvPr/>
+      </p:nvGrpSpPr>
+      <p:grpSpPr>
+        <a:xfrm>
+          <a:off x="0" y="0"/>
+          <a:ext cx="0" cy="0"/>
+          <a:chOff x="0" y="0"/>
+          <a:chExt cx="0" cy="0"/>
+        </a:xfrm>
+      </p:grpSpPr>
+      <p:sp>
+        <p:nvSpPr>
+          <p:cNvPr id="2" name="Slide Image Placeholder 1"/>
+          <p:cNvSpPr>
+            <a:spLocks noGrp="1" noRot="1" noChangeAspect="1"/>
+          </p:cNvSpPr>
+          <p:nvPr>
+            <p:ph type="sldImg"/>
+          </p:nvPr>
+        </p:nvSpPr>
+        <p:spPr/>
+      </p:sp>
+      <p:sp>
+        <p:nvSpPr>
+          <p:cNvPr id="3" name="Notes Placeholder 2"/>
+          <p:cNvSpPr>
+            <a:spLocks noGrp="1"/>
+          </p:cNvSpPr>
+          <p:nvPr>
+            <p:ph type="body" idx="1"/>
+          </p:nvPr>
+        </p:nvSpPr>
+        <p:spPr/>
+        <p:txBody>
+          <a:bodyPr/>
+          <a:lstStyle/>
+          <a:p>
+            <a:r>
+              <a:rPr lang="en-US" dirty="0"/>
+              <a:t>The canonical container supply-chain threat model, reframed for our stack: Buildah/Konflux instead of Docker, the signed registry.access.redhat.com/hi path, OpenShift at deploy. Top row: the classic vectors. Bottom row: the Hummingbird answer. The story to tell — a hardened base turns the three hardest vectors (vulnerable base, vulnerable dependencies, build tampering) from 'trust us' into signed evidence you verify yourself, and the minimalism means there's simply less inside to be vulnerable. Be candid about the left edge: tampered source and a tampered Containerfile are the operator's job — branch protection, signed commits, pin the base by digest. Hummingbird gives you a trustworthy FROM; it can't stop an insecure Containerfile on top of it.</a:t>
+            </a:r>
+            <a:endParaRPr lang="en-US" dirty="0"/>
+          </a:p>
+        </p:txBody>
+      </p:sp>
+      <p:sp>
+        <p:nvSpPr>
+          <p:cNvPr id="4" name="Slide Number Placeholder 3"/>
+          <p:cNvSpPr>
+            <a:spLocks noGrp="1"/>
+          </p:cNvSpPr>
+          <p:nvPr>
+            <p:ph type="sldNum" sz="quarter" idx="10"/>
+          </p:nvPr>
+        </p:nvSpPr>
+        <p:spPr/>
+        <p:txBody>
+          <a:bodyPr/>
+          <a:lstStyle/>
+          <a:p>
+            <a:fld id="{F7021451-1387-4CA6-816F-3879F97B5CBC}" type="slidenum">
+              <a:rPr lang="en-US"/>
+              <a:t>34</a:t>
+            </a:fld>
+            <a:endParaRPr lang="en-US"/>
+          </a:p>
+        </p:txBody>
+      </p:sp>
+    </p:spTree>
+    <p:extLst>
+      <p:ext uri="{BB962C8B-B14F-4D97-AF65-F5344CB8AC3E}">
+        <p14:creationId xmlns:p14="http://schemas.microsoft.com/office/powerpoint/2010/main" val="1024086991"/>
+      </p:ext>
+    </p:extLst>
+  </p:cSld>
+  <p:clrMapOvr>
+    <a:masterClrMapping/>
+  </p:clrMapOvr>
+</p:notes>
+</file>
+
+<file path=ppt/notesSlides/notesSlide35.xml><?xml version="1.0" encoding="utf-8"?>
+<p:notes xmlns:a="http://schemas.openxmlformats.org/drawingml/2006/main" xmlns:r="http://schemas.openxmlformats.org/officeDocument/2006/relationships" xmlns:p="http://schemas.openxmlformats.org/presentationml/2006/main">
+  <p:cSld>
+    <p:spTree>
+      <p:nvGrpSpPr>
+        <p:cNvPr id="1" name=""/>
+        <p:cNvGrpSpPr/>
+        <p:nvPr/>
+      </p:nvGrpSpPr>
+      <p:grpSpPr>
+        <a:xfrm>
+          <a:off x="0" y="0"/>
+          <a:ext cx="0" cy="0"/>
+          <a:chOff x="0" y="0"/>
+          <a:chExt cx="0" cy="0"/>
+        </a:xfrm>
+      </p:grpSpPr>
+      <p:sp>
+        <p:nvSpPr>
+          <p:cNvPr id="2" name="Slide Image Placeholder 1"/>
+          <p:cNvSpPr>
+            <a:spLocks noGrp="1" noRot="1" noChangeAspect="1"/>
+          </p:cNvSpPr>
+          <p:nvPr>
+            <p:ph type="sldImg"/>
+          </p:nvPr>
+        </p:nvSpPr>
+        <p:spPr/>
+      </p:sp>
+      <p:sp>
+        <p:nvSpPr>
+          <p:cNvPr id="3" name="Notes Placeholder 2"/>
+          <p:cNvSpPr>
+            <a:spLocks noGrp="1"/>
+          </p:cNvSpPr>
+          <p:nvPr>
+            <p:ph type="body" idx="1"/>
+          </p:nvPr>
+        </p:nvSpPr>
+        <p:spPr/>
+        <p:txBody>
+          <a:bodyPr/>
+          <a:lstStyle/>
+          <a:p>
+            <a:r>
+              <a:rPr lang="en-US" dirty="0"/>
+              <a:t>The pipeline view was build-and-delivery; this is runtime — defense in depth. The hardened image shrinks the cluster of vectors aimed at the image and the app: a swapped image fails cosign verify; distroless removes the foot-guns (no shell, no package manager, non-root UID 65532); fewer packages mean fewer exploitable paths and very little for an intruder to use if they do land inside. What it does NOT fix sits outside the container — misconfigured host, insecure networking, container escape — and those are platform hardening: rootless Podman, SELinux, seccomp, OpenShift SCCs, network policy. The hardened image is one strong layer, not the whole onion.</a:t>
+            </a:r>
+            <a:endParaRPr lang="en-US" dirty="0"/>
+          </a:p>
+        </p:txBody>
+      </p:sp>
+      <p:sp>
+        <p:nvSpPr>
+          <p:cNvPr id="4" name="Slide Number Placeholder 3"/>
+          <p:cNvSpPr>
+            <a:spLocks noGrp="1"/>
+          </p:cNvSpPr>
+          <p:nvPr>
+            <p:ph type="sldNum" sz="quarter" idx="10"/>
+          </p:nvPr>
+        </p:nvSpPr>
+        <p:spPr/>
+        <p:txBody>
+          <a:bodyPr/>
+          <a:lstStyle/>
+          <a:p>
+            <a:fld id="{F7021451-1387-4CA6-816F-3879F97B5CBC}" type="slidenum">
+              <a:rPr lang="en-US"/>
+              <a:t>35</a:t>
+            </a:fld>
+            <a:endParaRPr lang="en-US"/>
+          </a:p>
+        </p:txBody>
+      </p:sp>
+    </p:spTree>
+    <p:extLst>
+      <p:ext uri="{BB962C8B-B14F-4D97-AF65-F5344CB8AC3E}">
+        <p14:creationId xmlns:p14="http://schemas.microsoft.com/office/powerpoint/2010/main" val="1024086991"/>
+      </p:ext>
+    </p:extLst>
+  </p:cSld>
+  <p:clrMapOvr>
+    <a:masterClrMapping/>
+  </p:clrMapOvr>
+</p:notes>
+</file>
+
+<file path=ppt/notesSlides/notesSlide36.xml><?xml version="1.0" encoding="utf-8"?>
+<p:notes xmlns:a="http://schemas.openxmlformats.org/drawingml/2006/main" xmlns:r="http://schemas.openxmlformats.org/officeDocument/2006/relationships" xmlns:p="http://schemas.openxmlformats.org/presentationml/2006/main">
+  <p:cSld>
+    <p:spTree>
+      <p:nvGrpSpPr>
+        <p:cNvPr id="1" name=""/>
+        <p:cNvGrpSpPr/>
+        <p:nvPr/>
+      </p:nvGrpSpPr>
+      <p:grpSpPr>
+        <a:xfrm>
+          <a:off x="0" y="0"/>
+          <a:ext cx="0" cy="0"/>
+          <a:chOff x="0" y="0"/>
+          <a:chExt cx="0" cy="0"/>
+        </a:xfrm>
+      </p:grpSpPr>
+      <p:sp>
+        <p:nvSpPr>
+          <p:cNvPr id="2" name="Slide Image Placeholder 1"/>
+          <p:cNvSpPr>
+            <a:spLocks noGrp="1" noRot="1" noChangeAspect="1"/>
+          </p:cNvSpPr>
+          <p:nvPr>
+            <p:ph type="sldImg"/>
+          </p:nvPr>
+        </p:nvSpPr>
+        <p:spPr/>
+      </p:sp>
+      <p:sp>
+        <p:nvSpPr>
+          <p:cNvPr id="3" name="Notes Placeholder 2"/>
+          <p:cNvSpPr>
+            <a:spLocks noGrp="1"/>
+          </p:cNvSpPr>
+          <p:nvPr>
+            <p:ph type="body" idx="1"/>
+          </p:nvPr>
+        </p:nvSpPr>
+        <p:spPr/>
+        <p:txBody>
+          <a:bodyPr/>
+          <a:lstStyle/>
+          <a:p>
+            <a:r>
+              <a:rPr lang="en-US" dirty="0"/>
+              <a:t>The honest summary, and a good place to end an admin talk. Hummingbird owns the image — vulnerable base, vulnerable dependencies, build integrity, image authenticity — the part that's genuinely hard to do yourself and that you get for free. You own the edges — source and Containerfile integrity, platform hardening, and the admission gate that enforces verification for every deploy. The practical close: verify on pull with podman + cosign, and enforce it cluster-wide with an OpenShift admission policy so no one can route around the check — that's what closes the malicious-deployment-definition vector. A near-zero-CVE distroless base is the strongest single move on the supply chain precisely because it collapses the vectors that are hardest to defend one at a time.</a:t>
+            </a:r>
+            <a:endParaRPr lang="en-US" dirty="0"/>
+          </a:p>
+        </p:txBody>
+      </p:sp>
+      <p:sp>
+        <p:nvSpPr>
+          <p:cNvPr id="4" name="Slide Number Placeholder 3"/>
+          <p:cNvSpPr>
+            <a:spLocks noGrp="1"/>
+          </p:cNvSpPr>
+          <p:nvPr>
+            <p:ph type="sldNum" sz="quarter" idx="10"/>
+          </p:nvPr>
+        </p:nvSpPr>
+        <p:spPr/>
+        <p:txBody>
+          <a:bodyPr/>
+          <a:lstStyle/>
+          <a:p>
+            <a:fld id="{F7021451-1387-4CA6-816F-3879F97B5CBC}" type="slidenum">
+              <a:rPr lang="en-US"/>
+              <a:t>36</a:t>
+            </a:fld>
+            <a:endParaRPr lang="en-US"/>
+          </a:p>
+        </p:txBody>
+      </p:sp>
+    </p:spTree>
+    <p:extLst>
+      <p:ext uri="{BB962C8B-B14F-4D97-AF65-F5344CB8AC3E}">
+        <p14:creationId xmlns:p14="http://schemas.microsoft.com/office/powerpoint/2010/main" val="1024086991"/>
+      </p:ext>
+    </p:extLst>
+  </p:cSld>
+  <p:clrMapOvr>
+    <a:masterClrMapping/>
+  </p:clrMapOvr>
+</p:notes>
+</file>
+
+<file path=ppt/notesSlides/notesSlide37.xml><?xml version="1.0" encoding="utf-8"?>
+<p:notes xmlns:a="http://schemas.openxmlformats.org/drawingml/2006/main" xmlns:r="http://schemas.openxmlformats.org/officeDocument/2006/relationships" xmlns:p="http://schemas.openxmlformats.org/presentationml/2006/main">
+  <p:cSld>
+    <p:spTree>
+      <p:nvGrpSpPr>
+        <p:cNvPr id="1" name=""/>
+        <p:cNvGrpSpPr/>
+        <p:nvPr/>
+      </p:nvGrpSpPr>
+      <p:grpSpPr>
+        <a:xfrm>
+          <a:off x="0" y="0"/>
+          <a:ext cx="0" cy="0"/>
+          <a:chOff x="0" y="0"/>
+          <a:chExt cx="0" cy="0"/>
+        </a:xfrm>
+      </p:grpSpPr>
+      <p:sp>
+        <p:nvSpPr>
+          <p:cNvPr id="2" name="Slide Image Placeholder 1"/>
+          <p:cNvSpPr>
+            <a:spLocks noGrp="1" noRot="1" noChangeAspect="1"/>
+          </p:cNvSpPr>
+          <p:nvPr>
+            <p:ph type="sldImg"/>
+          </p:nvPr>
+        </p:nvSpPr>
+        <p:spPr/>
+      </p:sp>
+      <p:sp>
+        <p:nvSpPr>
+          <p:cNvPr id="3" name="Notes Placeholder 2"/>
+          <p:cNvSpPr>
+            <a:spLocks noGrp="1"/>
+          </p:cNvSpPr>
+          <p:nvPr>
+            <p:ph type="body" idx="1"/>
+          </p:nvPr>
+        </p:nvSpPr>
+        <p:spPr/>
+        <p:txBody>
+          <a:bodyPr/>
+          <a:lstStyle/>
+          <a:p>
+            <a:r>
+              <a:rPr lang="en-US" dirty="0"/>
+              <a:t>Recap the arc and point to where to go deeper. One idea drives everything — rebuild instead of patch — and it gives you distroless, near-zero-CVE images on a trust chain you may already rely on. The entire workflow fits on a laptop with Podman. The strongest closing note for an admin audience: near-zero CVE isn't something to take on faith — it's one Grype command away from being your own measurement, and the work that remains is the tractable part, keeping your own dependencies current. And it's not all-or-nothing: use Hummingbird where minimalism wins and UBI where breadth does. Everything in this deck — chapters, runnable examples, and the demos — lives in the tutorial repo and site.</a:t>
+            </a:r>
+            <a:endParaRPr lang="en-US" dirty="0"/>
+          </a:p>
+        </p:txBody>
+      </p:sp>
+      <p:sp>
+        <p:nvSpPr>
+          <p:cNvPr id="4" name="Slide Number Placeholder 3"/>
+          <p:cNvSpPr>
+            <a:spLocks noGrp="1"/>
+          </p:cNvSpPr>
+          <p:nvPr>
+            <p:ph type="sldNum" sz="quarter" idx="10"/>
+          </p:nvPr>
+        </p:nvSpPr>
+        <p:spPr/>
+        <p:txBody>
+          <a:bodyPr/>
+          <a:lstStyle/>
+          <a:p>
+            <a:fld id="{F7021451-1387-4CA6-816F-3879F97B5CBC}" type="slidenum">
+              <a:rPr lang="en-US"/>
+              <a:t>37</a:t>
             </a:fld>
             <a:endParaRPr lang="en-US"/>
           </a:p>
@@ -3914,7 +4270,7 @@
                 <a:ea typeface="Red Hat Mono" pitchFamily="34" charset="-122"/>
                 <a:cs typeface="Red Hat Mono" pitchFamily="34" charset="-120"/>
               </a:rPr>
-              <a:t>r01.2</a:t>
+              <a:t>r01.3</a:t>
             </a:r>
             <a:endParaRPr lang="en-US" sz="1100" dirty="0"/>
           </a:p>
@@ -13192,6 +13548,13 @@
 <file path=ppt/slides/slide33.xml><?xml version="1.0" encoding="utf-8"?>
 <p:sld xmlns:a="http://schemas.openxmlformats.org/drawingml/2006/main" xmlns:r="http://schemas.openxmlformats.org/officeDocument/2006/relationships" xmlns:p="http://schemas.openxmlformats.org/presentationml/2006/main">
   <p:cSld name="Slide 33">
+    <p:bg>
+      <p:bgPr>
+        <a:solidFill>
+          <a:srgbClr val="AB0000"/>
+        </a:solidFill>
+      </p:bgPr>
+    </p:bg>
     <p:spTree>
       <p:nvGrpSpPr>
         <p:cNvPr id="1" name=""/>
@@ -13206,16 +13569,40 @@
           <a:chExt cx="0" cy="0"/>
         </a:xfrm>
       </p:grpSpPr>
-      <p:sp>
-        <p:nvSpPr>
-          <p:cNvPr id="2" name="Text 0"/>
+      <p:pic>
+        <p:nvPicPr>
+          <p:cNvPr id="2" name="Image 0" descr="./assets/section-panel.png">    </p:cNvPr>
+          <p:cNvPicPr>
+            <a:picLocks noChangeAspect="1"/>
+          </p:cNvPicPr>
+          <p:nvPr/>
+        </p:nvPicPr>
+        <p:blipFill>
+          <a:blip r:embed="rId1"/>
+          <a:stretch>
+            <a:fillRect/>
+          </a:stretch>
+        </p:blipFill>
+        <p:spPr>
+          <a:xfrm>
+            <a:off x="0" y="0"/>
+            <a:ext cx="12191695" cy="6858000"/>
+          </a:xfrm>
+          <a:prstGeom prst="rect">
+            <a:avLst/>
+          </a:prstGeom>
+        </p:spPr>
+      </p:pic>
+      <p:sp>
+        <p:nvSpPr>
+          <p:cNvPr id="3" name="Text 0"/>
           <p:cNvSpPr/>
           <p:nvPr/>
         </p:nvSpPr>
         <p:spPr>
           <a:xfrm>
-            <a:off x="566928" y="6364224"/>
-            <a:ext cx="914400" cy="274320"/>
+            <a:off x="5733288" y="2121408"/>
+            <a:ext cx="5852160" cy="457200"/>
           </a:xfrm>
           <a:prstGeom prst="rect">
             <a:avLst/>
@@ -13231,15 +13618,2055 @@
               <a:buNone/>
             </a:pPr>
             <a:r>
-              <a:rPr lang="en-US" sz="1000" dirty="0">
-                <a:solidFill>
-                  <a:srgbClr val="8A8A8A"/>
+              <a:rPr lang="en-US" sz="2200" b="1" spc="600" kern="0" dirty="0">
+                <a:solidFill>
+                  <a:srgbClr val="FFFFFF"/>
+                </a:solidFill>
+                <a:latin typeface="Overpass" pitchFamily="34" charset="0"/>
+                <a:ea typeface="Overpass" pitchFamily="34" charset="-122"/>
+                <a:cs typeface="Overpass" pitchFamily="34" charset="-120"/>
+              </a:rPr>
+              <a:t>04</a:t>
+            </a:r>
+            <a:endParaRPr lang="en-US" sz="2200" dirty="0"/>
+          </a:p>
+        </p:txBody>
+      </p:sp>
+      <p:sp>
+        <p:nvSpPr>
+          <p:cNvPr id="4" name="Text 1"/>
+          <p:cNvSpPr/>
+          <p:nvPr/>
+        </p:nvSpPr>
+        <p:spPr>
+          <a:xfrm>
+            <a:off x="5705856" y="2596896"/>
+            <a:ext cx="6126480" cy="1463040"/>
+          </a:xfrm>
+          <a:prstGeom prst="rect">
+            <a:avLst/>
+          </a:prstGeom>
+          <a:noFill/>
+          <a:ln/>
+        </p:spPr>
+        <p:txBody>
+          <a:bodyPr wrap="square" rtlCol="0" anchor="t"/>
+          <a:lstStyle/>
+          <a:p>
+            <a:pPr algn="l" indent="0" marL="0">
+              <a:buNone/>
+            </a:pPr>
+            <a:r>
+              <a:rPr lang="en-US" sz="4400" b="1" dirty="0">
+                <a:solidFill>
+                  <a:srgbClr val="FFFFFF"/>
+                </a:solidFill>
+                <a:latin typeface="Overpass" pitchFamily="34" charset="0"/>
+                <a:ea typeface="Overpass" pitchFamily="34" charset="-122"/>
+                <a:cs typeface="Overpass" pitchFamily="34" charset="-120"/>
+              </a:rPr>
+              <a:t>Supply chain security</a:t>
+            </a:r>
+            <a:endParaRPr lang="en-US" sz="4400" dirty="0"/>
+          </a:p>
+        </p:txBody>
+      </p:sp>
+      <p:sp>
+        <p:nvSpPr>
+          <p:cNvPr id="5" name="Text 2"/>
+          <p:cNvSpPr/>
+          <p:nvPr/>
+        </p:nvSpPr>
+        <p:spPr>
+          <a:xfrm>
+            <a:off x="5733288" y="4160520"/>
+            <a:ext cx="6035040" cy="731520"/>
+          </a:xfrm>
+          <a:prstGeom prst="rect">
+            <a:avLst/>
+          </a:prstGeom>
+          <a:noFill/>
+          <a:ln/>
+        </p:spPr>
+        <p:txBody>
+          <a:bodyPr wrap="square" rtlCol="0" anchor="t"/>
+          <a:lstStyle/>
+          <a:p>
+            <a:pPr algn="l" indent="0" marL="0">
+              <a:buNone/>
+            </a:pPr>
+            <a:r>
+              <a:rPr lang="en-US" sz="1600" i="1" dirty="0">
+                <a:solidFill>
+                  <a:srgbClr val="FFD9D9"/>
                 </a:solidFill>
                 <a:latin typeface="Red Hat Text" pitchFamily="34" charset="0"/>
                 <a:ea typeface="Red Hat Text" pitchFamily="34" charset="-122"/>
                 <a:cs typeface="Red Hat Text" pitchFamily="34" charset="-120"/>
               </a:rPr>
-              <a:t>33</a:t>
+              <a:t>Where a hardened base fits the bigger threat model.</a:t>
+            </a:r>
+            <a:endParaRPr lang="en-US" sz="1600" dirty="0"/>
+          </a:p>
+        </p:txBody>
+      </p:sp>
+      <p:pic>
+        <p:nvPicPr>
+          <p:cNvPr id="6" name="Image 1" descr="./assets/redhat-logo-white.png">    </p:cNvPr>
+          <p:cNvPicPr>
+            <a:picLocks noChangeAspect="1"/>
+          </p:cNvPicPr>
+          <p:nvPr/>
+        </p:nvPicPr>
+        <p:blipFill>
+          <a:blip r:embed="rId2"/>
+          <a:stretch>
+            <a:fillRect/>
+          </a:stretch>
+        </p:blipFill>
+        <p:spPr>
+          <a:xfrm>
+            <a:off x="10442448" y="6291072"/>
+            <a:ext cx="1216152" cy="283464"/>
+          </a:xfrm>
+          <a:prstGeom prst="rect">
+            <a:avLst/>
+          </a:prstGeom>
+        </p:spPr>
+      </p:pic>
+    </p:spTree>
+  </p:cSld>
+  <p:clrMapOvr>
+    <a:masterClrMapping/>
+  </p:clrMapOvr>
+</p:sld>
+</file>
+
+<file path=ppt/slides/slide34.xml><?xml version="1.0" encoding="utf-8"?>
+<p:sld xmlns:a="http://schemas.openxmlformats.org/drawingml/2006/main" xmlns:r="http://schemas.openxmlformats.org/officeDocument/2006/relationships" xmlns:p="http://schemas.openxmlformats.org/presentationml/2006/main">
+  <p:cSld name="Slide 34">
+    <p:spTree>
+      <p:nvGrpSpPr>
+        <p:cNvPr id="1" name=""/>
+        <p:cNvGrpSpPr/>
+        <p:nvPr/>
+      </p:nvGrpSpPr>
+      <p:grpSpPr>
+        <a:xfrm>
+          <a:off x="0" y="0"/>
+          <a:ext cx="0" cy="0"/>
+          <a:chOff x="0" y="0"/>
+          <a:chExt cx="0" cy="0"/>
+        </a:xfrm>
+      </p:grpSpPr>
+      <p:sp>
+        <p:nvSpPr>
+          <p:cNvPr id="2" name="Text 0"/>
+          <p:cNvSpPr/>
+          <p:nvPr/>
+        </p:nvSpPr>
+        <p:spPr>
+          <a:xfrm>
+            <a:off x="566928" y="6364224"/>
+            <a:ext cx="914400" cy="274320"/>
+          </a:xfrm>
+          <a:prstGeom prst="rect">
+            <a:avLst/>
+          </a:prstGeom>
+          <a:noFill/>
+          <a:ln/>
+        </p:spPr>
+        <p:txBody>
+          <a:bodyPr wrap="square" rtlCol="0" anchor="ctr"/>
+          <a:lstStyle/>
+          <a:p>
+            <a:pPr algn="l" indent="0" marL="0">
+              <a:buNone/>
+            </a:pPr>
+            <a:r>
+              <a:rPr lang="en-US" sz="1000" dirty="0">
+                <a:solidFill>
+                  <a:srgbClr val="8A8A8A"/>
+                </a:solidFill>
+                <a:latin typeface="Red Hat Text" pitchFamily="34" charset="0"/>
+                <a:ea typeface="Red Hat Text" pitchFamily="34" charset="-122"/>
+                <a:cs typeface="Red Hat Text" pitchFamily="34" charset="-120"/>
+              </a:rPr>
+              <a:t>34</a:t>
+            </a:r>
+            <a:endParaRPr lang="en-US" sz="1000" dirty="0"/>
+          </a:p>
+        </p:txBody>
+      </p:sp>
+      <p:pic>
+        <p:nvPicPr>
+          <p:cNvPr id="3" name="Image 0" descr="./assets/logo-candidate-2.png">    </p:cNvPr>
+          <p:cNvPicPr>
+            <a:picLocks noChangeAspect="1"/>
+          </p:cNvPicPr>
+          <p:nvPr/>
+        </p:nvPicPr>
+        <p:blipFill>
+          <a:blip r:embed="rId1"/>
+          <a:stretch>
+            <a:fillRect/>
+          </a:stretch>
+        </p:blipFill>
+        <p:spPr>
+          <a:xfrm>
+            <a:off x="10561320" y="6355080"/>
+            <a:ext cx="1033272" cy="246888"/>
+          </a:xfrm>
+          <a:prstGeom prst="rect">
+            <a:avLst/>
+          </a:prstGeom>
+        </p:spPr>
+      </p:pic>
+      <p:sp>
+        <p:nvSpPr>
+          <p:cNvPr id="4" name="Text 1"/>
+          <p:cNvSpPr/>
+          <p:nvPr/>
+        </p:nvSpPr>
+        <p:spPr>
+          <a:xfrm>
+            <a:off x="566928" y="384048"/>
+            <a:ext cx="11055096" cy="292608"/>
+          </a:xfrm>
+          <a:prstGeom prst="rect">
+            <a:avLst/>
+          </a:prstGeom>
+          <a:noFill/>
+          <a:ln/>
+        </p:spPr>
+        <p:txBody>
+          <a:bodyPr wrap="square" rtlCol="0" anchor="ctr"/>
+          <a:lstStyle/>
+          <a:p>
+            <a:pPr algn="l" indent="0" marL="0">
+              <a:buNone/>
+            </a:pPr>
+            <a:r>
+              <a:rPr lang="en-US" sz="1200" b="1" spc="400" kern="0" dirty="0">
+                <a:solidFill>
+                  <a:srgbClr val="EE0000"/>
+                </a:solidFill>
+                <a:latin typeface="Overpass" pitchFamily="34" charset="0"/>
+                <a:ea typeface="Overpass" pitchFamily="34" charset="-122"/>
+                <a:cs typeface="Overpass" pitchFamily="34" charset="-120"/>
+              </a:rPr>
+              <a:t>SUPPLY CHAIN · ATTACK VECTORS</a:t>
+            </a:r>
+            <a:endParaRPr lang="en-US" sz="1200" dirty="0"/>
+          </a:p>
+        </p:txBody>
+      </p:sp>
+      <p:sp>
+        <p:nvSpPr>
+          <p:cNvPr id="5" name="Text 2"/>
+          <p:cNvSpPr/>
+          <p:nvPr/>
+        </p:nvSpPr>
+        <p:spPr>
+          <a:xfrm>
+            <a:off x="566928" y="676656"/>
+            <a:ext cx="11055096" cy="1005840"/>
+          </a:xfrm>
+          <a:prstGeom prst="rect">
+            <a:avLst/>
+          </a:prstGeom>
+          <a:noFill/>
+          <a:ln/>
+        </p:spPr>
+        <p:txBody>
+          <a:bodyPr wrap="square" rtlCol="0" anchor="t"/>
+          <a:lstStyle/>
+          <a:p>
+            <a:pPr algn="l" indent="0" marL="0">
+              <a:buNone/>
+            </a:pPr>
+            <a:r>
+              <a:rPr lang="en-US" sz="3000" b="1" dirty="0">
+                <a:solidFill>
+                  <a:srgbClr val="151515"/>
+                </a:solidFill>
+                <a:latin typeface="Overpass" pitchFamily="34" charset="0"/>
+                <a:ea typeface="Overpass" pitchFamily="34" charset="-122"/>
+                <a:cs typeface="Overpass" pitchFamily="34" charset="-120"/>
+              </a:rPr>
+              <a:t>The chain, and where it's attacked</a:t>
+            </a:r>
+            <a:endParaRPr lang="en-US" sz="3000" dirty="0"/>
+          </a:p>
+        </p:txBody>
+      </p:sp>
+      <p:pic>
+        <p:nvPicPr>
+          <p:cNvPr id="6" name="Image 1" descr="./png/18-supply-chain-security-attack-vectors.png">    </p:cNvPr>
+          <p:cNvPicPr>
+            <a:picLocks noChangeAspect="1"/>
+          </p:cNvPicPr>
+          <p:nvPr/>
+        </p:nvPicPr>
+        <p:blipFill>
+          <a:blip r:embed="rId2"/>
+          <a:srcRect l="0" r="0" t="0" b="0"/>
+          <a:stretch/>
+        </p:blipFill>
+        <p:spPr>
+          <a:xfrm>
+            <a:off x="1645920" y="1600200"/>
+            <a:ext cx="8906256" cy="4343400"/>
+          </a:xfrm>
+          <a:prstGeom prst="rect">
+            <a:avLst/>
+          </a:prstGeom>
+        </p:spPr>
+      </p:pic>
+      <p:sp>
+        <p:nvSpPr>
+          <p:cNvPr id="7" name="Text 3"/>
+          <p:cNvSpPr/>
+          <p:nvPr/>
+        </p:nvSpPr>
+        <p:spPr>
+          <a:xfrm>
+            <a:off x="566928" y="5943600"/>
+            <a:ext cx="11055096" cy="310896"/>
+          </a:xfrm>
+          <a:prstGeom prst="rect">
+            <a:avLst/>
+          </a:prstGeom>
+          <a:noFill/>
+          <a:ln/>
+        </p:spPr>
+        <p:txBody>
+          <a:bodyPr wrap="square" rtlCol="0" anchor="ctr"/>
+          <a:lstStyle/>
+          <a:p>
+            <a:pPr algn="ctr" indent="0" marL="0">
+              <a:buNone/>
+            </a:pPr>
+            <a:r>
+              <a:rPr lang="en-US" sz="1300" i="1" dirty="0">
+                <a:solidFill>
+                  <a:srgbClr val="5A5A5A"/>
+                </a:solidFill>
+                <a:latin typeface="Red Hat Text" pitchFamily="34" charset="0"/>
+                <a:ea typeface="Red Hat Text" pitchFamily="34" charset="-122"/>
+                <a:cs typeface="Red Hat Text" pitchFamily="34" charset="-120"/>
+              </a:rPr>
+              <a:t>Figure 18.1 — Attack vectors (after Liz Rice, Container Security 2e, Fig 7-1) and the Hummingbird answer at each stage.</a:t>
+            </a:r>
+            <a:endParaRPr lang="en-US" sz="1300" dirty="0"/>
+          </a:p>
+        </p:txBody>
+      </p:sp>
+    </p:spTree>
+  </p:cSld>
+  <p:clrMapOvr>
+    <a:masterClrMapping/>
+  </p:clrMapOvr>
+</p:sld>
+</file>
+
+<file path=ppt/slides/slide35.xml><?xml version="1.0" encoding="utf-8"?>
+<p:sld xmlns:a="http://schemas.openxmlformats.org/drawingml/2006/main" xmlns:r="http://schemas.openxmlformats.org/officeDocument/2006/relationships" xmlns:p="http://schemas.openxmlformats.org/presentationml/2006/main">
+  <p:cSld name="Slide 35">
+    <p:spTree>
+      <p:nvGrpSpPr>
+        <p:cNvPr id="1" name=""/>
+        <p:cNvGrpSpPr/>
+        <p:nvPr/>
+      </p:nvGrpSpPr>
+      <p:grpSpPr>
+        <a:xfrm>
+          <a:off x="0" y="0"/>
+          <a:ext cx="0" cy="0"/>
+          <a:chOff x="0" y="0"/>
+          <a:chExt cx="0" cy="0"/>
+        </a:xfrm>
+      </p:grpSpPr>
+      <p:sp>
+        <p:nvSpPr>
+          <p:cNvPr id="2" name="Text 0"/>
+          <p:cNvSpPr/>
+          <p:nvPr/>
+        </p:nvSpPr>
+        <p:spPr>
+          <a:xfrm>
+            <a:off x="566928" y="6364224"/>
+            <a:ext cx="914400" cy="274320"/>
+          </a:xfrm>
+          <a:prstGeom prst="rect">
+            <a:avLst/>
+          </a:prstGeom>
+          <a:noFill/>
+          <a:ln/>
+        </p:spPr>
+        <p:txBody>
+          <a:bodyPr wrap="square" rtlCol="0" anchor="ctr"/>
+          <a:lstStyle/>
+          <a:p>
+            <a:pPr algn="l" indent="0" marL="0">
+              <a:buNone/>
+            </a:pPr>
+            <a:r>
+              <a:rPr lang="en-US" sz="1000" dirty="0">
+                <a:solidFill>
+                  <a:srgbClr val="8A8A8A"/>
+                </a:solidFill>
+                <a:latin typeface="Red Hat Text" pitchFamily="34" charset="0"/>
+                <a:ea typeface="Red Hat Text" pitchFamily="34" charset="-122"/>
+                <a:cs typeface="Red Hat Text" pitchFamily="34" charset="-120"/>
+              </a:rPr>
+              <a:t>35</a:t>
+            </a:r>
+            <a:endParaRPr lang="en-US" sz="1000" dirty="0"/>
+          </a:p>
+        </p:txBody>
+      </p:sp>
+      <p:pic>
+        <p:nvPicPr>
+          <p:cNvPr id="3" name="Image 0" descr="./assets/logo-candidate-2.png">    </p:cNvPr>
+          <p:cNvPicPr>
+            <a:picLocks noChangeAspect="1"/>
+          </p:cNvPicPr>
+          <p:nvPr/>
+        </p:nvPicPr>
+        <p:blipFill>
+          <a:blip r:embed="rId1"/>
+          <a:stretch>
+            <a:fillRect/>
+          </a:stretch>
+        </p:blipFill>
+        <p:spPr>
+          <a:xfrm>
+            <a:off x="10561320" y="6355080"/>
+            <a:ext cx="1033272" cy="246888"/>
+          </a:xfrm>
+          <a:prstGeom prst="rect">
+            <a:avLst/>
+          </a:prstGeom>
+        </p:spPr>
+      </p:pic>
+      <p:sp>
+        <p:nvSpPr>
+          <p:cNvPr id="4" name="Text 1"/>
+          <p:cNvSpPr/>
+          <p:nvPr/>
+        </p:nvSpPr>
+        <p:spPr>
+          <a:xfrm>
+            <a:off x="566928" y="384048"/>
+            <a:ext cx="11055096" cy="292608"/>
+          </a:xfrm>
+          <a:prstGeom prst="rect">
+            <a:avLst/>
+          </a:prstGeom>
+          <a:noFill/>
+          <a:ln/>
+        </p:spPr>
+        <p:txBody>
+          <a:bodyPr wrap="square" rtlCol="0" anchor="ctr"/>
+          <a:lstStyle/>
+          <a:p>
+            <a:pPr algn="l" indent="0" marL="0">
+              <a:buNone/>
+            </a:pPr>
+            <a:r>
+              <a:rPr lang="en-US" sz="1200" b="1" spc="400" kern="0" dirty="0">
+                <a:solidFill>
+                  <a:srgbClr val="EE0000"/>
+                </a:solidFill>
+                <a:latin typeface="Overpass" pitchFamily="34" charset="0"/>
+                <a:ea typeface="Overpass" pitchFamily="34" charset="-122"/>
+                <a:cs typeface="Overpass" pitchFamily="34" charset="-120"/>
+              </a:rPr>
+              <a:t>SUPPLY CHAIN · RUNTIME SURFACE</a:t>
+            </a:r>
+            <a:endParaRPr lang="en-US" sz="1200" dirty="0"/>
+          </a:p>
+        </p:txBody>
+      </p:sp>
+      <p:sp>
+        <p:nvSpPr>
+          <p:cNvPr id="5" name="Text 2"/>
+          <p:cNvSpPr/>
+          <p:nvPr/>
+        </p:nvSpPr>
+        <p:spPr>
+          <a:xfrm>
+            <a:off x="566928" y="676656"/>
+            <a:ext cx="11055096" cy="1005840"/>
+          </a:xfrm>
+          <a:prstGeom prst="rect">
+            <a:avLst/>
+          </a:prstGeom>
+          <a:noFill/>
+          <a:ln/>
+        </p:spPr>
+        <p:txBody>
+          <a:bodyPr wrap="square" rtlCol="0" anchor="t"/>
+          <a:lstStyle/>
+          <a:p>
+            <a:pPr algn="l" indent="0" marL="0">
+              <a:buNone/>
+            </a:pPr>
+            <a:r>
+              <a:rPr lang="en-US" sz="3000" b="1" dirty="0">
+                <a:solidFill>
+                  <a:srgbClr val="151515"/>
+                </a:solidFill>
+                <a:latin typeface="Overpass" pitchFamily="34" charset="0"/>
+                <a:ea typeface="Overpass" pitchFamily="34" charset="-122"/>
+                <a:cs typeface="Overpass" pitchFamily="34" charset="-120"/>
+              </a:rPr>
+              <a:t>Defense in depth — and where the image helps</a:t>
+            </a:r>
+            <a:endParaRPr lang="en-US" sz="3000" dirty="0"/>
+          </a:p>
+        </p:txBody>
+      </p:sp>
+      <p:pic>
+        <p:nvPicPr>
+          <p:cNvPr id="6" name="Image 1" descr="./png/18-supply-chain-security-layers.png">    </p:cNvPr>
+          <p:cNvPicPr>
+            <a:picLocks noChangeAspect="1"/>
+          </p:cNvPicPr>
+          <p:nvPr/>
+        </p:nvPicPr>
+        <p:blipFill>
+          <a:blip r:embed="rId2"/>
+          <a:srcRect l="0" r="0" t="0" b="0"/>
+          <a:stretch/>
+        </p:blipFill>
+        <p:spPr>
+          <a:xfrm>
+            <a:off x="1645920" y="1600200"/>
+            <a:ext cx="8906256" cy="4343400"/>
+          </a:xfrm>
+          <a:prstGeom prst="rect">
+            <a:avLst/>
+          </a:prstGeom>
+        </p:spPr>
+      </p:pic>
+      <p:sp>
+        <p:nvSpPr>
+          <p:cNvPr id="7" name="Text 3"/>
+          <p:cNvSpPr/>
+          <p:nvPr/>
+        </p:nvSpPr>
+        <p:spPr>
+          <a:xfrm>
+            <a:off x="566928" y="5943600"/>
+            <a:ext cx="11055096" cy="310896"/>
+          </a:xfrm>
+          <a:prstGeom prst="rect">
+            <a:avLst/>
+          </a:prstGeom>
+          <a:noFill/>
+          <a:ln/>
+        </p:spPr>
+        <p:txBody>
+          <a:bodyPr wrap="square" rtlCol="0" anchor="ctr"/>
+          <a:lstStyle/>
+          <a:p>
+            <a:pPr algn="ctr" indent="0" marL="0">
+              <a:buNone/>
+            </a:pPr>
+            <a:r>
+              <a:rPr lang="en-US" sz="1300" i="1" dirty="0">
+                <a:solidFill>
+                  <a:srgbClr val="5A5A5A"/>
+                </a:solidFill>
+                <a:latin typeface="Red Hat Text" pitchFamily="34" charset="0"/>
+                <a:ea typeface="Red Hat Text" pitchFamily="34" charset="-122"/>
+                <a:cs typeface="Red Hat Text" pitchFamily="34" charset="-120"/>
+              </a:rPr>
+              <a:t>Figure 18.2 — The layered runtime attack surface; the hardened image shrinks the image-and-app cluster, not the platform.</a:t>
+            </a:r>
+            <a:endParaRPr lang="en-US" sz="1300" dirty="0"/>
+          </a:p>
+        </p:txBody>
+      </p:sp>
+    </p:spTree>
+  </p:cSld>
+  <p:clrMapOvr>
+    <a:masterClrMapping/>
+  </p:clrMapOvr>
+</p:sld>
+</file>
+
+<file path=ppt/slides/slide36.xml><?xml version="1.0" encoding="utf-8"?>
+<p:sld xmlns:a="http://schemas.openxmlformats.org/drawingml/2006/main" xmlns:r="http://schemas.openxmlformats.org/officeDocument/2006/relationships" xmlns:p="http://schemas.openxmlformats.org/presentationml/2006/main">
+  <p:cSld name="Slide 36">
+    <p:spTree>
+      <p:nvGrpSpPr>
+        <p:cNvPr id="1" name=""/>
+        <p:cNvGrpSpPr/>
+        <p:nvPr/>
+      </p:nvGrpSpPr>
+      <p:grpSpPr>
+        <a:xfrm>
+          <a:off x="0" y="0"/>
+          <a:ext cx="0" cy="0"/>
+          <a:chOff x="0" y="0"/>
+          <a:chExt cx="0" cy="0"/>
+        </a:xfrm>
+      </p:grpSpPr>
+      <p:sp>
+        <p:nvSpPr>
+          <p:cNvPr id="2" name="Text 0"/>
+          <p:cNvSpPr/>
+          <p:nvPr/>
+        </p:nvSpPr>
+        <p:spPr>
+          <a:xfrm>
+            <a:off x="566928" y="6364224"/>
+            <a:ext cx="914400" cy="274320"/>
+          </a:xfrm>
+          <a:prstGeom prst="rect">
+            <a:avLst/>
+          </a:prstGeom>
+          <a:noFill/>
+          <a:ln/>
+        </p:spPr>
+        <p:txBody>
+          <a:bodyPr wrap="square" rtlCol="0" anchor="ctr"/>
+          <a:lstStyle/>
+          <a:p>
+            <a:pPr algn="l" indent="0" marL="0">
+              <a:buNone/>
+            </a:pPr>
+            <a:r>
+              <a:rPr lang="en-US" sz="1000" dirty="0">
+                <a:solidFill>
+                  <a:srgbClr val="8A8A8A"/>
+                </a:solidFill>
+                <a:latin typeface="Red Hat Text" pitchFamily="34" charset="0"/>
+                <a:ea typeface="Red Hat Text" pitchFamily="34" charset="-122"/>
+                <a:cs typeface="Red Hat Text" pitchFamily="34" charset="-120"/>
+              </a:rPr>
+              <a:t>36</a:t>
+            </a:r>
+            <a:endParaRPr lang="en-US" sz="1000" dirty="0"/>
+          </a:p>
+        </p:txBody>
+      </p:sp>
+      <p:pic>
+        <p:nvPicPr>
+          <p:cNvPr id="3" name="Image 0" descr="./assets/logo-candidate-2.png">    </p:cNvPr>
+          <p:cNvPicPr>
+            <a:picLocks noChangeAspect="1"/>
+          </p:cNvPicPr>
+          <p:nvPr/>
+        </p:nvPicPr>
+        <p:blipFill>
+          <a:blip r:embed="rId1"/>
+          <a:stretch>
+            <a:fillRect/>
+          </a:stretch>
+        </p:blipFill>
+        <p:spPr>
+          <a:xfrm>
+            <a:off x="10561320" y="6355080"/>
+            <a:ext cx="1033272" cy="246888"/>
+          </a:xfrm>
+          <a:prstGeom prst="rect">
+            <a:avLst/>
+          </a:prstGeom>
+        </p:spPr>
+      </p:pic>
+      <p:sp>
+        <p:nvSpPr>
+          <p:cNvPr id="4" name="Text 1"/>
+          <p:cNvSpPr/>
+          <p:nvPr/>
+        </p:nvSpPr>
+        <p:spPr>
+          <a:xfrm>
+            <a:off x="566928" y="384048"/>
+            <a:ext cx="11055096" cy="292608"/>
+          </a:xfrm>
+          <a:prstGeom prst="rect">
+            <a:avLst/>
+          </a:prstGeom>
+          <a:noFill/>
+          <a:ln/>
+        </p:spPr>
+        <p:txBody>
+          <a:bodyPr wrap="square" rtlCol="0" anchor="ctr"/>
+          <a:lstStyle/>
+          <a:p>
+            <a:pPr algn="l" indent="0" marL="0">
+              <a:buNone/>
+            </a:pPr>
+            <a:r>
+              <a:rPr lang="en-US" sz="1200" b="1" spc="400" kern="0" dirty="0">
+                <a:solidFill>
+                  <a:srgbClr val="EE0000"/>
+                </a:solidFill>
+                <a:latin typeface="Overpass" pitchFamily="34" charset="0"/>
+                <a:ea typeface="Overpass" pitchFamily="34" charset="-122"/>
+                <a:cs typeface="Overpass" pitchFamily="34" charset="-120"/>
+              </a:rPr>
+              <a:t>SUPPLY CHAIN · DIVISION OF LABOUR</a:t>
+            </a:r>
+            <a:endParaRPr lang="en-US" sz="1200" dirty="0"/>
+          </a:p>
+        </p:txBody>
+      </p:sp>
+      <p:sp>
+        <p:nvSpPr>
+          <p:cNvPr id="5" name="Text 2"/>
+          <p:cNvSpPr/>
+          <p:nvPr/>
+        </p:nvSpPr>
+        <p:spPr>
+          <a:xfrm>
+            <a:off x="566928" y="676656"/>
+            <a:ext cx="11055096" cy="1005840"/>
+          </a:xfrm>
+          <a:prstGeom prst="rect">
+            <a:avLst/>
+          </a:prstGeom>
+          <a:noFill/>
+          <a:ln/>
+        </p:spPr>
+        <p:txBody>
+          <a:bodyPr wrap="square" rtlCol="0" anchor="t"/>
+          <a:lstStyle/>
+          <a:p>
+            <a:pPr algn="l" indent="0" marL="0">
+              <a:buNone/>
+            </a:pPr>
+            <a:r>
+              <a:rPr lang="en-US" sz="3000" b="1" dirty="0">
+                <a:solidFill>
+                  <a:srgbClr val="151515"/>
+                </a:solidFill>
+                <a:latin typeface="Overpass" pitchFamily="34" charset="0"/>
+                <a:ea typeface="Overpass" pitchFamily="34" charset="-122"/>
+                <a:cs typeface="Overpass" pitchFamily="34" charset="-120"/>
+              </a:rPr>
+              <a:t>What Hummingbird closes — and what's still yours</a:t>
+            </a:r>
+            <a:endParaRPr lang="en-US" sz="3000" dirty="0"/>
+          </a:p>
+        </p:txBody>
+      </p:sp>
+      <p:graphicFrame>
+        <p:nvGraphicFramePr>
+          <p:cNvPr id="37" name="Table 0"/>
+          <p:cNvGraphicFramePr>
+            <a:graphicFrameLocks noGrp="1"/>
+          </p:cNvGraphicFramePr>
+          <p:nvPr>
+            <p:extLst>
+              <p:ext uri="{D42A27DB-BD31-4B8C-83A1-F6EECF244321}">
+                <p14:modId xmlns:p14="http://schemas.microsoft.com/office/powerpoint/2010/main" val="1579011935"/>
+              </p:ext>
+            </p:extLst>
+          </p:nvPr>
+        </p:nvGraphicFramePr>
+        <p:xfrm>
+          <a:off x="566928" y="1691640"/>
+          <a:ext cx="11055096" cy="4434840"/>
+        </p:xfrm>
+        <a:graphic>
+          <a:graphicData uri="http://schemas.openxmlformats.org/drawingml/2006/table">
+            <a:tbl>
+              <a:tblPr/>
+              <a:tblGrid>
+                <a:gridCol w="2514600"/>
+                <a:gridCol w="2606040"/>
+                <a:gridCol w="5934456"/>
+              </a:tblGrid>
+              <a:tr h="566928">
+                <a:tc>
+                  <a:txBody>
+                    <a:bodyPr/>
+                    <a:lstStyle/>
+                    <a:p>
+                      <a:pPr algn="l" indent="0" marL="0">
+                        <a:buNone/>
+                      </a:pPr>
+                      <a:r>
+                        <a:rPr lang="en-US" sz="1500" b="1" dirty="0">
+                          <a:solidFill>
+                            <a:srgbClr val="EE0000"/>
+                          </a:solidFill>
+                          <a:latin typeface="Red Hat Mono" pitchFamily="34" charset="0"/>
+                          <a:ea typeface="Red Hat Mono" pitchFamily="34" charset="-122"/>
+                          <a:cs typeface="Red Hat Mono" pitchFamily="34" charset="-120"/>
+                        </a:rPr>
+                        <a:t>Vulnerable base</a:t>
+                      </a:r>
+                      <a:endParaRPr lang="en-US" sz="1500" dirty="0">
+                        <a:latin typeface="Red Hat Mono" charset="0"/>
+                        <a:ea typeface="Red Hat Mono" charset="0"/>
+                        <a:cs typeface="Red Hat Mono" charset="0"/>
+                      </a:endParaRPr>
+                    </a:p>
+                  </a:txBody>
+                  <a:tcPr marL="91440" marR="91440" marT="45720" marB="45720" anchor="ctr">
+                    <a:lnL w="6350" cap="flat" cmpd="sng" algn="ctr">
+                      <a:solidFill>
+                        <a:srgbClr val="D2D2D2"/>
+                      </a:solidFill>
+                      <a:prstDash val="solid"/>
+                      <a:round/>
+                      <a:headEnd type="none" w="med" len="med"/>
+                      <a:tailEnd type="none" w="med" len="med"/>
+                    </a:lnL>
+                    <a:lnR w="6350" cap="flat" cmpd="sng" algn="ctr">
+                      <a:solidFill>
+                        <a:srgbClr val="D2D2D2"/>
+                      </a:solidFill>
+                      <a:prstDash val="solid"/>
+                      <a:round/>
+                      <a:headEnd type="none" w="med" len="med"/>
+                      <a:tailEnd type="none" w="med" len="med"/>
+                    </a:lnR>
+                    <a:lnT w="6350" cap="flat" cmpd="sng" algn="ctr">
+                      <a:solidFill>
+                        <a:srgbClr val="D2D2D2"/>
+                      </a:solidFill>
+                      <a:prstDash val="solid"/>
+                      <a:round/>
+                      <a:headEnd type="none" w="med" len="med"/>
+                      <a:tailEnd type="none" w="med" len="med"/>
+                    </a:lnT>
+                    <a:lnB w="6350" cap="flat" cmpd="sng" algn="ctr">
+                      <a:solidFill>
+                        <a:srgbClr val="D2D2D2"/>
+                      </a:solidFill>
+                      <a:prstDash val="solid"/>
+                      <a:round/>
+                      <a:headEnd type="none" w="med" len="med"/>
+                      <a:tailEnd type="none" w="med" len="med"/>
+                    </a:lnB>
+                  </a:tcPr>
+                </a:tc>
+                <a:tc>
+                  <a:txBody>
+                    <a:bodyPr/>
+                    <a:lstStyle/>
+                    <a:p>
+                      <a:pPr algn="l" indent="0" marL="0">
+                        <a:buNone/>
+                      </a:pPr>
+                      <a:r>
+                        <a:rPr lang="en-US" sz="1400" b="1" dirty="0">
+                          <a:solidFill>
+                            <a:srgbClr val="151515"/>
+                          </a:solidFill>
+                          <a:latin typeface="Red Hat Text" pitchFamily="34" charset="0"/>
+                          <a:ea typeface="Red Hat Text" pitchFamily="34" charset="-122"/>
+                          <a:cs typeface="Red Hat Text" pitchFamily="34" charset="-120"/>
+                        </a:rPr>
+                        <a:t>Hummingbird</a:t>
+                      </a:r>
+                      <a:endParaRPr lang="en-US" sz="1400" dirty="0">
+                        <a:latin typeface="Red Hat Text" charset="0"/>
+                        <a:ea typeface="Red Hat Text" charset="0"/>
+                        <a:cs typeface="Red Hat Text" charset="0"/>
+                      </a:endParaRPr>
+                    </a:p>
+                  </a:txBody>
+                  <a:tcPr marL="91440" marR="91440" marT="45720" marB="45720" anchor="ctr">
+                    <a:lnL w="6350" cap="flat" cmpd="sng" algn="ctr">
+                      <a:solidFill>
+                        <a:srgbClr val="D2D2D2"/>
+                      </a:solidFill>
+                      <a:prstDash val="solid"/>
+                      <a:round/>
+                      <a:headEnd type="none" w="med" len="med"/>
+                      <a:tailEnd type="none" w="med" len="med"/>
+                    </a:lnL>
+                    <a:lnR w="6350" cap="flat" cmpd="sng" algn="ctr">
+                      <a:solidFill>
+                        <a:srgbClr val="D2D2D2"/>
+                      </a:solidFill>
+                      <a:prstDash val="solid"/>
+                      <a:round/>
+                      <a:headEnd type="none" w="med" len="med"/>
+                      <a:tailEnd type="none" w="med" len="med"/>
+                    </a:lnR>
+                    <a:lnT w="6350" cap="flat" cmpd="sng" algn="ctr">
+                      <a:solidFill>
+                        <a:srgbClr val="D2D2D2"/>
+                      </a:solidFill>
+                      <a:prstDash val="solid"/>
+                      <a:round/>
+                      <a:headEnd type="none" w="med" len="med"/>
+                      <a:tailEnd type="none" w="med" len="med"/>
+                    </a:lnT>
+                    <a:lnB w="6350" cap="flat" cmpd="sng" algn="ctr">
+                      <a:solidFill>
+                        <a:srgbClr val="D2D2D2"/>
+                      </a:solidFill>
+                      <a:prstDash val="solid"/>
+                      <a:round/>
+                      <a:headEnd type="none" w="med" len="med"/>
+                      <a:tailEnd type="none" w="med" len="med"/>
+                    </a:lnB>
+                  </a:tcPr>
+                </a:tc>
+                <a:tc>
+                  <a:txBody>
+                    <a:bodyPr/>
+                    <a:lstStyle/>
+                    <a:p>
+                      <a:pPr algn="l" indent="0" marL="0">
+                        <a:buNone/>
+                      </a:pPr>
+                      <a:r>
+                        <a:rPr lang="en-US" sz="1300" dirty="0">
+                          <a:solidFill>
+                            <a:srgbClr val="242424"/>
+                          </a:solidFill>
+                          <a:latin typeface="Red Hat Text" pitchFamily="34" charset="0"/>
+                          <a:ea typeface="Red Hat Text" pitchFamily="34" charset="-122"/>
+                          <a:cs typeface="Red Hat Text" pitchFamily="34" charset="-120"/>
+                        </a:rPr>
+                        <a:t>Near-zero-CVE hardened base, rebuilt continuously</a:t>
+                      </a:r>
+                      <a:endParaRPr lang="en-US" sz="1300" dirty="0">
+                        <a:latin typeface="Red Hat Text" charset="0"/>
+                        <a:ea typeface="Red Hat Text" charset="0"/>
+                        <a:cs typeface="Red Hat Text" charset="0"/>
+                      </a:endParaRPr>
+                    </a:p>
+                  </a:txBody>
+                  <a:tcPr marL="91440" marR="91440" marT="45720" marB="45720" anchor="ctr">
+                    <a:lnL w="6350" cap="flat" cmpd="sng" algn="ctr">
+                      <a:solidFill>
+                        <a:srgbClr val="D2D2D2"/>
+                      </a:solidFill>
+                      <a:prstDash val="solid"/>
+                      <a:round/>
+                      <a:headEnd type="none" w="med" len="med"/>
+                      <a:tailEnd type="none" w="med" len="med"/>
+                    </a:lnL>
+                    <a:lnR w="6350" cap="flat" cmpd="sng" algn="ctr">
+                      <a:solidFill>
+                        <a:srgbClr val="D2D2D2"/>
+                      </a:solidFill>
+                      <a:prstDash val="solid"/>
+                      <a:round/>
+                      <a:headEnd type="none" w="med" len="med"/>
+                      <a:tailEnd type="none" w="med" len="med"/>
+                    </a:lnR>
+                    <a:lnT w="6350" cap="flat" cmpd="sng" algn="ctr">
+                      <a:solidFill>
+                        <a:srgbClr val="D2D2D2"/>
+                      </a:solidFill>
+                      <a:prstDash val="solid"/>
+                      <a:round/>
+                      <a:headEnd type="none" w="med" len="med"/>
+                      <a:tailEnd type="none" w="med" len="med"/>
+                    </a:lnT>
+                    <a:lnB w="6350" cap="flat" cmpd="sng" algn="ctr">
+                      <a:solidFill>
+                        <a:srgbClr val="D2D2D2"/>
+                      </a:solidFill>
+                      <a:prstDash val="solid"/>
+                      <a:round/>
+                      <a:headEnd type="none" w="med" len="med"/>
+                      <a:tailEnd type="none" w="med" len="med"/>
+                    </a:lnB>
+                  </a:tcPr>
+                </a:tc>
+              </a:tr>
+              <a:tr h="566928">
+                <a:tc>
+                  <a:txBody>
+                    <a:bodyPr/>
+                    <a:lstStyle/>
+                    <a:p>
+                      <a:pPr algn="l" indent="0" marL="0">
+                        <a:buNone/>
+                      </a:pPr>
+                      <a:r>
+                        <a:rPr lang="en-US" sz="1500" b="1" dirty="0">
+                          <a:solidFill>
+                            <a:srgbClr val="EE0000"/>
+                          </a:solidFill>
+                          <a:latin typeface="Red Hat Mono" pitchFamily="34" charset="0"/>
+                          <a:ea typeface="Red Hat Mono" pitchFamily="34" charset="-122"/>
+                          <a:cs typeface="Red Hat Mono" pitchFamily="34" charset="-120"/>
+                        </a:rPr>
+                        <a:t>Vulnerable deps</a:t>
+                      </a:r>
+                      <a:endParaRPr lang="en-US" sz="1500" dirty="0">
+                        <a:latin typeface="Red Hat Mono" charset="0"/>
+                        <a:ea typeface="Red Hat Mono" charset="0"/>
+                        <a:cs typeface="Red Hat Mono" charset="0"/>
+                      </a:endParaRPr>
+                    </a:p>
+                  </a:txBody>
+                  <a:tcPr marL="91440" marR="91440" marT="45720" marB="45720" anchor="ctr">
+                    <a:lnL w="6350" cap="flat" cmpd="sng" algn="ctr">
+                      <a:solidFill>
+                        <a:srgbClr val="D2D2D2"/>
+                      </a:solidFill>
+                      <a:prstDash val="solid"/>
+                      <a:round/>
+                      <a:headEnd type="none" w="med" len="med"/>
+                      <a:tailEnd type="none" w="med" len="med"/>
+                    </a:lnL>
+                    <a:lnR w="6350" cap="flat" cmpd="sng" algn="ctr">
+                      <a:solidFill>
+                        <a:srgbClr val="D2D2D2"/>
+                      </a:solidFill>
+                      <a:prstDash val="solid"/>
+                      <a:round/>
+                      <a:headEnd type="none" w="med" len="med"/>
+                      <a:tailEnd type="none" w="med" len="med"/>
+                    </a:lnR>
+                    <a:lnT w="6350" cap="flat" cmpd="sng" algn="ctr">
+                      <a:solidFill>
+                        <a:srgbClr val="D2D2D2"/>
+                      </a:solidFill>
+                      <a:prstDash val="solid"/>
+                      <a:round/>
+                      <a:headEnd type="none" w="med" len="med"/>
+                      <a:tailEnd type="none" w="med" len="med"/>
+                    </a:lnT>
+                    <a:lnB w="6350" cap="flat" cmpd="sng" algn="ctr">
+                      <a:solidFill>
+                        <a:srgbClr val="D2D2D2"/>
+                      </a:solidFill>
+                      <a:prstDash val="solid"/>
+                      <a:round/>
+                      <a:headEnd type="none" w="med" len="med"/>
+                      <a:tailEnd type="none" w="med" len="med"/>
+                    </a:lnB>
+                  </a:tcPr>
+                </a:tc>
+                <a:tc>
+                  <a:txBody>
+                    <a:bodyPr/>
+                    <a:lstStyle/>
+                    <a:p>
+                      <a:pPr algn="l" indent="0" marL="0">
+                        <a:buNone/>
+                      </a:pPr>
+                      <a:r>
+                        <a:rPr lang="en-US" sz="1400" b="1" dirty="0">
+                          <a:solidFill>
+                            <a:srgbClr val="151515"/>
+                          </a:solidFill>
+                          <a:latin typeface="Red Hat Text" pitchFamily="34" charset="0"/>
+                          <a:ea typeface="Red Hat Text" pitchFamily="34" charset="-122"/>
+                          <a:cs typeface="Red Hat Text" pitchFamily="34" charset="-120"/>
+                        </a:rPr>
+                        <a:t>Hummingbird + TL</a:t>
+                      </a:r>
+                      <a:endParaRPr lang="en-US" sz="1400" dirty="0">
+                        <a:latin typeface="Red Hat Text" charset="0"/>
+                        <a:ea typeface="Red Hat Text" charset="0"/>
+                        <a:cs typeface="Red Hat Text" charset="0"/>
+                      </a:endParaRPr>
+                    </a:p>
+                  </a:txBody>
+                  <a:tcPr marL="91440" marR="91440" marT="45720" marB="45720" anchor="ctr">
+                    <a:lnL w="6350" cap="flat" cmpd="sng" algn="ctr">
+                      <a:solidFill>
+                        <a:srgbClr val="D2D2D2"/>
+                      </a:solidFill>
+                      <a:prstDash val="solid"/>
+                      <a:round/>
+                      <a:headEnd type="none" w="med" len="med"/>
+                      <a:tailEnd type="none" w="med" len="med"/>
+                    </a:lnL>
+                    <a:lnR w="6350" cap="flat" cmpd="sng" algn="ctr">
+                      <a:solidFill>
+                        <a:srgbClr val="D2D2D2"/>
+                      </a:solidFill>
+                      <a:prstDash val="solid"/>
+                      <a:round/>
+                      <a:headEnd type="none" w="med" len="med"/>
+                      <a:tailEnd type="none" w="med" len="med"/>
+                    </a:lnR>
+                    <a:lnT w="6350" cap="flat" cmpd="sng" algn="ctr">
+                      <a:solidFill>
+                        <a:srgbClr val="D2D2D2"/>
+                      </a:solidFill>
+                      <a:prstDash val="solid"/>
+                      <a:round/>
+                      <a:headEnd type="none" w="med" len="med"/>
+                      <a:tailEnd type="none" w="med" len="med"/>
+                    </a:lnT>
+                    <a:lnB w="6350" cap="flat" cmpd="sng" algn="ctr">
+                      <a:solidFill>
+                        <a:srgbClr val="D2D2D2"/>
+                      </a:solidFill>
+                      <a:prstDash val="solid"/>
+                      <a:round/>
+                      <a:headEnd type="none" w="med" len="med"/>
+                      <a:tailEnd type="none" w="med" len="med"/>
+                    </a:lnB>
+                  </a:tcPr>
+                </a:tc>
+                <a:tc>
+                  <a:txBody>
+                    <a:bodyPr/>
+                    <a:lstStyle/>
+                    <a:p>
+                      <a:pPr algn="l" indent="0" marL="0">
+                        <a:buNone/>
+                      </a:pPr>
+                      <a:r>
+                        <a:rPr lang="en-US" sz="1300" dirty="0">
+                          <a:solidFill>
+                            <a:srgbClr val="242424"/>
+                          </a:solidFill>
+                          <a:latin typeface="Red Hat Text" pitchFamily="34" charset="0"/>
+                          <a:ea typeface="Red Hat Text" pitchFamily="34" charset="-122"/>
+                          <a:cs typeface="Red Hat Text" pitchFamily="34" charset="-120"/>
+                        </a:rPr>
+                        <a:t>Distroless minimalism; Trusted Libraries for Python</a:t>
+                      </a:r>
+                      <a:endParaRPr lang="en-US" sz="1300" dirty="0">
+                        <a:latin typeface="Red Hat Text" charset="0"/>
+                        <a:ea typeface="Red Hat Text" charset="0"/>
+                        <a:cs typeface="Red Hat Text" charset="0"/>
+                      </a:endParaRPr>
+                    </a:p>
+                  </a:txBody>
+                  <a:tcPr marL="91440" marR="91440" marT="45720" marB="45720" anchor="ctr">
+                    <a:lnL w="6350" cap="flat" cmpd="sng" algn="ctr">
+                      <a:solidFill>
+                        <a:srgbClr val="D2D2D2"/>
+                      </a:solidFill>
+                      <a:prstDash val="solid"/>
+                      <a:round/>
+                      <a:headEnd type="none" w="med" len="med"/>
+                      <a:tailEnd type="none" w="med" len="med"/>
+                    </a:lnL>
+                    <a:lnR w="6350" cap="flat" cmpd="sng" algn="ctr">
+                      <a:solidFill>
+                        <a:srgbClr val="D2D2D2"/>
+                      </a:solidFill>
+                      <a:prstDash val="solid"/>
+                      <a:round/>
+                      <a:headEnd type="none" w="med" len="med"/>
+                      <a:tailEnd type="none" w="med" len="med"/>
+                    </a:lnR>
+                    <a:lnT w="6350" cap="flat" cmpd="sng" algn="ctr">
+                      <a:solidFill>
+                        <a:srgbClr val="D2D2D2"/>
+                      </a:solidFill>
+                      <a:prstDash val="solid"/>
+                      <a:round/>
+                      <a:headEnd type="none" w="med" len="med"/>
+                      <a:tailEnd type="none" w="med" len="med"/>
+                    </a:lnT>
+                    <a:lnB w="6350" cap="flat" cmpd="sng" algn="ctr">
+                      <a:solidFill>
+                        <a:srgbClr val="D2D2D2"/>
+                      </a:solidFill>
+                      <a:prstDash val="solid"/>
+                      <a:round/>
+                      <a:headEnd type="none" w="med" len="med"/>
+                      <a:tailEnd type="none" w="med" len="med"/>
+                    </a:lnB>
+                  </a:tcPr>
+                </a:tc>
+              </a:tr>
+              <a:tr h="566928">
+                <a:tc>
+                  <a:txBody>
+                    <a:bodyPr/>
+                    <a:lstStyle/>
+                    <a:p>
+                      <a:pPr algn="l" indent="0" marL="0">
+                        <a:buNone/>
+                      </a:pPr>
+                      <a:r>
+                        <a:rPr lang="en-US" sz="1500" b="1" dirty="0">
+                          <a:solidFill>
+                            <a:srgbClr val="EE0000"/>
+                          </a:solidFill>
+                          <a:latin typeface="Red Hat Mono" pitchFamily="34" charset="0"/>
+                          <a:ea typeface="Red Hat Mono" pitchFamily="34" charset="-122"/>
+                          <a:cs typeface="Red Hat Mono" pitchFamily="34" charset="-120"/>
+                        </a:rPr>
+                        <a:t>Build integrity</a:t>
+                      </a:r>
+                      <a:endParaRPr lang="en-US" sz="1500" dirty="0">
+                        <a:latin typeface="Red Hat Mono" charset="0"/>
+                        <a:ea typeface="Red Hat Mono" charset="0"/>
+                        <a:cs typeface="Red Hat Mono" charset="0"/>
+                      </a:endParaRPr>
+                    </a:p>
+                  </a:txBody>
+                  <a:tcPr marL="91440" marR="91440" marT="45720" marB="45720" anchor="ctr">
+                    <a:lnL w="6350" cap="flat" cmpd="sng" algn="ctr">
+                      <a:solidFill>
+                        <a:srgbClr val="D2D2D2"/>
+                      </a:solidFill>
+                      <a:prstDash val="solid"/>
+                      <a:round/>
+                      <a:headEnd type="none" w="med" len="med"/>
+                      <a:tailEnd type="none" w="med" len="med"/>
+                    </a:lnL>
+                    <a:lnR w="6350" cap="flat" cmpd="sng" algn="ctr">
+                      <a:solidFill>
+                        <a:srgbClr val="D2D2D2"/>
+                      </a:solidFill>
+                      <a:prstDash val="solid"/>
+                      <a:round/>
+                      <a:headEnd type="none" w="med" len="med"/>
+                      <a:tailEnd type="none" w="med" len="med"/>
+                    </a:lnR>
+                    <a:lnT w="6350" cap="flat" cmpd="sng" algn="ctr">
+                      <a:solidFill>
+                        <a:srgbClr val="D2D2D2"/>
+                      </a:solidFill>
+                      <a:prstDash val="solid"/>
+                      <a:round/>
+                      <a:headEnd type="none" w="med" len="med"/>
+                      <a:tailEnd type="none" w="med" len="med"/>
+                    </a:lnT>
+                    <a:lnB w="6350" cap="flat" cmpd="sng" algn="ctr">
+                      <a:solidFill>
+                        <a:srgbClr val="D2D2D2"/>
+                      </a:solidFill>
+                      <a:prstDash val="solid"/>
+                      <a:round/>
+                      <a:headEnd type="none" w="med" len="med"/>
+                      <a:tailEnd type="none" w="med" len="med"/>
+                    </a:lnB>
+                  </a:tcPr>
+                </a:tc>
+                <a:tc>
+                  <a:txBody>
+                    <a:bodyPr/>
+                    <a:lstStyle/>
+                    <a:p>
+                      <a:pPr algn="l" indent="0" marL="0">
+                        <a:buNone/>
+                      </a:pPr>
+                      <a:r>
+                        <a:rPr lang="en-US" sz="1400" b="1" dirty="0">
+                          <a:solidFill>
+                            <a:srgbClr val="151515"/>
+                          </a:solidFill>
+                          <a:latin typeface="Red Hat Text" pitchFamily="34" charset="0"/>
+                          <a:ea typeface="Red Hat Text" pitchFamily="34" charset="-122"/>
+                          <a:cs typeface="Red Hat Text" pitchFamily="34" charset="-120"/>
+                        </a:rPr>
+                        <a:t>Hummingbird</a:t>
+                      </a:r>
+                      <a:endParaRPr lang="en-US" sz="1400" dirty="0">
+                        <a:latin typeface="Red Hat Text" charset="0"/>
+                        <a:ea typeface="Red Hat Text" charset="0"/>
+                        <a:cs typeface="Red Hat Text" charset="0"/>
+                      </a:endParaRPr>
+                    </a:p>
+                  </a:txBody>
+                  <a:tcPr marL="91440" marR="91440" marT="45720" marB="45720" anchor="ctr">
+                    <a:lnL w="6350" cap="flat" cmpd="sng" algn="ctr">
+                      <a:solidFill>
+                        <a:srgbClr val="D2D2D2"/>
+                      </a:solidFill>
+                      <a:prstDash val="solid"/>
+                      <a:round/>
+                      <a:headEnd type="none" w="med" len="med"/>
+                      <a:tailEnd type="none" w="med" len="med"/>
+                    </a:lnL>
+                    <a:lnR w="6350" cap="flat" cmpd="sng" algn="ctr">
+                      <a:solidFill>
+                        <a:srgbClr val="D2D2D2"/>
+                      </a:solidFill>
+                      <a:prstDash val="solid"/>
+                      <a:round/>
+                      <a:headEnd type="none" w="med" len="med"/>
+                      <a:tailEnd type="none" w="med" len="med"/>
+                    </a:lnR>
+                    <a:lnT w="6350" cap="flat" cmpd="sng" algn="ctr">
+                      <a:solidFill>
+                        <a:srgbClr val="D2D2D2"/>
+                      </a:solidFill>
+                      <a:prstDash val="solid"/>
+                      <a:round/>
+                      <a:headEnd type="none" w="med" len="med"/>
+                      <a:tailEnd type="none" w="med" len="med"/>
+                    </a:lnT>
+                    <a:lnB w="6350" cap="flat" cmpd="sng" algn="ctr">
+                      <a:solidFill>
+                        <a:srgbClr val="D2D2D2"/>
+                      </a:solidFill>
+                      <a:prstDash val="solid"/>
+                      <a:round/>
+                      <a:headEnd type="none" w="med" len="med"/>
+                      <a:tailEnd type="none" w="med" len="med"/>
+                    </a:lnB>
+                  </a:tcPr>
+                </a:tc>
+                <a:tc>
+                  <a:txBody>
+                    <a:bodyPr/>
+                    <a:lstStyle/>
+                    <a:p>
+                      <a:pPr algn="l" indent="0" marL="0">
+                        <a:buNone/>
+                      </a:pPr>
+                      <a:r>
+                        <a:rPr lang="en-US" sz="1300" dirty="0">
+                          <a:solidFill>
+                            <a:srgbClr val="242424"/>
+                          </a:solidFill>
+                          <a:latin typeface="Red Hat Text" pitchFamily="34" charset="0"/>
+                          <a:ea typeface="Red Hat Text" pitchFamily="34" charset="-122"/>
+                          <a:cs typeface="Red Hat Text" pitchFamily="34" charset="-120"/>
+                        </a:rPr>
+                        <a:t>SLSA 3 hermetic Konflux build, signed provenance</a:t>
+                      </a:r>
+                      <a:endParaRPr lang="en-US" sz="1300" dirty="0">
+                        <a:latin typeface="Red Hat Text" charset="0"/>
+                        <a:ea typeface="Red Hat Text" charset="0"/>
+                        <a:cs typeface="Red Hat Text" charset="0"/>
+                      </a:endParaRPr>
+                    </a:p>
+                  </a:txBody>
+                  <a:tcPr marL="91440" marR="91440" marT="45720" marB="45720" anchor="ctr">
+                    <a:lnL w="6350" cap="flat" cmpd="sng" algn="ctr">
+                      <a:solidFill>
+                        <a:srgbClr val="D2D2D2"/>
+                      </a:solidFill>
+                      <a:prstDash val="solid"/>
+                      <a:round/>
+                      <a:headEnd type="none" w="med" len="med"/>
+                      <a:tailEnd type="none" w="med" len="med"/>
+                    </a:lnL>
+                    <a:lnR w="6350" cap="flat" cmpd="sng" algn="ctr">
+                      <a:solidFill>
+                        <a:srgbClr val="D2D2D2"/>
+                      </a:solidFill>
+                      <a:prstDash val="solid"/>
+                      <a:round/>
+                      <a:headEnd type="none" w="med" len="med"/>
+                      <a:tailEnd type="none" w="med" len="med"/>
+                    </a:lnR>
+                    <a:lnT w="6350" cap="flat" cmpd="sng" algn="ctr">
+                      <a:solidFill>
+                        <a:srgbClr val="D2D2D2"/>
+                      </a:solidFill>
+                      <a:prstDash val="solid"/>
+                      <a:round/>
+                      <a:headEnd type="none" w="med" len="med"/>
+                      <a:tailEnd type="none" w="med" len="med"/>
+                    </a:lnT>
+                    <a:lnB w="6350" cap="flat" cmpd="sng" algn="ctr">
+                      <a:solidFill>
+                        <a:srgbClr val="D2D2D2"/>
+                      </a:solidFill>
+                      <a:prstDash val="solid"/>
+                      <a:round/>
+                      <a:headEnd type="none" w="med" len="med"/>
+                      <a:tailEnd type="none" w="med" len="med"/>
+                    </a:lnB>
+                  </a:tcPr>
+                </a:tc>
+              </a:tr>
+              <a:tr h="566928">
+                <a:tc>
+                  <a:txBody>
+                    <a:bodyPr/>
+                    <a:lstStyle/>
+                    <a:p>
+                      <a:pPr algn="l" indent="0" marL="0">
+                        <a:buNone/>
+                      </a:pPr>
+                      <a:r>
+                        <a:rPr lang="en-US" sz="1500" b="1" dirty="0">
+                          <a:solidFill>
+                            <a:srgbClr val="EE0000"/>
+                          </a:solidFill>
+                          <a:latin typeface="Red Hat Mono" pitchFamily="34" charset="0"/>
+                          <a:ea typeface="Red Hat Mono" pitchFamily="34" charset="-122"/>
+                          <a:cs typeface="Red Hat Mono" pitchFamily="34" charset="-120"/>
+                        </a:rPr>
+                        <a:t>Image authenticity</a:t>
+                      </a:r>
+                      <a:endParaRPr lang="en-US" sz="1500" dirty="0">
+                        <a:latin typeface="Red Hat Mono" charset="0"/>
+                        <a:ea typeface="Red Hat Mono" charset="0"/>
+                        <a:cs typeface="Red Hat Mono" charset="0"/>
+                      </a:endParaRPr>
+                    </a:p>
+                  </a:txBody>
+                  <a:tcPr marL="91440" marR="91440" marT="45720" marB="45720" anchor="ctr">
+                    <a:lnL w="6350" cap="flat" cmpd="sng" algn="ctr">
+                      <a:solidFill>
+                        <a:srgbClr val="D2D2D2"/>
+                      </a:solidFill>
+                      <a:prstDash val="solid"/>
+                      <a:round/>
+                      <a:headEnd type="none" w="med" len="med"/>
+                      <a:tailEnd type="none" w="med" len="med"/>
+                    </a:lnL>
+                    <a:lnR w="6350" cap="flat" cmpd="sng" algn="ctr">
+                      <a:solidFill>
+                        <a:srgbClr val="D2D2D2"/>
+                      </a:solidFill>
+                      <a:prstDash val="solid"/>
+                      <a:round/>
+                      <a:headEnd type="none" w="med" len="med"/>
+                      <a:tailEnd type="none" w="med" len="med"/>
+                    </a:lnR>
+                    <a:lnT w="6350" cap="flat" cmpd="sng" algn="ctr">
+                      <a:solidFill>
+                        <a:srgbClr val="D2D2D2"/>
+                      </a:solidFill>
+                      <a:prstDash val="solid"/>
+                      <a:round/>
+                      <a:headEnd type="none" w="med" len="med"/>
+                      <a:tailEnd type="none" w="med" len="med"/>
+                    </a:lnT>
+                    <a:lnB w="6350" cap="flat" cmpd="sng" algn="ctr">
+                      <a:solidFill>
+                        <a:srgbClr val="D2D2D2"/>
+                      </a:solidFill>
+                      <a:prstDash val="solid"/>
+                      <a:round/>
+                      <a:headEnd type="none" w="med" len="med"/>
+                      <a:tailEnd type="none" w="med" len="med"/>
+                    </a:lnB>
+                  </a:tcPr>
+                </a:tc>
+                <a:tc>
+                  <a:txBody>
+                    <a:bodyPr/>
+                    <a:lstStyle/>
+                    <a:p>
+                      <a:pPr algn="l" indent="0" marL="0">
+                        <a:buNone/>
+                      </a:pPr>
+                      <a:r>
+                        <a:rPr lang="en-US" sz="1400" b="1" dirty="0">
+                          <a:solidFill>
+                            <a:srgbClr val="151515"/>
+                          </a:solidFill>
+                          <a:latin typeface="Red Hat Text" pitchFamily="34" charset="0"/>
+                          <a:ea typeface="Red Hat Text" pitchFamily="34" charset="-122"/>
+                          <a:cs typeface="Red Hat Text" pitchFamily="34" charset="-120"/>
+                        </a:rPr>
+                        <a:t>Hummingbird</a:t>
+                      </a:r>
+                      <a:endParaRPr lang="en-US" sz="1400" dirty="0">
+                        <a:latin typeface="Red Hat Text" charset="0"/>
+                        <a:ea typeface="Red Hat Text" charset="0"/>
+                        <a:cs typeface="Red Hat Text" charset="0"/>
+                      </a:endParaRPr>
+                    </a:p>
+                  </a:txBody>
+                  <a:tcPr marL="91440" marR="91440" marT="45720" marB="45720" anchor="ctr">
+                    <a:lnL w="6350" cap="flat" cmpd="sng" algn="ctr">
+                      <a:solidFill>
+                        <a:srgbClr val="D2D2D2"/>
+                      </a:solidFill>
+                      <a:prstDash val="solid"/>
+                      <a:round/>
+                      <a:headEnd type="none" w="med" len="med"/>
+                      <a:tailEnd type="none" w="med" len="med"/>
+                    </a:lnL>
+                    <a:lnR w="6350" cap="flat" cmpd="sng" algn="ctr">
+                      <a:solidFill>
+                        <a:srgbClr val="D2D2D2"/>
+                      </a:solidFill>
+                      <a:prstDash val="solid"/>
+                      <a:round/>
+                      <a:headEnd type="none" w="med" len="med"/>
+                      <a:tailEnd type="none" w="med" len="med"/>
+                    </a:lnR>
+                    <a:lnT w="6350" cap="flat" cmpd="sng" algn="ctr">
+                      <a:solidFill>
+                        <a:srgbClr val="D2D2D2"/>
+                      </a:solidFill>
+                      <a:prstDash val="solid"/>
+                      <a:round/>
+                      <a:headEnd type="none" w="med" len="med"/>
+                      <a:tailEnd type="none" w="med" len="med"/>
+                    </a:lnT>
+                    <a:lnB w="6350" cap="flat" cmpd="sng" algn="ctr">
+                      <a:solidFill>
+                        <a:srgbClr val="D2D2D2"/>
+                      </a:solidFill>
+                      <a:prstDash val="solid"/>
+                      <a:round/>
+                      <a:headEnd type="none" w="med" len="med"/>
+                      <a:tailEnd type="none" w="med" len="med"/>
+                    </a:lnB>
+                  </a:tcPr>
+                </a:tc>
+                <a:tc>
+                  <a:txBody>
+                    <a:bodyPr/>
+                    <a:lstStyle/>
+                    <a:p>
+                      <a:pPr algn="l" indent="0" marL="0">
+                        <a:buNone/>
+                      </a:pPr>
+                      <a:r>
+                        <a:rPr lang="en-US" sz="1300" dirty="0">
+                          <a:solidFill>
+                            <a:srgbClr val="242424"/>
+                          </a:solidFill>
+                          <a:latin typeface="Red Hat Text" pitchFamily="34" charset="0"/>
+                          <a:ea typeface="Red Hat Text" pitchFamily="34" charset="-122"/>
+                          <a:cs typeface="Red Hat Text" pitchFamily="34" charset="-120"/>
+                        </a:rPr>
+                        <a:t>cosign signature + SBOM + provenance on /hi</a:t>
+                      </a:r>
+                      <a:endParaRPr lang="en-US" sz="1300" dirty="0">
+                        <a:latin typeface="Red Hat Text" charset="0"/>
+                        <a:ea typeface="Red Hat Text" charset="0"/>
+                        <a:cs typeface="Red Hat Text" charset="0"/>
+                      </a:endParaRPr>
+                    </a:p>
+                  </a:txBody>
+                  <a:tcPr marL="91440" marR="91440" marT="45720" marB="45720" anchor="ctr">
+                    <a:lnL w="6350" cap="flat" cmpd="sng" algn="ctr">
+                      <a:solidFill>
+                        <a:srgbClr val="D2D2D2"/>
+                      </a:solidFill>
+                      <a:prstDash val="solid"/>
+                      <a:round/>
+                      <a:headEnd type="none" w="med" len="med"/>
+                      <a:tailEnd type="none" w="med" len="med"/>
+                    </a:lnL>
+                    <a:lnR w="6350" cap="flat" cmpd="sng" algn="ctr">
+                      <a:solidFill>
+                        <a:srgbClr val="D2D2D2"/>
+                      </a:solidFill>
+                      <a:prstDash val="solid"/>
+                      <a:round/>
+                      <a:headEnd type="none" w="med" len="med"/>
+                      <a:tailEnd type="none" w="med" len="med"/>
+                    </a:lnR>
+                    <a:lnT w="6350" cap="flat" cmpd="sng" algn="ctr">
+                      <a:solidFill>
+                        <a:srgbClr val="D2D2D2"/>
+                      </a:solidFill>
+                      <a:prstDash val="solid"/>
+                      <a:round/>
+                      <a:headEnd type="none" w="med" len="med"/>
+                      <a:tailEnd type="none" w="med" len="med"/>
+                    </a:lnT>
+                    <a:lnB w="6350" cap="flat" cmpd="sng" algn="ctr">
+                      <a:solidFill>
+                        <a:srgbClr val="D2D2D2"/>
+                      </a:solidFill>
+                      <a:prstDash val="solid"/>
+                      <a:round/>
+                      <a:headEnd type="none" w="med" len="med"/>
+                      <a:tailEnd type="none" w="med" len="med"/>
+                    </a:lnB>
+                  </a:tcPr>
+                </a:tc>
+              </a:tr>
+              <a:tr h="566928">
+                <a:tc>
+                  <a:txBody>
+                    <a:bodyPr/>
+                    <a:lstStyle/>
+                    <a:p>
+                      <a:pPr algn="l" indent="0" marL="0">
+                        <a:buNone/>
+                      </a:pPr>
+                      <a:r>
+                        <a:rPr lang="en-US" sz="1500" b="1" dirty="0">
+                          <a:solidFill>
+                            <a:srgbClr val="EE0000"/>
+                          </a:solidFill>
+                          <a:latin typeface="Red Hat Mono" pitchFamily="34" charset="0"/>
+                          <a:ea typeface="Red Hat Mono" pitchFamily="34" charset="-122"/>
+                          <a:cs typeface="Red Hat Mono" pitchFamily="34" charset="-120"/>
+                        </a:rPr>
+                        <a:t>Source / file</a:t>
+                      </a:r>
+                      <a:endParaRPr lang="en-US" sz="1500" dirty="0">
+                        <a:latin typeface="Red Hat Mono" charset="0"/>
+                        <a:ea typeface="Red Hat Mono" charset="0"/>
+                        <a:cs typeface="Red Hat Mono" charset="0"/>
+                      </a:endParaRPr>
+                    </a:p>
+                  </a:txBody>
+                  <a:tcPr marL="91440" marR="91440" marT="45720" marB="45720" anchor="ctr">
+                    <a:lnL w="6350" cap="flat" cmpd="sng" algn="ctr">
+                      <a:solidFill>
+                        <a:srgbClr val="D2D2D2"/>
+                      </a:solidFill>
+                      <a:prstDash val="solid"/>
+                      <a:round/>
+                      <a:headEnd type="none" w="med" len="med"/>
+                      <a:tailEnd type="none" w="med" len="med"/>
+                    </a:lnL>
+                    <a:lnR w="6350" cap="flat" cmpd="sng" algn="ctr">
+                      <a:solidFill>
+                        <a:srgbClr val="D2D2D2"/>
+                      </a:solidFill>
+                      <a:prstDash val="solid"/>
+                      <a:round/>
+                      <a:headEnd type="none" w="med" len="med"/>
+                      <a:tailEnd type="none" w="med" len="med"/>
+                    </a:lnR>
+                    <a:lnT w="6350" cap="flat" cmpd="sng" algn="ctr">
+                      <a:solidFill>
+                        <a:srgbClr val="D2D2D2"/>
+                      </a:solidFill>
+                      <a:prstDash val="solid"/>
+                      <a:round/>
+                      <a:headEnd type="none" w="med" len="med"/>
+                      <a:tailEnd type="none" w="med" len="med"/>
+                    </a:lnT>
+                    <a:lnB w="6350" cap="flat" cmpd="sng" algn="ctr">
+                      <a:solidFill>
+                        <a:srgbClr val="D2D2D2"/>
+                      </a:solidFill>
+                      <a:prstDash val="solid"/>
+                      <a:round/>
+                      <a:headEnd type="none" w="med" len="med"/>
+                      <a:tailEnd type="none" w="med" len="med"/>
+                    </a:lnB>
+                  </a:tcPr>
+                </a:tc>
+                <a:tc>
+                  <a:txBody>
+                    <a:bodyPr/>
+                    <a:lstStyle/>
+                    <a:p>
+                      <a:pPr algn="l" indent="0" marL="0">
+                        <a:buNone/>
+                      </a:pPr>
+                      <a:r>
+                        <a:rPr lang="en-US" sz="1400" b="1" dirty="0">
+                          <a:solidFill>
+                            <a:srgbClr val="151515"/>
+                          </a:solidFill>
+                          <a:latin typeface="Red Hat Text" pitchFamily="34" charset="0"/>
+                          <a:ea typeface="Red Hat Text" pitchFamily="34" charset="-122"/>
+                          <a:cs typeface="Red Hat Text" pitchFamily="34" charset="-120"/>
+                        </a:rPr>
+                        <a:t>You</a:t>
+                      </a:r>
+                      <a:endParaRPr lang="en-US" sz="1400" dirty="0">
+                        <a:latin typeface="Red Hat Text" charset="0"/>
+                        <a:ea typeface="Red Hat Text" charset="0"/>
+                        <a:cs typeface="Red Hat Text" charset="0"/>
+                      </a:endParaRPr>
+                    </a:p>
+                  </a:txBody>
+                  <a:tcPr marL="91440" marR="91440" marT="45720" marB="45720" anchor="ctr">
+                    <a:lnL w="6350" cap="flat" cmpd="sng" algn="ctr">
+                      <a:solidFill>
+                        <a:srgbClr val="D2D2D2"/>
+                      </a:solidFill>
+                      <a:prstDash val="solid"/>
+                      <a:round/>
+                      <a:headEnd type="none" w="med" len="med"/>
+                      <a:tailEnd type="none" w="med" len="med"/>
+                    </a:lnL>
+                    <a:lnR w="6350" cap="flat" cmpd="sng" algn="ctr">
+                      <a:solidFill>
+                        <a:srgbClr val="D2D2D2"/>
+                      </a:solidFill>
+                      <a:prstDash val="solid"/>
+                      <a:round/>
+                      <a:headEnd type="none" w="med" len="med"/>
+                      <a:tailEnd type="none" w="med" len="med"/>
+                    </a:lnR>
+                    <a:lnT w="6350" cap="flat" cmpd="sng" algn="ctr">
+                      <a:solidFill>
+                        <a:srgbClr val="D2D2D2"/>
+                      </a:solidFill>
+                      <a:prstDash val="solid"/>
+                      <a:round/>
+                      <a:headEnd type="none" w="med" len="med"/>
+                      <a:tailEnd type="none" w="med" len="med"/>
+                    </a:lnT>
+                    <a:lnB w="6350" cap="flat" cmpd="sng" algn="ctr">
+                      <a:solidFill>
+                        <a:srgbClr val="D2D2D2"/>
+                      </a:solidFill>
+                      <a:prstDash val="solid"/>
+                      <a:round/>
+                      <a:headEnd type="none" w="med" len="med"/>
+                      <a:tailEnd type="none" w="med" len="med"/>
+                    </a:lnB>
+                  </a:tcPr>
+                </a:tc>
+                <a:tc>
+                  <a:txBody>
+                    <a:bodyPr/>
+                    <a:lstStyle/>
+                    <a:p>
+                      <a:pPr algn="l" indent="0" marL="0">
+                        <a:buNone/>
+                      </a:pPr>
+                      <a:r>
+                        <a:rPr lang="en-US" sz="1300" dirty="0">
+                          <a:solidFill>
+                            <a:srgbClr val="242424"/>
+                          </a:solidFill>
+                          <a:latin typeface="Red Hat Text" pitchFamily="34" charset="0"/>
+                          <a:ea typeface="Red Hat Text" pitchFamily="34" charset="-122"/>
+                          <a:cs typeface="Red Hat Text" pitchFamily="34" charset="-120"/>
+                        </a:rPr>
+                        <a:t>Branch protection, signed commits, pin base by digest</a:t>
+                      </a:r>
+                      <a:endParaRPr lang="en-US" sz="1300" dirty="0">
+                        <a:latin typeface="Red Hat Text" charset="0"/>
+                        <a:ea typeface="Red Hat Text" charset="0"/>
+                        <a:cs typeface="Red Hat Text" charset="0"/>
+                      </a:endParaRPr>
+                    </a:p>
+                  </a:txBody>
+                  <a:tcPr marL="91440" marR="91440" marT="45720" marB="45720" anchor="ctr">
+                    <a:lnL w="6350" cap="flat" cmpd="sng" algn="ctr">
+                      <a:solidFill>
+                        <a:srgbClr val="D2D2D2"/>
+                      </a:solidFill>
+                      <a:prstDash val="solid"/>
+                      <a:round/>
+                      <a:headEnd type="none" w="med" len="med"/>
+                      <a:tailEnd type="none" w="med" len="med"/>
+                    </a:lnL>
+                    <a:lnR w="6350" cap="flat" cmpd="sng" algn="ctr">
+                      <a:solidFill>
+                        <a:srgbClr val="D2D2D2"/>
+                      </a:solidFill>
+                      <a:prstDash val="solid"/>
+                      <a:round/>
+                      <a:headEnd type="none" w="med" len="med"/>
+                      <a:tailEnd type="none" w="med" len="med"/>
+                    </a:lnR>
+                    <a:lnT w="6350" cap="flat" cmpd="sng" algn="ctr">
+                      <a:solidFill>
+                        <a:srgbClr val="D2D2D2"/>
+                      </a:solidFill>
+                      <a:prstDash val="solid"/>
+                      <a:round/>
+                      <a:headEnd type="none" w="med" len="med"/>
+                      <a:tailEnd type="none" w="med" len="med"/>
+                    </a:lnT>
+                    <a:lnB w="6350" cap="flat" cmpd="sng" algn="ctr">
+                      <a:solidFill>
+                        <a:srgbClr val="D2D2D2"/>
+                      </a:solidFill>
+                      <a:prstDash val="solid"/>
+                      <a:round/>
+                      <a:headEnd type="none" w="med" len="med"/>
+                      <a:tailEnd type="none" w="med" len="med"/>
+                    </a:lnB>
+                  </a:tcPr>
+                </a:tc>
+              </a:tr>
+              <a:tr h="566928">
+                <a:tc>
+                  <a:txBody>
+                    <a:bodyPr/>
+                    <a:lstStyle/>
+                    <a:p>
+                      <a:pPr algn="l" indent="0" marL="0">
+                        <a:buNone/>
+                      </a:pPr>
+                      <a:r>
+                        <a:rPr lang="en-US" sz="1500" b="1" dirty="0">
+                          <a:solidFill>
+                            <a:srgbClr val="EE0000"/>
+                          </a:solidFill>
+                          <a:latin typeface="Red Hat Mono" pitchFamily="34" charset="0"/>
+                          <a:ea typeface="Red Hat Mono" pitchFamily="34" charset="-122"/>
+                          <a:cs typeface="Red Hat Mono" pitchFamily="34" charset="-120"/>
+                        </a:rPr>
+                        <a:t>Deploy / platform</a:t>
+                      </a:r>
+                      <a:endParaRPr lang="en-US" sz="1500" dirty="0">
+                        <a:latin typeface="Red Hat Mono" charset="0"/>
+                        <a:ea typeface="Red Hat Mono" charset="0"/>
+                        <a:cs typeface="Red Hat Mono" charset="0"/>
+                      </a:endParaRPr>
+                    </a:p>
+                  </a:txBody>
+                  <a:tcPr marL="91440" marR="91440" marT="45720" marB="45720" anchor="ctr">
+                    <a:lnL w="6350" cap="flat" cmpd="sng" algn="ctr">
+                      <a:solidFill>
+                        <a:srgbClr val="D2D2D2"/>
+                      </a:solidFill>
+                      <a:prstDash val="solid"/>
+                      <a:round/>
+                      <a:headEnd type="none" w="med" len="med"/>
+                      <a:tailEnd type="none" w="med" len="med"/>
+                    </a:lnL>
+                    <a:lnR w="6350" cap="flat" cmpd="sng" algn="ctr">
+                      <a:solidFill>
+                        <a:srgbClr val="D2D2D2"/>
+                      </a:solidFill>
+                      <a:prstDash val="solid"/>
+                      <a:round/>
+                      <a:headEnd type="none" w="med" len="med"/>
+                      <a:tailEnd type="none" w="med" len="med"/>
+                    </a:lnR>
+                    <a:lnT w="6350" cap="flat" cmpd="sng" algn="ctr">
+                      <a:solidFill>
+                        <a:srgbClr val="D2D2D2"/>
+                      </a:solidFill>
+                      <a:prstDash val="solid"/>
+                      <a:round/>
+                      <a:headEnd type="none" w="med" len="med"/>
+                      <a:tailEnd type="none" w="med" len="med"/>
+                    </a:lnT>
+                    <a:lnB w="6350" cap="flat" cmpd="sng" algn="ctr">
+                      <a:solidFill>
+                        <a:srgbClr val="D2D2D2"/>
+                      </a:solidFill>
+                      <a:prstDash val="solid"/>
+                      <a:round/>
+                      <a:headEnd type="none" w="med" len="med"/>
+                      <a:tailEnd type="none" w="med" len="med"/>
+                    </a:lnB>
+                  </a:tcPr>
+                </a:tc>
+                <a:tc>
+                  <a:txBody>
+                    <a:bodyPr/>
+                    <a:lstStyle/>
+                    <a:p>
+                      <a:pPr algn="l" indent="0" marL="0">
+                        <a:buNone/>
+                      </a:pPr>
+                      <a:r>
+                        <a:rPr lang="en-US" sz="1400" b="1" dirty="0">
+                          <a:solidFill>
+                            <a:srgbClr val="151515"/>
+                          </a:solidFill>
+                          <a:latin typeface="Red Hat Text" pitchFamily="34" charset="0"/>
+                          <a:ea typeface="Red Hat Text" pitchFamily="34" charset="-122"/>
+                          <a:cs typeface="Red Hat Text" pitchFamily="34" charset="-120"/>
+                        </a:rPr>
+                        <a:t>You</a:t>
+                      </a:r>
+                      <a:endParaRPr lang="en-US" sz="1400" dirty="0">
+                        <a:latin typeface="Red Hat Text" charset="0"/>
+                        <a:ea typeface="Red Hat Text" charset="0"/>
+                        <a:cs typeface="Red Hat Text" charset="0"/>
+                      </a:endParaRPr>
+                    </a:p>
+                  </a:txBody>
+                  <a:tcPr marL="91440" marR="91440" marT="45720" marB="45720" anchor="ctr">
+                    <a:lnL w="6350" cap="flat" cmpd="sng" algn="ctr">
+                      <a:solidFill>
+                        <a:srgbClr val="D2D2D2"/>
+                      </a:solidFill>
+                      <a:prstDash val="solid"/>
+                      <a:round/>
+                      <a:headEnd type="none" w="med" len="med"/>
+                      <a:tailEnd type="none" w="med" len="med"/>
+                    </a:lnL>
+                    <a:lnR w="6350" cap="flat" cmpd="sng" algn="ctr">
+                      <a:solidFill>
+                        <a:srgbClr val="D2D2D2"/>
+                      </a:solidFill>
+                      <a:prstDash val="solid"/>
+                      <a:round/>
+                      <a:headEnd type="none" w="med" len="med"/>
+                      <a:tailEnd type="none" w="med" len="med"/>
+                    </a:lnR>
+                    <a:lnT w="6350" cap="flat" cmpd="sng" algn="ctr">
+                      <a:solidFill>
+                        <a:srgbClr val="D2D2D2"/>
+                      </a:solidFill>
+                      <a:prstDash val="solid"/>
+                      <a:round/>
+                      <a:headEnd type="none" w="med" len="med"/>
+                      <a:tailEnd type="none" w="med" len="med"/>
+                    </a:lnT>
+                    <a:lnB w="6350" cap="flat" cmpd="sng" algn="ctr">
+                      <a:solidFill>
+                        <a:srgbClr val="D2D2D2"/>
+                      </a:solidFill>
+                      <a:prstDash val="solid"/>
+                      <a:round/>
+                      <a:headEnd type="none" w="med" len="med"/>
+                      <a:tailEnd type="none" w="med" len="med"/>
+                    </a:lnB>
+                  </a:tcPr>
+                </a:tc>
+                <a:tc>
+                  <a:txBody>
+                    <a:bodyPr/>
+                    <a:lstStyle/>
+                    <a:p>
+                      <a:pPr algn="l" indent="0" marL="0">
+                        <a:buNone/>
+                      </a:pPr>
+                      <a:r>
+                        <a:rPr lang="en-US" sz="1300" dirty="0">
+                          <a:solidFill>
+                            <a:srgbClr val="242424"/>
+                          </a:solidFill>
+                          <a:latin typeface="Red Hat Text" pitchFamily="34" charset="0"/>
+                          <a:ea typeface="Red Hat Text" pitchFamily="34" charset="-122"/>
+                          <a:cs typeface="Red Hat Text" pitchFamily="34" charset="-120"/>
+                        </a:rPr>
+                        <a:t>OpenShift admission control; host &amp; network hardening</a:t>
+                      </a:r>
+                      <a:endParaRPr lang="en-US" sz="1300" dirty="0">
+                        <a:latin typeface="Red Hat Text" charset="0"/>
+                        <a:ea typeface="Red Hat Text" charset="0"/>
+                        <a:cs typeface="Red Hat Text" charset="0"/>
+                      </a:endParaRPr>
+                    </a:p>
+                  </a:txBody>
+                  <a:tcPr marL="91440" marR="91440" marT="45720" marB="45720" anchor="ctr">
+                    <a:lnL w="6350" cap="flat" cmpd="sng" algn="ctr">
+                      <a:solidFill>
+                        <a:srgbClr val="D2D2D2"/>
+                      </a:solidFill>
+                      <a:prstDash val="solid"/>
+                      <a:round/>
+                      <a:headEnd type="none" w="med" len="med"/>
+                      <a:tailEnd type="none" w="med" len="med"/>
+                    </a:lnL>
+                    <a:lnR w="6350" cap="flat" cmpd="sng" algn="ctr">
+                      <a:solidFill>
+                        <a:srgbClr val="D2D2D2"/>
+                      </a:solidFill>
+                      <a:prstDash val="solid"/>
+                      <a:round/>
+                      <a:headEnd type="none" w="med" len="med"/>
+                      <a:tailEnd type="none" w="med" len="med"/>
+                    </a:lnR>
+                    <a:lnT w="6350" cap="flat" cmpd="sng" algn="ctr">
+                      <a:solidFill>
+                        <a:srgbClr val="D2D2D2"/>
+                      </a:solidFill>
+                      <a:prstDash val="solid"/>
+                      <a:round/>
+                      <a:headEnd type="none" w="med" len="med"/>
+                      <a:tailEnd type="none" w="med" len="med"/>
+                    </a:lnT>
+                    <a:lnB w="6350" cap="flat" cmpd="sng" algn="ctr">
+                      <a:solidFill>
+                        <a:srgbClr val="D2D2D2"/>
+                      </a:solidFill>
+                      <a:prstDash val="solid"/>
+                      <a:round/>
+                      <a:headEnd type="none" w="med" len="med"/>
+                      <a:tailEnd type="none" w="med" len="med"/>
+                    </a:lnB>
+                  </a:tcPr>
+                </a:tc>
+              </a:tr>
+            </a:tbl>
+          </a:graphicData>
+        </a:graphic>
+      </p:graphicFrame>
+      <p:sp>
+        <p:nvSpPr>
+          <p:cNvPr id="7" name="Text 3"/>
+          <p:cNvSpPr/>
+          <p:nvPr/>
+        </p:nvSpPr>
+        <p:spPr>
+          <a:xfrm>
+            <a:off x="566928" y="5943600"/>
+            <a:ext cx="11055096" cy="310896"/>
+          </a:xfrm>
+          <a:prstGeom prst="rect">
+            <a:avLst/>
+          </a:prstGeom>
+          <a:noFill/>
+          <a:ln/>
+        </p:spPr>
+        <p:txBody>
+          <a:bodyPr wrap="square" rtlCol="0" anchor="ctr"/>
+          <a:lstStyle/>
+          <a:p>
+            <a:pPr algn="ctr" indent="0" marL="0">
+              <a:buNone/>
+            </a:pPr>
+            <a:r>
+              <a:rPr lang="en-US" sz="1300" i="1" dirty="0">
+                <a:solidFill>
+                  <a:srgbClr val="5A5A5A"/>
+                </a:solidFill>
+                <a:latin typeface="Red Hat Text" pitchFamily="34" charset="0"/>
+                <a:ea typeface="Red Hat Text" pitchFamily="34" charset="-122"/>
+                <a:cs typeface="Red Hat Text" pitchFamily="34" charset="-120"/>
+              </a:rPr>
+              <a:t>Verify on pull (podman + cosign); enforce for every deploy with an OpenShift admission policy.</a:t>
+            </a:r>
+            <a:endParaRPr lang="en-US" sz="1300" dirty="0"/>
+          </a:p>
+        </p:txBody>
+      </p:sp>
+    </p:spTree>
+  </p:cSld>
+  <p:clrMapOvr>
+    <a:masterClrMapping/>
+  </p:clrMapOvr>
+</p:sld>
+</file>
+
+<file path=ppt/slides/slide37.xml><?xml version="1.0" encoding="utf-8"?>
+<p:sld xmlns:a="http://schemas.openxmlformats.org/drawingml/2006/main" xmlns:r="http://schemas.openxmlformats.org/officeDocument/2006/relationships" xmlns:p="http://schemas.openxmlformats.org/presentationml/2006/main">
+  <p:cSld name="Slide 37">
+    <p:spTree>
+      <p:nvGrpSpPr>
+        <p:cNvPr id="1" name=""/>
+        <p:cNvGrpSpPr/>
+        <p:nvPr/>
+      </p:nvGrpSpPr>
+      <p:grpSpPr>
+        <a:xfrm>
+          <a:off x="0" y="0"/>
+          <a:ext cx="0" cy="0"/>
+          <a:chOff x="0" y="0"/>
+          <a:chExt cx="0" cy="0"/>
+        </a:xfrm>
+      </p:grpSpPr>
+      <p:sp>
+        <p:nvSpPr>
+          <p:cNvPr id="2" name="Text 0"/>
+          <p:cNvSpPr/>
+          <p:nvPr/>
+        </p:nvSpPr>
+        <p:spPr>
+          <a:xfrm>
+            <a:off x="566928" y="6364224"/>
+            <a:ext cx="914400" cy="274320"/>
+          </a:xfrm>
+          <a:prstGeom prst="rect">
+            <a:avLst/>
+          </a:prstGeom>
+          <a:noFill/>
+          <a:ln/>
+        </p:spPr>
+        <p:txBody>
+          <a:bodyPr wrap="square" rtlCol="0" anchor="ctr"/>
+          <a:lstStyle/>
+          <a:p>
+            <a:pPr algn="l" indent="0" marL="0">
+              <a:buNone/>
+            </a:pPr>
+            <a:r>
+              <a:rPr lang="en-US" sz="1000" dirty="0">
+                <a:solidFill>
+                  <a:srgbClr val="8A8A8A"/>
+                </a:solidFill>
+                <a:latin typeface="Red Hat Text" pitchFamily="34" charset="0"/>
+                <a:ea typeface="Red Hat Text" pitchFamily="34" charset="-122"/>
+                <a:cs typeface="Red Hat Text" pitchFamily="34" charset="-120"/>
+              </a:rPr>
+              <a:t>37</a:t>
             </a:r>
             <a:endParaRPr lang="en-US" sz="1000" dirty="0"/>
           </a:p>

--- a/presentations/hummingbird-overview.pptx
+++ b/presentations/hummingbird-overview.pptx
@@ -42,9 +42,10 @@
     <p:sldId id="290" r:id="rId36"/>
     <p:sldId id="291" r:id="rId37"/>
     <p:sldId id="292" r:id="rId38"/>
+    <p:sldId id="293" r:id="rId39"/>
   </p:sldIdLst>
   <p:notesMasterIdLst>
-    <p:notesMasterId r:id="rId39"/>
+    <p:notesMasterId r:id="rId40"/>
   </p:notesMasterIdLst>
   <p:sldSz cx="12192000" cy="6858000"/>
   <p:notesSz cx="6858000" cy="12192000"/>
@@ -2914,7 +2915,7 @@
           <a:p>
             <a:r>
               <a:rPr lang="en-US" dirty="0"/>
-              <a:t>The canonical container supply-chain threat model, reframed for our stack: Buildah/Konflux instead of Docker, the signed registry.access.redhat.com/hi path, OpenShift at deploy. Top row: the classic vectors. Bottom row: the Hummingbird answer. The story to tell — a hardened base turns the three hardest vectors (vulnerable base, vulnerable dependencies, build tampering) from 'trust us' into signed evidence you verify yourself, and the minimalism means there's simply less inside to be vulnerable. Be candid about the left edge: tampered source and a tampered Containerfile are the operator's job — branch protection, signed commits, pin the base by digest. Hummingbird gives you a trustworthy FROM; it can't stop an insecure Containerfile on top of it.</a:t>
+              <a:t>Set the stage with the generic picture first — this is the standard container supply-chain threat model, terminology-neutral, before any Hummingbird framing. A container image is assembled from a chain of inputs — source, the build file, a base image, packages — then built, stored, and deployed, and every hand-off is a place to interfere: tamper with source or the Containerfile, a vulnerable base or dependency, build-time tampering or a compromised build host, a swapped image in the registry, an intercepted pull, or a malicious deployment definition. Hold this picture; the next slide overlays the answer.</a:t>
             </a:r>
             <a:endParaRPr lang="en-US" dirty="0"/>
           </a:p>
@@ -3002,7 +3003,7 @@
           <a:p>
             <a:r>
               <a:rPr lang="en-US" dirty="0"/>
-              <a:t>The pipeline view was build-and-delivery; this is runtime — defense in depth. The hardened image shrinks the cluster of vectors aimed at the image and the app: a swapped image fails cosign verify; distroless removes the foot-guns (no shell, no package manager, non-root UID 65532); fewer packages mean fewer exploitable paths and very little for an intruder to use if they do land inside. What it does NOT fix sits outside the container — misconfigured host, insecure networking, container escape — and those are platform hardening: rootless Podman, SELinux, seccomp, OpenShift SCCs, network policy. The hardened image is one strong layer, not the whole onion.</a:t>
+              <a:t>Same chain, reframed for our stack: Buildah/Konflux instead of Docker, the signed registry.access.redhat.com/hi path, OpenShift at deploy. Top row: the classic vectors. Bottom row: the Hummingbird answer. The story to tell — a hardened base turns the three hardest vectors (vulnerable base, vulnerable dependencies, build tampering) from 'trust us' into signed evidence you verify yourself, and the minimalism means there's simply less inside to be vulnerable. Be candid about the left edge: tampered source and a tampered Containerfile are the operator's job — branch protection, signed commits, pin the base by digest. Hummingbird gives you a trustworthy FROM; it can't stop an insecure Containerfile on top of it.</a:t>
             </a:r>
             <a:endParaRPr lang="en-US" dirty="0"/>
           </a:p>
@@ -3090,7 +3091,7 @@
           <a:p>
             <a:r>
               <a:rPr lang="en-US" dirty="0"/>
-              <a:t>The honest summary, and a good place to end an admin talk. Hummingbird owns the image — vulnerable base, vulnerable dependencies, build integrity, image authenticity — the part that's genuinely hard to do yourself and that you get for free. You own the edges — source and Containerfile integrity, platform hardening, and the admission gate that enforces verification for every deploy. The practical close: verify on pull with podman + cosign, and enforce it cluster-wide with an OpenShift admission policy so no one can route around the check — that's what closes the malicious-deployment-definition vector. A near-zero-CVE distroless base is the strongest single move on the supply chain precisely because it collapses the vectors that are hardest to defend one at a time.</a:t>
+              <a:t>The pipeline view was build-and-delivery; this is runtime — defense in depth. The hardened image shrinks the cluster of vectors aimed at the image and the app: a swapped image fails cosign verify; distroless removes the foot-guns (no shell, no package manager, non-root UID 65532); fewer packages mean fewer exploitable paths and very little for an intruder to use if they do land inside. What it does NOT fix sits outside the container — misconfigured host, insecure networking, container escape — and those are platform hardening: rootless Podman, SELinux, seccomp, OpenShift SCCs, network policy. The hardened image is one strong layer, not the whole onion.</a:t>
             </a:r>
             <a:endParaRPr lang="en-US" dirty="0"/>
           </a:p>
@@ -3178,7 +3179,7 @@
           <a:p>
             <a:r>
               <a:rPr lang="en-US" dirty="0"/>
-              <a:t>Recap the arc and point to where to go deeper. One idea drives everything — rebuild instead of patch — and it gives you distroless, near-zero-CVE images on a trust chain you may already rely on. The entire workflow fits on a laptop with Podman. The strongest closing note for an admin audience: near-zero CVE isn't something to take on faith — it's one Grype command away from being your own measurement, and the work that remains is the tractable part, keeping your own dependencies current. And it's not all-or-nothing: use Hummingbird where minimalism wins and UBI where breadth does. Everything in this deck — chapters, runnable examples, and the demos — lives in the tutorial repo and site.</a:t>
+              <a:t>The honest summary, and a good place to end an admin talk. Hummingbird owns the image — vulnerable base, vulnerable dependencies, build integrity, image authenticity — the part that's genuinely hard to do yourself and that you get for free. You own the edges — source and Containerfile integrity, platform hardening, and the admission gate that enforces verification for every deploy. The practical close: verify on pull with podman + cosign, and enforce it cluster-wide with an OpenShift admission policy so no one can route around the check — that's what closes the malicious-deployment-definition vector. A near-zero-CVE distroless base is the strongest single move on the supply chain precisely because it collapses the vectors that are hardest to defend one at a time.</a:t>
             </a:r>
             <a:endParaRPr lang="en-US" dirty="0"/>
           </a:p>
@@ -3202,6 +3203,94 @@
             <a:fld id="{F7021451-1387-4CA6-816F-3879F97B5CBC}" type="slidenum">
               <a:rPr lang="en-US"/>
               <a:t>37</a:t>
+            </a:fld>
+            <a:endParaRPr lang="en-US"/>
+          </a:p>
+        </p:txBody>
+      </p:sp>
+    </p:spTree>
+    <p:extLst>
+      <p:ext uri="{BB962C8B-B14F-4D97-AF65-F5344CB8AC3E}">
+        <p14:creationId xmlns:p14="http://schemas.microsoft.com/office/powerpoint/2010/main" val="1024086991"/>
+      </p:ext>
+    </p:extLst>
+  </p:cSld>
+  <p:clrMapOvr>
+    <a:masterClrMapping/>
+  </p:clrMapOvr>
+</p:notes>
+</file>
+
+<file path=ppt/notesSlides/notesSlide38.xml><?xml version="1.0" encoding="utf-8"?>
+<p:notes xmlns:a="http://schemas.openxmlformats.org/drawingml/2006/main" xmlns:r="http://schemas.openxmlformats.org/officeDocument/2006/relationships" xmlns:p="http://schemas.openxmlformats.org/presentationml/2006/main">
+  <p:cSld>
+    <p:spTree>
+      <p:nvGrpSpPr>
+        <p:cNvPr id="1" name=""/>
+        <p:cNvGrpSpPr/>
+        <p:nvPr/>
+      </p:nvGrpSpPr>
+      <p:grpSpPr>
+        <a:xfrm>
+          <a:off x="0" y="0"/>
+          <a:ext cx="0" cy="0"/>
+          <a:chOff x="0" y="0"/>
+          <a:chExt cx="0" cy="0"/>
+        </a:xfrm>
+      </p:grpSpPr>
+      <p:sp>
+        <p:nvSpPr>
+          <p:cNvPr id="2" name="Slide Image Placeholder 1"/>
+          <p:cNvSpPr>
+            <a:spLocks noGrp="1" noRot="1" noChangeAspect="1"/>
+          </p:cNvSpPr>
+          <p:nvPr>
+            <p:ph type="sldImg"/>
+          </p:nvPr>
+        </p:nvSpPr>
+        <p:spPr/>
+      </p:sp>
+      <p:sp>
+        <p:nvSpPr>
+          <p:cNvPr id="3" name="Notes Placeholder 2"/>
+          <p:cNvSpPr>
+            <a:spLocks noGrp="1"/>
+          </p:cNvSpPr>
+          <p:nvPr>
+            <p:ph type="body" idx="1"/>
+          </p:nvPr>
+        </p:nvSpPr>
+        <p:spPr/>
+        <p:txBody>
+          <a:bodyPr/>
+          <a:lstStyle/>
+          <a:p>
+            <a:r>
+              <a:rPr lang="en-US" dirty="0"/>
+              <a:t>Recap the arc and point to where to go deeper. One idea drives everything — rebuild instead of patch — and it gives you distroless, near-zero-CVE images on a trust chain you may already rely on. The entire workflow fits on a laptop with Podman. The strongest closing note for an admin audience: near-zero CVE isn't something to take on faith — it's one Grype command away from being your own measurement, and the work that remains is the tractable part, keeping your own dependencies current. And it's not all-or-nothing: use Hummingbird where minimalism wins and UBI where breadth does. Everything in this deck — chapters, runnable examples, and the demos — lives in the tutorial repo and site.</a:t>
+            </a:r>
+            <a:endParaRPr lang="en-US" dirty="0"/>
+          </a:p>
+        </p:txBody>
+      </p:sp>
+      <p:sp>
+        <p:nvSpPr>
+          <p:cNvPr id="4" name="Slide Number Placeholder 3"/>
+          <p:cNvSpPr>
+            <a:spLocks noGrp="1"/>
+          </p:cNvSpPr>
+          <p:nvPr>
+            <p:ph type="sldNum" sz="quarter" idx="10"/>
+          </p:nvPr>
+        </p:nvSpPr>
+        <p:spPr/>
+        <p:txBody>
+          <a:bodyPr/>
+          <a:lstStyle/>
+          <a:p>
+            <a:fld id="{F7021451-1387-4CA6-816F-3879F97B5CBC}" type="slidenum">
+              <a:rPr lang="en-US"/>
+              <a:t>38</a:t>
             </a:fld>
             <a:endParaRPr lang="en-US"/>
           </a:p>
@@ -4270,7 +4359,7 @@
                 <a:ea typeface="Red Hat Mono" pitchFamily="34" charset="-122"/>
                 <a:cs typeface="Red Hat Mono" pitchFamily="34" charset="-120"/>
               </a:rPr>
-              <a:t>r01.3</a:t>
+              <a:t>r01.4</a:t>
             </a:r>
             <a:endParaRPr lang="en-US" sz="1100" dirty="0"/>
           </a:p>
@@ -13855,7 +13944,7 @@
                 <a:ea typeface="Overpass" pitchFamily="34" charset="-122"/>
                 <a:cs typeface="Overpass" pitchFamily="34" charset="-120"/>
               </a:rPr>
-              <a:t>SUPPLY CHAIN · ATTACK VECTORS</a:t>
+              <a:t>SUPPLY CHAIN · THE PROBLEM</a:t>
             </a:r>
             <a:endParaRPr lang="en-US" sz="1200" dirty="0"/>
           </a:p>
@@ -13894,7 +13983,7 @@
                 <a:ea typeface="Overpass" pitchFamily="34" charset="-122"/>
                 <a:cs typeface="Overpass" pitchFamily="34" charset="-120"/>
               </a:rPr>
-              <a:t>The chain, and where it's attacked</a:t>
+              <a:t>Where the supply chain gets attacked</a:t>
             </a:r>
             <a:endParaRPr lang="en-US" sz="3000" dirty="0"/>
           </a:p>
@@ -13902,7 +13991,7 @@
       </p:sp>
       <p:pic>
         <p:nvPicPr>
-          <p:cNvPr id="6" name="Image 1" descr="./png/18-supply-chain-security-attack-vectors.png">    </p:cNvPr>
+          <p:cNvPr id="6" name="Image 1" descr="./png/18-supply-chain-security-the-chain.png">    </p:cNvPr>
           <p:cNvPicPr>
             <a:picLocks noChangeAspect="1"/>
           </p:cNvPicPr>
@@ -13956,7 +14045,7 @@
                 <a:ea typeface="Red Hat Text" pitchFamily="34" charset="-122"/>
                 <a:cs typeface="Red Hat Text" pitchFamily="34" charset="-120"/>
               </a:rPr>
-              <a:t>Figure 18.1 — Attack vectors (after Liz Rice, Container Security 2e, Fig 7-1) and the Hummingbird answer at each stage.</a:t>
+              <a:t>Figure 18.1 — The container supply chain, and where it gets attacked.</a:t>
             </a:r>
             <a:endParaRPr lang="en-US" sz="1300" dirty="0"/>
           </a:p>
@@ -14083,7 +14172,7 @@
                 <a:ea typeface="Overpass" pitchFamily="34" charset="-122"/>
                 <a:cs typeface="Overpass" pitchFamily="34" charset="-120"/>
               </a:rPr>
-              <a:t>SUPPLY CHAIN · RUNTIME SURFACE</a:t>
+              <a:t>SUPPLY CHAIN · THE ANSWER</a:t>
             </a:r>
             <a:endParaRPr lang="en-US" sz="1200" dirty="0"/>
           </a:p>
@@ -14122,7 +14211,7 @@
                 <a:ea typeface="Overpass" pitchFamily="34" charset="-122"/>
                 <a:cs typeface="Overpass" pitchFamily="34" charset="-120"/>
               </a:rPr>
-              <a:t>Defense in depth — and where the image helps</a:t>
+              <a:t>The same chain, with the Hummingbird answer</a:t>
             </a:r>
             <a:endParaRPr lang="en-US" sz="3000" dirty="0"/>
           </a:p>
@@ -14130,7 +14219,7 @@
       </p:sp>
       <p:pic>
         <p:nvPicPr>
-          <p:cNvPr id="6" name="Image 1" descr="./png/18-supply-chain-security-layers.png">    </p:cNvPr>
+          <p:cNvPr id="6" name="Image 1" descr="./png/18-supply-chain-security-attack-vectors.png">    </p:cNvPr>
           <p:cNvPicPr>
             <a:picLocks noChangeAspect="1"/>
           </p:cNvPicPr>
@@ -14184,7 +14273,7 @@
                 <a:ea typeface="Red Hat Text" pitchFamily="34" charset="-122"/>
                 <a:cs typeface="Red Hat Text" pitchFamily="34" charset="-120"/>
               </a:rPr>
-              <a:t>Figure 18.2 — The layered runtime attack surface; the hardened image shrinks the image-and-app cluster, not the platform.</a:t>
+              <a:t>Figure 18.2 — Attack vectors and the Hummingbird answer at each stage, on Podman/Konflux/OpenShift.</a:t>
             </a:r>
             <a:endParaRPr lang="en-US" sz="1300" dirty="0"/>
           </a:p>
@@ -14311,7 +14400,7 @@
                 <a:ea typeface="Overpass" pitchFamily="34" charset="-122"/>
                 <a:cs typeface="Overpass" pitchFamily="34" charset="-120"/>
               </a:rPr>
-              <a:t>SUPPLY CHAIN · DIVISION OF LABOUR</a:t>
+              <a:t>SUPPLY CHAIN · RUNTIME SURFACE</a:t>
             </a:r>
             <a:endParaRPr lang="en-US" sz="1200" dirty="0"/>
           </a:p>
@@ -14350,6 +14439,234 @@
                 <a:ea typeface="Overpass" pitchFamily="34" charset="-122"/>
                 <a:cs typeface="Overpass" pitchFamily="34" charset="-120"/>
               </a:rPr>
+              <a:t>Defense in depth — and where the image helps</a:t>
+            </a:r>
+            <a:endParaRPr lang="en-US" sz="3000" dirty="0"/>
+          </a:p>
+        </p:txBody>
+      </p:sp>
+      <p:pic>
+        <p:nvPicPr>
+          <p:cNvPr id="6" name="Image 1" descr="./png/18-supply-chain-security-layers.png">    </p:cNvPr>
+          <p:cNvPicPr>
+            <a:picLocks noChangeAspect="1"/>
+          </p:cNvPicPr>
+          <p:nvPr/>
+        </p:nvPicPr>
+        <p:blipFill>
+          <a:blip r:embed="rId2"/>
+          <a:srcRect l="0" r="0" t="0" b="0"/>
+          <a:stretch/>
+        </p:blipFill>
+        <p:spPr>
+          <a:xfrm>
+            <a:off x="1645920" y="1600200"/>
+            <a:ext cx="8906256" cy="4343400"/>
+          </a:xfrm>
+          <a:prstGeom prst="rect">
+            <a:avLst/>
+          </a:prstGeom>
+        </p:spPr>
+      </p:pic>
+      <p:sp>
+        <p:nvSpPr>
+          <p:cNvPr id="7" name="Text 3"/>
+          <p:cNvSpPr/>
+          <p:nvPr/>
+        </p:nvSpPr>
+        <p:spPr>
+          <a:xfrm>
+            <a:off x="566928" y="5943600"/>
+            <a:ext cx="11055096" cy="310896"/>
+          </a:xfrm>
+          <a:prstGeom prst="rect">
+            <a:avLst/>
+          </a:prstGeom>
+          <a:noFill/>
+          <a:ln/>
+        </p:spPr>
+        <p:txBody>
+          <a:bodyPr wrap="square" rtlCol="0" anchor="ctr"/>
+          <a:lstStyle/>
+          <a:p>
+            <a:pPr algn="ctr" indent="0" marL="0">
+              <a:buNone/>
+            </a:pPr>
+            <a:r>
+              <a:rPr lang="en-US" sz="1300" i="1" dirty="0">
+                <a:solidFill>
+                  <a:srgbClr val="5A5A5A"/>
+                </a:solidFill>
+                <a:latin typeface="Red Hat Text" pitchFamily="34" charset="0"/>
+                <a:ea typeface="Red Hat Text" pitchFamily="34" charset="-122"/>
+                <a:cs typeface="Red Hat Text" pitchFamily="34" charset="-120"/>
+              </a:rPr>
+              <a:t>Figure 18.3 — The layered runtime attack surface; the hardened image shrinks the image-and-app cluster, not the platform.</a:t>
+            </a:r>
+            <a:endParaRPr lang="en-US" sz="1300" dirty="0"/>
+          </a:p>
+        </p:txBody>
+      </p:sp>
+    </p:spTree>
+  </p:cSld>
+  <p:clrMapOvr>
+    <a:masterClrMapping/>
+  </p:clrMapOvr>
+</p:sld>
+</file>
+
+<file path=ppt/slides/slide37.xml><?xml version="1.0" encoding="utf-8"?>
+<p:sld xmlns:a="http://schemas.openxmlformats.org/drawingml/2006/main" xmlns:r="http://schemas.openxmlformats.org/officeDocument/2006/relationships" xmlns:p="http://schemas.openxmlformats.org/presentationml/2006/main">
+  <p:cSld name="Slide 37">
+    <p:spTree>
+      <p:nvGrpSpPr>
+        <p:cNvPr id="1" name=""/>
+        <p:cNvGrpSpPr/>
+        <p:nvPr/>
+      </p:nvGrpSpPr>
+      <p:grpSpPr>
+        <a:xfrm>
+          <a:off x="0" y="0"/>
+          <a:ext cx="0" cy="0"/>
+          <a:chOff x="0" y="0"/>
+          <a:chExt cx="0" cy="0"/>
+        </a:xfrm>
+      </p:grpSpPr>
+      <p:sp>
+        <p:nvSpPr>
+          <p:cNvPr id="2" name="Text 0"/>
+          <p:cNvSpPr/>
+          <p:nvPr/>
+        </p:nvSpPr>
+        <p:spPr>
+          <a:xfrm>
+            <a:off x="566928" y="6364224"/>
+            <a:ext cx="914400" cy="274320"/>
+          </a:xfrm>
+          <a:prstGeom prst="rect">
+            <a:avLst/>
+          </a:prstGeom>
+          <a:noFill/>
+          <a:ln/>
+        </p:spPr>
+        <p:txBody>
+          <a:bodyPr wrap="square" rtlCol="0" anchor="ctr"/>
+          <a:lstStyle/>
+          <a:p>
+            <a:pPr algn="l" indent="0" marL="0">
+              <a:buNone/>
+            </a:pPr>
+            <a:r>
+              <a:rPr lang="en-US" sz="1000" dirty="0">
+                <a:solidFill>
+                  <a:srgbClr val="8A8A8A"/>
+                </a:solidFill>
+                <a:latin typeface="Red Hat Text" pitchFamily="34" charset="0"/>
+                <a:ea typeface="Red Hat Text" pitchFamily="34" charset="-122"/>
+                <a:cs typeface="Red Hat Text" pitchFamily="34" charset="-120"/>
+              </a:rPr>
+              <a:t>37</a:t>
+            </a:r>
+            <a:endParaRPr lang="en-US" sz="1000" dirty="0"/>
+          </a:p>
+        </p:txBody>
+      </p:sp>
+      <p:pic>
+        <p:nvPicPr>
+          <p:cNvPr id="3" name="Image 0" descr="./assets/logo-candidate-2.png">    </p:cNvPr>
+          <p:cNvPicPr>
+            <a:picLocks noChangeAspect="1"/>
+          </p:cNvPicPr>
+          <p:nvPr/>
+        </p:nvPicPr>
+        <p:blipFill>
+          <a:blip r:embed="rId1"/>
+          <a:stretch>
+            <a:fillRect/>
+          </a:stretch>
+        </p:blipFill>
+        <p:spPr>
+          <a:xfrm>
+            <a:off x="10561320" y="6355080"/>
+            <a:ext cx="1033272" cy="246888"/>
+          </a:xfrm>
+          <a:prstGeom prst="rect">
+            <a:avLst/>
+          </a:prstGeom>
+        </p:spPr>
+      </p:pic>
+      <p:sp>
+        <p:nvSpPr>
+          <p:cNvPr id="4" name="Text 1"/>
+          <p:cNvSpPr/>
+          <p:nvPr/>
+        </p:nvSpPr>
+        <p:spPr>
+          <a:xfrm>
+            <a:off x="566928" y="384048"/>
+            <a:ext cx="11055096" cy="292608"/>
+          </a:xfrm>
+          <a:prstGeom prst="rect">
+            <a:avLst/>
+          </a:prstGeom>
+          <a:noFill/>
+          <a:ln/>
+        </p:spPr>
+        <p:txBody>
+          <a:bodyPr wrap="square" rtlCol="0" anchor="ctr"/>
+          <a:lstStyle/>
+          <a:p>
+            <a:pPr algn="l" indent="0" marL="0">
+              <a:buNone/>
+            </a:pPr>
+            <a:r>
+              <a:rPr lang="en-US" sz="1200" b="1" spc="400" kern="0" dirty="0">
+                <a:solidFill>
+                  <a:srgbClr val="EE0000"/>
+                </a:solidFill>
+                <a:latin typeface="Overpass" pitchFamily="34" charset="0"/>
+                <a:ea typeface="Overpass" pitchFamily="34" charset="-122"/>
+                <a:cs typeface="Overpass" pitchFamily="34" charset="-120"/>
+              </a:rPr>
+              <a:t>SUPPLY CHAIN · DIVISION OF LABOUR</a:t>
+            </a:r>
+            <a:endParaRPr lang="en-US" sz="1200" dirty="0"/>
+          </a:p>
+        </p:txBody>
+      </p:sp>
+      <p:sp>
+        <p:nvSpPr>
+          <p:cNvPr id="5" name="Text 2"/>
+          <p:cNvSpPr/>
+          <p:nvPr/>
+        </p:nvSpPr>
+        <p:spPr>
+          <a:xfrm>
+            <a:off x="566928" y="676656"/>
+            <a:ext cx="11055096" cy="1005840"/>
+          </a:xfrm>
+          <a:prstGeom prst="rect">
+            <a:avLst/>
+          </a:prstGeom>
+          <a:noFill/>
+          <a:ln/>
+        </p:spPr>
+        <p:txBody>
+          <a:bodyPr wrap="square" rtlCol="0" anchor="t"/>
+          <a:lstStyle/>
+          <a:p>
+            <a:pPr algn="l" indent="0" marL="0">
+              <a:buNone/>
+            </a:pPr>
+            <a:r>
+              <a:rPr lang="en-US" sz="3000" b="1" dirty="0">
+                <a:solidFill>
+                  <a:srgbClr val="151515"/>
+                </a:solidFill>
+                <a:latin typeface="Overpass" pitchFamily="34" charset="0"/>
+                <a:ea typeface="Overpass" pitchFamily="34" charset="-122"/>
+                <a:cs typeface="Overpass" pitchFamily="34" charset="-120"/>
+              </a:rPr>
               <a:t>What Hummingbird closes — and what's still yours</a:t>
             </a:r>
             <a:endParaRPr lang="en-US" sz="3000" dirty="0"/>
@@ -14358,7 +14675,7 @@
       </p:sp>
       <p:graphicFrame>
         <p:nvGraphicFramePr>
-          <p:cNvPr id="37" name="Table 0"/>
+          <p:cNvPr id="38" name="Table 0"/>
           <p:cNvGraphicFramePr>
             <a:graphicFrameLocks noGrp="1"/>
           </p:cNvGraphicFramePr>
@@ -15616,9 +15933,9 @@
 </p:sld>
 </file>
 
-<file path=ppt/slides/slide37.xml><?xml version="1.0" encoding="utf-8"?>
+<file path=ppt/slides/slide38.xml><?xml version="1.0" encoding="utf-8"?>
 <p:sld xmlns:a="http://schemas.openxmlformats.org/drawingml/2006/main" xmlns:r="http://schemas.openxmlformats.org/officeDocument/2006/relationships" xmlns:p="http://schemas.openxmlformats.org/presentationml/2006/main">
-  <p:cSld name="Slide 37">
+  <p:cSld name="Slide 38">
     <p:spTree>
       <p:nvGrpSpPr>
         <p:cNvPr id="1" name=""/>
@@ -15666,7 +15983,7 @@
                 <a:ea typeface="Red Hat Text" pitchFamily="34" charset="-122"/>
                 <a:cs typeface="Red Hat Text" pitchFamily="34" charset="-120"/>
               </a:rPr>
-              <a:t>37</a:t>
+              <a:t>38</a:t>
             </a:r>
             <a:endParaRPr lang="en-US" sz="1000" dirty="0"/>
           </a:p>

--- a/presentations/hummingbird-overview.pptx
+++ b/presentations/hummingbird-overview.pptx
@@ -891,7 +891,7 @@
           <a:p>
             <a:r>
               <a:rPr lang="en-US" dirty="0"/>
-              <a:t>Most platforms end up with both, so compare them honestly. UBI is the flexible, broad, predictable RHEL base with a 10-year life cycle. Hummingbird is the minimal, rolling, purpose-built hardened base. Both are free; the GA difference to state correctly is that Hardened Images are free to use on any Linux distro, Kubernetes, or container engine — vendor-neutral — with optional LTS images planned via subscription, rather than support being tied to a RHEL/OpenShift subscription. The decision rule repeats: UBI when you need RHEL breadth or dnf at runtime; Hummingbird when you want the smallest, hardest-to-attack runtime — usually the deploy stage. The gotchas section gives concrete failure modes for when the minimal runtime is the wrong tool.</a:t>
+              <a:t>Most platforms end up with both, so compare them on the merits. UBI is the flexible, broad, predictable RHEL base with a 10-year life cycle. Hummingbird is the minimal, rolling, purpose-built hardened base. Both are free; the GA difference to state correctly is that Hardened Images are free to use on any Linux distro, Kubernetes, or container engine — vendor-neutral — with optional LTS images planned via subscription, rather than support being tied to a RHEL/OpenShift subscription. The decision rule repeats: UBI when you need RHEL breadth or dnf at runtime; Hummingbird when you want the smallest, hardest-to-attack runtime — usually the deploy stage. The gotchas section gives concrete failure modes for when the minimal runtime is the wrong tool.</a:t>
             </a:r>
             <a:endParaRPr lang="en-US" dirty="0"/>
           </a:p>
@@ -1067,7 +1067,7 @@
           <a:p>
             <a:r>
               <a:rPr lang="en-US" dirty="0"/>
-              <a:t>Now the hands-on arc, kept brief — one stop per tutorial section, led by its diagram. Prerequisites and the registry model; pulling and inspecting; the debug-sidecar pattern and the broader debugging strategy; multi-stage builds; SBOMs and signing; CVE scanning; multi-service compose; the two layer-efficiency features; trusted libraries and provenance; and the distroless gotchas. Each of these has a full chapter and a runnable example in the tutorial.</a:t>
+              <a:t>Now the hands-on arc, kept brief — one stop per topic, led by its diagram. Prerequisites and the registry model; pulling and inspecting; the debug-sidecar pattern and the broader debugging strategy; multi-stage builds; SBOMs and signing; CVE scanning; multi-service compose; the two layer-efficiency features; trusted libraries and provenance; and the distroless gotchas. Each has a runnable example.</a:t>
             </a:r>
             <a:endParaRPr lang="en-US" dirty="0"/>
           </a:p>
@@ -1155,7 +1155,7 @@
           <a:p>
             <a:r>
               <a:rPr lang="en-US" dirty="0"/>
-              <a:t>The setup chapter pins the environment: Podman and Skopeo for images, Syft for SBOMs, Grype for scanning, Cosign for signatures — all sharing one registry-auth file. It also establishes the registry shortcuts the tutorial uses: HB_REGISTRY=quay.io/hummingbird is the Project Hummingbird community org on Quay, RH_REGISTRY=registry.access.redhat.com is UBI and the toolbox, and the signed Red Hat path is used for verification. Note for GA: the Red Hat Hardened Images catalog now lives at images.redhat.com — browse there for the canonical image names and pull paths, and confirm them before a talk. One Fedora-44 note from the field: install Cosign from the upstream RPM, not dnf, which is currently broken there.</a:t>
+              <a:t>Setup pins the environment: Podman and Skopeo for images, Syft for SBOMs, Grype for scanning, Cosign for signatures — all sharing one registry-auth file. It also establishes the registry shortcuts used here: HB_REGISTRY=quay.io/hummingbird is the Project Hummingbird community org on Quay, RH_REGISTRY=registry.access.redhat.com is UBI and the toolbox, and the signed Red Hat path is used for verification. Note for GA: the Red Hat Hardened Images catalog now lives at images.redhat.com — browse there for the canonical image names and pull paths, and confirm them before a talk. One Fedora-44 note from the field: install Cosign from the upstream RPM, not dnf, which is currently broken there.</a:t>
             </a:r>
             <a:endParaRPr lang="en-US" dirty="0"/>
           </a:p>
@@ -1243,7 +1243,7 @@
           <a:p>
             <a:r>
               <a:rPr lang="en-US" dirty="0"/>
-              <a:t>The first hands-on chapter: pull an image, then read its manifest two ways — locally with podman inspect, remotely with skopeo inspect (no pull needed) — looking at the layer count and the provenance labels. Then the moment that surprises everyone from general-purpose bases: podman exec into a shell fails, because there is no shell. The image isn't broken — the application is the entrypoint. That single behavior reframes how you operate these images, and it sets up the debugging section.</a:t>
+              <a:t>The first hands-on topic: pull an image, then read its manifest two ways — locally with podman inspect, remotely with skopeo inspect (no pull needed) — looking at the layer count and the provenance labels. Then the moment that surprises everyone from general-purpose bases: podman exec into a shell fails, because there is no shell. The image isn't broken — the application is the entrypoint. That single behavior reframes how you operate these images, and it sets up the debugging section.</a:t>
             </a:r>
             <a:endParaRPr lang="en-US" dirty="0"/>
           </a:p>
@@ -1507,7 +1507,7 @@
           <a:p>
             <a:r>
               <a:rPr lang="en-US" dirty="0"/>
-              <a:t>This is the part to get right before touching a terminal. We'll cover what the catalog is, the one idea that drives the whole design — rebuild instead of patch — what 'near-zero CVE' honestly means, where Hummingbird sits next to UBI, what's deliberately left out of an image, the image variants, what 'hardened' means concretely, and the three named concepts behind the trust chain. Once this lands, the commands later read as obvious rather than magic.</a:t>
+              <a:t>This is the part to get right before touching a terminal. We'll cover what the catalog is, the one idea that drives the whole design — rebuild instead of patch — what 'near-zero CVE' really means, where Hummingbird sits next to UBI, what's deliberately left out of an image, the image variants, what 'hardened' means concretely, and the three named concepts behind the trust chain. Once this lands, the commands later read as obvious rather than magic.</a:t>
             </a:r>
             <a:endParaRPr lang="en-US" dirty="0"/>
           </a:p>
@@ -1771,7 +1771,7 @@
           <a:p>
             <a:r>
               <a:rPr lang="en-US" dirty="0"/>
-              <a:t>This is where the claim becomes a number you can reproduce. Grype turns the small package list into a CVE count. Two honest caveats up front: a match is a reported CVE against a present package version, not proof it's reachable; and the database updates daily, so comparisons are only fair against the same DB. The side-by-side — hardened versus general-purpose — is the payoff, and scanning your own derived image reframes the job: the base is clean, so all that's left is keeping your direct dependencies patched. --fail-on high is the CI gate.</a:t>
+              <a:t>This is where the claim becomes a number you can reproduce. Grype turns the small package list into a CVE count. Two caveats up front: a match is a reported CVE against a present package version, not proof it's reachable; and the database updates daily, so comparisons are only fair against the same DB. The side-by-side — hardened versus general-purpose — is the payoff, and scanning your own derived image reframes the job: the base is clean, so all that's left is keeping your direct dependencies patched. --fail-on high is the CI gate.</a:t>
             </a:r>
             <a:endParaRPr lang="en-US" dirty="0"/>
           </a:p>
@@ -1947,7 +1947,7 @@
           <a:p>
             <a:r>
               <a:rPr lang="en-US" dirty="0"/>
-              <a:t>Two tutorial sections cover why re-pulls are cheap. zstd:chunked is the modern OCI layer format that makes a layer seekable: the client can fetch just the chunks that changed instead of the whole layer. Combined with Hummingbird's frequent clean rebuilds, this keeps the bandwidth cost of staying current low — which matters when 'rebuild, don't patch' means images change often.</a:t>
+              <a:t>Two features cover why re-pulls are cheap. zstd:chunked is the modern OCI layer format that makes a layer seekable: the client can fetch just the chunks that changed instead of the whole layer. Combined with Hummingbird's frequent clean rebuilds, this keeps the bandwidth cost of staying current low — which matters when 'rebuild, don't patch' means images change often.</a:t>
             </a:r>
             <a:endParaRPr lang="en-US" dirty="0"/>
           </a:p>
@@ -2211,7 +2211,7 @@
           <a:p>
             <a:r>
               <a:rPr lang="en-US" dirty="0"/>
-              <a:t>The gotchas chapter is the most practical in the tutorial, and the closing demo trips each wire on purpose. The framing to land: none of these are defects — they're implicit assumptions from the wider ecosystem becoming visible against a minimal runtime. RUN needs a shell, so do shell work in the builder. Tools want HOME; set it. The bare 'python' alias is gone; use python3. Hummingbird's Postgres uses upstream env names. localhost resolves to IPv6 first, so test against 127.0.0.1. And when your COPYed-library list gets long, that's the signal to use UBI — Hummingbird isn't a moral position, it's a tool for the right workloads.</a:t>
+              <a:t>The gotchas topic is the most practical part, and the closing demo trips each wire on purpose. The framing to land: none of these are defects — they're implicit assumptions from the wider ecosystem becoming visible against a minimal runtime. RUN needs a shell, so do shell work in the builder. Tools want HOME; set it. The bare 'python' alias is gone; use python3. Hummingbird's Postgres uses upstream env names. localhost resolves to IPv6 first, so test against 127.0.0.1. And when your COPYed-library list gets long, that's the signal to use UBI — Hummingbird isn't a moral position, it's a tool for the right workloads.</a:t>
             </a:r>
             <a:endParaRPr lang="en-US" dirty="0"/>
           </a:p>
@@ -3003,7 +3003,7 @@
           <a:p>
             <a:r>
               <a:rPr lang="en-US" dirty="0"/>
-              <a:t>Same chain, reframed for our stack: Buildah/Konflux instead of Docker, the signed registry.access.redhat.com/hi path, OpenShift at deploy. Top row: the classic vectors. Bottom row: the Hummingbird answer. The story to tell — a hardened base turns the three hardest vectors (vulnerable base, vulnerable dependencies, build tampering) from 'trust us' into signed evidence you verify yourself, and the minimalism means there's simply less inside to be vulnerable. Be candid about the left edge: tampered source and a tampered Containerfile are the operator's job — branch protection, signed commits, pin the base by digest. Hummingbird gives you a trustworthy FROM; it can't stop an insecure Containerfile on top of it.</a:t>
+              <a:t>Same chain, reframed for our stack: Buildah/Konflux instead of Docker, the signed registry.access.redhat.com/hi path, OpenShift at deploy. Top row: the classic vectors. Bottom row: the Hummingbird answer. The story to tell — a hardened base turns the three hardest vectors (vulnerable base, vulnerable dependencies, build tampering) from 'trust us' into signed evidence you verify yourself, and the minimalism means there's simply less inside to be vulnerable. Be clear about the left edge: tampered source and a tampered Containerfile are the operator's job — branch protection, signed commits, pin the base by digest. Hummingbird gives you a trustworthy FROM; it can't stop an insecure Containerfile on top of it.</a:t>
             </a:r>
             <a:endParaRPr lang="en-US" dirty="0"/>
           </a:p>
@@ -3179,7 +3179,7 @@
           <a:p>
             <a:r>
               <a:rPr lang="en-US" dirty="0"/>
-              <a:t>The honest summary, and a good place to end an admin talk. Hummingbird owns the image — vulnerable base, vulnerable dependencies, build integrity, image authenticity — the part that's genuinely hard to do yourself and that you get for free. You own the edges — source and Containerfile integrity, platform hardening, and the admission gate that enforces verification for every deploy. The practical close: verify on pull with podman + cosign, and enforce it cluster-wide with an OpenShift admission policy so no one can route around the check — that's what closes the malicious-deployment-definition vector. A near-zero-CVE distroless base is the strongest single move on the supply chain precisely because it collapses the vectors that are hardest to defend one at a time.</a:t>
+              <a:t>The summary to land, and a good place to end an admin talk. Hummingbird owns the image — vulnerable base, vulnerable dependencies, build integrity, image authenticity — the part that's genuinely hard to do yourself and that you get for free. You own the edges — source and Containerfile integrity, platform hardening, and the admission gate that enforces verification for every deploy. The practical close: verify on pull with podman + cosign, and enforce it cluster-wide with an OpenShift admission policy so no one can route around the check — that's what closes the malicious-deployment-definition vector. A near-zero-CVE distroless base is the strongest single move on the supply chain precisely because it collapses the vectors that are hardest to defend one at a time.</a:t>
             </a:r>
             <a:endParaRPr lang="en-US" dirty="0"/>
           </a:p>
@@ -3267,7 +3267,7 @@
           <a:p>
             <a:r>
               <a:rPr lang="en-US" dirty="0"/>
-              <a:t>Recap the arc and point to where to go deeper. One idea drives everything — rebuild instead of patch — and it gives you distroless, near-zero-CVE images on a trust chain you may already rely on. The entire workflow fits on a laptop with Podman. The strongest closing note for an admin audience: near-zero CVE isn't something to take on faith — it's one Grype command away from being your own measurement, and the work that remains is the tractable part, keeping your own dependencies current. And it's not all-or-nothing: use Hummingbird where minimalism wins and UBI where breadth does. Everything in this deck — chapters, runnable examples, and the demos — lives in the tutorial repo and site.</a:t>
+              <a:t>Recap the arc and point to where to go deeper. One idea drives everything — rebuild instead of patch — and it gives you distroless, near-zero-CVE images on a trust chain you may already rely on. The entire workflow fits on a laptop with Podman. The strongest closing note for an admin audience: near-zero CVE isn't something to take on faith — it's one Grype command away from being your own measurement, and the work that remains is the tractable part, keeping your own dependencies current. And it's not all-or-nothing: use Hummingbird where minimalism wins and UBI where breadth does. Everything in this deck — the workflow, runnable examples, and the demos — lives in the project repo and site.</a:t>
             </a:r>
             <a:endParaRPr lang="en-US" dirty="0"/>
           </a:p>
@@ -3443,7 +3443,7 @@
           <a:p>
             <a:r>
               <a:rPr lang="en-US" dirty="0"/>
-              <a:t>Be candid here — it earns trust. 'Zero CVE' is the marketing; 'near-zero CVE' is the engineering truth, and the difference is just honesty about how vulnerability disclosure works. The zero line moves every day. What you can actually guarantee is: clean at publication, continuous rebuilds that chase the line, and functional testing so a security rebuild doesn't break your workload. In the CVE-scanning demo the audience watches Grype put real numbers behind this against a hardened image versus a general-purpose one.</a:t>
+              <a:t>Worth stating plainly — it earns trust. 'Zero CVE' is the marketing; 'near-zero CVE' is the engineering reality, and the difference is just how vulnerability disclosure works. The zero line moves every day. What you can actually guarantee is: clean at publication, continuous rebuilds that chase the line, and functional testing so a security rebuild doesn't break your workload. In the CVE-scanning demo the audience watches Grype put real numbers behind this against a hardened image versus a general-purpose one.</a:t>
             </a:r>
             <a:endParaRPr lang="en-US" dirty="0"/>
           </a:p>
@@ -3619,7 +3619,7 @@
           <a:p>
             <a:r>
               <a:rPr lang="en-US" dirty="0"/>
-              <a:t>Hummingbird does not replace UBI; most real platforms use both. The mental model: UBI when you need a familiar RHEL userspace and the ability to install packages — typically builder stages and middleware. Hummingbird when you want the smallest possible attack surface — typically the deploy stage that ships a compiled artifact. The Quarkus example in the tutorial literally does both: it builds on UBI (which ships Maven) and deploys on a hardened JRE. Mixing per-stage is the common, correct shape.</a:t>
+              <a:t>Hummingbird does not replace UBI; most real platforms use both. The mental model: UBI when you need a familiar RHEL userspace and the ability to install packages — typically builder stages and middleware. Hummingbird when you want the smallest possible attack surface — typically the deploy stage that ships a compiled artifact. The Quarkus example does both: it builds on UBI (which ships Maven) and deploys on a hardened JRE. Mixing per-stage is the common, correct shape.</a:t>
             </a:r>
             <a:endParaRPr lang="en-US" dirty="0"/>
           </a:p>
@@ -3795,7 +3795,7 @@
           <a:p>
             <a:r>
               <a:rPr lang="en-US" dirty="0"/>
-              <a:t>Every image ships in variants identified by tag suffix, plus per-architecture builds (AMD64 and Arm64) — which is how 45+ images become 150+ variants. Default aims to balance distroless principles with compatibility with existing upstream images; it's the production runtime. Builder retains the hardening but adds a package manager and shell so you can customize builds. FIPS adds validated cryptography for regulated environments. One honest nuance carried from the tutorial: 'no shell' is the safe assumption, not a universal guarantee — a few default images (Golang, Core Runtime, the full OpenJDK) include a shell because their ecosystems expect it. If your build pattern relies on shell-free runtime, pin the specific variant rather than assuming. Confirm exact tags against the catalog at images.redhat.com.</a:t>
+              <a:t>Every image ships in variants identified by tag suffix, plus per-architecture builds (AMD64 and Arm64) — which is how 45+ images become 150+ variants. Default aims to balance distroless principles with compatibility with existing upstream images; it's the production runtime. Builder retains the hardening but adds a package manager and shell so you can customize builds. FIPS adds validated cryptography for regulated environments. One nuance worth carrying over: 'no shell' is the safe assumption, not a universal guarantee — a few default images (Golang, Core Runtime, the full OpenJDK) include a shell because their ecosystems expect it. If your build pattern relies on shell-free runtime, pin the specific variant rather than assuming. Confirm exact tags against the catalog at images.redhat.com.</a:t>
             </a:r>
             <a:endParaRPr lang="en-US" dirty="0"/>
           </a:p>
@@ -4359,7 +4359,7 @@
                 <a:ea typeface="Red Hat Mono" pitchFamily="34" charset="-122"/>
                 <a:cs typeface="Red Hat Mono" pitchFamily="34" charset="-120"/>
               </a:rPr>
-              <a:t>r01.4</a:t>
+              <a:t>r01.5</a:t>
             </a:r>
             <a:endParaRPr lang="en-US" sz="1100" dirty="0"/>
           </a:p>
@@ -7128,7 +7128,7 @@
                 <a:ea typeface="Red Hat Text" pitchFamily="34" charset="-122"/>
                 <a:cs typeface="Red Hat Text" pitchFamily="34" charset="-120"/>
               </a:rPr>
-              <a:t>A diagram-led tour of the tutorial sections.</a:t>
+              <a:t>A diagram-led tour of the workflow.</a:t>
             </a:r>
             <a:endParaRPr lang="en-US" sz="1600" dirty="0"/>
           </a:p>
@@ -7279,7 +7279,7 @@
                 <a:ea typeface="Overpass" pitchFamily="34" charset="-122"/>
                 <a:cs typeface="Overpass" pitchFamily="34" charset="-120"/>
               </a:rPr>
-              <a:t>TUTORIAL · PREREQUISITES</a:t>
+              <a:t>WORKING WITH IMAGES · PREREQUISITES</a:t>
             </a:r>
             <a:endParaRPr lang="en-US" sz="1200" dirty="0"/>
           </a:p>
@@ -7507,7 +7507,7 @@
                 <a:ea typeface="Overpass" pitchFamily="34" charset="-122"/>
                 <a:cs typeface="Overpass" pitchFamily="34" charset="-120"/>
               </a:rPr>
-              <a:t>TUTORIAL · PODMAN BASICS</a:t>
+              <a:t>WORKING WITH IMAGES · PODMAN BASICS</a:t>
             </a:r>
             <a:endParaRPr lang="en-US" sz="1200" dirty="0"/>
           </a:p>
@@ -7735,7 +7735,7 @@
                 <a:ea typeface="Overpass" pitchFamily="34" charset="-122"/>
                 <a:cs typeface="Overpass" pitchFamily="34" charset="-120"/>
               </a:rPr>
-              <a:t>TUTORIAL · DEBUGGING</a:t>
+              <a:t>WORKING WITH IMAGES · DEBUGGING</a:t>
             </a:r>
             <a:endParaRPr lang="en-US" sz="1200" dirty="0"/>
           </a:p>
@@ -7963,7 +7963,7 @@
                 <a:ea typeface="Overpass" pitchFamily="34" charset="-122"/>
                 <a:cs typeface="Overpass" pitchFamily="34" charset="-120"/>
               </a:rPr>
-              <a:t>TUTORIAL · DEBUGGING</a:t>
+              <a:t>WORKING WITH IMAGES · DEBUGGING</a:t>
             </a:r>
             <a:endParaRPr lang="en-US" sz="1200" dirty="0"/>
           </a:p>
@@ -8388,7 +8388,7 @@
                 <a:ea typeface="Overpass" pitchFamily="34" charset="-122"/>
                 <a:cs typeface="Overpass" pitchFamily="34" charset="-120"/>
               </a:rPr>
-              <a:t>TUTORIAL · MULTI-STAGE BUILDS</a:t>
+              <a:t>WORKING WITH IMAGES · MULTI-STAGE BUILDS</a:t>
             </a:r>
             <a:endParaRPr lang="en-US" sz="1200" dirty="0"/>
           </a:p>
@@ -8616,7 +8616,7 @@
                 <a:ea typeface="Overpass" pitchFamily="34" charset="-122"/>
                 <a:cs typeface="Overpass" pitchFamily="34" charset="-120"/>
               </a:rPr>
-              <a:t>TUTORIAL · SBOM &amp; SIGNING</a:t>
+              <a:t>WORKING WITH IMAGES · SBOM &amp; SIGNING</a:t>
             </a:r>
             <a:endParaRPr lang="en-US" sz="1200" dirty="0"/>
           </a:p>
@@ -8844,7 +8844,7 @@
                 <a:ea typeface="Overpass" pitchFamily="34" charset="-122"/>
                 <a:cs typeface="Overpass" pitchFamily="34" charset="-120"/>
               </a:rPr>
-              <a:t>TUTORIAL · CVE SCANNING</a:t>
+              <a:t>WORKING WITH IMAGES · CVE SCANNING</a:t>
             </a:r>
             <a:endParaRPr lang="en-US" sz="1200" dirty="0"/>
           </a:p>
@@ -9127,7 +9127,7 @@
                 <a:ea typeface="Overpass" pitchFamily="34" charset="-122"/>
                 <a:cs typeface="Overpass" pitchFamily="34" charset="-120"/>
               </a:rPr>
-              <a:t>TUTORIAL · PODMAN COMPOSE</a:t>
+              <a:t>WORKING WITH IMAGES · PODMAN COMPOSE</a:t>
             </a:r>
             <a:endParaRPr lang="en-US" sz="1200" dirty="0"/>
           </a:p>
@@ -9355,7 +9355,7 @@
                 <a:ea typeface="Overpass" pitchFamily="34" charset="-122"/>
                 <a:cs typeface="Overpass" pitchFamily="34" charset="-120"/>
               </a:rPr>
-              <a:t>TUTORIAL · EFFICIENT LAYERS</a:t>
+              <a:t>WORKING WITH IMAGES · EFFICIENT LAYERS</a:t>
             </a:r>
             <a:endParaRPr lang="en-US" sz="1200" dirty="0"/>
           </a:p>
@@ -9583,7 +9583,7 @@
                 <a:ea typeface="Overpass" pitchFamily="34" charset="-122"/>
                 <a:cs typeface="Overpass" pitchFamily="34" charset="-120"/>
               </a:rPr>
-              <a:t>TUTORIAL · EFFICIENT LAYERS</a:t>
+              <a:t>WORKING WITH IMAGES · EFFICIENT LAYERS</a:t>
             </a:r>
             <a:endParaRPr lang="en-US" sz="1200" dirty="0"/>
           </a:p>
@@ -9811,7 +9811,7 @@
                 <a:ea typeface="Overpass" pitchFamily="34" charset="-122"/>
                 <a:cs typeface="Overpass" pitchFamily="34" charset="-120"/>
               </a:rPr>
-              <a:t>TUTORIAL · TRUSTED LIBRARIES</a:t>
+              <a:t>WORKING WITH IMAGES · TRUSTED LIBRARIES</a:t>
             </a:r>
             <a:endParaRPr lang="en-US" sz="1200" dirty="0"/>
           </a:p>
@@ -10094,7 +10094,7 @@
                 <a:ea typeface="Overpass" pitchFamily="34" charset="-122"/>
                 <a:cs typeface="Overpass" pitchFamily="34" charset="-120"/>
               </a:rPr>
-              <a:t>TUTORIAL · GOTCHAS</a:t>
+              <a:t>WORKING WITH IMAGES · GOTCHAS</a:t>
             </a:r>
             <a:endParaRPr lang="en-US" sz="1200" dirty="0"/>
           </a:p>
@@ -16226,7 +16226,7 @@
                 <a:ea typeface="Red Hat Text" pitchFamily="34" charset="-122"/>
                 <a:cs typeface="Red Hat Text" pitchFamily="34" charset="-120"/>
               </a:rPr>
-              <a:t>Tutorial &amp; demos: github.com/patterncatalyst/hummingbird-tutorial · patterncatalyst.github.io/hummingbird-tutorial</a:t>
+              <a:t>Docs &amp; demos: github.com/patterncatalyst/hummingbird-tutorial · patterncatalyst.github.io/hummingbird-tutorial</a:t>
             </a:r>
             <a:endParaRPr lang="en-US" sz="1500" dirty="0"/>
           </a:p>
@@ -16769,7 +16769,7 @@
                 <a:ea typeface="Red Hat Text" pitchFamily="34" charset="-122"/>
                 <a:cs typeface="Red Hat Text" pitchFamily="34" charset="-120"/>
               </a:rPr>
-              <a:t>Around 160 new CVEs are disclosed daily — an image that scans clean at 9 a.m. can have a CVE by 5 p.m. A literal, permanent zero is not achievable, and the honest phrase is “near-zero”.</a:t>
+              <a:t>Around 160 new CVEs are disclosed daily — an image that scans clean at 9 a.m. can have a CVE by 5 p.m. A literal, permanent zero is not achievable, and the accurate phrase is “near-zero”.</a:t>
             </a:r>
             <a:endParaRPr lang="en-US" sz="1600" dirty="0"/>
           </a:p>

--- a/presentations/hummingbird-overview.pptx
+++ b/presentations/hummingbird-overview.pptx
@@ -45,9 +45,12 @@
     <p:sldId id="293" r:id="rId39"/>
     <p:sldId id="294" r:id="rId40"/>
     <p:sldId id="295" r:id="rId41"/>
+    <p:sldId id="296" r:id="rId42"/>
+    <p:sldId id="297" r:id="rId43"/>
+    <p:sldId id="298" r:id="rId44"/>
   </p:sldIdLst>
   <p:notesMasterIdLst>
-    <p:notesMasterId r:id="rId42"/>
+    <p:notesMasterId r:id="rId45"/>
   </p:notesMasterIdLst>
   <p:sldSz cx="12192000" cy="6858000"/>
   <p:notesSz cx="6858000" cy="12192000"/>
@@ -717,7 +720,7 @@
           <a:p>
             <a:r>
               <a:rPr lang="en-US" dirty="0"/>
-              <a:t>'Hardened' isn't a vibe — it's four concrete layers, each building on the one below, applied to every image by default. None of the layers is individually novel; the value is applying all four, everywhere, as a release gate. Bottom to top: Source (provenance and CVE tracking), Packages (hardened compiler flags), Images (distroless, non-root, reproducible), and Benchmarks (CIS/STIG/OpenSCAP). The next slide unpacks each.</a:t>
+              <a:t>'Hardened' isn't a vibe — it's four concrete layers, applied to every image by default and enforced as a release gate. None of the layers is individually novel; the value is doing all four, everywhere, on every rebuild. Bottom to top: Source (provenance + CVE tracking), Packages (hardened compiler flags), Images (distroless, non-root, reproducible), Benchmarks (compliance scanning). The next slide defines each term — a technical audience will ask what they mean.</a:t>
             </a:r>
             <a:endParaRPr lang="en-US" dirty="0"/>
           </a:p>
@@ -805,7 +808,18 @@
           <a:p>
             <a:r>
               <a:rPr lang="en-US" dirty="0"/>
-              <a:t>Source: every component is tracked to upstream with continuous remediation, and dependencies come from Red Hat's SLSA 3 build pipeline (Konflux) with signed provenance. The point is a signed attestation, not a claim. Packages: the full RHEL hardening flag set, and crucially they verify the flags are actually present in the binaries with annobin/annocheck — plus weak dependencies are disabled so nothing sneaks in. Images: the distroless, non-root, reproducible, signed assembly. Benchmarks: Red Hat states compliance-related configuration is verifiable via OpenSCAP (which scans against profiles such as CIS and STIG) as part of the release gate. The compounding effect across all four is what makes 'near-zero CVE' defensible at release.</a:t>
+              <a:t>This slide is dense and a technical audience will ask what the acronyms are — define them as you go. Bottom to top:
+• Source — SLSA 3 provenance, built in Konflux. SLSA (Supply-chain Levels for Software Artifacts) is an OpenSSF framework grading build integrity from 1 to 3; Level 3 means a hardened, isolated build service emits signed, unforgeable provenance. Konflux is Red Hat's Tekton-based build pipeline.
+• Packages — RHEL hardening compiler flags, and crucially verified present in the binary:
+   – PIE (Position-Independent Executable): lets ASLR randomize where the binary loads, so exploits can't rely on fixed addresses.
+   – RELRO (RELocation Read-Only): makes the GOT read-only after startup, blocking GOT-overwrite attacks.
+   – stack protectors (-fstack-protector-strong): canaries that catch stack buffer overflows.
+   – FORTIFY_SOURCE=3: compile- and run-time bounds checks on common libc calls.
+   – annobin/annocheck: annobin records the flags into the ELF; annocheck audits the binary to prove the hardening was actually applied — verification, not a claim.
+   – install_weak_deps=False: skip optional 'recommended' packages so nothing sneaks in.
+• Images — distroless userspace, non-root (UID 65532 where possible), hermetic reproducible builds, signed manifests, attached SBOMs.
+• Benchmarks — compliance config verifiable via OpenSCAP (the open-source scanner for the SCAP standard) against profiles like CIS (Center for Internet Security benchmarks) and STIG (DISA's Security Technical Implementation Guides, used across US government/DoD). Fail the scan, don't ship.
+The compounding effect of all four, enforced at release, is what makes 'near-zero CVE' defensible.</a:t>
             </a:r>
             <a:endParaRPr lang="en-US" dirty="0"/>
           </a:p>
@@ -1421,7 +1435,14 @@
           <a:p>
             <a:r>
               <a:rPr lang="en-US" dirty="0"/>
-              <a:t>If there's no shell, you don't get into the container — you put a second container beside it. A throwaway UBI toolbox shares the target's PID and network namespaces, so its ps sees the target's processes and its localhost is the target's localhost. The production container never changes, and the toolbox vanishes when you're done. For strace or gdb you add the SYS_PTRACE capability and, on SELinux-enforcing Fedora, relax the label for the debug container only. This is the single most important operational habit to teach.</a:t>
+              <a:t>No shell means you don't exec into the container — you stand a second container next to it and share the target's kernel namespaces. The production container never changes, and the toolbox is thrown away after.
+Steps to walk through:
+1. Find the target: podman ps — note its name (say 'web').
+2. Launch a toolbox that JOINS the target's namespaces:
+   podman run -it --rm --pid=container:web --network=container:web registry.access.redhat.com/ubi9/toolbox
+3. --pid=container:web shares the PID namespace, so ps/top in the toolbox see the target's processes. --network=container:web shares the network namespace, so curl 127.0.0.1:3000 in the toolbox hits the target's own ports and ss -ltnp lists its sockets.
+4. For strace/gdb, add --cap-add=SYS_PTRACE; on SELinux-enforcing Fedora, relax the label for the debug container only (--security-opt label=disable).
+Clarify the mechanism if asked: this is namespace JOINING, not a bind mount — the toolbox enters the same PID and network namespaces the kernel already created for the target, so it sees the same process table and the same loopback. Nothing is copied into the production image. On a cluster, kubectl debug does the identical trick against a pod. This is the single most important operational habit to teach.</a:t>
             </a:r>
             <a:endParaRPr lang="en-US" dirty="0"/>
           </a:p>
@@ -1773,7 +1794,15 @@
           <a:p>
             <a:r>
               <a:rPr lang="en-US" dirty="0"/>
-              <a:t>Three distinct things can hang off an image manifest, all addressed by digest: a signature ('I vouch for these bytes'), an SBOM attestation (a signed bill of materials), and a SLSA provenance attestation (how it was built). Hummingbird images ship Red-Hat-signed versions of these on the signed registry path, verifiable with Cosign and one published key. In the demo we generate an SBOM with Syft, verify Red Hat's signature and SBOM, and then sign an artifact ourselves — the same Cosign either way.</a:t>
+              <a:t>The diagram shows the shape; this makes the payoff concrete. Read it as two images:
+• Build stage (FROM ...-builder): the full toolchain — compiler, dnf, module cache. It does the work, then is discarded.
+• Runtime stage (FROM hi/go:1.26): distroless — no compiler, no package manager, no shell.
+• COPY --from=build copies ONLY the compiled binary across the boundary; the source, module cache, any build secrets, and the toolchain never reach the shipped image.
+Why it matters:
+• Attack surface — the production image has almost nothing to exploit: no compiler to build an exploit, no shell to run one.
+• CVEs — the toolchain is where most of a base image's CVEs live; leaving it in the build stage is what keeps the runtime near-zero.
+• Size / pull time — the runtime image is a fraction of the size.
+Contrast a single-stage build: it ships the compiler, headers, and source — bigger, more CVEs, more to attack — for zero runtime benefit. Two rules the syntax enforces: only COPY in the runtime stage (no RUN — there's no shell), and in real use pin the base by digest, not a moving tag. CGO_ENABLED=0 makes a static binary, so the runtime needs no libc at all.</a:t>
             </a:r>
             <a:endParaRPr lang="en-US" dirty="0"/>
           </a:p>
@@ -1861,7 +1890,12 @@
           <a:p>
             <a:r>
               <a:rPr lang="en-US" dirty="0"/>
-              <a:t>This is where the claim becomes a number you can reproduce. Grype turns the small package list into a CVE count. Two caveats up front: a match is a reported CVE against a present package version, not proof it's reachable; and the database updates daily, so comparisons are only fair against the same DB. The side-by-side — hardened versus general-purpose — is the payoff, and scanning your own derived image reframes the job: the base is clean, so all that's left is keeping your direct dependencies patched. --fail-on high is the CI gate.</a:t>
+              <a:t>Three things hang off the image manifest, all addressed by digest: a signature (who vouches for these exact bytes), an SBOM attestation (a signed bill of materials — what's inside), and a SLSA provenance attestation (how it was built). Hummingbird ships Red-Hat-signed versions on the signed registry path.
+Where the SBOM actually lives — likely questions:
+• From the registry (authoritative): the SBOM is attached to the image as a signed attestation. Pull it with cosign download sbom &lt;image&gt;, or verify it signed with cosign verify-attestation --type spdxjson &lt;image&gt;. Every Konflux-built Hummingbird image ships an SBOM plus SLSA provenance.
+• From the image itself: RPM-based images carry their own package inventory inside — the rpm database (under /usr/lib/sysimage/rpm) plus Red Hat 'content manifests'. That's the 'internal DB'. It's present even in distroless images that have no rpm binary, which is exactly how a scanner enumerates packages without a shell.
+• Vendor SBOMs: scanners generate their own SBOM from that inventory — Syft (for Grype), Trivy, and Docker Scout each produce one. So an image can carry the publisher's signed SBOM AND a tool-generated one; for trust decisions, prefer the signed publisher SBOM and verify it.
+Red Hat's own SBOM analyzer is Trusted Profile Analyzer (RHTPA). In the demo we generate an SBOM with Syft, verify Red Hat's signature and SBOM, then sign an artifact ourselves — the same cosign either way.</a:t>
             </a:r>
             <a:endParaRPr lang="en-US" dirty="0"/>
           </a:p>
@@ -1949,7 +1983,17 @@
           <a:p>
             <a:r>
               <a:rPr lang="en-US" dirty="0"/>
-              <a:t>Compose assembles the single-image work into a multi-service application — here a hardened web service, a database, and an OpenTelemetry collector. Two gotchas live in this section and bite people: healthchecks must use a tool that's actually in the distroless image (the language interpreter, not /bin/test), and Hummingbird's Postgres follows upstream env-var names — POSTGRES_PASSWORD, not the older sclorg POSTGRESQL_PASSWORD. Both show up again in the gotchas demo.</a:t>
+              <a:t>Where the claim becomes a number you can reproduce. Grype reads the package inventory, matches each entry against a vulnerability database, and reports by severity.
+Two caveats to say out loud:
+• A match is a reported CVE against a present package version — not proof the path is reachable. VEX (Vulnerability Exploitability eXchange) statements let a scanner suppress non-exploitable CVEs; Grype and Trivy both accept --vex, and Red Hat publishes VEX/CSAF data.
+• The vuln DB updates daily and Grype refuses a stale one — so side-by-side numbers are only fair against the same DB. Run grype db update first.
+We use Grype in the examples, but in production any of these read RHHI images fine — they all consume the in-image rpm inventory plus Red Hat advisories:
+• Grype (Anchore) — CLI, SBOM-first, pairs with Syft. What the demos use.
+• Trivy (Aqua) — the most widely used CLI scanner; images, filesystems, IaC, Kubernetes; uses Red Hat advisories + CPE content sets for accurate RHEL matching.
+• Clair v4 (Red Hat) — service-based; the default scanner in Red Hat Quay / Quay.io and in Harbor.
+• Red Hat Advanced Cluster Security (RHACS) Scanner V4 — the OpenShift-native option; merges the StackRox scanner with Clair v4, and also verifies cosign signatures at admission. The production gate.
+• Commercial: Snyk, Prisma Cloud, Aqua, Docker Scout, Anchore Enterprise.
+Accuracy note: RHEL CVE matching relies on per-layer content manifests, so don't flatten or merge layers (e.g. podman export) before scanning, or the CPE mapping breaks and you get false results.</a:t>
             </a:r>
             <a:endParaRPr lang="en-US" dirty="0"/>
           </a:p>
@@ -2037,7 +2081,11 @@
           <a:p>
             <a:r>
               <a:rPr lang="en-US" dirty="0"/>
-              <a:t>Two features cover why re-pulls are cheap. zstd:chunked is the modern OCI layer format that makes a layer seekable: the client can fetch just the chunks that changed instead of the whole layer. Combined with Hummingbird's frequent clean rebuilds, this keeps the bandwidth cost of staying current low — which matters when 'rebuild, don't patch' means images change often.</a:t>
+              <a:t>The reproducible version of the previous slide. Three things to show live:
+• grype db update first — Grype won't scan against a stale database, and a fair comparison needs both images scanned against the same DB.
+• The side-by-side is the moment: the hardened nginx comes back at or near zero; docker.io/library/nginx is typically tens to hundreds.
+• You can scan the image, or scan its signed SBOM — cosign download sbom ... then grype sbom:.... Scanning the SBOM is what CI usually does: it's faster and needs no pull. --fail-on high makes grype exit non-zero, failing the pipeline step.
+The same commands work against your own derived image — the base stays clean, so what shows up is what your app added. Tool choice is covered on the previous slide's notes (Trivy, Clair, and RHACS Scanner V4 all read these images too).</a:t>
             </a:r>
             <a:endParaRPr lang="en-US" dirty="0"/>
           </a:p>
@@ -2125,7 +2173,7 @@
           <a:p>
             <a:r>
               <a:rPr lang="en-US" dirty="0"/>
-              <a:t>chunkah is the complementary idea: instead of layering by Containerfile line, group files into layers by the package they belong to. When one package updates, only its layer's digest changes, so everything else stays cached and clients re-pull far less. This is why podman history on a Hummingbird image shows a content-based split rather than a build-step split — and it's a neat thing to point at live in the first demo.</a:t>
+              <a:t>Compose assembles the single-image work into a multi-service application — here a hardened web service, a database, and an OpenTelemetry collector. Two gotchas live in this section and bite people: healthchecks must use a tool that's actually in the distroless image (the language interpreter, not /bin/test), and Hummingbird's Postgres follows upstream env-var names — POSTGRES_PASSWORD, not the older sclorg POSTGRESQL_PASSWORD. Both show up again in the gotchas demo.</a:t>
             </a:r>
             <a:endParaRPr lang="en-US" dirty="0"/>
           </a:p>
@@ -2213,7 +2261,12 @@
           <a:p>
             <a:r>
               <a:rPr lang="en-US" dirty="0"/>
-              <a:t>Provenance shouldn't stop at the image. Your application also runs dependencies from PyPI, which is a passthrough that re-signs nothing — a supply-chain gap. Trusted Libraries closes it: a pip-compatible index of Python packages rebuilt from source in Red Hat's Konflux pipeline, carrying SLSA Level 3 provenance and signatures (via Red Hat Trusted Artifact Signer) you can verify before install, from packages.redhat.com/trusted-libraries. Be clear about the current status: it's been Tech Preview since February 2026 and is Python-only, with npm and Java on the roadmap, and it's now part of Red Hat Advanced Developer Suite. The upstream community equivalent is Calunga. The demo verifies image provenance as a rock-solid anchor, then shows the Trusted Libraries flow.</a:t>
+              <a:t>Why staying current is cheap — part one. A normal OCI layer is a single gzip blob: change one file and the client re-pulls the whole layer.
+• zstd:chunked stores the layer compressed with zstd and keeps a table of content-addressed chunks plus a manifest of which chunk holds which file.
+• On pull, the client compares chunk digests against what it already has and fetches only the chunks that changed; unchanged chunks come from cache.
+• zstd also decompresses much faster than gzip, so even a full pull is quicker.
+• It's a standard OCI/containers-storage feature, not Hummingbird-specific — but it pairs perfectly with 'rebuild, don't patch': a rebuild that touched one package costs roughly that package's bytes, not the whole image.
+Good moment to pre-empt 'won't constant rebuilds hammer my bandwidth?' — no, and this is why.</a:t>
             </a:r>
             <a:endParaRPr lang="en-US" dirty="0"/>
           </a:p>
@@ -2301,7 +2354,12 @@
           <a:p>
             <a:r>
               <a:rPr lang="en-US" dirty="0"/>
-              <a:t>The gotchas topic is the most practical part, and the closing demo trips each wire on purpose. The framing to land: none of these are defects — they're implicit assumptions from the wider ecosystem becoming visible against a minimal runtime. RUN needs a shell, so do shell work in the builder. Tools want HOME; set it. The bare 'python' alias is gone; use python3. Hummingbird's Postgres uses upstream env names. localhost resolves to IPv6 first, so test against 127.0.0.1. And when your COPYed-library list gets long, that's the signal to use UBI — Hummingbird isn't a moral position, it's a tool for the right workloads.</a:t>
+              <a:t>Why staying current is cheap — part two, and it composes with zstd:chunked. Normally each Containerfile instruction becomes a layer, so unrelated packages share a layer and any change re-pulls all of them.
+• chunkah splits the filesystem into layers by the package each file belongs to, instead of by build step.
+• A one-package security update changes only that package's layer digest; every other layer keeps its digest and stays cached, so clients re-pull just the changed package.
+• It's why podman history on a Hummingbird image shows a content-based split (many small package layers) — and why a hardened image can have MORE layers than a general-purpose one. More layers here is a feature, not bloat.
+• Together: chunkah decides the layer boundaries (per package); zstd:chunked makes each layer's bytes individually fetchable. The cost of staying current tracks what actually changed.
+Nice to show live: podman history of a hardened image in demo 1.</a:t>
             </a:r>
             <a:endParaRPr lang="en-US" dirty="0"/>
           </a:p>
@@ -2389,7 +2447,13 @@
           <a:p>
             <a:r>
               <a:rPr lang="en-US" dirty="0"/>
-              <a:t>We finish at the terminal. There are eight demos that mirror the sections we just toured. Each narrates what it's about to do, stops so you can talk over the command on screen, runs it live, and stops again before the next one. They run individually or back-to-back as a guided walkthrough, entirely on Podman, locally. This is the part where every claim in the deck becomes something the room watches happen.</a:t>
+              <a:t>Provenance shouldn't stop at the image. Your app still pulls dependencies from PyPI — a public passthrough that re-signs nothing — so the trust you established at the container layer evaporates at the dependency layer. Trusted Libraries closes that gap.
+Define the terms (the audience may be new to them):
+• Provenance — a signed, machine-readable record of HOW and from WHAT an artifact was built: source repo + commit, the builder, inputs, parameters. A signature says WHO vouches for the bytes; provenance says WHERE they came from and HOW. You verify both.
+• Konflux — Red Hat's open-source, Tekton-based build pipeline ('software factory') focused on supply-chain security; it builds Hummingbird and emits an SBOM + SLSA provenance for every image.
+• SLSA Level 3 provenance — the build ran on a hardened, isolated, hosted service that produced signed provenance that can't be forged and can be verified as authentic (versus Level 1, which is just unsigned build metadata).
+• Red Hat Trusted Artifact Signer (RHTAS) — Red Hat's enterprise, self-managed deployment of Sigstore (cosign / fulcio / rekor); it's how these packages are signed, and what you'd run in-house to sign your own.
+Usage: point pip at packages.redhat.com/trusted-libraries with PyPI as fallback, and verify a package's provenance before installing. Status to state plainly: Tech Preview since Feb 2026, Python-only (npm and Java planned), now part of Red Hat Advanced Developer Suite; the index is authenticated; the upstream community project is Calunga. The next slide is the picture.</a:t>
             </a:r>
             <a:endParaRPr lang="en-US" dirty="0"/>
           </a:p>
@@ -2565,7 +2629,10 @@
           <a:p>
             <a:r>
               <a:rPr lang="en-US" dirty="0"/>
-              <a:t>Set expectations before the live portion. The interaction is a rhythm: narrate the upcoming command, stop on Enter, run it, stop again — so you control pacing and the audience reads each command before it executes. The engine is built for a stage: network-touching steps are allowed to fail soft, so a flaky conference connection never kills the talk. And each demo cleans up after itself, so re-runs are idempotent and your machine stays tidy. Pre-pull the images beforehand with run.sh check.</a:t>
+              <a:t>One picture for the value proposition. The hardened base image is already trusted — signed, with an SBOM and SLSA provenance. Your application sits on top with its Python dependencies, and those have two possible sources:
+• PyPI — the usual index: public, unsigned, unaudited. This is the gap (dashed): you verified the base, then pulled unverified code on top of it.
+• Red Hat Trusted Libraries — the same packages rebuilt from source in Konflux, carrying SLSA Level 3 provenance and signatures (via Trusted Artifact Signer) you can verify before install (solid).
+The point to land: it's the exact same verify-before-you-trust habit you already apply to the image, now extended one layer down to the dependencies your app actually runs.</a:t>
             </a:r>
             <a:endParaRPr lang="en-US" dirty="0"/>
           </a:p>
@@ -2653,7 +2720,13 @@
           <a:p>
             <a:r>
               <a:rPr lang="en-US" dirty="0"/>
-              <a:t>The first four demos map onto the early sections. Demo 1 pulls a hardened curl image, inspects it both ways, points at the content-based layers, and then fails to exec a shell — the no-shell moment, live. Demo 2 runs a hardened nginx, fails to exec into it, then attaches a toolbox sidecar that sees its processes and reaches it over shared localhost. Demo 3 puts hardened and stock nginx side by side on size, layers, and contents. Demo 4 builds the Go example end to end and proves the toolchain didn't come along.</a:t>
+              <a:t>The gotchas are implicit ecosystem assumptions made visible against a minimal runtime — not defects. The closing demo trips each on purpose. Land these:
+• RUN needs a shell → do shell work in the -builder stage, COPY the result into runtime.
+• Build tools want HOME → set it, or caches resolve to / and fail for the non-root user.
+• The bare 'python' alias is gone → use python3 in CMD/ENTRYPOINT.
+• Hummingbird's Postgres uses upstream env names (POSTGRES_PASSWORD), not sclorg (POSTGRESQL_PASSWORD).
+• localhost resolves to IPv6 (::1) first → test against 127.0.0.1, or bind dual-stack.
+The biggest real-world gotcha — native-extension stacks: SciPy / NumPy / pandas and most ML inference need shared libraries the distroless runtime omits (libstdc++, libgomp, libgfortran, BLAS/LAPACK, libquadmath…). You can COPY them in one by one, but past a handful you've hand-rebuilt a chunk of UBI's userland — and those hand-copied libraries are NOT in the image's SBOM and NOT CVE-tracked by Red Hat, which quietly undoes the reason you chose a hardened image. The practical rule: hardened runtime for Go static binaries, JVM apps, and light or pure-Python services; reach for UBI when the accommodation list gets long. Mixing per stage is normal — build on UBI, deploy on hardened where it fits. This is Gotcha F in the demo, and it's the most useful 'when NOT to use this' guidance you can give.</a:t>
             </a:r>
             <a:endParaRPr lang="en-US" dirty="0"/>
           </a:p>
@@ -2741,7 +2814,7 @@
           <a:p>
             <a:r>
               <a:rPr lang="en-US" dirty="0"/>
-              <a:t>The back four map onto the trust and operations sections. Demo 5 generates an SBOM, verifies Red Hat's signature and shipped SBOM on the signed path, then signs an artifact locally with no registry push. Demo 6 is the CVE payoff — real Grype numbers side by side and a CI gate. Demo 7 verifies image provenance as a reliable anchor, then walks the Trusted Libraries flow with graceful fallback since it's Tech Preview. Demo 8 trips each gotcha on purpose and shows the fix. Note: demos 5 and 7 verify against the signed registry.access.redhat.com/hi path.</a:t>
+              <a:t>We finish at the terminal. There are eight demos that mirror the sections we just toured. Each narrates what it's about to do, stops so you can talk over the command on screen, runs it live, and stops again before the next one. They run individually or back-to-back as a guided walkthrough, entirely on Podman, locally. This is the part where every claim in the deck becomes something the room watches happen.</a:t>
             </a:r>
             <a:endParaRPr lang="en-US" dirty="0"/>
           </a:p>
@@ -2829,7 +2902,7 @@
           <a:p>
             <a:r>
               <a:rPr lang="en-US" dirty="0"/>
-              <a:t>Driving it is simple. run.sh check is the first thing to run in a new room: it lists which tools are on PATH, prints the registry settings, and gives you a ready-made podman pull line so nothing stalls on the venue wifi. run.sh all is the guided walkthrough; run.sh &lt;n&gt; runs a single demo; and each NN-*.sh is independently executable. The scripts are bash with a bash shebang, so they run cleanly from the zsh prompt we present from. Registry overrides — for example pointing at the early-access org — are environment variables set before launching.</a:t>
+              <a:t>Set expectations before the live portion. The interaction is a rhythm: narrate the upcoming command, stop on Enter, run it, stop again — so you control pacing and the audience reads each command before it executes. The engine is built for a stage: network-touching steps are allowed to fail soft, so a flaky conference connection never kills the talk. And each demo cleans up after itself, so re-runs are idempotent and your machine stays tidy. Pre-pull the images beforehand with run.sh check.</a:t>
             </a:r>
             <a:endParaRPr lang="en-US" dirty="0"/>
           </a:p>
@@ -2917,7 +2990,7 @@
           <a:p>
             <a:r>
               <a:rPr lang="en-US" dirty="0"/>
-              <a:t>This close-out borrows the canonical container supply-chain threat model from Liz Rice's Container Security (2nd edition, chapter 7) and reframes it for Podman, OpenShift, and RHEL. The goal for the audience: Hummingbird is, in large part, an answer to this model — it closes the hardest vectors by construction — while source/Containerfile integrity, host and platform hardening, and the admission gate stay the operator's job.</a:t>
+              <a:t>The first four demos map onto the early sections. Demo 1 pulls a hardened curl image, inspects it both ways, points at the content-based layers, and then fails to exec a shell — the no-shell moment, live. Demo 2 runs a hardened nginx, fails to exec into it, then attaches a toolbox sidecar that sees its processes and reaches it over shared localhost. Demo 3 puts hardened and stock nginx side by side on size, layers, and contents. Demo 4 builds the Go example end to end and proves the toolchain didn't come along.</a:t>
             </a:r>
             <a:endParaRPr lang="en-US" dirty="0"/>
           </a:p>
@@ -3005,7 +3078,7 @@
           <a:p>
             <a:r>
               <a:rPr lang="en-US" dirty="0"/>
-              <a:t>Set the stage with the generic picture first — this is the standard container supply-chain threat model, terminology-neutral, before any Hummingbird framing. A container image is assembled from a chain of inputs — source, the build file, a base image, packages — then built, stored, and deployed, and every hand-off is a place to interfere: tamper with source or the Containerfile, a vulnerable base or dependency, build-time tampering or a compromised build host, a swapped image in the registry, an intercepted pull, or a malicious deployment definition. Hold this picture; the next slide overlays the answer.</a:t>
+              <a:t>The back four map onto the trust and operations sections. Demo 5 generates an SBOM, verifies Red Hat's signature and shipped SBOM on the signed path, then signs an artifact locally with no registry push. Demo 6 is the CVE payoff — real Grype numbers side by side and a CI gate. Demo 7 verifies image provenance as a reliable anchor, then walks the Trusted Libraries flow with graceful fallback since it's Tech Preview. Demo 8 trips each gotcha on purpose and shows the fix. Note: demos 5 and 7 verify against the signed registry.access.redhat.com/hi path.</a:t>
             </a:r>
             <a:endParaRPr lang="en-US" dirty="0"/>
           </a:p>
@@ -3093,7 +3166,7 @@
           <a:p>
             <a:r>
               <a:rPr lang="en-US" dirty="0"/>
-              <a:t>Same chain, reframed for our stack: Buildah/Konflux instead of Docker, the signed registry.access.redhat.com/hi path, OpenShift at deploy. Top row: the classic vectors. Bottom row: the Hummingbird answer. The story to tell — a hardened base turns the three hardest vectors (vulnerable base, vulnerable dependencies, build tampering) from 'trust us' into signed evidence you verify yourself, and the minimalism means there's simply less inside to be vulnerable. Be clear about the left edge: tampered source and a tampered Containerfile are the operator's job — branch protection, signed commits, pin the base by digest. Hummingbird gives you a trustworthy FROM; it can't stop an insecure Containerfile on top of it.</a:t>
+              <a:t>Driving it is simple. run.sh check is the first thing to run in a new room: it lists which tools are on PATH, prints the registry settings, and gives you a ready-made podman pull line so nothing stalls on the venue wifi. run.sh all is the guided walkthrough; run.sh &lt;n&gt; runs a single demo; and each NN-*.sh is independently executable. The scripts are bash with a bash shebang, so they run cleanly from the zsh prompt we present from. Registry overrides — for example pointing at the early-access org — are environment variables set before launching.</a:t>
             </a:r>
             <a:endParaRPr lang="en-US" dirty="0"/>
           </a:p>
@@ -3181,7 +3254,7 @@
           <a:p>
             <a:r>
               <a:rPr lang="en-US" dirty="0"/>
-              <a:t>The pipeline view was build-and-delivery; this is runtime — defense in depth. The hardened image shrinks the cluster of vectors aimed at the image and the app: a swapped image fails cosign verify; distroless removes the foot-guns (no shell, no package manager, non-root UID 65532); fewer packages mean fewer exploitable paths and very little for an intruder to use if they do land inside. What it does NOT fix sits outside the container — misconfigured host, insecure networking, container escape — and those are platform hardening: rootless Podman, SELinux, seccomp, OpenShift SCCs, network policy. The hardened image is one strong layer, not the whole onion.</a:t>
+              <a:t>This close-out borrows the canonical container supply-chain threat model from Liz Rice's Container Security (2nd edition, chapter 7) and reframes it for Podman, OpenShift, and RHEL. The goal for the audience: Hummingbird is, in large part, an answer to this model — it closes the hardest vectors by construction — while source/Containerfile integrity, host and platform hardening, and the admission gate stay the operator's job.</a:t>
             </a:r>
             <a:endParaRPr lang="en-US" dirty="0"/>
           </a:p>
@@ -3269,7 +3342,13 @@
           <a:p>
             <a:r>
               <a:rPr lang="en-US" dirty="0"/>
-              <a:t>The summary to land, and a good place to end an admin talk. Hummingbird owns the image — vulnerable base, vulnerable dependencies, build integrity, image authenticity — the part that's genuinely hard to do yourself and that you get for free. You own the edges — source and Containerfile integrity, platform hardening, and the admission gate that enforces verification for every deploy. The practical close: verify on pull with podman + cosign, and enforce it cluster-wide with an OpenShift admission policy so no one can route around the check — that's what closes the malicious-deployment-definition vector. A near-zero-CVE distroless base is the strongest single move on the supply chain precisely because it collapses the vectors that are hardest to defend one at a time.</a:t>
+              <a:t>Walk the chain left to right and name the attack at each stage. This is the generic model — no Hummingbird yet.
+1. Source code — tampered source: someone with repo access or stolen credentials changes the app before it's ever built. Defended by branch protection, RBAC, signed commits, review.
+2. Code repo + Containerfile — tampered build file: a malicious RUN line is arbitrary code execution at build time; it can pull malware, read build secrets, or probe the build network. Treat Containerfile edits like privileged code.
+3. CI build — three vectors converge here: a vulnerable or poisoned BASE image (FROM); a vulnerable or confused DEPENDENCY pulled during the build (dependency confusion — a wrong-registry or typo'd package); and BUILD-TIME tampering / a compromised build host that injects a backdoor even from clean source.
+4. Registry — tampered stored image: the image is swapped or modified at rest after it was built.
+5. Pull → Deploy — intercepted pull (image altered in transit) and malicious deployment definition: a one-character change to a registry hostname in the YAML silently runs a different image.
+Set up the next slide: most of these are about trusting inputs you didn't build and can't see — exactly what signing, provenance, and a minimal verified base address.</a:t>
             </a:r>
             <a:endParaRPr lang="en-US" dirty="0"/>
           </a:p>
@@ -3357,7 +3436,13 @@
           <a:p>
             <a:r>
               <a:rPr lang="en-US" dirty="0"/>
-              <a:t>Recap the arc and point to where to go deeper. One idea drives everything — rebuild instead of patch — and it gives you distroless, near-zero-CVE images on a trust chain you may already rely on. The entire workflow fits on a laptop with Podman. The strongest closing note for an admin audience: near-zero CVE isn't something to take on faith — it's one Grype command away from being your own measurement, and the work that remains is the tractable part, keeping your own dependencies current. And it's not all-or-nothing: use Hummingbird where minimalism wins and UBI where breadth does. Everything in this deck — the workflow, runnable examples, and the demos — lives in the project repo and site.</a:t>
+              <a:t>Same chain, now the Hummingbird / Red Hat answer at each stage — map them one to one:
+1. Source — still yours, but smaller: branch protection, RBAC, signed commits. Hummingbird doesn't own your repo.
+2. Containerfile — pin the base by digest (not a moving tag) and review every RUN/COPY. Hummingbird gives a trustworthy FROM; it can't fix an insecure Containerfile on top.
+3. Build — the big one: builds run in Konflux, a hardened, isolated pipeline that emits SLSA 3 signed provenance; the base is near-zero-CVE and distroless (fewer dependencies to be vulnerable); and for your own code, Trusted Libraries extends the same provenance to Python packages. Vulnerable-base, vulnerable-deps, and build-tampering all move from 'trust us' to 'here's signed evidence'.
+4. Registry — the image carries a cosign signature + signed SBOM + signed provenance on the signed /hi path. A swapped or modified image fails verification.
+5. Pull/Deploy — verify on pull with podman + cosign; enforce cluster-wide with an OpenShift admission policy (RHACS / sigstore admission) so an unsigned or unverified image won't run — that closes the malicious-YAML vector.
+The framing to land: Hummingbird closes the middle of the chain by construction; you still own the two ends — source/Containerfile and deploy/platform.</a:t>
             </a:r>
             <a:endParaRPr lang="en-US" dirty="0"/>
           </a:p>
@@ -3533,7 +3618,15 @@
           <a:p>
             <a:r>
               <a:rPr lang="en-US" dirty="0"/>
-              <a:t>Close, then open the floor. The single line to leave them with: near-zero CVE isn't a slogan to take on faith — it's one Grype command away from being their own measurement, and the workflow they just saw runs entirely on Podman on a laptop. Point them at the repo for the runnable examples and the eight demos, and at images.redhat.com for the GA catalog and the canonical image names and pull paths.</a:t>
+              <a:t>The pipeline view was build-and-delivery; this is runtime — defense in depth. Walk the layers from outside in and pair each exploit with the Red Hat control that addresses it:
+• Insecure networking (exposed or cleartext services) — OpenShift NetworkPolicy, service mesh / TLS. Hummingbird doesn't change this.
+• Misconfigured host (a weak RHEL host undermines everything above it) — RHEL hardening, SELinux enforcing, OpenSCAP CIS/STIG compliance, a minimal host footprint.
+• Code exploits against the runtime/orchestrator — keep the platform patched; SELinux + seccomp confine what a compromised process can do.
+• Compromised container image (swapped or poisoned) — cosign signature verification at admission (RHACS): fails verification, doesn't run.
+• Poorly configured image — distroless removes the foot-guns (no shell, no package manager, non-root UID 65532), so there's far less to misconfigure.
+• Exposed secrets / code exploits inside the container — a minimal image gives an intruder almost nothing to use (no shell, no curl, no package manager) and fewer packages mean fewer exploitable paths; pair with real secret management (never bake secrets into the image).
+• Container escape — rootless Podman, dropped capabilities, seccomp, SELinux, and OpenShift SCCs constrain the blast radius.
+The division to state: the hardened image shrinks the image-and-app cluster in the middle; the RHEL/OpenShift platform handles the host, network, and isolation around it. Defense in depth, not one silver bullet.</a:t>
             </a:r>
             <a:endParaRPr lang="en-US" dirty="0"/>
           </a:p>
@@ -3557,6 +3650,270 @@
             <a:fld id="{F7021451-1387-4CA6-816F-3879F97B5CBC}" type="slidenum">
               <a:rPr lang="en-US"/>
               <a:t>40</a:t>
+            </a:fld>
+            <a:endParaRPr lang="en-US"/>
+          </a:p>
+        </p:txBody>
+      </p:sp>
+    </p:spTree>
+    <p:extLst>
+      <p:ext uri="{BB962C8B-B14F-4D97-AF65-F5344CB8AC3E}">
+        <p14:creationId xmlns:p14="http://schemas.microsoft.com/office/powerpoint/2010/main" val="1024086991"/>
+      </p:ext>
+    </p:extLst>
+  </p:cSld>
+  <p:clrMapOvr>
+    <a:masterClrMapping/>
+  </p:clrMapOvr>
+</p:notes>
+</file>
+
+<file path=ppt/notesSlides/notesSlide41.xml><?xml version="1.0" encoding="utf-8"?>
+<p:notes xmlns:a="http://schemas.openxmlformats.org/drawingml/2006/main" xmlns:r="http://schemas.openxmlformats.org/officeDocument/2006/relationships" xmlns:p="http://schemas.openxmlformats.org/presentationml/2006/main">
+  <p:cSld>
+    <p:spTree>
+      <p:nvGrpSpPr>
+        <p:cNvPr id="1" name=""/>
+        <p:cNvGrpSpPr/>
+        <p:nvPr/>
+      </p:nvGrpSpPr>
+      <p:grpSpPr>
+        <a:xfrm>
+          <a:off x="0" y="0"/>
+          <a:ext cx="0" cy="0"/>
+          <a:chOff x="0" y="0"/>
+          <a:chExt cx="0" cy="0"/>
+        </a:xfrm>
+      </p:grpSpPr>
+      <p:sp>
+        <p:nvSpPr>
+          <p:cNvPr id="2" name="Slide Image Placeholder 1"/>
+          <p:cNvSpPr>
+            <a:spLocks noGrp="1" noRot="1" noChangeAspect="1"/>
+          </p:cNvSpPr>
+          <p:nvPr>
+            <p:ph type="sldImg"/>
+          </p:nvPr>
+        </p:nvSpPr>
+        <p:spPr/>
+      </p:sp>
+      <p:sp>
+        <p:nvSpPr>
+          <p:cNvPr id="3" name="Notes Placeholder 2"/>
+          <p:cNvSpPr>
+            <a:spLocks noGrp="1"/>
+          </p:cNvSpPr>
+          <p:nvPr>
+            <p:ph type="body" idx="1"/>
+          </p:nvPr>
+        </p:nvSpPr>
+        <p:spPr/>
+        <p:txBody>
+          <a:bodyPr/>
+          <a:lstStyle/>
+          <a:p>
+            <a:r>
+              <a:rPr lang="en-US" dirty="0"/>
+              <a:t>The summary to land, and a good place to end an admin talk. Hummingbird owns the image — vulnerable base, vulnerable dependencies, build integrity, image authenticity — the part that's genuinely hard to do yourself and that you get for free. You own the edges — source and Containerfile integrity, platform hardening, and the admission gate that enforces verification for every deploy. The practical close: verify on pull with podman + cosign, and enforce it cluster-wide with an OpenShift admission policy so no one can route around the check — that's what closes the malicious-deployment-definition vector. A near-zero-CVE distroless base is the strongest single move on the supply chain precisely because it collapses the vectors that are hardest to defend one at a time.</a:t>
+            </a:r>
+            <a:endParaRPr lang="en-US" dirty="0"/>
+          </a:p>
+        </p:txBody>
+      </p:sp>
+      <p:sp>
+        <p:nvSpPr>
+          <p:cNvPr id="4" name="Slide Number Placeholder 3"/>
+          <p:cNvSpPr>
+            <a:spLocks noGrp="1"/>
+          </p:cNvSpPr>
+          <p:nvPr>
+            <p:ph type="sldNum" sz="quarter" idx="10"/>
+          </p:nvPr>
+        </p:nvSpPr>
+        <p:spPr/>
+        <p:txBody>
+          <a:bodyPr/>
+          <a:lstStyle/>
+          <a:p>
+            <a:fld id="{F7021451-1387-4CA6-816F-3879F97B5CBC}" type="slidenum">
+              <a:rPr lang="en-US"/>
+              <a:t>41</a:t>
+            </a:fld>
+            <a:endParaRPr lang="en-US"/>
+          </a:p>
+        </p:txBody>
+      </p:sp>
+    </p:spTree>
+    <p:extLst>
+      <p:ext uri="{BB962C8B-B14F-4D97-AF65-F5344CB8AC3E}">
+        <p14:creationId xmlns:p14="http://schemas.microsoft.com/office/powerpoint/2010/main" val="1024086991"/>
+      </p:ext>
+    </p:extLst>
+  </p:cSld>
+  <p:clrMapOvr>
+    <a:masterClrMapping/>
+  </p:clrMapOvr>
+</p:notes>
+</file>
+
+<file path=ppt/notesSlides/notesSlide42.xml><?xml version="1.0" encoding="utf-8"?>
+<p:notes xmlns:a="http://schemas.openxmlformats.org/drawingml/2006/main" xmlns:r="http://schemas.openxmlformats.org/officeDocument/2006/relationships" xmlns:p="http://schemas.openxmlformats.org/presentationml/2006/main">
+  <p:cSld>
+    <p:spTree>
+      <p:nvGrpSpPr>
+        <p:cNvPr id="1" name=""/>
+        <p:cNvGrpSpPr/>
+        <p:nvPr/>
+      </p:nvGrpSpPr>
+      <p:grpSpPr>
+        <a:xfrm>
+          <a:off x="0" y="0"/>
+          <a:ext cx="0" cy="0"/>
+          <a:chOff x="0" y="0"/>
+          <a:chExt cx="0" cy="0"/>
+        </a:xfrm>
+      </p:grpSpPr>
+      <p:sp>
+        <p:nvSpPr>
+          <p:cNvPr id="2" name="Slide Image Placeholder 1"/>
+          <p:cNvSpPr>
+            <a:spLocks noGrp="1" noRot="1" noChangeAspect="1"/>
+          </p:cNvSpPr>
+          <p:nvPr>
+            <p:ph type="sldImg"/>
+          </p:nvPr>
+        </p:nvSpPr>
+        <p:spPr/>
+      </p:sp>
+      <p:sp>
+        <p:nvSpPr>
+          <p:cNvPr id="3" name="Notes Placeholder 2"/>
+          <p:cNvSpPr>
+            <a:spLocks noGrp="1"/>
+          </p:cNvSpPr>
+          <p:nvPr>
+            <p:ph type="body" idx="1"/>
+          </p:nvPr>
+        </p:nvSpPr>
+        <p:spPr/>
+        <p:txBody>
+          <a:bodyPr/>
+          <a:lstStyle/>
+          <a:p>
+            <a:r>
+              <a:rPr lang="en-US" dirty="0"/>
+              <a:t>Recap the arc and point to where to go deeper. One idea drives everything — rebuild instead of patch — and it gives you distroless, near-zero-CVE images on a trust chain you may already rely on. The entire workflow fits on a laptop with Podman. The strongest closing note for an admin audience: near-zero CVE isn't something to take on faith — it's one Grype command away from being your own measurement, and the work that remains is the tractable part, keeping your own dependencies current. And it's not all-or-nothing: use Hummingbird where minimalism wins and UBI where breadth does. Everything in this deck — the workflow, runnable examples, and the demos — lives in the project repo and site.</a:t>
+            </a:r>
+            <a:endParaRPr lang="en-US" dirty="0"/>
+          </a:p>
+        </p:txBody>
+      </p:sp>
+      <p:sp>
+        <p:nvSpPr>
+          <p:cNvPr id="4" name="Slide Number Placeholder 3"/>
+          <p:cNvSpPr>
+            <a:spLocks noGrp="1"/>
+          </p:cNvSpPr>
+          <p:nvPr>
+            <p:ph type="sldNum" sz="quarter" idx="10"/>
+          </p:nvPr>
+        </p:nvSpPr>
+        <p:spPr/>
+        <p:txBody>
+          <a:bodyPr/>
+          <a:lstStyle/>
+          <a:p>
+            <a:fld id="{F7021451-1387-4CA6-816F-3879F97B5CBC}" type="slidenum">
+              <a:rPr lang="en-US"/>
+              <a:t>42</a:t>
+            </a:fld>
+            <a:endParaRPr lang="en-US"/>
+          </a:p>
+        </p:txBody>
+      </p:sp>
+    </p:spTree>
+    <p:extLst>
+      <p:ext uri="{BB962C8B-B14F-4D97-AF65-F5344CB8AC3E}">
+        <p14:creationId xmlns:p14="http://schemas.microsoft.com/office/powerpoint/2010/main" val="1024086991"/>
+      </p:ext>
+    </p:extLst>
+  </p:cSld>
+  <p:clrMapOvr>
+    <a:masterClrMapping/>
+  </p:clrMapOvr>
+</p:notes>
+</file>
+
+<file path=ppt/notesSlides/notesSlide43.xml><?xml version="1.0" encoding="utf-8"?>
+<p:notes xmlns:a="http://schemas.openxmlformats.org/drawingml/2006/main" xmlns:r="http://schemas.openxmlformats.org/officeDocument/2006/relationships" xmlns:p="http://schemas.openxmlformats.org/presentationml/2006/main">
+  <p:cSld>
+    <p:spTree>
+      <p:nvGrpSpPr>
+        <p:cNvPr id="1" name=""/>
+        <p:cNvGrpSpPr/>
+        <p:nvPr/>
+      </p:nvGrpSpPr>
+      <p:grpSpPr>
+        <a:xfrm>
+          <a:off x="0" y="0"/>
+          <a:ext cx="0" cy="0"/>
+          <a:chOff x="0" y="0"/>
+          <a:chExt cx="0" cy="0"/>
+        </a:xfrm>
+      </p:grpSpPr>
+      <p:sp>
+        <p:nvSpPr>
+          <p:cNvPr id="2" name="Slide Image Placeholder 1"/>
+          <p:cNvSpPr>
+            <a:spLocks noGrp="1" noRot="1" noChangeAspect="1"/>
+          </p:cNvSpPr>
+          <p:nvPr>
+            <p:ph type="sldImg"/>
+          </p:nvPr>
+        </p:nvSpPr>
+        <p:spPr/>
+      </p:sp>
+      <p:sp>
+        <p:nvSpPr>
+          <p:cNvPr id="3" name="Notes Placeholder 2"/>
+          <p:cNvSpPr>
+            <a:spLocks noGrp="1"/>
+          </p:cNvSpPr>
+          <p:nvPr>
+            <p:ph type="body" idx="1"/>
+          </p:nvPr>
+        </p:nvSpPr>
+        <p:spPr/>
+        <p:txBody>
+          <a:bodyPr/>
+          <a:lstStyle/>
+          <a:p>
+            <a:r>
+              <a:rPr lang="en-US" dirty="0"/>
+              <a:t>Close, then open the floor. The single line to leave them with: near-zero CVE isn't a slogan to take on faith — it's one Grype command away from being their own measurement, and the workflow they just saw runs entirely on Podman on a laptop. Point them at the repo for the runnable examples and the eight demos, and at images.redhat.com for the GA catalog and the canonical image names and pull paths.</a:t>
+            </a:r>
+            <a:endParaRPr lang="en-US" dirty="0"/>
+          </a:p>
+        </p:txBody>
+      </p:sp>
+      <p:sp>
+        <p:nvSpPr>
+          <p:cNvPr id="4" name="Slide Number Placeholder 3"/>
+          <p:cNvSpPr>
+            <a:spLocks noGrp="1"/>
+          </p:cNvSpPr>
+          <p:nvPr>
+            <p:ph type="sldNum" sz="quarter" idx="10"/>
+          </p:nvPr>
+        </p:nvSpPr>
+        <p:spPr/>
+        <p:txBody>
+          <a:bodyPr/>
+          <a:lstStyle/>
+          <a:p>
+            <a:fld id="{F7021451-1387-4CA6-816F-3879F97B5CBC}" type="slidenum">
+              <a:rPr lang="en-US"/>
+              <a:t>43</a:t>
             </a:fld>
             <a:endParaRPr lang="en-US"/>
           </a:p>
@@ -4504,48 +4861,9 @@
           </a:p>
         </p:txBody>
       </p:sp>
-      <p:sp>
-        <p:nvSpPr>
-          <p:cNvPr id="6" name="Text 3"/>
-          <p:cNvSpPr/>
-          <p:nvPr/>
-        </p:nvSpPr>
-        <p:spPr>
-          <a:xfrm>
-            <a:off x="10835640" y="5349240"/>
-            <a:ext cx="868680" cy="274320"/>
-          </a:xfrm>
-          <a:prstGeom prst="rect">
-            <a:avLst/>
-          </a:prstGeom>
-          <a:noFill/>
-          <a:ln/>
-        </p:spPr>
-        <p:txBody>
-          <a:bodyPr wrap="square" rtlCol="0" anchor="ctr"/>
-          <a:lstStyle/>
-          <a:p>
-            <a:pPr algn="r" indent="0" marL="0">
-              <a:buNone/>
-            </a:pPr>
-            <a:r>
-              <a:rPr lang="en-US" sz="1100" dirty="0">
-                <a:solidFill>
-                  <a:srgbClr val="5A5A5A"/>
-                </a:solidFill>
-                <a:latin typeface="Red Hat Mono" pitchFamily="34" charset="0"/>
-                <a:ea typeface="Red Hat Mono" pitchFamily="34" charset="-122"/>
-                <a:cs typeface="Red Hat Mono" pitchFamily="34" charset="-120"/>
-              </a:rPr>
-              <a:t>r01.6</a:t>
-            </a:r>
-            <a:endParaRPr lang="en-US" sz="1100" dirty="0"/>
-          </a:p>
-        </p:txBody>
-      </p:sp>
       <p:pic>
         <p:nvPicPr>
-          <p:cNvPr id="7" name="Image 1" descr="./assets/logo-candidate-2.png">    </p:cNvPr>
+          <p:cNvPr id="6" name="Image 1" descr="./assets/logo-candidate-2.png">    </p:cNvPr>
           <p:cNvPicPr>
             <a:picLocks noChangeAspect="1"/>
           </p:cNvPicPr>
@@ -9800,7 +10118,7 @@
                 <a:ea typeface="Overpass" pitchFamily="34" charset="-122"/>
                 <a:cs typeface="Overpass" pitchFamily="34" charset="-120"/>
               </a:rPr>
-              <a:t>WORKING WITH IMAGES · SBOM &amp; SIGNING</a:t>
+              <a:t>WORKING WITH IMAGES · MULTI-STAGE BUILDS</a:t>
             </a:r>
             <a:endParaRPr lang="en-US" sz="1200" dirty="0"/>
           </a:p>
@@ -9815,7 +10133,7 @@
         <p:spPr>
           <a:xfrm>
             <a:off x="566928" y="676656"/>
-            <a:ext cx="11055096" cy="1005840"/>
+            <a:ext cx="7223760" cy="1005840"/>
           </a:xfrm>
           <a:prstGeom prst="rect">
             <a:avLst/>
@@ -9839,38 +10157,338 @@
                 <a:ea typeface="Overpass" pitchFamily="34" charset="-122"/>
                 <a:cs typeface="Overpass" pitchFamily="34" charset="-120"/>
               </a:rPr>
-              <a:t>Three artifacts travel with the image</a:t>
+              <a:t>What that buys you, in a Containerfile</a:t>
             </a:r>
             <a:endParaRPr lang="en-US" sz="3000" dirty="0"/>
           </a:p>
         </p:txBody>
       </p:sp>
-      <p:pic>
-        <p:nvPicPr>
-          <p:cNvPr id="6" name="Image 1" descr="./png/05-sbom-and-signing-artifacts.png">    </p:cNvPr>
-          <p:cNvPicPr>
-            <a:picLocks noChangeAspect="1"/>
-          </p:cNvPicPr>
-          <p:nvPr/>
-        </p:nvPicPr>
-        <p:blipFill>
-          <a:blip r:embed="rId2"/>
-          <a:srcRect l="0" r="0" t="0" b="0"/>
-          <a:stretch/>
-        </p:blipFill>
-        <p:spPr>
-          <a:xfrm>
-            <a:off x="1645920" y="1600200"/>
-            <a:ext cx="8906256" cy="4343400"/>
-          </a:xfrm>
-          <a:prstGeom prst="rect">
-            <a:avLst/>
-          </a:prstGeom>
-        </p:spPr>
-      </p:pic>
-      <p:sp>
-        <p:nvSpPr>
-          <p:cNvPr id="7" name="Text 3"/>
+      <p:sp>
+        <p:nvSpPr>
+          <p:cNvPr id="6" name="Text 3"/>
+          <p:cNvSpPr/>
+          <p:nvPr/>
+        </p:nvSpPr>
+        <p:spPr>
+          <a:xfrm>
+            <a:off x="7882128" y="969264"/>
+            <a:ext cx="3739896" cy="274320"/>
+          </a:xfrm>
+          <a:prstGeom prst="rect">
+            <a:avLst/>
+          </a:prstGeom>
+          <a:noFill/>
+          <a:ln/>
+        </p:spPr>
+        <p:txBody>
+          <a:bodyPr wrap="square" rtlCol="0" anchor="ctr"/>
+          <a:lstStyle/>
+          <a:p>
+            <a:pPr algn="r" indent="0" marL="0">
+              <a:buNone/>
+            </a:pPr>
+            <a:r>
+              <a:rPr lang="en-US" sz="1100" b="1" spc="200" kern="0" dirty="0">
+                <a:solidFill>
+                  <a:srgbClr val="5A5A5A"/>
+                </a:solidFill>
+                <a:latin typeface="Red Hat Mono" pitchFamily="34" charset="0"/>
+                <a:ea typeface="Red Hat Mono" pitchFamily="34" charset="-122"/>
+                <a:cs typeface="Red Hat Mono" pitchFamily="34" charset="-120"/>
+              </a:rPr>
+              <a:t>Containerfile</a:t>
+            </a:r>
+            <a:endParaRPr lang="en-US" sz="1100" dirty="0"/>
+          </a:p>
+        </p:txBody>
+      </p:sp>
+      <p:sp>
+        <p:nvSpPr>
+          <p:cNvPr id="7" name="Shape 4"/>
+          <p:cNvSpPr/>
+          <p:nvPr/>
+        </p:nvSpPr>
+        <p:spPr>
+          <a:xfrm>
+            <a:off x="566928" y="1691640"/>
+            <a:ext cx="11055096" cy="4251960"/>
+          </a:xfrm>
+          <a:prstGeom prst="rect">
+            <a:avLst/>
+          </a:prstGeom>
+          <a:solidFill>
+            <a:srgbClr val="151515"/>
+          </a:solidFill>
+          <a:ln w="12700">
+            <a:solidFill>
+              <a:srgbClr val="151515"/>
+            </a:solidFill>
+            <a:prstDash val="solid"/>
+          </a:ln>
+        </p:spPr>
+      </p:sp>
+      <p:sp>
+        <p:nvSpPr>
+          <p:cNvPr id="8" name="Text 5"/>
+          <p:cNvSpPr/>
+          <p:nvPr/>
+        </p:nvSpPr>
+        <p:spPr>
+          <a:xfrm>
+            <a:off x="749808" y="1783080"/>
+            <a:ext cx="10689336" cy="4069080"/>
+          </a:xfrm>
+          <a:prstGeom prst="rect">
+            <a:avLst/>
+          </a:prstGeom>
+          <a:noFill/>
+          <a:ln/>
+        </p:spPr>
+        <p:txBody>
+          <a:bodyPr wrap="square" rtlCol="0" anchor="t"/>
+          <a:lstStyle/>
+          <a:p>
+            <a:pPr algn="l" indent="0" marL="0">
+              <a:lnSpc>
+                <a:spcPct val="110000"/>
+              </a:lnSpc>
+              <a:buNone/>
+            </a:pPr>
+            <a:r>
+              <a:rPr lang="en-US" sz="1100" dirty="0">
+                <a:solidFill>
+                  <a:srgbClr val="8FB98F"/>
+                </a:solidFill>
+                <a:latin typeface="Red Hat Mono" pitchFamily="34" charset="0"/>
+                <a:ea typeface="Red Hat Mono" pitchFamily="34" charset="-122"/>
+                <a:cs typeface="Red Hat Mono" pitchFamily="34" charset="-120"/>
+              </a:rPr>
+              <a:t># ---- build stage: full toolchain, thrown away ----
+</a:t>
+            </a:r>
+            <a:pPr algn="l" indent="0" marL="0">
+              <a:lnSpc>
+                <a:spcPct val="110000"/>
+              </a:lnSpc>
+              <a:buNone/>
+            </a:pPr>
+            <a:r>
+              <a:rPr lang="en-US" sz="1100" dirty="0">
+                <a:solidFill>
+                  <a:srgbClr val="E6E6E6"/>
+                </a:solidFill>
+                <a:latin typeface="Red Hat Mono" pitchFamily="34" charset="0"/>
+                <a:ea typeface="Red Hat Mono" pitchFamily="34" charset="-122"/>
+                <a:cs typeface="Red Hat Mono" pitchFamily="34" charset="-120"/>
+              </a:rPr>
+              <a:t>FROM registry.access.redhat.com/hi/go:1.26-builder AS build
+</a:t>
+            </a:r>
+            <a:pPr algn="l" indent="0" marL="0">
+              <a:lnSpc>
+                <a:spcPct val="110000"/>
+              </a:lnSpc>
+              <a:buNone/>
+            </a:pPr>
+            <a:r>
+              <a:rPr lang="en-US" sz="1100" dirty="0">
+                <a:solidFill>
+                  <a:srgbClr val="E6E6E6"/>
+                </a:solidFill>
+                <a:latin typeface="Red Hat Mono" pitchFamily="34" charset="0"/>
+                <a:ea typeface="Red Hat Mono" pitchFamily="34" charset="-122"/>
+                <a:cs typeface="Red Hat Mono" pitchFamily="34" charset="-120"/>
+              </a:rPr>
+              <a:t>WORKDIR /src
+</a:t>
+            </a:r>
+            <a:pPr algn="l" indent="0" marL="0">
+              <a:lnSpc>
+                <a:spcPct val="110000"/>
+              </a:lnSpc>
+              <a:buNone/>
+            </a:pPr>
+            <a:r>
+              <a:rPr lang="en-US" sz="1100" dirty="0">
+                <a:solidFill>
+                  <a:srgbClr val="E6E6E6"/>
+                </a:solidFill>
+                <a:latin typeface="Red Hat Mono" pitchFamily="34" charset="0"/>
+                <a:ea typeface="Red Hat Mono" pitchFamily="34" charset="-122"/>
+                <a:cs typeface="Red Hat Mono" pitchFamily="34" charset="-120"/>
+              </a:rPr>
+              <a:t>COPY go.mod go.sum ./
+</a:t>
+            </a:r>
+            <a:pPr algn="l" indent="0" marL="0">
+              <a:lnSpc>
+                <a:spcPct val="110000"/>
+              </a:lnSpc>
+              <a:buNone/>
+            </a:pPr>
+            <a:r>
+              <a:rPr lang="en-US" sz="1100" dirty="0">
+                <a:solidFill>
+                  <a:srgbClr val="E6E6E6"/>
+                </a:solidFill>
+                <a:latin typeface="Red Hat Mono" pitchFamily="34" charset="0"/>
+                <a:ea typeface="Red Hat Mono" pitchFamily="34" charset="-122"/>
+                <a:cs typeface="Red Hat Mono" pitchFamily="34" charset="-120"/>
+              </a:rPr>
+              <a:t>RUN go mod download
+</a:t>
+            </a:r>
+            <a:pPr algn="l" indent="0" marL="0">
+              <a:lnSpc>
+                <a:spcPct val="110000"/>
+              </a:lnSpc>
+              <a:buNone/>
+            </a:pPr>
+            <a:r>
+              <a:rPr lang="en-US" sz="1100" dirty="0">
+                <a:solidFill>
+                  <a:srgbClr val="E6E6E6"/>
+                </a:solidFill>
+                <a:latin typeface="Red Hat Mono" pitchFamily="34" charset="0"/>
+                <a:ea typeface="Red Hat Mono" pitchFamily="34" charset="-122"/>
+                <a:cs typeface="Red Hat Mono" pitchFamily="34" charset="-120"/>
+              </a:rPr>
+              <a:t>COPY . .
+</a:t>
+            </a:r>
+            <a:pPr algn="l" indent="0" marL="0">
+              <a:lnSpc>
+                <a:spcPct val="110000"/>
+              </a:lnSpc>
+              <a:buNone/>
+            </a:pPr>
+            <a:r>
+              <a:rPr lang="en-US" sz="1100" dirty="0">
+                <a:solidFill>
+                  <a:srgbClr val="E6E6E6"/>
+                </a:solidFill>
+                <a:latin typeface="Red Hat Mono" pitchFamily="34" charset="0"/>
+                <a:ea typeface="Red Hat Mono" pitchFamily="34" charset="-122"/>
+                <a:cs typeface="Red Hat Mono" pitchFamily="34" charset="-120"/>
+              </a:rPr>
+              <a:t>RUN CGO_ENABLED=0 go build -o /app ./cmd/server
+</a:t>
+            </a:r>
+            <a:pPr algn="l" indent="0" marL="0">
+              <a:lnSpc>
+                <a:spcPct val="110000"/>
+              </a:lnSpc>
+              <a:buNone/>
+            </a:pPr>
+            <a:r>
+              <a:rPr lang="en-US" sz="1100" dirty="0">
+                <a:solidFill>
+                  <a:srgbClr val="E6E6E6"/>
+                </a:solidFill>
+                <a:latin typeface="Red Hat Mono" pitchFamily="34" charset="0"/>
+                <a:ea typeface="Red Hat Mono" pitchFamily="34" charset="-122"/>
+                <a:cs typeface="Red Hat Mono" pitchFamily="34" charset="-120"/>
+              </a:rPr>
+              <a:t>
+</a:t>
+            </a:r>
+            <a:pPr algn="l" indent="0" marL="0">
+              <a:lnSpc>
+                <a:spcPct val="110000"/>
+              </a:lnSpc>
+              <a:buNone/>
+            </a:pPr>
+            <a:r>
+              <a:rPr lang="en-US" sz="1100" dirty="0">
+                <a:solidFill>
+                  <a:srgbClr val="8FB98F"/>
+                </a:solidFill>
+                <a:latin typeface="Red Hat Mono" pitchFamily="34" charset="0"/>
+                <a:ea typeface="Red Hat Mono" pitchFamily="34" charset="-122"/>
+                <a:cs typeface="Red Hat Mono" pitchFamily="34" charset="-120"/>
+              </a:rPr>
+              <a:t># ---- runtime stage: distroless — no compiler, no shell ----
+</a:t>
+            </a:r>
+            <a:pPr algn="l" indent="0" marL="0">
+              <a:lnSpc>
+                <a:spcPct val="110000"/>
+              </a:lnSpc>
+              <a:buNone/>
+            </a:pPr>
+            <a:r>
+              <a:rPr lang="en-US" sz="1100" dirty="0">
+                <a:solidFill>
+                  <a:srgbClr val="E6E6E6"/>
+                </a:solidFill>
+                <a:latin typeface="Red Hat Mono" pitchFamily="34" charset="0"/>
+                <a:ea typeface="Red Hat Mono" pitchFamily="34" charset="-122"/>
+                <a:cs typeface="Red Hat Mono" pitchFamily="34" charset="-120"/>
+              </a:rPr>
+              <a:t>FROM registry.access.redhat.com/hi/go:1.26
+</a:t>
+            </a:r>
+            <a:pPr algn="l" indent="0" marL="0">
+              <a:lnSpc>
+                <a:spcPct val="110000"/>
+              </a:lnSpc>
+              <a:buNone/>
+            </a:pPr>
+            <a:r>
+              <a:rPr lang="en-US" sz="1100" dirty="0">
+                <a:solidFill>
+                  <a:srgbClr val="E6E6E6"/>
+                </a:solidFill>
+                <a:latin typeface="Red Hat Mono" pitchFamily="34" charset="0"/>
+                <a:ea typeface="Red Hat Mono" pitchFamily="34" charset="-122"/>
+                <a:cs typeface="Red Hat Mono" pitchFamily="34" charset="-120"/>
+              </a:rPr>
+              <a:t>COPY --from=build /app /app
+</a:t>
+            </a:r>
+            <a:pPr algn="l" indent="0" marL="0">
+              <a:lnSpc>
+                <a:spcPct val="110000"/>
+              </a:lnSpc>
+              <a:buNone/>
+            </a:pPr>
+            <a:r>
+              <a:rPr lang="en-US" sz="1100" dirty="0">
+                <a:solidFill>
+                  <a:srgbClr val="E6E6E6"/>
+                </a:solidFill>
+                <a:latin typeface="Red Hat Mono" pitchFamily="34" charset="0"/>
+                <a:ea typeface="Red Hat Mono" pitchFamily="34" charset="-122"/>
+                <a:cs typeface="Red Hat Mono" pitchFamily="34" charset="-120"/>
+              </a:rPr>
+              <a:t>USER 1001
+</a:t>
+            </a:r>
+            <a:pPr algn="l" indent="0" marL="0">
+              <a:lnSpc>
+                <a:spcPct val="110000"/>
+              </a:lnSpc>
+              <a:buNone/>
+            </a:pPr>
+            <a:r>
+              <a:rPr lang="en-US" sz="1100" dirty="0">
+                <a:solidFill>
+                  <a:srgbClr val="E6E6E6"/>
+                </a:solidFill>
+                <a:latin typeface="Red Hat Mono" pitchFamily="34" charset="0"/>
+                <a:ea typeface="Red Hat Mono" pitchFamily="34" charset="-122"/>
+                <a:cs typeface="Red Hat Mono" pitchFamily="34" charset="-120"/>
+              </a:rPr>
+              <a:t>ENTRYPOINT ["/app"]
+</a:t>
+            </a:r>
+            <a:endParaRPr lang="en-US" sz="1100" dirty="0"/>
+          </a:p>
+        </p:txBody>
+      </p:sp>
+      <p:sp>
+        <p:nvSpPr>
+          <p:cNvPr id="9" name="Text 6"/>
           <p:cNvSpPr/>
           <p:nvPr/>
         </p:nvSpPr>
@@ -9901,7 +10519,7 @@
                 <a:ea typeface="Red Hat Text" pitchFamily="34" charset="-122"/>
                 <a:cs typeface="Red Hat Text" pitchFamily="34" charset="-120"/>
               </a:rPr>
-              <a:t>Figure 5.1 — Signature, SBOM attestation, and SLSA provenance — all on the same manifest, by digest.</a:t>
+              <a:t>COPY --from copies only the built binary; the compiler, module cache, and source never reach the shipped image.</a:t>
             </a:r>
             <a:endParaRPr lang="en-US" sz="1300" dirty="0"/>
           </a:p>
@@ -10028,7 +10646,7 @@
                 <a:ea typeface="Overpass" pitchFamily="34" charset="-122"/>
                 <a:cs typeface="Overpass" pitchFamily="34" charset="-120"/>
               </a:rPr>
-              <a:t>WORKING WITH IMAGES · CVE SCANNING</a:t>
+              <a:t>WORKING WITH IMAGES · SBOM &amp; SIGNING</a:t>
             </a:r>
             <a:endParaRPr lang="en-US" sz="1200" dirty="0"/>
           </a:p>
@@ -10067,22 +10685,45 @@
                 <a:ea typeface="Overpass" pitchFamily="34" charset="-122"/>
                 <a:cs typeface="Overpass" pitchFamily="34" charset="-120"/>
               </a:rPr>
-              <a:t>“Near-zero CVE”, measured</a:t>
+              <a:t>Three artifacts travel with the image</a:t>
             </a:r>
             <a:endParaRPr lang="en-US" sz="3000" dirty="0"/>
           </a:p>
         </p:txBody>
       </p:sp>
-      <p:sp>
-        <p:nvSpPr>
-          <p:cNvPr id="6" name="Text 3"/>
+      <p:pic>
+        <p:nvPicPr>
+          <p:cNvPr id="6" name="Image 1" descr="./png/05-sbom-and-signing-artifacts.png">    </p:cNvPr>
+          <p:cNvPicPr>
+            <a:picLocks noChangeAspect="1"/>
+          </p:cNvPicPr>
+          <p:nvPr/>
+        </p:nvPicPr>
+        <p:blipFill>
+          <a:blip r:embed="rId2"/>
+          <a:srcRect l="0" r="0" t="0" b="0"/>
+          <a:stretch/>
+        </p:blipFill>
+        <p:spPr>
+          <a:xfrm>
+            <a:off x="1645920" y="1600200"/>
+            <a:ext cx="8906256" cy="4343400"/>
+          </a:xfrm>
+          <a:prstGeom prst="rect">
+            <a:avLst/>
+          </a:prstGeom>
+        </p:spPr>
+      </p:pic>
+      <p:sp>
+        <p:nvSpPr>
+          <p:cNvPr id="7" name="Text 3"/>
           <p:cNvSpPr/>
           <p:nvPr/>
         </p:nvSpPr>
         <p:spPr>
           <a:xfrm>
-            <a:off x="566928" y="1691640"/>
-            <a:ext cx="11055096" cy="4434840"/>
+            <a:off x="566928" y="5943600"/>
+            <a:ext cx="11055096" cy="310896"/>
           </a:xfrm>
           <a:prstGeom prst="rect">
             <a:avLst/>
@@ -10091,102 +10732,24 @@
           <a:ln/>
         </p:spPr>
         <p:txBody>
-          <a:bodyPr wrap="square" rtlCol="0" anchor="t"/>
-          <a:lstStyle/>
-          <a:p>
-            <a:pPr algn="l" marL="342900" indent="-342900">
-              <a:lnSpc>
-                <a:spcPct val="115000"/>
-              </a:lnSpc>
-              <a:spcAft>
-                <a:spcPts val="600"/>
-              </a:spcAft>
-              <a:buSzPct val="100000"/>
-              <a:buChar char="●"/>
-            </a:pPr>
-            <a:r>
-              <a:rPr lang="en-US" sz="1600" dirty="0">
-                <a:solidFill>
-                  <a:srgbClr val="242424"/>
+          <a:bodyPr wrap="square" rtlCol="0" anchor="ctr"/>
+          <a:lstStyle/>
+          <a:p>
+            <a:pPr algn="ctr" indent="0" marL="0">
+              <a:buNone/>
+            </a:pPr>
+            <a:r>
+              <a:rPr lang="en-US" sz="1300" i="1" dirty="0">
+                <a:solidFill>
+                  <a:srgbClr val="5A5A5A"/>
                 </a:solidFill>
                 <a:latin typeface="Red Hat Text" pitchFamily="34" charset="0"/>
                 <a:ea typeface="Red Hat Text" pitchFamily="34" charset="-122"/>
                 <a:cs typeface="Red Hat Text" pitchFamily="34" charset="-120"/>
               </a:rPr>
-              <a:t>Grype reads the image's package list, matches each against a vulnerability database, and reports by severity — with the caveat that a match isn't proof of an exploitable path, and the database moves daily.</a:t>
-            </a:r>
-            <a:endParaRPr lang="en-US" sz="1600" dirty="0"/>
-          </a:p>
-          <a:p>
-            <a:pPr algn="l" marL="342900" indent="-342900">
-              <a:lnSpc>
-                <a:spcPct val="115000"/>
-              </a:lnSpc>
-              <a:spcAft>
-                <a:spcPts val="600"/>
-              </a:spcAft>
-              <a:buSzPct val="100000"/>
-              <a:buChar char="●"/>
-            </a:pPr>
-            <a:r>
-              <a:rPr lang="en-US" sz="1600" dirty="0">
-                <a:solidFill>
-                  <a:srgbClr val="242424"/>
-                </a:solidFill>
-                <a:latin typeface="Red Hat Text" pitchFamily="34" charset="0"/>
-                <a:ea typeface="Red Hat Text" pitchFamily="34" charset="-122"/>
-                <a:cs typeface="Red Hat Text" pitchFamily="34" charset="-120"/>
-              </a:rPr>
-              <a:t>Scan a hardened image and a general-purpose image side by side: the hardened one is near-zero; the general-purpose one is typically tens to hundreds.</a:t>
-            </a:r>
-            <a:endParaRPr lang="en-US" sz="1600" dirty="0"/>
-          </a:p>
-          <a:p>
-            <a:pPr algn="l" marL="342900" indent="-342900">
-              <a:lnSpc>
-                <a:spcPct val="115000"/>
-              </a:lnSpc>
-              <a:spcAft>
-                <a:spcPts val="600"/>
-              </a:spcAft>
-              <a:buSzPct val="100000"/>
-              <a:buChar char="●"/>
-            </a:pPr>
-            <a:r>
-              <a:rPr lang="en-US" sz="1600" dirty="0">
-                <a:solidFill>
-                  <a:srgbClr val="242424"/>
-                </a:solidFill>
-                <a:latin typeface="Red Hat Text" pitchFamily="34" charset="0"/>
-                <a:ea typeface="Red Hat Text" pitchFamily="34" charset="-122"/>
-                <a:cs typeface="Red Hat Text" pitchFamily="34" charset="-120"/>
-              </a:rPr>
-              <a:t>Your own derived image shows what your app adds on top — the base stays clean, so the work shrinks to keeping your direct dependencies patched.</a:t>
-            </a:r>
-            <a:endParaRPr lang="en-US" sz="1600" dirty="0"/>
-          </a:p>
-          <a:p>
-            <a:pPr algn="l" indent="0" marL="0">
-              <a:lnSpc>
-                <a:spcPct val="115000"/>
-              </a:lnSpc>
-              <a:spcAft>
-                <a:spcPts val="400"/>
-              </a:spcAft>
-              <a:buNone/>
-            </a:pPr>
-            <a:r>
-              <a:rPr lang="en-US" sz="1600" dirty="0">
-                <a:solidFill>
-                  <a:srgbClr val="242424"/>
-                </a:solidFill>
-                <a:latin typeface="Red Hat Text" pitchFamily="34" charset="0"/>
-                <a:ea typeface="Red Hat Text" pitchFamily="34" charset="-122"/>
-                <a:cs typeface="Red Hat Text" pitchFamily="34" charset="-120"/>
-              </a:rPr>
-              <a:t>grype &lt;image&gt; --fail-on high gates a CI build automatically.</a:t>
-            </a:r>
-            <a:endParaRPr lang="en-US" sz="1600" dirty="0"/>
+              <a:t>Figure 5.1 — Signature, SBOM attestation, and SLSA provenance — all on the same manifest, by digest.</a:t>
+            </a:r>
+            <a:endParaRPr lang="en-US" sz="1300" dirty="0"/>
           </a:p>
         </p:txBody>
       </p:sp>
@@ -10311,7 +10874,7 @@
                 <a:ea typeface="Overpass" pitchFamily="34" charset="-122"/>
                 <a:cs typeface="Overpass" pitchFamily="34" charset="-120"/>
               </a:rPr>
-              <a:t>WORKING WITH IMAGES · PODMAN COMPOSE</a:t>
+              <a:t>WORKING WITH IMAGES · CVE SCANNING</a:t>
             </a:r>
             <a:endParaRPr lang="en-US" sz="1200" dirty="0"/>
           </a:p>
@@ -10350,45 +10913,22 @@
                 <a:ea typeface="Overpass" pitchFamily="34" charset="-122"/>
                 <a:cs typeface="Overpass" pitchFamily="34" charset="-120"/>
               </a:rPr>
-              <a:t>Multi-service apps with Podman Compose</a:t>
+              <a:t>“Near-zero CVE”, measured</a:t>
             </a:r>
             <a:endParaRPr lang="en-US" sz="3000" dirty="0"/>
           </a:p>
         </p:txBody>
       </p:sp>
-      <p:pic>
-        <p:nvPicPr>
-          <p:cNvPr id="6" name="Image 1" descr="./png/07-podman-compose-stack.png">    </p:cNvPr>
-          <p:cNvPicPr>
-            <a:picLocks noChangeAspect="1"/>
-          </p:cNvPicPr>
-          <p:nvPr/>
-        </p:nvPicPr>
-        <p:blipFill>
-          <a:blip r:embed="rId2"/>
-          <a:srcRect l="0" r="0" t="0" b="0"/>
-          <a:stretch/>
-        </p:blipFill>
-        <p:spPr>
-          <a:xfrm>
-            <a:off x="1645920" y="1600200"/>
-            <a:ext cx="8906256" cy="4343400"/>
-          </a:xfrm>
-          <a:prstGeom prst="rect">
-            <a:avLst/>
-          </a:prstGeom>
-        </p:spPr>
-      </p:pic>
-      <p:sp>
-        <p:nvSpPr>
-          <p:cNvPr id="7" name="Text 3"/>
+      <p:sp>
+        <p:nvSpPr>
+          <p:cNvPr id="6" name="Text 3"/>
           <p:cNvSpPr/>
           <p:nvPr/>
         </p:nvSpPr>
         <p:spPr>
           <a:xfrm>
-            <a:off x="566928" y="5943600"/>
-            <a:ext cx="11055096" cy="310896"/>
+            <a:off x="566928" y="1691640"/>
+            <a:ext cx="11055096" cy="4434840"/>
           </a:xfrm>
           <a:prstGeom prst="rect">
             <a:avLst/>
@@ -10397,24 +10937,102 @@
           <a:ln/>
         </p:spPr>
         <p:txBody>
-          <a:bodyPr wrap="square" rtlCol="0" anchor="ctr"/>
-          <a:lstStyle/>
-          <a:p>
-            <a:pPr algn="ctr" indent="0" marL="0">
-              <a:buNone/>
-            </a:pPr>
-            <a:r>
-              <a:rPr lang="en-US" sz="1300" i="1" dirty="0">
-                <a:solidFill>
-                  <a:srgbClr val="5A5A5A"/>
+          <a:bodyPr wrap="square" rtlCol="0" anchor="t"/>
+          <a:lstStyle/>
+          <a:p>
+            <a:pPr algn="l" marL="342900" indent="-342900">
+              <a:lnSpc>
+                <a:spcPct val="115000"/>
+              </a:lnSpc>
+              <a:spcAft>
+                <a:spcPts val="600"/>
+              </a:spcAft>
+              <a:buSzPct val="100000"/>
+              <a:buChar char="●"/>
+            </a:pPr>
+            <a:r>
+              <a:rPr lang="en-US" sz="1600" dirty="0">
+                <a:solidFill>
+                  <a:srgbClr val="242424"/>
                 </a:solidFill>
                 <a:latin typeface="Red Hat Text" pitchFamily="34" charset="0"/>
                 <a:ea typeface="Red Hat Text" pitchFamily="34" charset="-122"/>
                 <a:cs typeface="Red Hat Text" pitchFamily="34" charset="-120"/>
               </a:rPr>
-              <a:t>Figure 7.1 — A hardened web service, a database, and an OpenTelemetry collector, wired with compose.</a:t>
-            </a:r>
-            <a:endParaRPr lang="en-US" sz="1300" dirty="0"/>
+              <a:t>Grype reads the image's package list, matches each against a vulnerability database, and reports by severity — with the caveat that a match isn't proof of an exploitable path, and the database moves daily.</a:t>
+            </a:r>
+            <a:endParaRPr lang="en-US" sz="1600" dirty="0"/>
+          </a:p>
+          <a:p>
+            <a:pPr algn="l" marL="342900" indent="-342900">
+              <a:lnSpc>
+                <a:spcPct val="115000"/>
+              </a:lnSpc>
+              <a:spcAft>
+                <a:spcPts val="600"/>
+              </a:spcAft>
+              <a:buSzPct val="100000"/>
+              <a:buChar char="●"/>
+            </a:pPr>
+            <a:r>
+              <a:rPr lang="en-US" sz="1600" dirty="0">
+                <a:solidFill>
+                  <a:srgbClr val="242424"/>
+                </a:solidFill>
+                <a:latin typeface="Red Hat Text" pitchFamily="34" charset="0"/>
+                <a:ea typeface="Red Hat Text" pitchFamily="34" charset="-122"/>
+                <a:cs typeface="Red Hat Text" pitchFamily="34" charset="-120"/>
+              </a:rPr>
+              <a:t>Scan a hardened image and a general-purpose image side by side: the hardened one is near-zero; the general-purpose one is typically tens to hundreds.</a:t>
+            </a:r>
+            <a:endParaRPr lang="en-US" sz="1600" dirty="0"/>
+          </a:p>
+          <a:p>
+            <a:pPr algn="l" marL="342900" indent="-342900">
+              <a:lnSpc>
+                <a:spcPct val="115000"/>
+              </a:lnSpc>
+              <a:spcAft>
+                <a:spcPts val="600"/>
+              </a:spcAft>
+              <a:buSzPct val="100000"/>
+              <a:buChar char="●"/>
+            </a:pPr>
+            <a:r>
+              <a:rPr lang="en-US" sz="1600" dirty="0">
+                <a:solidFill>
+                  <a:srgbClr val="242424"/>
+                </a:solidFill>
+                <a:latin typeface="Red Hat Text" pitchFamily="34" charset="0"/>
+                <a:ea typeface="Red Hat Text" pitchFamily="34" charset="-122"/>
+                <a:cs typeface="Red Hat Text" pitchFamily="34" charset="-120"/>
+              </a:rPr>
+              <a:t>Your own derived image shows what your app adds on top — the base stays clean, so the work shrinks to keeping your direct dependencies patched.</a:t>
+            </a:r>
+            <a:endParaRPr lang="en-US" sz="1600" dirty="0"/>
+          </a:p>
+          <a:p>
+            <a:pPr algn="l" indent="0" marL="0">
+              <a:lnSpc>
+                <a:spcPct val="115000"/>
+              </a:lnSpc>
+              <a:spcAft>
+                <a:spcPts val="400"/>
+              </a:spcAft>
+              <a:buNone/>
+            </a:pPr>
+            <a:r>
+              <a:rPr lang="en-US" sz="1600" dirty="0">
+                <a:solidFill>
+                  <a:srgbClr val="242424"/>
+                </a:solidFill>
+                <a:latin typeface="Red Hat Text" pitchFamily="34" charset="0"/>
+                <a:ea typeface="Red Hat Text" pitchFamily="34" charset="-122"/>
+                <a:cs typeface="Red Hat Text" pitchFamily="34" charset="-120"/>
+              </a:rPr>
+              <a:t>grype &lt;image&gt; --fail-on high gates a CI build automatically.</a:t>
+            </a:r>
+            <a:endParaRPr lang="en-US" sz="1600" dirty="0"/>
           </a:p>
         </p:txBody>
       </p:sp>
@@ -10539,7 +11157,7 @@
                 <a:ea typeface="Overpass" pitchFamily="34" charset="-122"/>
                 <a:cs typeface="Overpass" pitchFamily="34" charset="-120"/>
               </a:rPr>
-              <a:t>WORKING WITH IMAGES · EFFICIENT LAYERS</a:t>
+              <a:t>WORKING WITH IMAGES · CVE SCANNING</a:t>
             </a:r>
             <a:endParaRPr lang="en-US" sz="1200" dirty="0"/>
           </a:p>
@@ -10554,7 +11172,7 @@
         <p:spPr>
           <a:xfrm>
             <a:off x="566928" y="676656"/>
-            <a:ext cx="11055096" cy="1005840"/>
+            <a:ext cx="7223760" cy="1005840"/>
           </a:xfrm>
           <a:prstGeom prst="rect">
             <a:avLst/>
@@ -10578,38 +11196,284 @@
                 <a:ea typeface="Overpass" pitchFamily="34" charset="-122"/>
                 <a:cs typeface="Overpass" pitchFamily="34" charset="-120"/>
               </a:rPr>
-              <a:t>zstd:chunked — pull only the bytes that changed</a:t>
+              <a:t>The same claim, from the command line</a:t>
             </a:r>
             <a:endParaRPr lang="en-US" sz="3000" dirty="0"/>
           </a:p>
         </p:txBody>
       </p:sp>
-      <p:pic>
-        <p:nvPicPr>
-          <p:cNvPr id="6" name="Image 1" descr="./png/09-zstd-chunked-layer-format.png">    </p:cNvPr>
-          <p:cNvPicPr>
-            <a:picLocks noChangeAspect="1"/>
-          </p:cNvPicPr>
-          <p:nvPr/>
-        </p:nvPicPr>
-        <p:blipFill>
-          <a:blip r:embed="rId2"/>
-          <a:srcRect l="0" r="0" t="0" b="0"/>
-          <a:stretch/>
-        </p:blipFill>
-        <p:spPr>
-          <a:xfrm>
-            <a:off x="1645920" y="1600200"/>
-            <a:ext cx="8906256" cy="4343400"/>
-          </a:xfrm>
-          <a:prstGeom prst="rect">
-            <a:avLst/>
-          </a:prstGeom>
-        </p:spPr>
-      </p:pic>
-      <p:sp>
-        <p:nvSpPr>
-          <p:cNvPr id="7" name="Text 3"/>
+      <p:sp>
+        <p:nvSpPr>
+          <p:cNvPr id="6" name="Text 3"/>
+          <p:cNvSpPr/>
+          <p:nvPr/>
+        </p:nvSpPr>
+        <p:spPr>
+          <a:xfrm>
+            <a:off x="7882128" y="969264"/>
+            <a:ext cx="3739896" cy="274320"/>
+          </a:xfrm>
+          <a:prstGeom prst="rect">
+            <a:avLst/>
+          </a:prstGeom>
+          <a:noFill/>
+          <a:ln/>
+        </p:spPr>
+        <p:txBody>
+          <a:bodyPr wrap="square" rtlCol="0" anchor="ctr"/>
+          <a:lstStyle/>
+          <a:p>
+            <a:pPr algn="r" indent="0" marL="0">
+              <a:buNone/>
+            </a:pPr>
+            <a:r>
+              <a:rPr lang="en-US" sz="1100" b="1" spc="200" kern="0" dirty="0">
+                <a:solidFill>
+                  <a:srgbClr val="5A5A5A"/>
+                </a:solidFill>
+                <a:latin typeface="Red Hat Mono" pitchFamily="34" charset="0"/>
+                <a:ea typeface="Red Hat Mono" pitchFamily="34" charset="-122"/>
+                <a:cs typeface="Red Hat Mono" pitchFamily="34" charset="-120"/>
+              </a:rPr>
+              <a:t>zsh</a:t>
+            </a:r>
+            <a:endParaRPr lang="en-US" sz="1100" dirty="0"/>
+          </a:p>
+        </p:txBody>
+      </p:sp>
+      <p:sp>
+        <p:nvSpPr>
+          <p:cNvPr id="7" name="Shape 4"/>
+          <p:cNvSpPr/>
+          <p:nvPr/>
+        </p:nvSpPr>
+        <p:spPr>
+          <a:xfrm>
+            <a:off x="566928" y="1691640"/>
+            <a:ext cx="11055096" cy="4251960"/>
+          </a:xfrm>
+          <a:prstGeom prst="rect">
+            <a:avLst/>
+          </a:prstGeom>
+          <a:solidFill>
+            <a:srgbClr val="151515"/>
+          </a:solidFill>
+          <a:ln w="12700">
+            <a:solidFill>
+              <a:srgbClr val="151515"/>
+            </a:solidFill>
+            <a:prstDash val="solid"/>
+          </a:ln>
+        </p:spPr>
+      </p:sp>
+      <p:sp>
+        <p:nvSpPr>
+          <p:cNvPr id="8" name="Text 5"/>
+          <p:cNvSpPr/>
+          <p:nvPr/>
+        </p:nvSpPr>
+        <p:spPr>
+          <a:xfrm>
+            <a:off x="749808" y="1783080"/>
+            <a:ext cx="10689336" cy="4069080"/>
+          </a:xfrm>
+          <a:prstGeom prst="rect">
+            <a:avLst/>
+          </a:prstGeom>
+          <a:noFill/>
+          <a:ln/>
+        </p:spPr>
+        <p:txBody>
+          <a:bodyPr wrap="square" rtlCol="0" anchor="t"/>
+          <a:lstStyle/>
+          <a:p>
+            <a:pPr algn="l" indent="0" marL="0">
+              <a:lnSpc>
+                <a:spcPct val="110000"/>
+              </a:lnSpc>
+              <a:buNone/>
+            </a:pPr>
+            <a:r>
+              <a:rPr lang="en-US" sz="1100" dirty="0">
+                <a:solidFill>
+                  <a:srgbClr val="8FB98F"/>
+                </a:solidFill>
+                <a:latin typeface="Red Hat Mono" pitchFamily="34" charset="0"/>
+                <a:ea typeface="Red Hat Mono" pitchFamily="34" charset="-122"/>
+                <a:cs typeface="Red Hat Mono" pitchFamily="34" charset="-120"/>
+              </a:rPr>
+              <a:t># keep the vuln DB fresh — grype refuses a stale one
+</a:t>
+            </a:r>
+            <a:pPr algn="l" indent="0" marL="0">
+              <a:lnSpc>
+                <a:spcPct val="110000"/>
+              </a:lnSpc>
+              <a:buNone/>
+            </a:pPr>
+            <a:r>
+              <a:rPr lang="en-US" sz="1100" dirty="0">
+                <a:solidFill>
+                  <a:srgbClr val="E6E6E6"/>
+                </a:solidFill>
+                <a:latin typeface="Red Hat Mono" pitchFamily="34" charset="0"/>
+                <a:ea typeface="Red Hat Mono" pitchFamily="34" charset="-122"/>
+                <a:cs typeface="Red Hat Mono" pitchFamily="34" charset="-120"/>
+              </a:rPr>
+              <a:t>grype db status || grype db update
+</a:t>
+            </a:r>
+            <a:pPr algn="l" indent="0" marL="0">
+              <a:lnSpc>
+                <a:spcPct val="110000"/>
+              </a:lnSpc>
+              <a:buNone/>
+            </a:pPr>
+            <a:r>
+              <a:rPr lang="en-US" sz="1100" dirty="0">
+                <a:solidFill>
+                  <a:srgbClr val="E6E6E6"/>
+                </a:solidFill>
+                <a:latin typeface="Red Hat Mono" pitchFamily="34" charset="0"/>
+                <a:ea typeface="Red Hat Mono" pitchFamily="34" charset="-122"/>
+                <a:cs typeface="Red Hat Mono" pitchFamily="34" charset="-120"/>
+              </a:rPr>
+              <a:t>
+</a:t>
+            </a:r>
+            <a:pPr algn="l" indent="0" marL="0">
+              <a:lnSpc>
+                <a:spcPct val="110000"/>
+              </a:lnSpc>
+              <a:buNone/>
+            </a:pPr>
+            <a:r>
+              <a:rPr lang="en-US" sz="1100" dirty="0">
+                <a:solidFill>
+                  <a:srgbClr val="8FB98F"/>
+                </a:solidFill>
+                <a:latin typeface="Red Hat Mono" pitchFamily="34" charset="0"/>
+                <a:ea typeface="Red Hat Mono" pitchFamily="34" charset="-122"/>
+                <a:cs typeface="Red Hat Mono" pitchFamily="34" charset="-120"/>
+              </a:rPr>
+              <a:t># hardened vs general-purpose, side by side
+</a:t>
+            </a:r>
+            <a:pPr algn="l" indent="0" marL="0">
+              <a:lnSpc>
+                <a:spcPct val="110000"/>
+              </a:lnSpc>
+              <a:buNone/>
+            </a:pPr>
+            <a:r>
+              <a:rPr lang="en-US" sz="1100" dirty="0">
+                <a:solidFill>
+                  <a:srgbClr val="E6E6E6"/>
+                </a:solidFill>
+                <a:latin typeface="Red Hat Mono" pitchFamily="34" charset="0"/>
+                <a:ea typeface="Red Hat Mono" pitchFamily="34" charset="-122"/>
+                <a:cs typeface="Red Hat Mono" pitchFamily="34" charset="-120"/>
+              </a:rPr>
+              <a:t>grype registry.access.redhat.com/hi/nginx:1
+</a:t>
+            </a:r>
+            <a:pPr algn="l" indent="0" marL="0">
+              <a:lnSpc>
+                <a:spcPct val="110000"/>
+              </a:lnSpc>
+              <a:buNone/>
+            </a:pPr>
+            <a:r>
+              <a:rPr lang="en-US" sz="1100" dirty="0">
+                <a:solidFill>
+                  <a:srgbClr val="E6E6E6"/>
+                </a:solidFill>
+                <a:latin typeface="Red Hat Mono" pitchFamily="34" charset="0"/>
+                <a:ea typeface="Red Hat Mono" pitchFamily="34" charset="-122"/>
+                <a:cs typeface="Red Hat Mono" pitchFamily="34" charset="-120"/>
+              </a:rPr>
+              <a:t>grype docker.io/library/nginx:latest
+</a:t>
+            </a:r>
+            <a:pPr algn="l" indent="0" marL="0">
+              <a:lnSpc>
+                <a:spcPct val="110000"/>
+              </a:lnSpc>
+              <a:buNone/>
+            </a:pPr>
+            <a:r>
+              <a:rPr lang="en-US" sz="1100" dirty="0">
+                <a:solidFill>
+                  <a:srgbClr val="E6E6E6"/>
+                </a:solidFill>
+                <a:latin typeface="Red Hat Mono" pitchFamily="34" charset="0"/>
+                <a:ea typeface="Red Hat Mono" pitchFamily="34" charset="-122"/>
+                <a:cs typeface="Red Hat Mono" pitchFamily="34" charset="-120"/>
+              </a:rPr>
+              <a:t>
+</a:t>
+            </a:r>
+            <a:pPr algn="l" indent="0" marL="0">
+              <a:lnSpc>
+                <a:spcPct val="110000"/>
+              </a:lnSpc>
+              <a:buNone/>
+            </a:pPr>
+            <a:r>
+              <a:rPr lang="en-US" sz="1100" dirty="0">
+                <a:solidFill>
+                  <a:srgbClr val="8FB98F"/>
+                </a:solidFill>
+                <a:latin typeface="Red Hat Mono" pitchFamily="34" charset="0"/>
+                <a:ea typeface="Red Hat Mono" pitchFamily="34" charset="-122"/>
+                <a:cs typeface="Red Hat Mono" pitchFamily="34" charset="-120"/>
+              </a:rPr>
+              <a:t># or scan the signed SBOM instead of the image, and gate CI
+</a:t>
+            </a:r>
+            <a:pPr algn="l" indent="0" marL="0">
+              <a:lnSpc>
+                <a:spcPct val="110000"/>
+              </a:lnSpc>
+              <a:buNone/>
+            </a:pPr>
+            <a:r>
+              <a:rPr lang="en-US" sz="1100" dirty="0">
+                <a:solidFill>
+                  <a:srgbClr val="E6E6E6"/>
+                </a:solidFill>
+                <a:latin typeface="Red Hat Mono" pitchFamily="34" charset="0"/>
+                <a:ea typeface="Red Hat Mono" pitchFamily="34" charset="-122"/>
+                <a:cs typeface="Red Hat Mono" pitchFamily="34" charset="-120"/>
+              </a:rPr>
+              <a:t>cosign download sbom registry.access.redhat.com/hi/nginx:1 &gt; nginx.sbom.json
+</a:t>
+            </a:r>
+            <a:pPr algn="l" indent="0" marL="0">
+              <a:lnSpc>
+                <a:spcPct val="110000"/>
+              </a:lnSpc>
+              <a:buNone/>
+            </a:pPr>
+            <a:r>
+              <a:rPr lang="en-US" sz="1100" dirty="0">
+                <a:solidFill>
+                  <a:srgbClr val="E6E6E6"/>
+                </a:solidFill>
+                <a:latin typeface="Red Hat Mono" pitchFamily="34" charset="0"/>
+                <a:ea typeface="Red Hat Mono" pitchFamily="34" charset="-122"/>
+                <a:cs typeface="Red Hat Mono" pitchFamily="34" charset="-120"/>
+              </a:rPr>
+              <a:t>grype sbom:nginx.sbom.json --fail-on high   # non-zero exit fails the build
+</a:t>
+            </a:r>
+            <a:endParaRPr lang="en-US" sz="1100" dirty="0"/>
+          </a:p>
+        </p:txBody>
+      </p:sp>
+      <p:sp>
+        <p:nvSpPr>
+          <p:cNvPr id="9" name="Text 6"/>
           <p:cNvSpPr/>
           <p:nvPr/>
         </p:nvSpPr>
@@ -10640,7 +11504,7 @@
                 <a:ea typeface="Red Hat Text" pitchFamily="34" charset="-122"/>
                 <a:cs typeface="Red Hat Text" pitchFamily="34" charset="-120"/>
               </a:rPr>
-              <a:t>Figure 9.1 — zstd:chunked makes layers seekable, so clients fetch only changed chunks.</a:t>
+              <a:t>Scan the image directly, or scan its signed SBOM; --fail-on turns either into a CI gate.</a:t>
             </a:r>
             <a:endParaRPr lang="en-US" sz="1300" dirty="0"/>
           </a:p>
@@ -10767,7 +11631,7 @@
                 <a:ea typeface="Overpass" pitchFamily="34" charset="-122"/>
                 <a:cs typeface="Overpass" pitchFamily="34" charset="-120"/>
               </a:rPr>
-              <a:t>WORKING WITH IMAGES · EFFICIENT LAYERS</a:t>
+              <a:t>WORKING WITH IMAGES · PODMAN COMPOSE</a:t>
             </a:r>
             <a:endParaRPr lang="en-US" sz="1200" dirty="0"/>
           </a:p>
@@ -10806,7 +11670,7 @@
                 <a:ea typeface="Overpass" pitchFamily="34" charset="-122"/>
                 <a:cs typeface="Overpass" pitchFamily="34" charset="-120"/>
               </a:rPr>
-              <a:t>chunkah — content-based layer splitting</a:t>
+              <a:t>Multi-service apps with Podman Compose</a:t>
             </a:r>
             <a:endParaRPr lang="en-US" sz="3000" dirty="0"/>
           </a:p>
@@ -10814,7 +11678,7 @@
       </p:sp>
       <p:pic>
         <p:nvPicPr>
-          <p:cNvPr id="6" name="Image 1" descr="./png/10-chunkah-layer-split.png">    </p:cNvPr>
+          <p:cNvPr id="6" name="Image 1" descr="./png/07-podman-compose-stack.png">    </p:cNvPr>
           <p:cNvPicPr>
             <a:picLocks noChangeAspect="1"/>
           </p:cNvPicPr>
@@ -10868,7 +11732,7 @@
                 <a:ea typeface="Red Hat Text" pitchFamily="34" charset="-122"/>
                 <a:cs typeface="Red Hat Text" pitchFamily="34" charset="-120"/>
               </a:rPr>
-              <a:t>Figure 10.1 — Layers grouped by package, so a package update invalidates only its own layer.</a:t>
+              <a:t>Figure 7.1 — A hardened web service, a database, and an OpenTelemetry collector, wired with compose.</a:t>
             </a:r>
             <a:endParaRPr lang="en-US" sz="1300" dirty="0"/>
           </a:p>
@@ -10995,7 +11859,7 @@
                 <a:ea typeface="Overpass" pitchFamily="34" charset="-122"/>
                 <a:cs typeface="Overpass" pitchFamily="34" charset="-120"/>
               </a:rPr>
-              <a:t>WORKING WITH IMAGES · TRUSTED LIBRARIES</a:t>
+              <a:t>WORKING WITH IMAGES · EFFICIENT LAYERS</a:t>
             </a:r>
             <a:endParaRPr lang="en-US" sz="1200" dirty="0"/>
           </a:p>
@@ -11034,22 +11898,45 @@
                 <a:ea typeface="Overpass" pitchFamily="34" charset="-122"/>
                 <a:cs typeface="Overpass" pitchFamily="34" charset="-120"/>
               </a:rPr>
-              <a:t>Provenance, extended to your dependencies</a:t>
+              <a:t>zstd:chunked — pull only the bytes that changed</a:t>
             </a:r>
             <a:endParaRPr lang="en-US" sz="3000" dirty="0"/>
           </a:p>
         </p:txBody>
       </p:sp>
-      <p:sp>
-        <p:nvSpPr>
-          <p:cNvPr id="6" name="Text 3"/>
+      <p:pic>
+        <p:nvPicPr>
+          <p:cNvPr id="6" name="Image 1" descr="./png/09-zstd-chunked-layer-format.png">    </p:cNvPr>
+          <p:cNvPicPr>
+            <a:picLocks noChangeAspect="1"/>
+          </p:cNvPicPr>
+          <p:nvPr/>
+        </p:nvPicPr>
+        <p:blipFill>
+          <a:blip r:embed="rId2"/>
+          <a:srcRect l="0" r="0" t="0" b="0"/>
+          <a:stretch/>
+        </p:blipFill>
+        <p:spPr>
+          <a:xfrm>
+            <a:off x="1645920" y="1600200"/>
+            <a:ext cx="8906256" cy="4343400"/>
+          </a:xfrm>
+          <a:prstGeom prst="rect">
+            <a:avLst/>
+          </a:prstGeom>
+        </p:spPr>
+      </p:pic>
+      <p:sp>
+        <p:nvSpPr>
+          <p:cNvPr id="7" name="Text 3"/>
           <p:cNvSpPr/>
           <p:nvPr/>
         </p:nvSpPr>
         <p:spPr>
           <a:xfrm>
-            <a:off x="566928" y="1691640"/>
-            <a:ext cx="11055096" cy="4434840"/>
+            <a:off x="566928" y="5943600"/>
+            <a:ext cx="11055096" cy="310896"/>
           </a:xfrm>
           <a:prstGeom prst="rect">
             <a:avLst/>
@@ -11058,102 +11945,24 @@
           <a:ln/>
         </p:spPr>
         <p:txBody>
-          <a:bodyPr wrap="square" rtlCol="0" anchor="t"/>
-          <a:lstStyle/>
-          <a:p>
-            <a:pPr algn="l" marL="342900" indent="-342900">
-              <a:lnSpc>
-                <a:spcPct val="115000"/>
-              </a:lnSpc>
-              <a:spcAft>
-                <a:spcPts val="600"/>
-              </a:spcAft>
-              <a:buSzPct val="100000"/>
-              <a:buChar char="●"/>
-            </a:pPr>
-            <a:r>
-              <a:rPr lang="en-US" sz="1600" dirty="0">
-                <a:solidFill>
-                  <a:srgbClr val="242424"/>
+          <a:bodyPr wrap="square" rtlCol="0" anchor="ctr"/>
+          <a:lstStyle/>
+          <a:p>
+            <a:pPr algn="ctr" indent="0" marL="0">
+              <a:buNone/>
+            </a:pPr>
+            <a:r>
+              <a:rPr lang="en-US" sz="1300" i="1" dirty="0">
+                <a:solidFill>
+                  <a:srgbClr val="5A5A5A"/>
                 </a:solidFill>
                 <a:latin typeface="Red Hat Text" pitchFamily="34" charset="0"/>
                 <a:ea typeface="Red Hat Text" pitchFamily="34" charset="-122"/>
                 <a:cs typeface="Red Hat Text" pitchFamily="34" charset="-120"/>
               </a:rPr>
-              <a:t>The base image gives trust at the container layer; your app still runs whatever you pulled from PyPI — a public, unaudited index.</a:t>
-            </a:r>
-            <a:endParaRPr lang="en-US" sz="1600" dirty="0"/>
-          </a:p>
-          <a:p>
-            <a:pPr algn="l" marL="342900" indent="-342900">
-              <a:lnSpc>
-                <a:spcPct val="115000"/>
-              </a:lnSpc>
-              <a:spcAft>
-                <a:spcPts val="600"/>
-              </a:spcAft>
-              <a:buSzPct val="100000"/>
-              <a:buChar char="●"/>
-            </a:pPr>
-            <a:r>
-              <a:rPr lang="en-US" sz="1600" dirty="0">
-                <a:solidFill>
-                  <a:srgbClr val="242424"/>
-                </a:solidFill>
-                <a:latin typeface="Red Hat Text" pitchFamily="34" charset="0"/>
-                <a:ea typeface="Red Hat Text" pitchFamily="34" charset="-122"/>
-                <a:cs typeface="Red Hat Text" pitchFamily="34" charset="-120"/>
-              </a:rPr>
-              <a:t>Red Hat Trusted Libraries is a pip-compatible index of curated Python packages, rebuilt from source in Red Hat's Konflux pipeline with SLSA Level 3 provenance and signed attestations (via Red Hat Trusted Artifact Signer).</a:t>
-            </a:r>
-            <a:endParaRPr lang="en-US" sz="1600" dirty="0"/>
-          </a:p>
-          <a:p>
-            <a:pPr algn="l" marL="342900" indent="-342900">
-              <a:lnSpc>
-                <a:spcPct val="115000"/>
-              </a:lnSpc>
-              <a:spcAft>
-                <a:spcPts val="600"/>
-              </a:spcAft>
-              <a:buSzPct val="100000"/>
-              <a:buChar char="●"/>
-            </a:pPr>
-            <a:r>
-              <a:rPr lang="en-US" sz="1600" dirty="0">
-                <a:solidFill>
-                  <a:srgbClr val="242424"/>
-                </a:solidFill>
-                <a:latin typeface="Red Hat Text" pitchFamily="34" charset="0"/>
-                <a:ea typeface="Red Hat Text" pitchFamily="34" charset="-122"/>
-                <a:cs typeface="Red Hat Text" pitchFamily="34" charset="-120"/>
-              </a:rPr>
-              <a:t>Point pip at packages.redhat.com/trusted-libraries, keep PyPI as a fallback, and verify a package's provenance before installing.</a:t>
-            </a:r>
-            <a:endParaRPr lang="en-US" sz="1600" dirty="0"/>
-          </a:p>
-          <a:p>
-            <a:pPr algn="l" indent="0" marL="0">
-              <a:lnSpc>
-                <a:spcPct val="115000"/>
-              </a:lnSpc>
-              <a:spcAft>
-                <a:spcPts val="400"/>
-              </a:spcAft>
-              <a:buNone/>
-            </a:pPr>
-            <a:r>
-              <a:rPr lang="en-US" sz="1600" dirty="0">
-                <a:solidFill>
-                  <a:srgbClr val="242424"/>
-                </a:solidFill>
-                <a:latin typeface="Red Hat Text" pitchFamily="34" charset="0"/>
-                <a:ea typeface="Red Hat Text" pitchFamily="34" charset="-122"/>
-                <a:cs typeface="Red Hat Text" pitchFamily="34" charset="-120"/>
-              </a:rPr>
-              <a:t>Tech Preview (since Feb 2026) and Python-only today, with npm and Java planned; now part of Red Hat Advanced Developer Suite. The upstream community project is Calunga.</a:t>
-            </a:r>
-            <a:endParaRPr lang="en-US" sz="1600" dirty="0"/>
+              <a:t>Figure 9.1 — zstd:chunked makes layers seekable, so clients fetch only changed chunks.</a:t>
+            </a:r>
+            <a:endParaRPr lang="en-US" sz="1300" dirty="0"/>
           </a:p>
         </p:txBody>
       </p:sp>
@@ -11278,7 +12087,7 @@
                 <a:ea typeface="Overpass" pitchFamily="34" charset="-122"/>
                 <a:cs typeface="Overpass" pitchFamily="34" charset="-120"/>
               </a:rPr>
-              <a:t>WORKING WITH IMAGES · GOTCHAS</a:t>
+              <a:t>WORKING WITH IMAGES · EFFICIENT LAYERS</a:t>
             </a:r>
             <a:endParaRPr lang="en-US" sz="1200" dirty="0"/>
           </a:p>
@@ -11317,22 +12126,45 @@
                 <a:ea typeface="Overpass" pitchFamily="34" charset="-122"/>
                 <a:cs typeface="Overpass" pitchFamily="34" charset="-120"/>
               </a:rPr>
-              <a:t>Distroless gotchas — assumptions made visible</a:t>
+              <a:t>chunkah — content-based layer splitting</a:t>
             </a:r>
             <a:endParaRPr lang="en-US" sz="3000" dirty="0"/>
           </a:p>
         </p:txBody>
       </p:sp>
-      <p:sp>
-        <p:nvSpPr>
-          <p:cNvPr id="6" name="Text 3"/>
+      <p:pic>
+        <p:nvPicPr>
+          <p:cNvPr id="6" name="Image 1" descr="./png/10-chunkah-layer-split.png">    </p:cNvPr>
+          <p:cNvPicPr>
+            <a:picLocks noChangeAspect="1"/>
+          </p:cNvPicPr>
+          <p:nvPr/>
+        </p:nvPicPr>
+        <p:blipFill>
+          <a:blip r:embed="rId2"/>
+          <a:srcRect l="0" r="0" t="0" b="0"/>
+          <a:stretch/>
+        </p:blipFill>
+        <p:spPr>
+          <a:xfrm>
+            <a:off x="1645920" y="1600200"/>
+            <a:ext cx="8906256" cy="4343400"/>
+          </a:xfrm>
+          <a:prstGeom prst="rect">
+            <a:avLst/>
+          </a:prstGeom>
+        </p:spPr>
+      </p:pic>
+      <p:sp>
+        <p:nvSpPr>
+          <p:cNvPr id="7" name="Text 3"/>
           <p:cNvSpPr/>
           <p:nvPr/>
         </p:nvSpPr>
         <p:spPr>
           <a:xfrm>
-            <a:off x="566928" y="1691640"/>
-            <a:ext cx="5486400" cy="4434840"/>
+            <a:off x="566928" y="5943600"/>
+            <a:ext cx="11055096" cy="310896"/>
           </a:xfrm>
           <a:prstGeom prst="rect">
             <a:avLst/>
@@ -11341,256 +12173,22 @@
           <a:ln/>
         </p:spPr>
         <p:txBody>
-          <a:bodyPr wrap="square" rtlCol="0" anchor="t"/>
-          <a:lstStyle/>
-          <a:p>
-            <a:pPr algn="l" indent="0" marL="0">
-              <a:lnSpc>
-                <a:spcPct val="120000"/>
-              </a:lnSpc>
-              <a:spcAft>
-                <a:spcPts val="800"/>
-              </a:spcAft>
+          <a:bodyPr wrap="square" rtlCol="0" anchor="ctr"/>
+          <a:lstStyle/>
+          <a:p>
+            <a:pPr algn="ctr" indent="0" marL="0">
               <a:buNone/>
             </a:pPr>
             <a:r>
-              <a:rPr lang="en-US" sz="1700" b="1" dirty="0">
-                <a:solidFill>
-                  <a:srgbClr val="242424"/>
+              <a:rPr lang="en-US" sz="1300" i="1" dirty="0">
+                <a:solidFill>
+                  <a:srgbClr val="5A5A5A"/>
                 </a:solidFill>
                 <a:latin typeface="Red Hat Text" pitchFamily="34" charset="0"/>
                 <a:ea typeface="Red Hat Text" pitchFamily="34" charset="-122"/>
                 <a:cs typeface="Red Hat Text" pitchFamily="34" charset="-120"/>
               </a:rPr>
-              <a:t>Build &amp; runtime</a:t>
-            </a:r>
-            <a:endParaRPr lang="en-US" sz="1700" dirty="0"/>
-          </a:p>
-          <a:p>
-            <a:pPr algn="l" marL="342900" indent="-342900">
-              <a:lnSpc>
-                <a:spcPct val="120000"/>
-              </a:lnSpc>
-              <a:spcAft>
-                <a:spcPts val="800"/>
-              </a:spcAft>
-              <a:buSzPct val="100000"/>
-              <a:buChar char="●"/>
-            </a:pPr>
-            <a:r>
-              <a:rPr lang="en-US" sz="1700" dirty="0">
-                <a:solidFill>
-                  <a:srgbClr val="242424"/>
-                </a:solidFill>
-                <a:latin typeface="Red Hat Text" pitchFamily="34" charset="0"/>
-                <a:ea typeface="Red Hat Text" pitchFamily="34" charset="-122"/>
-                <a:cs typeface="Red Hat Text" pitchFamily="34" charset="-120"/>
-              </a:rPr>
-              <a:t>RUN in a runtime stage fails — no /bin/sh.</a:t>
-            </a:r>
-            <a:endParaRPr lang="en-US" sz="1700" dirty="0"/>
-          </a:p>
-          <a:p>
-            <a:pPr algn="l" marL="342900" indent="-342900">
-              <a:lnSpc>
-                <a:spcPct val="120000"/>
-              </a:lnSpc>
-              <a:spcAft>
-                <a:spcPts val="800"/>
-              </a:spcAft>
-              <a:buSzPct val="100000"/>
-              <a:buChar char="●"/>
-            </a:pPr>
-            <a:r>
-              <a:rPr lang="en-US" sz="1700" dirty="0">
-                <a:solidFill>
-                  <a:srgbClr val="242424"/>
-                </a:solidFill>
-                <a:latin typeface="Red Hat Text" pitchFamily="34" charset="0"/>
-                <a:ea typeface="Red Hat Text" pitchFamily="34" charset="-122"/>
-                <a:cs typeface="Red Hat Text" pitchFamily="34" charset="-120"/>
-              </a:rPr>
-              <a:t>“Permission denied” on /.cache — set HOME in the builder.</a:t>
-            </a:r>
-            <a:endParaRPr lang="en-US" sz="1700" dirty="0"/>
-          </a:p>
-          <a:p>
-            <a:pPr algn="l" marL="342900" indent="-342900">
-              <a:lnSpc>
-                <a:spcPct val="120000"/>
-              </a:lnSpc>
-              <a:spcAft>
-                <a:spcPts val="800"/>
-              </a:spcAft>
-              <a:buSzPct val="100000"/>
-              <a:buChar char="●"/>
-            </a:pPr>
-            <a:r>
-              <a:rPr lang="en-US" sz="1700" dirty="0">
-                <a:solidFill>
-                  <a:srgbClr val="242424"/>
-                </a:solidFill>
-                <a:latin typeface="Red Hat Text" pitchFamily="34" charset="0"/>
-                <a:ea typeface="Red Hat Text" pitchFamily="34" charset="-122"/>
-                <a:cs typeface="Red Hat Text" pitchFamily="34" charset="-120"/>
-              </a:rPr>
-              <a:t>python vs python3 — the bare alias is gone.</a:t>
-            </a:r>
-            <a:endParaRPr lang="en-US" sz="1700" dirty="0"/>
-          </a:p>
-        </p:txBody>
-      </p:sp>
-      <p:sp>
-        <p:nvSpPr>
-          <p:cNvPr id="7" name="Text 4"/>
-          <p:cNvSpPr/>
-          <p:nvPr/>
-        </p:nvSpPr>
-        <p:spPr>
-          <a:xfrm>
-            <a:off x="6419088" y="1691640"/>
-            <a:ext cx="5486400" cy="4434840"/>
-          </a:xfrm>
-          <a:prstGeom prst="rect">
-            <a:avLst/>
-          </a:prstGeom>
-          <a:noFill/>
-          <a:ln/>
-        </p:spPr>
-        <p:txBody>
-          <a:bodyPr wrap="square" rtlCol="0" anchor="t"/>
-          <a:lstStyle/>
-          <a:p>
-            <a:pPr algn="l" indent="0" marL="0">
-              <a:lnSpc>
-                <a:spcPct val="120000"/>
-              </a:lnSpc>
-              <a:spcAft>
-                <a:spcPts val="800"/>
-              </a:spcAft>
-              <a:buNone/>
-            </a:pPr>
-            <a:r>
-              <a:rPr lang="en-US" sz="1700" b="1" dirty="0">
-                <a:solidFill>
-                  <a:srgbClr val="242424"/>
-                </a:solidFill>
-                <a:latin typeface="Red Hat Text" pitchFamily="34" charset="0"/>
-                <a:ea typeface="Red Hat Text" pitchFamily="34" charset="-122"/>
-                <a:cs typeface="Red Hat Text" pitchFamily="34" charset="-120"/>
-              </a:rPr>
-              <a:t>Config &amp; operations</a:t>
-            </a:r>
-            <a:endParaRPr lang="en-US" sz="1700" dirty="0"/>
-          </a:p>
-          <a:p>
-            <a:pPr algn="l" marL="342900" indent="-342900">
-              <a:lnSpc>
-                <a:spcPct val="120000"/>
-              </a:lnSpc>
-              <a:spcAft>
-                <a:spcPts val="800"/>
-              </a:spcAft>
-              <a:buSzPct val="100000"/>
-              <a:buChar char="●"/>
-            </a:pPr>
-            <a:r>
-              <a:rPr lang="en-US" sz="1700" dirty="0">
-                <a:solidFill>
-                  <a:srgbClr val="242424"/>
-                </a:solidFill>
-                <a:latin typeface="Red Hat Text" pitchFamily="34" charset="0"/>
-                <a:ea typeface="Red Hat Text" pitchFamily="34" charset="-122"/>
-                <a:cs typeface="Red Hat Text" pitchFamily="34" charset="-120"/>
-              </a:rPr>
-              <a:t>Postgres needs POSTGRES_*, not POSTGRESQL_*.</a:t>
-            </a:r>
-            <a:endParaRPr lang="en-US" sz="1700" dirty="0"/>
-          </a:p>
-          <a:p>
-            <a:pPr algn="l" marL="342900" indent="-342900">
-              <a:lnSpc>
-                <a:spcPct val="120000"/>
-              </a:lnSpc>
-              <a:spcAft>
-                <a:spcPts val="800"/>
-              </a:spcAft>
-              <a:buSzPct val="100000"/>
-              <a:buChar char="●"/>
-            </a:pPr>
-            <a:r>
-              <a:rPr lang="en-US" sz="1700" dirty="0">
-                <a:solidFill>
-                  <a:srgbClr val="242424"/>
-                </a:solidFill>
-                <a:latin typeface="Red Hat Text" pitchFamily="34" charset="0"/>
-                <a:ea typeface="Red Hat Text" pitchFamily="34" charset="-122"/>
-                <a:cs typeface="Red Hat Text" pitchFamily="34" charset="-120"/>
-              </a:rPr>
-              <a:t>“Connection reset” — curl 127.0.0.1, not localhost (IPv6).</a:t>
-            </a:r>
-            <a:endParaRPr lang="en-US" sz="1700" dirty="0"/>
-          </a:p>
-          <a:p>
-            <a:pPr algn="l" marL="342900" indent="-342900">
-              <a:lnSpc>
-                <a:spcPct val="120000"/>
-              </a:lnSpc>
-              <a:spcAft>
-                <a:spcPts val="800"/>
-              </a:spcAft>
-              <a:buSzPct val="100000"/>
-              <a:buChar char="●"/>
-            </a:pPr>
-            <a:r>
-              <a:rPr lang="en-US" sz="1700" dirty="0">
-                <a:solidFill>
-                  <a:srgbClr val="242424"/>
-                </a:solidFill>
-                <a:latin typeface="Red Hat Text" pitchFamily="34" charset="0"/>
-                <a:ea typeface="Red Hat Text" pitchFamily="34" charset="-122"/>
-                <a:cs typeface="Red Hat Text" pitchFamily="34" charset="-120"/>
-              </a:rPr>
-              <a:t>Past ~5 COPYed libraries? Switch to UBI.</a:t>
-            </a:r>
-            <a:endParaRPr lang="en-US" sz="1700" dirty="0"/>
-          </a:p>
-        </p:txBody>
-      </p:sp>
-      <p:sp>
-        <p:nvSpPr>
-          <p:cNvPr id="8" name="Text 5"/>
-          <p:cNvSpPr/>
-          <p:nvPr/>
-        </p:nvSpPr>
-        <p:spPr>
-          <a:xfrm>
-            <a:off x="566928" y="5943600"/>
-            <a:ext cx="11055096" cy="310896"/>
-          </a:xfrm>
-          <a:prstGeom prst="rect">
-            <a:avLst/>
-          </a:prstGeom>
-          <a:noFill/>
-          <a:ln/>
-        </p:spPr>
-        <p:txBody>
-          <a:bodyPr wrap="square" rtlCol="0" anchor="ctr"/>
-          <a:lstStyle/>
-          <a:p>
-            <a:pPr algn="ctr" indent="0" marL="0">
-              <a:buNone/>
-            </a:pPr>
-            <a:r>
-              <a:rPr lang="en-US" sz="1300" i="1" dirty="0">
-                <a:solidFill>
-                  <a:srgbClr val="5A5A5A"/>
-                </a:solidFill>
-                <a:latin typeface="Red Hat Text" pitchFamily="34" charset="0"/>
-                <a:ea typeface="Red Hat Text" pitchFamily="34" charset="-122"/>
-                <a:cs typeface="Red Hat Text" pitchFamily="34" charset="-120"/>
-              </a:rPr>
-              <a:t>None are bugs — each is the absence of something you didn't know you relied on.</a:t>
+              <a:t>Figure 10.1 — Layers grouped by package, so a package update invalidates only its own layer.</a:t>
             </a:r>
             <a:endParaRPr lang="en-US" sz="1300" dirty="0"/>
           </a:p>
@@ -11607,13 +12205,6 @@
 <file path=ppt/slides/slide29.xml><?xml version="1.0" encoding="utf-8"?>
 <p:sld xmlns:a="http://schemas.openxmlformats.org/drawingml/2006/main" xmlns:r="http://schemas.openxmlformats.org/officeDocument/2006/relationships" xmlns:p="http://schemas.openxmlformats.org/presentationml/2006/main">
   <p:cSld name="Slide 29">
-    <p:bg>
-      <p:bgPr>
-        <a:solidFill>
-          <a:srgbClr val="AB0000"/>
-        </a:solidFill>
-      </p:bgPr>
-    </p:bg>
     <p:spTree>
       <p:nvGrpSpPr>
         <p:cNvPr id="1" name=""/>
@@ -11628,9 +12219,48 @@
           <a:chExt cx="0" cy="0"/>
         </a:xfrm>
       </p:grpSpPr>
+      <p:sp>
+        <p:nvSpPr>
+          <p:cNvPr id="2" name="Text 0"/>
+          <p:cNvSpPr/>
+          <p:nvPr/>
+        </p:nvSpPr>
+        <p:spPr>
+          <a:xfrm>
+            <a:off x="566928" y="6364224"/>
+            <a:ext cx="914400" cy="274320"/>
+          </a:xfrm>
+          <a:prstGeom prst="rect">
+            <a:avLst/>
+          </a:prstGeom>
+          <a:noFill/>
+          <a:ln/>
+        </p:spPr>
+        <p:txBody>
+          <a:bodyPr wrap="square" rtlCol="0" anchor="ctr"/>
+          <a:lstStyle/>
+          <a:p>
+            <a:pPr algn="l" indent="0" marL="0">
+              <a:buNone/>
+            </a:pPr>
+            <a:r>
+              <a:rPr lang="en-US" sz="1000" dirty="0">
+                <a:solidFill>
+                  <a:srgbClr val="8A8A8A"/>
+                </a:solidFill>
+                <a:latin typeface="Red Hat Text" pitchFamily="34" charset="0"/>
+                <a:ea typeface="Red Hat Text" pitchFamily="34" charset="-122"/>
+                <a:cs typeface="Red Hat Text" pitchFamily="34" charset="-120"/>
+              </a:rPr>
+              <a:t>29</a:t>
+            </a:r>
+            <a:endParaRPr lang="en-US" sz="1000" dirty="0"/>
+          </a:p>
+        </p:txBody>
+      </p:sp>
       <p:pic>
         <p:nvPicPr>
-          <p:cNvPr id="2" name="Image 0" descr="./assets/section-panel.png">    </p:cNvPr>
+          <p:cNvPr id="3" name="Image 0" descr="./assets/logo-candidate-2.png">    </p:cNvPr>
           <p:cNvPicPr>
             <a:picLocks noChangeAspect="1"/>
           </p:cNvPicPr>
@@ -11644,8 +12274,8 @@
         </p:blipFill>
         <p:spPr>
           <a:xfrm>
-            <a:off x="0" y="0"/>
-            <a:ext cx="12191695" cy="6858000"/>
+            <a:off x="10561320" y="6355080"/>
+            <a:ext cx="1033272" cy="246888"/>
           </a:xfrm>
           <a:prstGeom prst="rect">
             <a:avLst/>
@@ -11654,14 +12284,14 @@
       </p:pic>
       <p:sp>
         <p:nvSpPr>
-          <p:cNvPr id="3" name="Text 0"/>
+          <p:cNvPr id="4" name="Text 1"/>
           <p:cNvSpPr/>
           <p:nvPr/>
         </p:nvSpPr>
         <p:spPr>
           <a:xfrm>
-            <a:off x="5733288" y="2121408"/>
-            <a:ext cx="5852160" cy="457200"/>
+            <a:off x="566928" y="384048"/>
+            <a:ext cx="11055096" cy="292608"/>
           </a:xfrm>
           <a:prstGeom prst="rect">
             <a:avLst/>
@@ -11677,30 +12307,30 @@
               <a:buNone/>
             </a:pPr>
             <a:r>
-              <a:rPr lang="en-US" sz="2200" b="1" spc="600" kern="0" dirty="0">
-                <a:solidFill>
-                  <a:srgbClr val="FFFFFF"/>
+              <a:rPr lang="en-US" sz="1200" b="1" spc="400" kern="0" dirty="0">
+                <a:solidFill>
+                  <a:srgbClr val="EE0000"/>
                 </a:solidFill>
                 <a:latin typeface="Overpass" pitchFamily="34" charset="0"/>
                 <a:ea typeface="Overpass" pitchFamily="34" charset="-122"/>
                 <a:cs typeface="Overpass" pitchFamily="34" charset="-120"/>
               </a:rPr>
-              <a:t>03</a:t>
-            </a:r>
-            <a:endParaRPr lang="en-US" sz="2200" dirty="0"/>
-          </a:p>
-        </p:txBody>
-      </p:sp>
-      <p:sp>
-        <p:nvSpPr>
-          <p:cNvPr id="4" name="Text 1"/>
+              <a:t>WORKING WITH IMAGES · TRUSTED LIBRARIES</a:t>
+            </a:r>
+            <a:endParaRPr lang="en-US" sz="1200" dirty="0"/>
+          </a:p>
+        </p:txBody>
+      </p:sp>
+      <p:sp>
+        <p:nvSpPr>
+          <p:cNvPr id="5" name="Text 2"/>
           <p:cNvSpPr/>
           <p:nvPr/>
         </p:nvSpPr>
         <p:spPr>
           <a:xfrm>
-            <a:off x="5705856" y="2596896"/>
-            <a:ext cx="6126480" cy="1463040"/>
+            <a:off x="566928" y="676656"/>
+            <a:ext cx="11055096" cy="1005840"/>
           </a:xfrm>
           <a:prstGeom prst="rect">
             <a:avLst/>
@@ -11716,30 +12346,30 @@
               <a:buNone/>
             </a:pPr>
             <a:r>
-              <a:rPr lang="en-US" sz="4400" b="1" dirty="0">
-                <a:solidFill>
-                  <a:srgbClr val="FFFFFF"/>
+              <a:rPr lang="en-US" sz="3000" b="1" dirty="0">
+                <a:solidFill>
+                  <a:srgbClr val="151515"/>
                 </a:solidFill>
                 <a:latin typeface="Overpass" pitchFamily="34" charset="0"/>
                 <a:ea typeface="Overpass" pitchFamily="34" charset="-122"/>
                 <a:cs typeface="Overpass" pitchFamily="34" charset="-120"/>
               </a:rPr>
-              <a:t>The demo walkthrough</a:t>
-            </a:r>
-            <a:endParaRPr lang="en-US" sz="4400" dirty="0"/>
-          </a:p>
-        </p:txBody>
-      </p:sp>
-      <p:sp>
-        <p:nvSpPr>
-          <p:cNvPr id="5" name="Text 2"/>
+              <a:t>Provenance, extended to your dependencies</a:t>
+            </a:r>
+            <a:endParaRPr lang="en-US" sz="3000" dirty="0"/>
+          </a:p>
+        </p:txBody>
+      </p:sp>
+      <p:sp>
+        <p:nvSpPr>
+          <p:cNvPr id="6" name="Text 3"/>
           <p:cNvSpPr/>
           <p:nvPr/>
         </p:nvSpPr>
         <p:spPr>
           <a:xfrm>
-            <a:off x="5733288" y="4160520"/>
-            <a:ext cx="6035040" cy="731520"/>
+            <a:off x="566928" y="1691640"/>
+            <a:ext cx="11055096" cy="4434840"/>
           </a:xfrm>
           <a:prstGeom prst="rect">
             <a:avLst/>
@@ -11751,48 +12381,102 @@
           <a:bodyPr wrap="square" rtlCol="0" anchor="t"/>
           <a:lstStyle/>
           <a:p>
-            <a:pPr algn="l" indent="0" marL="0">
-              <a:buNone/>
-            </a:pPr>
-            <a:r>
-              <a:rPr lang="en-US" sz="1600" i="1" dirty="0">
-                <a:solidFill>
-                  <a:srgbClr val="FFD9D9"/>
+            <a:pPr algn="l" marL="342900" indent="-342900">
+              <a:lnSpc>
+                <a:spcPct val="115000"/>
+              </a:lnSpc>
+              <a:spcAft>
+                <a:spcPts val="600"/>
+              </a:spcAft>
+              <a:buSzPct val="100000"/>
+              <a:buChar char="●"/>
+            </a:pPr>
+            <a:r>
+              <a:rPr lang="en-US" sz="1600" dirty="0">
+                <a:solidFill>
+                  <a:srgbClr val="242424"/>
                 </a:solidFill>
                 <a:latin typeface="Red Hat Text" pitchFamily="34" charset="0"/>
                 <a:ea typeface="Red Hat Text" pitchFamily="34" charset="-122"/>
                 <a:cs typeface="Red Hat Text" pitchFamily="34" charset="-120"/>
               </a:rPr>
-              <a:t>Eight command-line demos, live.</a:t>
+              <a:t>The base image gives trust at the container layer; your app still runs whatever you pulled from PyPI — a public, unaudited index.</a:t>
             </a:r>
             <a:endParaRPr lang="en-US" sz="1600" dirty="0"/>
           </a:p>
-        </p:txBody>
-      </p:sp>
-      <p:pic>
-        <p:nvPicPr>
-          <p:cNvPr id="6" name="Image 1" descr="./assets/redhat-logo-white.png">    </p:cNvPr>
-          <p:cNvPicPr>
-            <a:picLocks noChangeAspect="1"/>
-          </p:cNvPicPr>
-          <p:nvPr/>
-        </p:nvPicPr>
-        <p:blipFill>
-          <a:blip r:embed="rId2"/>
-          <a:stretch>
-            <a:fillRect/>
-          </a:stretch>
-        </p:blipFill>
-        <p:spPr>
-          <a:xfrm>
-            <a:off x="10442448" y="6291072"/>
-            <a:ext cx="1216152" cy="283464"/>
-          </a:xfrm>
-          <a:prstGeom prst="rect">
-            <a:avLst/>
-          </a:prstGeom>
-        </p:spPr>
-      </p:pic>
+          <a:p>
+            <a:pPr algn="l" marL="342900" indent="-342900">
+              <a:lnSpc>
+                <a:spcPct val="115000"/>
+              </a:lnSpc>
+              <a:spcAft>
+                <a:spcPts val="600"/>
+              </a:spcAft>
+              <a:buSzPct val="100000"/>
+              <a:buChar char="●"/>
+            </a:pPr>
+            <a:r>
+              <a:rPr lang="en-US" sz="1600" dirty="0">
+                <a:solidFill>
+                  <a:srgbClr val="242424"/>
+                </a:solidFill>
+                <a:latin typeface="Red Hat Text" pitchFamily="34" charset="0"/>
+                <a:ea typeface="Red Hat Text" pitchFamily="34" charset="-122"/>
+                <a:cs typeface="Red Hat Text" pitchFamily="34" charset="-120"/>
+              </a:rPr>
+              <a:t>Red Hat Trusted Libraries is a pip-compatible index of curated Python packages, rebuilt from source in Red Hat's Konflux pipeline with SLSA Level 3 provenance and signed attestations (via Red Hat Trusted Artifact Signer).</a:t>
+            </a:r>
+            <a:endParaRPr lang="en-US" sz="1600" dirty="0"/>
+          </a:p>
+          <a:p>
+            <a:pPr algn="l" marL="342900" indent="-342900">
+              <a:lnSpc>
+                <a:spcPct val="115000"/>
+              </a:lnSpc>
+              <a:spcAft>
+                <a:spcPts val="600"/>
+              </a:spcAft>
+              <a:buSzPct val="100000"/>
+              <a:buChar char="●"/>
+            </a:pPr>
+            <a:r>
+              <a:rPr lang="en-US" sz="1600" dirty="0">
+                <a:solidFill>
+                  <a:srgbClr val="242424"/>
+                </a:solidFill>
+                <a:latin typeface="Red Hat Text" pitchFamily="34" charset="0"/>
+                <a:ea typeface="Red Hat Text" pitchFamily="34" charset="-122"/>
+                <a:cs typeface="Red Hat Text" pitchFamily="34" charset="-120"/>
+              </a:rPr>
+              <a:t>Point pip at packages.redhat.com/trusted-libraries, keep PyPI as a fallback, and verify a package's provenance before installing.</a:t>
+            </a:r>
+            <a:endParaRPr lang="en-US" sz="1600" dirty="0"/>
+          </a:p>
+          <a:p>
+            <a:pPr algn="l" indent="0" marL="0">
+              <a:lnSpc>
+                <a:spcPct val="115000"/>
+              </a:lnSpc>
+              <a:spcAft>
+                <a:spcPts val="400"/>
+              </a:spcAft>
+              <a:buNone/>
+            </a:pPr>
+            <a:r>
+              <a:rPr lang="en-US" sz="1600" dirty="0">
+                <a:solidFill>
+                  <a:srgbClr val="242424"/>
+                </a:solidFill>
+                <a:latin typeface="Red Hat Text" pitchFamily="34" charset="0"/>
+                <a:ea typeface="Red Hat Text" pitchFamily="34" charset="-122"/>
+                <a:cs typeface="Red Hat Text" pitchFamily="34" charset="-120"/>
+              </a:rPr>
+              <a:t>Tech Preview (since Feb 2026) and Python-only today, with npm and Java planned; now part of Red Hat Advanced Developer Suite. The upstream community project is Calunga.</a:t>
+            </a:r>
+            <a:endParaRPr lang="en-US" sz="1600" dirty="0"/>
+          </a:p>
+        </p:txBody>
+      </p:sp>
     </p:spTree>
   </p:cSld>
   <p:clrMapOvr>
@@ -12111,7 +12795,7 @@
                 <a:ea typeface="Overpass" pitchFamily="34" charset="-122"/>
                 <a:cs typeface="Overpass" pitchFamily="34" charset="-120"/>
               </a:rPr>
-              <a:t>DEMOS · HOW THEY RUN</a:t>
+              <a:t>WORKING WITH IMAGES · TRUSTED LIBRARIES</a:t>
             </a:r>
             <a:endParaRPr lang="en-US" sz="1200" dirty="0"/>
           </a:p>
@@ -12150,22 +12834,45 @@
                 <a:ea typeface="Overpass" pitchFamily="34" charset="-122"/>
                 <a:cs typeface="Overpass" pitchFamily="34" charset="-120"/>
               </a:rPr>
-              <a:t>Narrate → stop → run → stop</a:t>
+              <a:t>Trust, all the way down to your dependencies</a:t>
             </a:r>
             <a:endParaRPr lang="en-US" sz="3000" dirty="0"/>
           </a:p>
         </p:txBody>
       </p:sp>
-      <p:sp>
-        <p:nvSpPr>
-          <p:cNvPr id="6" name="Text 3"/>
+      <p:pic>
+        <p:nvPicPr>
+          <p:cNvPr id="6" name="Image 1" descr="./png/13-trusted-libraries-provenance.png">    </p:cNvPr>
+          <p:cNvPicPr>
+            <a:picLocks noChangeAspect="1"/>
+          </p:cNvPicPr>
+          <p:nvPr/>
+        </p:nvPicPr>
+        <p:blipFill>
+          <a:blip r:embed="rId2"/>
+          <a:srcRect l="0" r="0" t="0" b="0"/>
+          <a:stretch/>
+        </p:blipFill>
+        <p:spPr>
+          <a:xfrm>
+            <a:off x="1645920" y="1600200"/>
+            <a:ext cx="8906256" cy="4343400"/>
+          </a:xfrm>
+          <a:prstGeom prst="rect">
+            <a:avLst/>
+          </a:prstGeom>
+        </p:spPr>
+      </p:pic>
+      <p:sp>
+        <p:nvSpPr>
+          <p:cNvPr id="7" name="Text 3"/>
           <p:cNvSpPr/>
           <p:nvPr/>
         </p:nvSpPr>
         <p:spPr>
           <a:xfrm>
-            <a:off x="566928" y="1691640"/>
-            <a:ext cx="11055096" cy="4434840"/>
+            <a:off x="566928" y="5943600"/>
+            <a:ext cx="11055096" cy="310896"/>
           </a:xfrm>
           <a:prstGeom prst="rect">
             <a:avLst/>
@@ -12174,103 +12881,24 @@
           <a:ln/>
         </p:spPr>
         <p:txBody>
-          <a:bodyPr wrap="square" rtlCol="0" anchor="t"/>
-          <a:lstStyle/>
-          <a:p>
-            <a:pPr algn="l" marL="342900" indent="-342900">
-              <a:lnSpc>
-                <a:spcPct val="115000"/>
-              </a:lnSpc>
-              <a:spcAft>
-                <a:spcPts val="600"/>
-              </a:spcAft>
-              <a:buSzPct val="100000"/>
-              <a:buChar char="●"/>
-            </a:pPr>
-            <a:r>
-              <a:rPr lang="en-US" sz="1600" dirty="0">
-                <a:solidFill>
-                  <a:srgbClr val="242424"/>
+          <a:bodyPr wrap="square" rtlCol="0" anchor="ctr"/>
+          <a:lstStyle/>
+          <a:p>
+            <a:pPr algn="ctr" indent="0" marL="0">
+              <a:buNone/>
+            </a:pPr>
+            <a:r>
+              <a:rPr lang="en-US" sz="1300" i="1" dirty="0">
+                <a:solidFill>
+                  <a:srgbClr val="5A5A5A"/>
                 </a:solidFill>
                 <a:latin typeface="Red Hat Text" pitchFamily="34" charset="0"/>
                 <a:ea typeface="Red Hat Text" pitchFamily="34" charset="-122"/>
                 <a:cs typeface="Red Hat Text" pitchFamily="34" charset="-120"/>
               </a:rPr>
-              <a:t>Eight demos under demos/, runnable individually or as one guided walkthrough.</a:t>
-            </a:r>
-            <a:endParaRPr lang="en-US" sz="1600" dirty="0"/>
-          </a:p>
-          <a:p>
-            <a:pPr algn="l" marL="342900" indent="-342900">
-              <a:lnSpc>
-                <a:spcPct val="115000"/>
-              </a:lnSpc>
-              <a:spcAft>
-                <a:spcPts val="600"/>
-              </a:spcAft>
-              <a:buSzPct val="100000"/>
-              <a:buChar char="●"/>
-            </a:pPr>
-            <a:r>
-              <a:rPr lang="en-US" sz="1600" dirty="0">
-                <a:solidFill>
-                  <a:srgbClr val="242424"/>
-                </a:solidFill>
-                <a:latin typeface="Red Hat Text" pitchFamily="34" charset="0"/>
-                <a:ea typeface="Red Hat Text" pitchFamily="34" charset="-122"/>
-                <a:cs typeface="Red Hat Text" pitchFamily="34" charset="-120"/>
-              </a:rPr>
-              <a:t>Each demo explains a step, stops for Enter so you can narrate, runs the command live, then stops again before the next.</a:t>
-            </a:r>
-            <a:endParaRPr lang="en-US" sz="1600" dirty="0"/>
-          </a:p>
-          <a:p>
-            <a:pPr algn="l" marL="342900" indent="-342900">
-              <a:lnSpc>
-                <a:spcPct val="115000"/>
-              </a:lnSpc>
-              <a:spcAft>
-                <a:spcPts val="600"/>
-              </a:spcAft>
-              <a:buSzPct val="100000"/>
-              <a:buChar char="●"/>
-            </a:pPr>
-            <a:r>
-              <a:rPr lang="en-US" sz="1600" dirty="0">
-                <a:solidFill>
-                  <a:srgbClr val="242424"/>
-                </a:solidFill>
-                <a:latin typeface="Red Hat Text" pitchFamily="34" charset="0"/>
-                <a:ea typeface="Red Hat Text" pitchFamily="34" charset="-122"/>
-                <a:cs typeface="Red Hat Text" pitchFamily="34" charset="-120"/>
-              </a:rPr>
-              <a:t>Nothing aborts on stage: a slow pull or unreachable registry degrades to a short note and the demo continues.</a:t>
-            </a:r>
-            <a:endParaRPr lang="en-US" sz="1600" dirty="0"/>
-          </a:p>
-          <a:p>
-            <a:pPr algn="l" marL="342900" indent="-342900">
-              <a:lnSpc>
-                <a:spcPct val="115000"/>
-              </a:lnSpc>
-              <a:spcAft>
-                <a:spcPts val="600"/>
-              </a:spcAft>
-              <a:buSzPct val="100000"/>
-              <a:buChar char="●"/>
-            </a:pPr>
-            <a:r>
-              <a:rPr lang="en-US" sz="1600" dirty="0">
-                <a:solidFill>
-                  <a:srgbClr val="242424"/>
-                </a:solidFill>
-                <a:latin typeface="Red Hat Text" pitchFamily="34" charset="0"/>
-                <a:ea typeface="Red Hat Text" pitchFamily="34" charset="-122"/>
-                <a:cs typeface="Red Hat Text" pitchFamily="34" charset="-120"/>
-              </a:rPr>
-              <a:t>Self-cleaning: every demo removes the containers, images, and temp files it created on exit.</a:t>
-            </a:r>
-            <a:endParaRPr lang="en-US" sz="1600" dirty="0"/>
+              <a:t>Figure 13.1 — The base image is already trusted; Trusted Libraries extends the same provenance to your Python packages.</a:t>
+            </a:r>
+            <a:endParaRPr lang="en-US" sz="1300" dirty="0"/>
           </a:p>
         </p:txBody>
       </p:sp>
@@ -12395,7 +13023,7 @@
                 <a:ea typeface="Overpass" pitchFamily="34" charset="-122"/>
                 <a:cs typeface="Overpass" pitchFamily="34" charset="-120"/>
               </a:rPr>
-              <a:t>DEMOS · 1–4</a:t>
+              <a:t>WORKING WITH IMAGES · GOTCHAS</a:t>
             </a:r>
             <a:endParaRPr lang="en-US" sz="1200" dirty="0"/>
           </a:p>
@@ -12434,6 +13062,926 @@
                 <a:ea typeface="Overpass" pitchFamily="34" charset="-122"/>
                 <a:cs typeface="Overpass" pitchFamily="34" charset="-120"/>
               </a:rPr>
+              <a:t>Distroless gotchas — assumptions made visible</a:t>
+            </a:r>
+            <a:endParaRPr lang="en-US" sz="3000" dirty="0"/>
+          </a:p>
+        </p:txBody>
+      </p:sp>
+      <p:sp>
+        <p:nvSpPr>
+          <p:cNvPr id="6" name="Text 3"/>
+          <p:cNvSpPr/>
+          <p:nvPr/>
+        </p:nvSpPr>
+        <p:spPr>
+          <a:xfrm>
+            <a:off x="566928" y="1691640"/>
+            <a:ext cx="5486400" cy="4434840"/>
+          </a:xfrm>
+          <a:prstGeom prst="rect">
+            <a:avLst/>
+          </a:prstGeom>
+          <a:noFill/>
+          <a:ln/>
+        </p:spPr>
+        <p:txBody>
+          <a:bodyPr wrap="square" rtlCol="0" anchor="t"/>
+          <a:lstStyle/>
+          <a:p>
+            <a:pPr algn="l" indent="0" marL="0">
+              <a:lnSpc>
+                <a:spcPct val="120000"/>
+              </a:lnSpc>
+              <a:spcAft>
+                <a:spcPts val="800"/>
+              </a:spcAft>
+              <a:buNone/>
+            </a:pPr>
+            <a:r>
+              <a:rPr lang="en-US" sz="1700" b="1" dirty="0">
+                <a:solidFill>
+                  <a:srgbClr val="242424"/>
+                </a:solidFill>
+                <a:latin typeface="Red Hat Text" pitchFamily="34" charset="0"/>
+                <a:ea typeface="Red Hat Text" pitchFamily="34" charset="-122"/>
+                <a:cs typeface="Red Hat Text" pitchFamily="34" charset="-120"/>
+              </a:rPr>
+              <a:t>Build &amp; runtime</a:t>
+            </a:r>
+            <a:endParaRPr lang="en-US" sz="1700" dirty="0"/>
+          </a:p>
+          <a:p>
+            <a:pPr algn="l" marL="342900" indent="-342900">
+              <a:lnSpc>
+                <a:spcPct val="120000"/>
+              </a:lnSpc>
+              <a:spcAft>
+                <a:spcPts val="800"/>
+              </a:spcAft>
+              <a:buSzPct val="100000"/>
+              <a:buChar char="●"/>
+            </a:pPr>
+            <a:r>
+              <a:rPr lang="en-US" sz="1700" dirty="0">
+                <a:solidFill>
+                  <a:srgbClr val="242424"/>
+                </a:solidFill>
+                <a:latin typeface="Red Hat Text" pitchFamily="34" charset="0"/>
+                <a:ea typeface="Red Hat Text" pitchFamily="34" charset="-122"/>
+                <a:cs typeface="Red Hat Text" pitchFamily="34" charset="-120"/>
+              </a:rPr>
+              <a:t>RUN in a runtime stage fails — no /bin/sh.</a:t>
+            </a:r>
+            <a:endParaRPr lang="en-US" sz="1700" dirty="0"/>
+          </a:p>
+          <a:p>
+            <a:pPr algn="l" marL="342900" indent="-342900">
+              <a:lnSpc>
+                <a:spcPct val="120000"/>
+              </a:lnSpc>
+              <a:spcAft>
+                <a:spcPts val="800"/>
+              </a:spcAft>
+              <a:buSzPct val="100000"/>
+              <a:buChar char="●"/>
+            </a:pPr>
+            <a:r>
+              <a:rPr lang="en-US" sz="1700" dirty="0">
+                <a:solidFill>
+                  <a:srgbClr val="242424"/>
+                </a:solidFill>
+                <a:latin typeface="Red Hat Text" pitchFamily="34" charset="0"/>
+                <a:ea typeface="Red Hat Text" pitchFamily="34" charset="-122"/>
+                <a:cs typeface="Red Hat Text" pitchFamily="34" charset="-120"/>
+              </a:rPr>
+              <a:t>“Permission denied” on /.cache — set HOME in the builder.</a:t>
+            </a:r>
+            <a:endParaRPr lang="en-US" sz="1700" dirty="0"/>
+          </a:p>
+          <a:p>
+            <a:pPr algn="l" marL="342900" indent="-342900">
+              <a:lnSpc>
+                <a:spcPct val="120000"/>
+              </a:lnSpc>
+              <a:spcAft>
+                <a:spcPts val="800"/>
+              </a:spcAft>
+              <a:buSzPct val="100000"/>
+              <a:buChar char="●"/>
+            </a:pPr>
+            <a:r>
+              <a:rPr lang="en-US" sz="1700" dirty="0">
+                <a:solidFill>
+                  <a:srgbClr val="242424"/>
+                </a:solidFill>
+                <a:latin typeface="Red Hat Text" pitchFamily="34" charset="0"/>
+                <a:ea typeface="Red Hat Text" pitchFamily="34" charset="-122"/>
+                <a:cs typeface="Red Hat Text" pitchFamily="34" charset="-120"/>
+              </a:rPr>
+              <a:t>python vs python3 — the bare alias is gone.</a:t>
+            </a:r>
+            <a:endParaRPr lang="en-US" sz="1700" dirty="0"/>
+          </a:p>
+        </p:txBody>
+      </p:sp>
+      <p:sp>
+        <p:nvSpPr>
+          <p:cNvPr id="7" name="Text 4"/>
+          <p:cNvSpPr/>
+          <p:nvPr/>
+        </p:nvSpPr>
+        <p:spPr>
+          <a:xfrm>
+            <a:off x="6419088" y="1691640"/>
+            <a:ext cx="5486400" cy="4434840"/>
+          </a:xfrm>
+          <a:prstGeom prst="rect">
+            <a:avLst/>
+          </a:prstGeom>
+          <a:noFill/>
+          <a:ln/>
+        </p:spPr>
+        <p:txBody>
+          <a:bodyPr wrap="square" rtlCol="0" anchor="t"/>
+          <a:lstStyle/>
+          <a:p>
+            <a:pPr algn="l" indent="0" marL="0">
+              <a:lnSpc>
+                <a:spcPct val="120000"/>
+              </a:lnSpc>
+              <a:spcAft>
+                <a:spcPts val="800"/>
+              </a:spcAft>
+              <a:buNone/>
+            </a:pPr>
+            <a:r>
+              <a:rPr lang="en-US" sz="1700" b="1" dirty="0">
+                <a:solidFill>
+                  <a:srgbClr val="242424"/>
+                </a:solidFill>
+                <a:latin typeface="Red Hat Text" pitchFamily="34" charset="0"/>
+                <a:ea typeface="Red Hat Text" pitchFamily="34" charset="-122"/>
+                <a:cs typeface="Red Hat Text" pitchFamily="34" charset="-120"/>
+              </a:rPr>
+              <a:t>Config &amp; operations</a:t>
+            </a:r>
+            <a:endParaRPr lang="en-US" sz="1700" dirty="0"/>
+          </a:p>
+          <a:p>
+            <a:pPr algn="l" marL="342900" indent="-342900">
+              <a:lnSpc>
+                <a:spcPct val="120000"/>
+              </a:lnSpc>
+              <a:spcAft>
+                <a:spcPts val="800"/>
+              </a:spcAft>
+              <a:buSzPct val="100000"/>
+              <a:buChar char="●"/>
+            </a:pPr>
+            <a:r>
+              <a:rPr lang="en-US" sz="1700" dirty="0">
+                <a:solidFill>
+                  <a:srgbClr val="242424"/>
+                </a:solidFill>
+                <a:latin typeface="Red Hat Text" pitchFamily="34" charset="0"/>
+                <a:ea typeface="Red Hat Text" pitchFamily="34" charset="-122"/>
+                <a:cs typeface="Red Hat Text" pitchFamily="34" charset="-120"/>
+              </a:rPr>
+              <a:t>Postgres needs POSTGRES_*, not POSTGRESQL_*.</a:t>
+            </a:r>
+            <a:endParaRPr lang="en-US" sz="1700" dirty="0"/>
+          </a:p>
+          <a:p>
+            <a:pPr algn="l" marL="342900" indent="-342900">
+              <a:lnSpc>
+                <a:spcPct val="120000"/>
+              </a:lnSpc>
+              <a:spcAft>
+                <a:spcPts val="800"/>
+              </a:spcAft>
+              <a:buSzPct val="100000"/>
+              <a:buChar char="●"/>
+            </a:pPr>
+            <a:r>
+              <a:rPr lang="en-US" sz="1700" dirty="0">
+                <a:solidFill>
+                  <a:srgbClr val="242424"/>
+                </a:solidFill>
+                <a:latin typeface="Red Hat Text" pitchFamily="34" charset="0"/>
+                <a:ea typeface="Red Hat Text" pitchFamily="34" charset="-122"/>
+                <a:cs typeface="Red Hat Text" pitchFamily="34" charset="-120"/>
+              </a:rPr>
+              <a:t>“Connection reset” — curl 127.0.0.1, not localhost (IPv6).</a:t>
+            </a:r>
+            <a:endParaRPr lang="en-US" sz="1700" dirty="0"/>
+          </a:p>
+          <a:p>
+            <a:pPr algn="l" marL="342900" indent="-342900">
+              <a:lnSpc>
+                <a:spcPct val="120000"/>
+              </a:lnSpc>
+              <a:spcAft>
+                <a:spcPts val="800"/>
+              </a:spcAft>
+              <a:buSzPct val="100000"/>
+              <a:buChar char="●"/>
+            </a:pPr>
+            <a:r>
+              <a:rPr lang="en-US" sz="1700" dirty="0">
+                <a:solidFill>
+                  <a:srgbClr val="242424"/>
+                </a:solidFill>
+                <a:latin typeface="Red Hat Text" pitchFamily="34" charset="0"/>
+                <a:ea typeface="Red Hat Text" pitchFamily="34" charset="-122"/>
+                <a:cs typeface="Red Hat Text" pitchFamily="34" charset="-120"/>
+              </a:rPr>
+              <a:t>Past ~5 COPYed libraries? Switch to UBI.</a:t>
+            </a:r>
+            <a:endParaRPr lang="en-US" sz="1700" dirty="0"/>
+          </a:p>
+        </p:txBody>
+      </p:sp>
+      <p:sp>
+        <p:nvSpPr>
+          <p:cNvPr id="8" name="Text 5"/>
+          <p:cNvSpPr/>
+          <p:nvPr/>
+        </p:nvSpPr>
+        <p:spPr>
+          <a:xfrm>
+            <a:off x="566928" y="5943600"/>
+            <a:ext cx="11055096" cy="310896"/>
+          </a:xfrm>
+          <a:prstGeom prst="rect">
+            <a:avLst/>
+          </a:prstGeom>
+          <a:noFill/>
+          <a:ln/>
+        </p:spPr>
+        <p:txBody>
+          <a:bodyPr wrap="square" rtlCol="0" anchor="ctr"/>
+          <a:lstStyle/>
+          <a:p>
+            <a:pPr algn="ctr" indent="0" marL="0">
+              <a:buNone/>
+            </a:pPr>
+            <a:r>
+              <a:rPr lang="en-US" sz="1300" i="1" dirty="0">
+                <a:solidFill>
+                  <a:srgbClr val="5A5A5A"/>
+                </a:solidFill>
+                <a:latin typeface="Red Hat Text" pitchFamily="34" charset="0"/>
+                <a:ea typeface="Red Hat Text" pitchFamily="34" charset="-122"/>
+                <a:cs typeface="Red Hat Text" pitchFamily="34" charset="-120"/>
+              </a:rPr>
+              <a:t>None are bugs — each is the absence of something you didn't know you relied on.</a:t>
+            </a:r>
+            <a:endParaRPr lang="en-US" sz="1300" dirty="0"/>
+          </a:p>
+        </p:txBody>
+      </p:sp>
+    </p:spTree>
+  </p:cSld>
+  <p:clrMapOvr>
+    <a:masterClrMapping/>
+  </p:clrMapOvr>
+</p:sld>
+</file>
+
+<file path=ppt/slides/slide32.xml><?xml version="1.0" encoding="utf-8"?>
+<p:sld xmlns:a="http://schemas.openxmlformats.org/drawingml/2006/main" xmlns:r="http://schemas.openxmlformats.org/officeDocument/2006/relationships" xmlns:p="http://schemas.openxmlformats.org/presentationml/2006/main">
+  <p:cSld name="Slide 32">
+    <p:bg>
+      <p:bgPr>
+        <a:solidFill>
+          <a:srgbClr val="AB0000"/>
+        </a:solidFill>
+      </p:bgPr>
+    </p:bg>
+    <p:spTree>
+      <p:nvGrpSpPr>
+        <p:cNvPr id="1" name=""/>
+        <p:cNvGrpSpPr/>
+        <p:nvPr/>
+      </p:nvGrpSpPr>
+      <p:grpSpPr>
+        <a:xfrm>
+          <a:off x="0" y="0"/>
+          <a:ext cx="0" cy="0"/>
+          <a:chOff x="0" y="0"/>
+          <a:chExt cx="0" cy="0"/>
+        </a:xfrm>
+      </p:grpSpPr>
+      <p:pic>
+        <p:nvPicPr>
+          <p:cNvPr id="2" name="Image 0" descr="./assets/section-panel.png">    </p:cNvPr>
+          <p:cNvPicPr>
+            <a:picLocks noChangeAspect="1"/>
+          </p:cNvPicPr>
+          <p:nvPr/>
+        </p:nvPicPr>
+        <p:blipFill>
+          <a:blip r:embed="rId1"/>
+          <a:stretch>
+            <a:fillRect/>
+          </a:stretch>
+        </p:blipFill>
+        <p:spPr>
+          <a:xfrm>
+            <a:off x="0" y="0"/>
+            <a:ext cx="12191695" cy="6858000"/>
+          </a:xfrm>
+          <a:prstGeom prst="rect">
+            <a:avLst/>
+          </a:prstGeom>
+        </p:spPr>
+      </p:pic>
+      <p:sp>
+        <p:nvSpPr>
+          <p:cNvPr id="3" name="Text 0"/>
+          <p:cNvSpPr/>
+          <p:nvPr/>
+        </p:nvSpPr>
+        <p:spPr>
+          <a:xfrm>
+            <a:off x="5733288" y="2121408"/>
+            <a:ext cx="5852160" cy="457200"/>
+          </a:xfrm>
+          <a:prstGeom prst="rect">
+            <a:avLst/>
+          </a:prstGeom>
+          <a:noFill/>
+          <a:ln/>
+        </p:spPr>
+        <p:txBody>
+          <a:bodyPr wrap="square" rtlCol="0" anchor="ctr"/>
+          <a:lstStyle/>
+          <a:p>
+            <a:pPr algn="l" indent="0" marL="0">
+              <a:buNone/>
+            </a:pPr>
+            <a:r>
+              <a:rPr lang="en-US" sz="2200" b="1" spc="600" kern="0" dirty="0">
+                <a:solidFill>
+                  <a:srgbClr val="FFFFFF"/>
+                </a:solidFill>
+                <a:latin typeface="Overpass" pitchFamily="34" charset="0"/>
+                <a:ea typeface="Overpass" pitchFamily="34" charset="-122"/>
+                <a:cs typeface="Overpass" pitchFamily="34" charset="-120"/>
+              </a:rPr>
+              <a:t>03</a:t>
+            </a:r>
+            <a:endParaRPr lang="en-US" sz="2200" dirty="0"/>
+          </a:p>
+        </p:txBody>
+      </p:sp>
+      <p:sp>
+        <p:nvSpPr>
+          <p:cNvPr id="4" name="Text 1"/>
+          <p:cNvSpPr/>
+          <p:nvPr/>
+        </p:nvSpPr>
+        <p:spPr>
+          <a:xfrm>
+            <a:off x="5705856" y="2596896"/>
+            <a:ext cx="6126480" cy="1463040"/>
+          </a:xfrm>
+          <a:prstGeom prst="rect">
+            <a:avLst/>
+          </a:prstGeom>
+          <a:noFill/>
+          <a:ln/>
+        </p:spPr>
+        <p:txBody>
+          <a:bodyPr wrap="square" rtlCol="0" anchor="t"/>
+          <a:lstStyle/>
+          <a:p>
+            <a:pPr algn="l" indent="0" marL="0">
+              <a:buNone/>
+            </a:pPr>
+            <a:r>
+              <a:rPr lang="en-US" sz="4400" b="1" dirty="0">
+                <a:solidFill>
+                  <a:srgbClr val="FFFFFF"/>
+                </a:solidFill>
+                <a:latin typeface="Overpass" pitchFamily="34" charset="0"/>
+                <a:ea typeface="Overpass" pitchFamily="34" charset="-122"/>
+                <a:cs typeface="Overpass" pitchFamily="34" charset="-120"/>
+              </a:rPr>
+              <a:t>The demo walkthrough</a:t>
+            </a:r>
+            <a:endParaRPr lang="en-US" sz="4400" dirty="0"/>
+          </a:p>
+        </p:txBody>
+      </p:sp>
+      <p:sp>
+        <p:nvSpPr>
+          <p:cNvPr id="5" name="Text 2"/>
+          <p:cNvSpPr/>
+          <p:nvPr/>
+        </p:nvSpPr>
+        <p:spPr>
+          <a:xfrm>
+            <a:off x="5733288" y="4160520"/>
+            <a:ext cx="6035040" cy="731520"/>
+          </a:xfrm>
+          <a:prstGeom prst="rect">
+            <a:avLst/>
+          </a:prstGeom>
+          <a:noFill/>
+          <a:ln/>
+        </p:spPr>
+        <p:txBody>
+          <a:bodyPr wrap="square" rtlCol="0" anchor="t"/>
+          <a:lstStyle/>
+          <a:p>
+            <a:pPr algn="l" indent="0" marL="0">
+              <a:buNone/>
+            </a:pPr>
+            <a:r>
+              <a:rPr lang="en-US" sz="1600" i="1" dirty="0">
+                <a:solidFill>
+                  <a:srgbClr val="FFD9D9"/>
+                </a:solidFill>
+                <a:latin typeface="Red Hat Text" pitchFamily="34" charset="0"/>
+                <a:ea typeface="Red Hat Text" pitchFamily="34" charset="-122"/>
+                <a:cs typeface="Red Hat Text" pitchFamily="34" charset="-120"/>
+              </a:rPr>
+              <a:t>Eight command-line demos, live.</a:t>
+            </a:r>
+            <a:endParaRPr lang="en-US" sz="1600" dirty="0"/>
+          </a:p>
+        </p:txBody>
+      </p:sp>
+      <p:pic>
+        <p:nvPicPr>
+          <p:cNvPr id="6" name="Image 1" descr="./assets/redhat-logo-white.png">    </p:cNvPr>
+          <p:cNvPicPr>
+            <a:picLocks noChangeAspect="1"/>
+          </p:cNvPicPr>
+          <p:nvPr/>
+        </p:nvPicPr>
+        <p:blipFill>
+          <a:blip r:embed="rId2"/>
+          <a:stretch>
+            <a:fillRect/>
+          </a:stretch>
+        </p:blipFill>
+        <p:spPr>
+          <a:xfrm>
+            <a:off x="10442448" y="6291072"/>
+            <a:ext cx="1216152" cy="283464"/>
+          </a:xfrm>
+          <a:prstGeom prst="rect">
+            <a:avLst/>
+          </a:prstGeom>
+        </p:spPr>
+      </p:pic>
+    </p:spTree>
+  </p:cSld>
+  <p:clrMapOvr>
+    <a:masterClrMapping/>
+  </p:clrMapOvr>
+</p:sld>
+</file>
+
+<file path=ppt/slides/slide33.xml><?xml version="1.0" encoding="utf-8"?>
+<p:sld xmlns:a="http://schemas.openxmlformats.org/drawingml/2006/main" xmlns:r="http://schemas.openxmlformats.org/officeDocument/2006/relationships" xmlns:p="http://schemas.openxmlformats.org/presentationml/2006/main">
+  <p:cSld name="Slide 33">
+    <p:spTree>
+      <p:nvGrpSpPr>
+        <p:cNvPr id="1" name=""/>
+        <p:cNvGrpSpPr/>
+        <p:nvPr/>
+      </p:nvGrpSpPr>
+      <p:grpSpPr>
+        <a:xfrm>
+          <a:off x="0" y="0"/>
+          <a:ext cx="0" cy="0"/>
+          <a:chOff x="0" y="0"/>
+          <a:chExt cx="0" cy="0"/>
+        </a:xfrm>
+      </p:grpSpPr>
+      <p:sp>
+        <p:nvSpPr>
+          <p:cNvPr id="2" name="Text 0"/>
+          <p:cNvSpPr/>
+          <p:nvPr/>
+        </p:nvSpPr>
+        <p:spPr>
+          <a:xfrm>
+            <a:off x="566928" y="6364224"/>
+            <a:ext cx="914400" cy="274320"/>
+          </a:xfrm>
+          <a:prstGeom prst="rect">
+            <a:avLst/>
+          </a:prstGeom>
+          <a:noFill/>
+          <a:ln/>
+        </p:spPr>
+        <p:txBody>
+          <a:bodyPr wrap="square" rtlCol="0" anchor="ctr"/>
+          <a:lstStyle/>
+          <a:p>
+            <a:pPr algn="l" indent="0" marL="0">
+              <a:buNone/>
+            </a:pPr>
+            <a:r>
+              <a:rPr lang="en-US" sz="1000" dirty="0">
+                <a:solidFill>
+                  <a:srgbClr val="8A8A8A"/>
+                </a:solidFill>
+                <a:latin typeface="Red Hat Text" pitchFamily="34" charset="0"/>
+                <a:ea typeface="Red Hat Text" pitchFamily="34" charset="-122"/>
+                <a:cs typeface="Red Hat Text" pitchFamily="34" charset="-120"/>
+              </a:rPr>
+              <a:t>33</a:t>
+            </a:r>
+            <a:endParaRPr lang="en-US" sz="1000" dirty="0"/>
+          </a:p>
+        </p:txBody>
+      </p:sp>
+      <p:pic>
+        <p:nvPicPr>
+          <p:cNvPr id="3" name="Image 0" descr="./assets/logo-candidate-2.png">    </p:cNvPr>
+          <p:cNvPicPr>
+            <a:picLocks noChangeAspect="1"/>
+          </p:cNvPicPr>
+          <p:nvPr/>
+        </p:nvPicPr>
+        <p:blipFill>
+          <a:blip r:embed="rId1"/>
+          <a:stretch>
+            <a:fillRect/>
+          </a:stretch>
+        </p:blipFill>
+        <p:spPr>
+          <a:xfrm>
+            <a:off x="10561320" y="6355080"/>
+            <a:ext cx="1033272" cy="246888"/>
+          </a:xfrm>
+          <a:prstGeom prst="rect">
+            <a:avLst/>
+          </a:prstGeom>
+        </p:spPr>
+      </p:pic>
+      <p:sp>
+        <p:nvSpPr>
+          <p:cNvPr id="4" name="Text 1"/>
+          <p:cNvSpPr/>
+          <p:nvPr/>
+        </p:nvSpPr>
+        <p:spPr>
+          <a:xfrm>
+            <a:off x="566928" y="384048"/>
+            <a:ext cx="11055096" cy="292608"/>
+          </a:xfrm>
+          <a:prstGeom prst="rect">
+            <a:avLst/>
+          </a:prstGeom>
+          <a:noFill/>
+          <a:ln/>
+        </p:spPr>
+        <p:txBody>
+          <a:bodyPr wrap="square" rtlCol="0" anchor="ctr"/>
+          <a:lstStyle/>
+          <a:p>
+            <a:pPr algn="l" indent="0" marL="0">
+              <a:buNone/>
+            </a:pPr>
+            <a:r>
+              <a:rPr lang="en-US" sz="1200" b="1" spc="400" kern="0" dirty="0">
+                <a:solidFill>
+                  <a:srgbClr val="EE0000"/>
+                </a:solidFill>
+                <a:latin typeface="Overpass" pitchFamily="34" charset="0"/>
+                <a:ea typeface="Overpass" pitchFamily="34" charset="-122"/>
+                <a:cs typeface="Overpass" pitchFamily="34" charset="-120"/>
+              </a:rPr>
+              <a:t>DEMOS · HOW THEY RUN</a:t>
+            </a:r>
+            <a:endParaRPr lang="en-US" sz="1200" dirty="0"/>
+          </a:p>
+        </p:txBody>
+      </p:sp>
+      <p:sp>
+        <p:nvSpPr>
+          <p:cNvPr id="5" name="Text 2"/>
+          <p:cNvSpPr/>
+          <p:nvPr/>
+        </p:nvSpPr>
+        <p:spPr>
+          <a:xfrm>
+            <a:off x="566928" y="676656"/>
+            <a:ext cx="11055096" cy="1005840"/>
+          </a:xfrm>
+          <a:prstGeom prst="rect">
+            <a:avLst/>
+          </a:prstGeom>
+          <a:noFill/>
+          <a:ln/>
+        </p:spPr>
+        <p:txBody>
+          <a:bodyPr wrap="square" rtlCol="0" anchor="t"/>
+          <a:lstStyle/>
+          <a:p>
+            <a:pPr algn="l" indent="0" marL="0">
+              <a:buNone/>
+            </a:pPr>
+            <a:r>
+              <a:rPr lang="en-US" sz="3000" b="1" dirty="0">
+                <a:solidFill>
+                  <a:srgbClr val="151515"/>
+                </a:solidFill>
+                <a:latin typeface="Overpass" pitchFamily="34" charset="0"/>
+                <a:ea typeface="Overpass" pitchFamily="34" charset="-122"/>
+                <a:cs typeface="Overpass" pitchFamily="34" charset="-120"/>
+              </a:rPr>
+              <a:t>Narrate → stop → run → stop</a:t>
+            </a:r>
+            <a:endParaRPr lang="en-US" sz="3000" dirty="0"/>
+          </a:p>
+        </p:txBody>
+      </p:sp>
+      <p:sp>
+        <p:nvSpPr>
+          <p:cNvPr id="6" name="Text 3"/>
+          <p:cNvSpPr/>
+          <p:nvPr/>
+        </p:nvSpPr>
+        <p:spPr>
+          <a:xfrm>
+            <a:off x="566928" y="1691640"/>
+            <a:ext cx="11055096" cy="4434840"/>
+          </a:xfrm>
+          <a:prstGeom prst="rect">
+            <a:avLst/>
+          </a:prstGeom>
+          <a:noFill/>
+          <a:ln/>
+        </p:spPr>
+        <p:txBody>
+          <a:bodyPr wrap="square" rtlCol="0" anchor="t"/>
+          <a:lstStyle/>
+          <a:p>
+            <a:pPr algn="l" marL="342900" indent="-342900">
+              <a:lnSpc>
+                <a:spcPct val="115000"/>
+              </a:lnSpc>
+              <a:spcAft>
+                <a:spcPts val="600"/>
+              </a:spcAft>
+              <a:buSzPct val="100000"/>
+              <a:buChar char="●"/>
+            </a:pPr>
+            <a:r>
+              <a:rPr lang="en-US" sz="1600" dirty="0">
+                <a:solidFill>
+                  <a:srgbClr val="242424"/>
+                </a:solidFill>
+                <a:latin typeface="Red Hat Text" pitchFamily="34" charset="0"/>
+                <a:ea typeface="Red Hat Text" pitchFamily="34" charset="-122"/>
+                <a:cs typeface="Red Hat Text" pitchFamily="34" charset="-120"/>
+              </a:rPr>
+              <a:t>Eight demos under demos/, runnable individually or as one guided walkthrough.</a:t>
+            </a:r>
+            <a:endParaRPr lang="en-US" sz="1600" dirty="0"/>
+          </a:p>
+          <a:p>
+            <a:pPr algn="l" marL="342900" indent="-342900">
+              <a:lnSpc>
+                <a:spcPct val="115000"/>
+              </a:lnSpc>
+              <a:spcAft>
+                <a:spcPts val="600"/>
+              </a:spcAft>
+              <a:buSzPct val="100000"/>
+              <a:buChar char="●"/>
+            </a:pPr>
+            <a:r>
+              <a:rPr lang="en-US" sz="1600" dirty="0">
+                <a:solidFill>
+                  <a:srgbClr val="242424"/>
+                </a:solidFill>
+                <a:latin typeface="Red Hat Text" pitchFamily="34" charset="0"/>
+                <a:ea typeface="Red Hat Text" pitchFamily="34" charset="-122"/>
+                <a:cs typeface="Red Hat Text" pitchFamily="34" charset="-120"/>
+              </a:rPr>
+              <a:t>Each demo explains a step, stops for Enter so you can narrate, runs the command live, then stops again before the next.</a:t>
+            </a:r>
+            <a:endParaRPr lang="en-US" sz="1600" dirty="0"/>
+          </a:p>
+          <a:p>
+            <a:pPr algn="l" marL="342900" indent="-342900">
+              <a:lnSpc>
+                <a:spcPct val="115000"/>
+              </a:lnSpc>
+              <a:spcAft>
+                <a:spcPts val="600"/>
+              </a:spcAft>
+              <a:buSzPct val="100000"/>
+              <a:buChar char="●"/>
+            </a:pPr>
+            <a:r>
+              <a:rPr lang="en-US" sz="1600" dirty="0">
+                <a:solidFill>
+                  <a:srgbClr val="242424"/>
+                </a:solidFill>
+                <a:latin typeface="Red Hat Text" pitchFamily="34" charset="0"/>
+                <a:ea typeface="Red Hat Text" pitchFamily="34" charset="-122"/>
+                <a:cs typeface="Red Hat Text" pitchFamily="34" charset="-120"/>
+              </a:rPr>
+              <a:t>Nothing aborts on stage: a slow pull or unreachable registry degrades to a short note and the demo continues.</a:t>
+            </a:r>
+            <a:endParaRPr lang="en-US" sz="1600" dirty="0"/>
+          </a:p>
+          <a:p>
+            <a:pPr algn="l" marL="342900" indent="-342900">
+              <a:lnSpc>
+                <a:spcPct val="115000"/>
+              </a:lnSpc>
+              <a:spcAft>
+                <a:spcPts val="600"/>
+              </a:spcAft>
+              <a:buSzPct val="100000"/>
+              <a:buChar char="●"/>
+            </a:pPr>
+            <a:r>
+              <a:rPr lang="en-US" sz="1600" dirty="0">
+                <a:solidFill>
+                  <a:srgbClr val="242424"/>
+                </a:solidFill>
+                <a:latin typeface="Red Hat Text" pitchFamily="34" charset="0"/>
+                <a:ea typeface="Red Hat Text" pitchFamily="34" charset="-122"/>
+                <a:cs typeface="Red Hat Text" pitchFamily="34" charset="-120"/>
+              </a:rPr>
+              <a:t>Self-cleaning: every demo removes the containers, images, and temp files it created on exit.</a:t>
+            </a:r>
+            <a:endParaRPr lang="en-US" sz="1600" dirty="0"/>
+          </a:p>
+        </p:txBody>
+      </p:sp>
+    </p:spTree>
+  </p:cSld>
+  <p:clrMapOvr>
+    <a:masterClrMapping/>
+  </p:clrMapOvr>
+</p:sld>
+</file>
+
+<file path=ppt/slides/slide34.xml><?xml version="1.0" encoding="utf-8"?>
+<p:sld xmlns:a="http://schemas.openxmlformats.org/drawingml/2006/main" xmlns:r="http://schemas.openxmlformats.org/officeDocument/2006/relationships" xmlns:p="http://schemas.openxmlformats.org/presentationml/2006/main">
+  <p:cSld name="Slide 34">
+    <p:spTree>
+      <p:nvGrpSpPr>
+        <p:cNvPr id="1" name=""/>
+        <p:cNvGrpSpPr/>
+        <p:nvPr/>
+      </p:nvGrpSpPr>
+      <p:grpSpPr>
+        <a:xfrm>
+          <a:off x="0" y="0"/>
+          <a:ext cx="0" cy="0"/>
+          <a:chOff x="0" y="0"/>
+          <a:chExt cx="0" cy="0"/>
+        </a:xfrm>
+      </p:grpSpPr>
+      <p:sp>
+        <p:nvSpPr>
+          <p:cNvPr id="2" name="Text 0"/>
+          <p:cNvSpPr/>
+          <p:nvPr/>
+        </p:nvSpPr>
+        <p:spPr>
+          <a:xfrm>
+            <a:off x="566928" y="6364224"/>
+            <a:ext cx="914400" cy="274320"/>
+          </a:xfrm>
+          <a:prstGeom prst="rect">
+            <a:avLst/>
+          </a:prstGeom>
+          <a:noFill/>
+          <a:ln/>
+        </p:spPr>
+        <p:txBody>
+          <a:bodyPr wrap="square" rtlCol="0" anchor="ctr"/>
+          <a:lstStyle/>
+          <a:p>
+            <a:pPr algn="l" indent="0" marL="0">
+              <a:buNone/>
+            </a:pPr>
+            <a:r>
+              <a:rPr lang="en-US" sz="1000" dirty="0">
+                <a:solidFill>
+                  <a:srgbClr val="8A8A8A"/>
+                </a:solidFill>
+                <a:latin typeface="Red Hat Text" pitchFamily="34" charset="0"/>
+                <a:ea typeface="Red Hat Text" pitchFamily="34" charset="-122"/>
+                <a:cs typeface="Red Hat Text" pitchFamily="34" charset="-120"/>
+              </a:rPr>
+              <a:t>34</a:t>
+            </a:r>
+            <a:endParaRPr lang="en-US" sz="1000" dirty="0"/>
+          </a:p>
+        </p:txBody>
+      </p:sp>
+      <p:pic>
+        <p:nvPicPr>
+          <p:cNvPr id="3" name="Image 0" descr="./assets/logo-candidate-2.png">    </p:cNvPr>
+          <p:cNvPicPr>
+            <a:picLocks noChangeAspect="1"/>
+          </p:cNvPicPr>
+          <p:nvPr/>
+        </p:nvPicPr>
+        <p:blipFill>
+          <a:blip r:embed="rId1"/>
+          <a:stretch>
+            <a:fillRect/>
+          </a:stretch>
+        </p:blipFill>
+        <p:spPr>
+          <a:xfrm>
+            <a:off x="10561320" y="6355080"/>
+            <a:ext cx="1033272" cy="246888"/>
+          </a:xfrm>
+          <a:prstGeom prst="rect">
+            <a:avLst/>
+          </a:prstGeom>
+        </p:spPr>
+      </p:pic>
+      <p:sp>
+        <p:nvSpPr>
+          <p:cNvPr id="4" name="Text 1"/>
+          <p:cNvSpPr/>
+          <p:nvPr/>
+        </p:nvSpPr>
+        <p:spPr>
+          <a:xfrm>
+            <a:off x="566928" y="384048"/>
+            <a:ext cx="11055096" cy="292608"/>
+          </a:xfrm>
+          <a:prstGeom prst="rect">
+            <a:avLst/>
+          </a:prstGeom>
+          <a:noFill/>
+          <a:ln/>
+        </p:spPr>
+        <p:txBody>
+          <a:bodyPr wrap="square" rtlCol="0" anchor="ctr"/>
+          <a:lstStyle/>
+          <a:p>
+            <a:pPr algn="l" indent="0" marL="0">
+              <a:buNone/>
+            </a:pPr>
+            <a:r>
+              <a:rPr lang="en-US" sz="1200" b="1" spc="400" kern="0" dirty="0">
+                <a:solidFill>
+                  <a:srgbClr val="EE0000"/>
+                </a:solidFill>
+                <a:latin typeface="Overpass" pitchFamily="34" charset="0"/>
+                <a:ea typeface="Overpass" pitchFamily="34" charset="-122"/>
+                <a:cs typeface="Overpass" pitchFamily="34" charset="-120"/>
+              </a:rPr>
+              <a:t>DEMOS · 1–4</a:t>
+            </a:r>
+            <a:endParaRPr lang="en-US" sz="1200" dirty="0"/>
+          </a:p>
+        </p:txBody>
+      </p:sp>
+      <p:sp>
+        <p:nvSpPr>
+          <p:cNvPr id="5" name="Text 2"/>
+          <p:cNvSpPr/>
+          <p:nvPr/>
+        </p:nvSpPr>
+        <p:spPr>
+          <a:xfrm>
+            <a:off x="566928" y="676656"/>
+            <a:ext cx="11055096" cy="1005840"/>
+          </a:xfrm>
+          <a:prstGeom prst="rect">
+            <a:avLst/>
+          </a:prstGeom>
+          <a:noFill/>
+          <a:ln/>
+        </p:spPr>
+        <p:txBody>
+          <a:bodyPr wrap="square" rtlCol="0" anchor="t"/>
+          <a:lstStyle/>
+          <a:p>
+            <a:pPr algn="l" indent="0" marL="0">
+              <a:buNone/>
+            </a:pPr>
+            <a:r>
+              <a:rPr lang="en-US" sz="3000" b="1" dirty="0">
+                <a:solidFill>
+                  <a:srgbClr val="151515"/>
+                </a:solidFill>
+                <a:latin typeface="Overpass" pitchFamily="34" charset="0"/>
+                <a:ea typeface="Overpass" pitchFamily="34" charset="-122"/>
+                <a:cs typeface="Overpass" pitchFamily="34" charset="-120"/>
+              </a:rPr>
               <a:t>Pull, debug, compare, build</a:t>
             </a:r>
             <a:endParaRPr lang="en-US" sz="3000" dirty="0"/>
@@ -12442,7 +13990,7 @@
       </p:sp>
       <p:graphicFrame>
         <p:nvGraphicFramePr>
-          <p:cNvPr id="32" name="Table 0"/>
+          <p:cNvPr id="35" name="Table 0"/>
           <p:cNvGraphicFramePr>
             <a:graphicFrameLocks noGrp="1"/>
           </p:cNvGraphicFramePr>
@@ -13267,9 +14815,9 @@
 </p:sld>
 </file>
 
-<file path=ppt/slides/slide32.xml><?xml version="1.0" encoding="utf-8"?>
+<file path=ppt/slides/slide35.xml><?xml version="1.0" encoding="utf-8"?>
 <p:sld xmlns:a="http://schemas.openxmlformats.org/drawingml/2006/main" xmlns:r="http://schemas.openxmlformats.org/officeDocument/2006/relationships" xmlns:p="http://schemas.openxmlformats.org/presentationml/2006/main">
-  <p:cSld name="Slide 32">
+  <p:cSld name="Slide 35">
     <p:spTree>
       <p:nvGrpSpPr>
         <p:cNvPr id="1" name=""/>
@@ -13317,7 +14865,7 @@
                 <a:ea typeface="Red Hat Text" pitchFamily="34" charset="-122"/>
                 <a:cs typeface="Red Hat Text" pitchFamily="34" charset="-120"/>
               </a:rPr>
-              <a:t>32</a:t>
+              <a:t>35</a:t>
             </a:r>
             <a:endParaRPr lang="en-US" sz="1000" dirty="0"/>
           </a:p>
@@ -13427,7 +14975,7 @@
       </p:sp>
       <p:graphicFrame>
         <p:nvGraphicFramePr>
-          <p:cNvPr id="33" name="Table 0"/>
+          <p:cNvPr id="36" name="Table 0"/>
           <p:cNvGraphicFramePr>
             <a:graphicFrameLocks noGrp="1"/>
           </p:cNvGraphicFramePr>
@@ -14252,9 +15800,9 @@
 </p:sld>
 </file>
 
-<file path=ppt/slides/slide33.xml><?xml version="1.0" encoding="utf-8"?>
+<file path=ppt/slides/slide36.xml><?xml version="1.0" encoding="utf-8"?>
 <p:sld xmlns:a="http://schemas.openxmlformats.org/drawingml/2006/main" xmlns:r="http://schemas.openxmlformats.org/officeDocument/2006/relationships" xmlns:p="http://schemas.openxmlformats.org/presentationml/2006/main">
-  <p:cSld name="Slide 33">
+  <p:cSld name="Slide 36">
     <p:spTree>
       <p:nvGrpSpPr>
         <p:cNvPr id="1" name=""/>
@@ -14302,7 +15850,7 @@
                 <a:ea typeface="Red Hat Text" pitchFamily="34" charset="-122"/>
                 <a:cs typeface="Red Hat Text" pitchFamily="34" charset="-120"/>
               </a:rPr>
-              <a:t>33</a:t>
+              <a:t>36</a:t>
             </a:r>
             <a:endParaRPr lang="en-US" sz="1000" dirty="0"/>
           </a:p>
@@ -14708,9 +16256,9 @@
 </p:sld>
 </file>
 
-<file path=ppt/slides/slide34.xml><?xml version="1.0" encoding="utf-8"?>
+<file path=ppt/slides/slide37.xml><?xml version="1.0" encoding="utf-8"?>
 <p:sld xmlns:a="http://schemas.openxmlformats.org/drawingml/2006/main" xmlns:r="http://schemas.openxmlformats.org/officeDocument/2006/relationships" xmlns:p="http://schemas.openxmlformats.org/presentationml/2006/main">
-  <p:cSld name="Slide 34">
+  <p:cSld name="Slide 37">
     <p:bg>
       <p:bgPr>
         <a:solidFill>
@@ -14905,690 +16453,6 @@
 </p:sld>
 </file>
 
-<file path=ppt/slides/slide35.xml><?xml version="1.0" encoding="utf-8"?>
-<p:sld xmlns:a="http://schemas.openxmlformats.org/drawingml/2006/main" xmlns:r="http://schemas.openxmlformats.org/officeDocument/2006/relationships" xmlns:p="http://schemas.openxmlformats.org/presentationml/2006/main">
-  <p:cSld name="Slide 35">
-    <p:spTree>
-      <p:nvGrpSpPr>
-        <p:cNvPr id="1" name=""/>
-        <p:cNvGrpSpPr/>
-        <p:nvPr/>
-      </p:nvGrpSpPr>
-      <p:grpSpPr>
-        <a:xfrm>
-          <a:off x="0" y="0"/>
-          <a:ext cx="0" cy="0"/>
-          <a:chOff x="0" y="0"/>
-          <a:chExt cx="0" cy="0"/>
-        </a:xfrm>
-      </p:grpSpPr>
-      <p:sp>
-        <p:nvSpPr>
-          <p:cNvPr id="2" name="Text 0"/>
-          <p:cNvSpPr/>
-          <p:nvPr/>
-        </p:nvSpPr>
-        <p:spPr>
-          <a:xfrm>
-            <a:off x="566928" y="6364224"/>
-            <a:ext cx="914400" cy="274320"/>
-          </a:xfrm>
-          <a:prstGeom prst="rect">
-            <a:avLst/>
-          </a:prstGeom>
-          <a:noFill/>
-          <a:ln/>
-        </p:spPr>
-        <p:txBody>
-          <a:bodyPr wrap="square" rtlCol="0" anchor="ctr"/>
-          <a:lstStyle/>
-          <a:p>
-            <a:pPr algn="l" indent="0" marL="0">
-              <a:buNone/>
-            </a:pPr>
-            <a:r>
-              <a:rPr lang="en-US" sz="1000" dirty="0">
-                <a:solidFill>
-                  <a:srgbClr val="8A8A8A"/>
-                </a:solidFill>
-                <a:latin typeface="Red Hat Text" pitchFamily="34" charset="0"/>
-                <a:ea typeface="Red Hat Text" pitchFamily="34" charset="-122"/>
-                <a:cs typeface="Red Hat Text" pitchFamily="34" charset="-120"/>
-              </a:rPr>
-              <a:t>35</a:t>
-            </a:r>
-            <a:endParaRPr lang="en-US" sz="1000" dirty="0"/>
-          </a:p>
-        </p:txBody>
-      </p:sp>
-      <p:pic>
-        <p:nvPicPr>
-          <p:cNvPr id="3" name="Image 0" descr="./assets/logo-candidate-2.png">    </p:cNvPr>
-          <p:cNvPicPr>
-            <a:picLocks noChangeAspect="1"/>
-          </p:cNvPicPr>
-          <p:nvPr/>
-        </p:nvPicPr>
-        <p:blipFill>
-          <a:blip r:embed="rId1"/>
-          <a:stretch>
-            <a:fillRect/>
-          </a:stretch>
-        </p:blipFill>
-        <p:spPr>
-          <a:xfrm>
-            <a:off x="10561320" y="6355080"/>
-            <a:ext cx="1033272" cy="246888"/>
-          </a:xfrm>
-          <a:prstGeom prst="rect">
-            <a:avLst/>
-          </a:prstGeom>
-        </p:spPr>
-      </p:pic>
-      <p:sp>
-        <p:nvSpPr>
-          <p:cNvPr id="4" name="Text 1"/>
-          <p:cNvSpPr/>
-          <p:nvPr/>
-        </p:nvSpPr>
-        <p:spPr>
-          <a:xfrm>
-            <a:off x="566928" y="384048"/>
-            <a:ext cx="11055096" cy="292608"/>
-          </a:xfrm>
-          <a:prstGeom prst="rect">
-            <a:avLst/>
-          </a:prstGeom>
-          <a:noFill/>
-          <a:ln/>
-        </p:spPr>
-        <p:txBody>
-          <a:bodyPr wrap="square" rtlCol="0" anchor="ctr"/>
-          <a:lstStyle/>
-          <a:p>
-            <a:pPr algn="l" indent="0" marL="0">
-              <a:buNone/>
-            </a:pPr>
-            <a:r>
-              <a:rPr lang="en-US" sz="1200" b="1" spc="400" kern="0" dirty="0">
-                <a:solidFill>
-                  <a:srgbClr val="EE0000"/>
-                </a:solidFill>
-                <a:latin typeface="Overpass" pitchFamily="34" charset="0"/>
-                <a:ea typeface="Overpass" pitchFamily="34" charset="-122"/>
-                <a:cs typeface="Overpass" pitchFamily="34" charset="-120"/>
-              </a:rPr>
-              <a:t>SUPPLY CHAIN · THE PROBLEM</a:t>
-            </a:r>
-            <a:endParaRPr lang="en-US" sz="1200" dirty="0"/>
-          </a:p>
-        </p:txBody>
-      </p:sp>
-      <p:sp>
-        <p:nvSpPr>
-          <p:cNvPr id="5" name="Text 2"/>
-          <p:cNvSpPr/>
-          <p:nvPr/>
-        </p:nvSpPr>
-        <p:spPr>
-          <a:xfrm>
-            <a:off x="566928" y="676656"/>
-            <a:ext cx="11055096" cy="1005840"/>
-          </a:xfrm>
-          <a:prstGeom prst="rect">
-            <a:avLst/>
-          </a:prstGeom>
-          <a:noFill/>
-          <a:ln/>
-        </p:spPr>
-        <p:txBody>
-          <a:bodyPr wrap="square" rtlCol="0" anchor="t"/>
-          <a:lstStyle/>
-          <a:p>
-            <a:pPr algn="l" indent="0" marL="0">
-              <a:buNone/>
-            </a:pPr>
-            <a:r>
-              <a:rPr lang="en-US" sz="3000" b="1" dirty="0">
-                <a:solidFill>
-                  <a:srgbClr val="151515"/>
-                </a:solidFill>
-                <a:latin typeface="Overpass" pitchFamily="34" charset="0"/>
-                <a:ea typeface="Overpass" pitchFamily="34" charset="-122"/>
-                <a:cs typeface="Overpass" pitchFamily="34" charset="-120"/>
-              </a:rPr>
-              <a:t>Where the supply chain gets attacked</a:t>
-            </a:r>
-            <a:endParaRPr lang="en-US" sz="3000" dirty="0"/>
-          </a:p>
-        </p:txBody>
-      </p:sp>
-      <p:pic>
-        <p:nvPicPr>
-          <p:cNvPr id="6" name="Image 1" descr="./png/18-supply-chain-security-the-chain.png">    </p:cNvPr>
-          <p:cNvPicPr>
-            <a:picLocks noChangeAspect="1"/>
-          </p:cNvPicPr>
-          <p:nvPr/>
-        </p:nvPicPr>
-        <p:blipFill>
-          <a:blip r:embed="rId2"/>
-          <a:srcRect l="0" r="0" t="0" b="0"/>
-          <a:stretch/>
-        </p:blipFill>
-        <p:spPr>
-          <a:xfrm>
-            <a:off x="1645920" y="1600200"/>
-            <a:ext cx="8906256" cy="4343400"/>
-          </a:xfrm>
-          <a:prstGeom prst="rect">
-            <a:avLst/>
-          </a:prstGeom>
-        </p:spPr>
-      </p:pic>
-      <p:sp>
-        <p:nvSpPr>
-          <p:cNvPr id="7" name="Text 3"/>
-          <p:cNvSpPr/>
-          <p:nvPr/>
-        </p:nvSpPr>
-        <p:spPr>
-          <a:xfrm>
-            <a:off x="566928" y="5943600"/>
-            <a:ext cx="11055096" cy="310896"/>
-          </a:xfrm>
-          <a:prstGeom prst="rect">
-            <a:avLst/>
-          </a:prstGeom>
-          <a:noFill/>
-          <a:ln/>
-        </p:spPr>
-        <p:txBody>
-          <a:bodyPr wrap="square" rtlCol="0" anchor="ctr"/>
-          <a:lstStyle/>
-          <a:p>
-            <a:pPr algn="ctr" indent="0" marL="0">
-              <a:buNone/>
-            </a:pPr>
-            <a:r>
-              <a:rPr lang="en-US" sz="1300" i="1" dirty="0">
-                <a:solidFill>
-                  <a:srgbClr val="5A5A5A"/>
-                </a:solidFill>
-                <a:latin typeface="Red Hat Text" pitchFamily="34" charset="0"/>
-                <a:ea typeface="Red Hat Text" pitchFamily="34" charset="-122"/>
-                <a:cs typeface="Red Hat Text" pitchFamily="34" charset="-120"/>
-              </a:rPr>
-              <a:t>Figure 18.1 — The container supply chain, and where it gets attacked.</a:t>
-            </a:r>
-            <a:endParaRPr lang="en-US" sz="1300" dirty="0"/>
-          </a:p>
-        </p:txBody>
-      </p:sp>
-    </p:spTree>
-  </p:cSld>
-  <p:clrMapOvr>
-    <a:masterClrMapping/>
-  </p:clrMapOvr>
-</p:sld>
-</file>
-
-<file path=ppt/slides/slide36.xml><?xml version="1.0" encoding="utf-8"?>
-<p:sld xmlns:a="http://schemas.openxmlformats.org/drawingml/2006/main" xmlns:r="http://schemas.openxmlformats.org/officeDocument/2006/relationships" xmlns:p="http://schemas.openxmlformats.org/presentationml/2006/main">
-  <p:cSld name="Slide 36">
-    <p:spTree>
-      <p:nvGrpSpPr>
-        <p:cNvPr id="1" name=""/>
-        <p:cNvGrpSpPr/>
-        <p:nvPr/>
-      </p:nvGrpSpPr>
-      <p:grpSpPr>
-        <a:xfrm>
-          <a:off x="0" y="0"/>
-          <a:ext cx="0" cy="0"/>
-          <a:chOff x="0" y="0"/>
-          <a:chExt cx="0" cy="0"/>
-        </a:xfrm>
-      </p:grpSpPr>
-      <p:sp>
-        <p:nvSpPr>
-          <p:cNvPr id="2" name="Text 0"/>
-          <p:cNvSpPr/>
-          <p:nvPr/>
-        </p:nvSpPr>
-        <p:spPr>
-          <a:xfrm>
-            <a:off x="566928" y="6364224"/>
-            <a:ext cx="914400" cy="274320"/>
-          </a:xfrm>
-          <a:prstGeom prst="rect">
-            <a:avLst/>
-          </a:prstGeom>
-          <a:noFill/>
-          <a:ln/>
-        </p:spPr>
-        <p:txBody>
-          <a:bodyPr wrap="square" rtlCol="0" anchor="ctr"/>
-          <a:lstStyle/>
-          <a:p>
-            <a:pPr algn="l" indent="0" marL="0">
-              <a:buNone/>
-            </a:pPr>
-            <a:r>
-              <a:rPr lang="en-US" sz="1000" dirty="0">
-                <a:solidFill>
-                  <a:srgbClr val="8A8A8A"/>
-                </a:solidFill>
-                <a:latin typeface="Red Hat Text" pitchFamily="34" charset="0"/>
-                <a:ea typeface="Red Hat Text" pitchFamily="34" charset="-122"/>
-                <a:cs typeface="Red Hat Text" pitchFamily="34" charset="-120"/>
-              </a:rPr>
-              <a:t>36</a:t>
-            </a:r>
-            <a:endParaRPr lang="en-US" sz="1000" dirty="0"/>
-          </a:p>
-        </p:txBody>
-      </p:sp>
-      <p:pic>
-        <p:nvPicPr>
-          <p:cNvPr id="3" name="Image 0" descr="./assets/logo-candidate-2.png">    </p:cNvPr>
-          <p:cNvPicPr>
-            <a:picLocks noChangeAspect="1"/>
-          </p:cNvPicPr>
-          <p:nvPr/>
-        </p:nvPicPr>
-        <p:blipFill>
-          <a:blip r:embed="rId1"/>
-          <a:stretch>
-            <a:fillRect/>
-          </a:stretch>
-        </p:blipFill>
-        <p:spPr>
-          <a:xfrm>
-            <a:off x="10561320" y="6355080"/>
-            <a:ext cx="1033272" cy="246888"/>
-          </a:xfrm>
-          <a:prstGeom prst="rect">
-            <a:avLst/>
-          </a:prstGeom>
-        </p:spPr>
-      </p:pic>
-      <p:sp>
-        <p:nvSpPr>
-          <p:cNvPr id="4" name="Text 1"/>
-          <p:cNvSpPr/>
-          <p:nvPr/>
-        </p:nvSpPr>
-        <p:spPr>
-          <a:xfrm>
-            <a:off x="566928" y="384048"/>
-            <a:ext cx="11055096" cy="292608"/>
-          </a:xfrm>
-          <a:prstGeom prst="rect">
-            <a:avLst/>
-          </a:prstGeom>
-          <a:noFill/>
-          <a:ln/>
-        </p:spPr>
-        <p:txBody>
-          <a:bodyPr wrap="square" rtlCol="0" anchor="ctr"/>
-          <a:lstStyle/>
-          <a:p>
-            <a:pPr algn="l" indent="0" marL="0">
-              <a:buNone/>
-            </a:pPr>
-            <a:r>
-              <a:rPr lang="en-US" sz="1200" b="1" spc="400" kern="0" dirty="0">
-                <a:solidFill>
-                  <a:srgbClr val="EE0000"/>
-                </a:solidFill>
-                <a:latin typeface="Overpass" pitchFamily="34" charset="0"/>
-                <a:ea typeface="Overpass" pitchFamily="34" charset="-122"/>
-                <a:cs typeface="Overpass" pitchFamily="34" charset="-120"/>
-              </a:rPr>
-              <a:t>SUPPLY CHAIN · THE ANSWER</a:t>
-            </a:r>
-            <a:endParaRPr lang="en-US" sz="1200" dirty="0"/>
-          </a:p>
-        </p:txBody>
-      </p:sp>
-      <p:sp>
-        <p:nvSpPr>
-          <p:cNvPr id="5" name="Text 2"/>
-          <p:cNvSpPr/>
-          <p:nvPr/>
-        </p:nvSpPr>
-        <p:spPr>
-          <a:xfrm>
-            <a:off x="566928" y="676656"/>
-            <a:ext cx="11055096" cy="1005840"/>
-          </a:xfrm>
-          <a:prstGeom prst="rect">
-            <a:avLst/>
-          </a:prstGeom>
-          <a:noFill/>
-          <a:ln/>
-        </p:spPr>
-        <p:txBody>
-          <a:bodyPr wrap="square" rtlCol="0" anchor="t"/>
-          <a:lstStyle/>
-          <a:p>
-            <a:pPr algn="l" indent="0" marL="0">
-              <a:buNone/>
-            </a:pPr>
-            <a:r>
-              <a:rPr lang="en-US" sz="3000" b="1" dirty="0">
-                <a:solidFill>
-                  <a:srgbClr val="151515"/>
-                </a:solidFill>
-                <a:latin typeface="Overpass" pitchFamily="34" charset="0"/>
-                <a:ea typeface="Overpass" pitchFamily="34" charset="-122"/>
-                <a:cs typeface="Overpass" pitchFamily="34" charset="-120"/>
-              </a:rPr>
-              <a:t>The same chain, with the Hummingbird answer</a:t>
-            </a:r>
-            <a:endParaRPr lang="en-US" sz="3000" dirty="0"/>
-          </a:p>
-        </p:txBody>
-      </p:sp>
-      <p:pic>
-        <p:nvPicPr>
-          <p:cNvPr id="6" name="Image 1" descr="./png/18-supply-chain-security-attack-vectors.png">    </p:cNvPr>
-          <p:cNvPicPr>
-            <a:picLocks noChangeAspect="1"/>
-          </p:cNvPicPr>
-          <p:nvPr/>
-        </p:nvPicPr>
-        <p:blipFill>
-          <a:blip r:embed="rId2"/>
-          <a:srcRect l="0" r="0" t="0" b="0"/>
-          <a:stretch/>
-        </p:blipFill>
-        <p:spPr>
-          <a:xfrm>
-            <a:off x="1645920" y="1600200"/>
-            <a:ext cx="8906256" cy="4343400"/>
-          </a:xfrm>
-          <a:prstGeom prst="rect">
-            <a:avLst/>
-          </a:prstGeom>
-        </p:spPr>
-      </p:pic>
-      <p:sp>
-        <p:nvSpPr>
-          <p:cNvPr id="7" name="Text 3"/>
-          <p:cNvSpPr/>
-          <p:nvPr/>
-        </p:nvSpPr>
-        <p:spPr>
-          <a:xfrm>
-            <a:off x="566928" y="5943600"/>
-            <a:ext cx="11055096" cy="310896"/>
-          </a:xfrm>
-          <a:prstGeom prst="rect">
-            <a:avLst/>
-          </a:prstGeom>
-          <a:noFill/>
-          <a:ln/>
-        </p:spPr>
-        <p:txBody>
-          <a:bodyPr wrap="square" rtlCol="0" anchor="ctr"/>
-          <a:lstStyle/>
-          <a:p>
-            <a:pPr algn="ctr" indent="0" marL="0">
-              <a:buNone/>
-            </a:pPr>
-            <a:r>
-              <a:rPr lang="en-US" sz="1300" i="1" dirty="0">
-                <a:solidFill>
-                  <a:srgbClr val="5A5A5A"/>
-                </a:solidFill>
-                <a:latin typeface="Red Hat Text" pitchFamily="34" charset="0"/>
-                <a:ea typeface="Red Hat Text" pitchFamily="34" charset="-122"/>
-                <a:cs typeface="Red Hat Text" pitchFamily="34" charset="-120"/>
-              </a:rPr>
-              <a:t>Figure 18.2 — Attack vectors and the Hummingbird answer at each stage, on Podman/Konflux/OpenShift.</a:t>
-            </a:r>
-            <a:endParaRPr lang="en-US" sz="1300" dirty="0"/>
-          </a:p>
-        </p:txBody>
-      </p:sp>
-    </p:spTree>
-  </p:cSld>
-  <p:clrMapOvr>
-    <a:masterClrMapping/>
-  </p:clrMapOvr>
-</p:sld>
-</file>
-
-<file path=ppt/slides/slide37.xml><?xml version="1.0" encoding="utf-8"?>
-<p:sld xmlns:a="http://schemas.openxmlformats.org/drawingml/2006/main" xmlns:r="http://schemas.openxmlformats.org/officeDocument/2006/relationships" xmlns:p="http://schemas.openxmlformats.org/presentationml/2006/main">
-  <p:cSld name="Slide 37">
-    <p:spTree>
-      <p:nvGrpSpPr>
-        <p:cNvPr id="1" name=""/>
-        <p:cNvGrpSpPr/>
-        <p:nvPr/>
-      </p:nvGrpSpPr>
-      <p:grpSpPr>
-        <a:xfrm>
-          <a:off x="0" y="0"/>
-          <a:ext cx="0" cy="0"/>
-          <a:chOff x="0" y="0"/>
-          <a:chExt cx="0" cy="0"/>
-        </a:xfrm>
-      </p:grpSpPr>
-      <p:sp>
-        <p:nvSpPr>
-          <p:cNvPr id="2" name="Text 0"/>
-          <p:cNvSpPr/>
-          <p:nvPr/>
-        </p:nvSpPr>
-        <p:spPr>
-          <a:xfrm>
-            <a:off x="566928" y="6364224"/>
-            <a:ext cx="914400" cy="274320"/>
-          </a:xfrm>
-          <a:prstGeom prst="rect">
-            <a:avLst/>
-          </a:prstGeom>
-          <a:noFill/>
-          <a:ln/>
-        </p:spPr>
-        <p:txBody>
-          <a:bodyPr wrap="square" rtlCol="0" anchor="ctr"/>
-          <a:lstStyle/>
-          <a:p>
-            <a:pPr algn="l" indent="0" marL="0">
-              <a:buNone/>
-            </a:pPr>
-            <a:r>
-              <a:rPr lang="en-US" sz="1000" dirty="0">
-                <a:solidFill>
-                  <a:srgbClr val="8A8A8A"/>
-                </a:solidFill>
-                <a:latin typeface="Red Hat Text" pitchFamily="34" charset="0"/>
-                <a:ea typeface="Red Hat Text" pitchFamily="34" charset="-122"/>
-                <a:cs typeface="Red Hat Text" pitchFamily="34" charset="-120"/>
-              </a:rPr>
-              <a:t>37</a:t>
-            </a:r>
-            <a:endParaRPr lang="en-US" sz="1000" dirty="0"/>
-          </a:p>
-        </p:txBody>
-      </p:sp>
-      <p:pic>
-        <p:nvPicPr>
-          <p:cNvPr id="3" name="Image 0" descr="./assets/logo-candidate-2.png">    </p:cNvPr>
-          <p:cNvPicPr>
-            <a:picLocks noChangeAspect="1"/>
-          </p:cNvPicPr>
-          <p:nvPr/>
-        </p:nvPicPr>
-        <p:blipFill>
-          <a:blip r:embed="rId1"/>
-          <a:stretch>
-            <a:fillRect/>
-          </a:stretch>
-        </p:blipFill>
-        <p:spPr>
-          <a:xfrm>
-            <a:off x="10561320" y="6355080"/>
-            <a:ext cx="1033272" cy="246888"/>
-          </a:xfrm>
-          <a:prstGeom prst="rect">
-            <a:avLst/>
-          </a:prstGeom>
-        </p:spPr>
-      </p:pic>
-      <p:sp>
-        <p:nvSpPr>
-          <p:cNvPr id="4" name="Text 1"/>
-          <p:cNvSpPr/>
-          <p:nvPr/>
-        </p:nvSpPr>
-        <p:spPr>
-          <a:xfrm>
-            <a:off x="566928" y="384048"/>
-            <a:ext cx="11055096" cy="292608"/>
-          </a:xfrm>
-          <a:prstGeom prst="rect">
-            <a:avLst/>
-          </a:prstGeom>
-          <a:noFill/>
-          <a:ln/>
-        </p:spPr>
-        <p:txBody>
-          <a:bodyPr wrap="square" rtlCol="0" anchor="ctr"/>
-          <a:lstStyle/>
-          <a:p>
-            <a:pPr algn="l" indent="0" marL="0">
-              <a:buNone/>
-            </a:pPr>
-            <a:r>
-              <a:rPr lang="en-US" sz="1200" b="1" spc="400" kern="0" dirty="0">
-                <a:solidFill>
-                  <a:srgbClr val="EE0000"/>
-                </a:solidFill>
-                <a:latin typeface="Overpass" pitchFamily="34" charset="0"/>
-                <a:ea typeface="Overpass" pitchFamily="34" charset="-122"/>
-                <a:cs typeface="Overpass" pitchFamily="34" charset="-120"/>
-              </a:rPr>
-              <a:t>SUPPLY CHAIN · RUNTIME SURFACE</a:t>
-            </a:r>
-            <a:endParaRPr lang="en-US" sz="1200" dirty="0"/>
-          </a:p>
-        </p:txBody>
-      </p:sp>
-      <p:sp>
-        <p:nvSpPr>
-          <p:cNvPr id="5" name="Text 2"/>
-          <p:cNvSpPr/>
-          <p:nvPr/>
-        </p:nvSpPr>
-        <p:spPr>
-          <a:xfrm>
-            <a:off x="566928" y="676656"/>
-            <a:ext cx="11055096" cy="1005840"/>
-          </a:xfrm>
-          <a:prstGeom prst="rect">
-            <a:avLst/>
-          </a:prstGeom>
-          <a:noFill/>
-          <a:ln/>
-        </p:spPr>
-        <p:txBody>
-          <a:bodyPr wrap="square" rtlCol="0" anchor="t"/>
-          <a:lstStyle/>
-          <a:p>
-            <a:pPr algn="l" indent="0" marL="0">
-              <a:buNone/>
-            </a:pPr>
-            <a:r>
-              <a:rPr lang="en-US" sz="3000" b="1" dirty="0">
-                <a:solidFill>
-                  <a:srgbClr val="151515"/>
-                </a:solidFill>
-                <a:latin typeface="Overpass" pitchFamily="34" charset="0"/>
-                <a:ea typeface="Overpass" pitchFamily="34" charset="-122"/>
-                <a:cs typeface="Overpass" pitchFamily="34" charset="-120"/>
-              </a:rPr>
-              <a:t>Defense in depth — and where the image helps</a:t>
-            </a:r>
-            <a:endParaRPr lang="en-US" sz="3000" dirty="0"/>
-          </a:p>
-        </p:txBody>
-      </p:sp>
-      <p:pic>
-        <p:nvPicPr>
-          <p:cNvPr id="6" name="Image 1" descr="./png/18-supply-chain-security-layers.png">    </p:cNvPr>
-          <p:cNvPicPr>
-            <a:picLocks noChangeAspect="1"/>
-          </p:cNvPicPr>
-          <p:nvPr/>
-        </p:nvPicPr>
-        <p:blipFill>
-          <a:blip r:embed="rId2"/>
-          <a:srcRect l="0" r="0" t="0" b="0"/>
-          <a:stretch/>
-        </p:blipFill>
-        <p:spPr>
-          <a:xfrm>
-            <a:off x="1645920" y="1600200"/>
-            <a:ext cx="8906256" cy="4343400"/>
-          </a:xfrm>
-          <a:prstGeom prst="rect">
-            <a:avLst/>
-          </a:prstGeom>
-        </p:spPr>
-      </p:pic>
-      <p:sp>
-        <p:nvSpPr>
-          <p:cNvPr id="7" name="Text 3"/>
-          <p:cNvSpPr/>
-          <p:nvPr/>
-        </p:nvSpPr>
-        <p:spPr>
-          <a:xfrm>
-            <a:off x="566928" y="5943600"/>
-            <a:ext cx="11055096" cy="310896"/>
-          </a:xfrm>
-          <a:prstGeom prst="rect">
-            <a:avLst/>
-          </a:prstGeom>
-          <a:noFill/>
-          <a:ln/>
-        </p:spPr>
-        <p:txBody>
-          <a:bodyPr wrap="square" rtlCol="0" anchor="ctr"/>
-          <a:lstStyle/>
-          <a:p>
-            <a:pPr algn="ctr" indent="0" marL="0">
-              <a:buNone/>
-            </a:pPr>
-            <a:r>
-              <a:rPr lang="en-US" sz="1300" i="1" dirty="0">
-                <a:solidFill>
-                  <a:srgbClr val="5A5A5A"/>
-                </a:solidFill>
-                <a:latin typeface="Red Hat Text" pitchFamily="34" charset="0"/>
-                <a:ea typeface="Red Hat Text" pitchFamily="34" charset="-122"/>
-                <a:cs typeface="Red Hat Text" pitchFamily="34" charset="-120"/>
-              </a:rPr>
-              <a:t>Figure 18.3 — The layered runtime attack surface; the hardened image shrinks the image-and-app cluster, not the platform.</a:t>
-            </a:r>
-            <a:endParaRPr lang="en-US" sz="1300" dirty="0"/>
-          </a:p>
-        </p:txBody>
-      </p:sp>
-    </p:spTree>
-  </p:cSld>
-  <p:clrMapOvr>
-    <a:masterClrMapping/>
-  </p:clrMapOvr>
-</p:sld>
-</file>
-
 <file path=ppt/slides/slide38.xml><?xml version="1.0" encoding="utf-8"?>
 <p:sld xmlns:a="http://schemas.openxmlformats.org/drawingml/2006/main" xmlns:r="http://schemas.openxmlformats.org/officeDocument/2006/relationships" xmlns:p="http://schemas.openxmlformats.org/presentationml/2006/main">
   <p:cSld name="Slide 38">
@@ -15702,7 +16566,7 @@
                 <a:ea typeface="Overpass" pitchFamily="34" charset="-122"/>
                 <a:cs typeface="Overpass" pitchFamily="34" charset="-120"/>
               </a:rPr>
-              <a:t>SUPPLY CHAIN · DIVISION OF LABOUR</a:t>
+              <a:t>SUPPLY CHAIN · THE PROBLEM</a:t>
             </a:r>
             <a:endParaRPr lang="en-US" sz="1200" dirty="0"/>
           </a:p>
@@ -15741,6 +16605,997 @@
                 <a:ea typeface="Overpass" pitchFamily="34" charset="-122"/>
                 <a:cs typeface="Overpass" pitchFamily="34" charset="-120"/>
               </a:rPr>
+              <a:t>Where the supply chain gets attacked</a:t>
+            </a:r>
+            <a:endParaRPr lang="en-US" sz="3000" dirty="0"/>
+          </a:p>
+        </p:txBody>
+      </p:sp>
+      <p:pic>
+        <p:nvPicPr>
+          <p:cNvPr id="6" name="Image 1" descr="./png/18-supply-chain-security-the-chain.png">    </p:cNvPr>
+          <p:cNvPicPr>
+            <a:picLocks noChangeAspect="1"/>
+          </p:cNvPicPr>
+          <p:nvPr/>
+        </p:nvPicPr>
+        <p:blipFill>
+          <a:blip r:embed="rId2"/>
+          <a:srcRect l="0" r="0" t="0" b="0"/>
+          <a:stretch/>
+        </p:blipFill>
+        <p:spPr>
+          <a:xfrm>
+            <a:off x="1645920" y="1600200"/>
+            <a:ext cx="8906256" cy="4343400"/>
+          </a:xfrm>
+          <a:prstGeom prst="rect">
+            <a:avLst/>
+          </a:prstGeom>
+        </p:spPr>
+      </p:pic>
+      <p:sp>
+        <p:nvSpPr>
+          <p:cNvPr id="7" name="Text 3"/>
+          <p:cNvSpPr/>
+          <p:nvPr/>
+        </p:nvSpPr>
+        <p:spPr>
+          <a:xfrm>
+            <a:off x="566928" y="5943600"/>
+            <a:ext cx="11055096" cy="310896"/>
+          </a:xfrm>
+          <a:prstGeom prst="rect">
+            <a:avLst/>
+          </a:prstGeom>
+          <a:noFill/>
+          <a:ln/>
+        </p:spPr>
+        <p:txBody>
+          <a:bodyPr wrap="square" rtlCol="0" anchor="ctr"/>
+          <a:lstStyle/>
+          <a:p>
+            <a:pPr algn="ctr" indent="0" marL="0">
+              <a:buNone/>
+            </a:pPr>
+            <a:r>
+              <a:rPr lang="en-US" sz="1300" i="1" dirty="0">
+                <a:solidFill>
+                  <a:srgbClr val="5A5A5A"/>
+                </a:solidFill>
+                <a:latin typeface="Red Hat Text" pitchFamily="34" charset="0"/>
+                <a:ea typeface="Red Hat Text" pitchFamily="34" charset="-122"/>
+                <a:cs typeface="Red Hat Text" pitchFamily="34" charset="-120"/>
+              </a:rPr>
+              <a:t>Figure 18.1 — The container supply chain, and where it gets attacked.</a:t>
+            </a:r>
+            <a:endParaRPr lang="en-US" sz="1300" dirty="0"/>
+          </a:p>
+        </p:txBody>
+      </p:sp>
+    </p:spTree>
+  </p:cSld>
+  <p:clrMapOvr>
+    <a:masterClrMapping/>
+  </p:clrMapOvr>
+</p:sld>
+</file>
+
+<file path=ppt/slides/slide39.xml><?xml version="1.0" encoding="utf-8"?>
+<p:sld xmlns:a="http://schemas.openxmlformats.org/drawingml/2006/main" xmlns:r="http://schemas.openxmlformats.org/officeDocument/2006/relationships" xmlns:p="http://schemas.openxmlformats.org/presentationml/2006/main">
+  <p:cSld name="Slide 39">
+    <p:spTree>
+      <p:nvGrpSpPr>
+        <p:cNvPr id="1" name=""/>
+        <p:cNvGrpSpPr/>
+        <p:nvPr/>
+      </p:nvGrpSpPr>
+      <p:grpSpPr>
+        <a:xfrm>
+          <a:off x="0" y="0"/>
+          <a:ext cx="0" cy="0"/>
+          <a:chOff x="0" y="0"/>
+          <a:chExt cx="0" cy="0"/>
+        </a:xfrm>
+      </p:grpSpPr>
+      <p:sp>
+        <p:nvSpPr>
+          <p:cNvPr id="2" name="Text 0"/>
+          <p:cNvSpPr/>
+          <p:nvPr/>
+        </p:nvSpPr>
+        <p:spPr>
+          <a:xfrm>
+            <a:off x="566928" y="6364224"/>
+            <a:ext cx="914400" cy="274320"/>
+          </a:xfrm>
+          <a:prstGeom prst="rect">
+            <a:avLst/>
+          </a:prstGeom>
+          <a:noFill/>
+          <a:ln/>
+        </p:spPr>
+        <p:txBody>
+          <a:bodyPr wrap="square" rtlCol="0" anchor="ctr"/>
+          <a:lstStyle/>
+          <a:p>
+            <a:pPr algn="l" indent="0" marL="0">
+              <a:buNone/>
+            </a:pPr>
+            <a:r>
+              <a:rPr lang="en-US" sz="1000" dirty="0">
+                <a:solidFill>
+                  <a:srgbClr val="8A8A8A"/>
+                </a:solidFill>
+                <a:latin typeface="Red Hat Text" pitchFamily="34" charset="0"/>
+                <a:ea typeface="Red Hat Text" pitchFamily="34" charset="-122"/>
+                <a:cs typeface="Red Hat Text" pitchFamily="34" charset="-120"/>
+              </a:rPr>
+              <a:t>39</a:t>
+            </a:r>
+            <a:endParaRPr lang="en-US" sz="1000" dirty="0"/>
+          </a:p>
+        </p:txBody>
+      </p:sp>
+      <p:pic>
+        <p:nvPicPr>
+          <p:cNvPr id="3" name="Image 0" descr="./assets/logo-candidate-2.png">    </p:cNvPr>
+          <p:cNvPicPr>
+            <a:picLocks noChangeAspect="1"/>
+          </p:cNvPicPr>
+          <p:nvPr/>
+        </p:nvPicPr>
+        <p:blipFill>
+          <a:blip r:embed="rId1"/>
+          <a:stretch>
+            <a:fillRect/>
+          </a:stretch>
+        </p:blipFill>
+        <p:spPr>
+          <a:xfrm>
+            <a:off x="10561320" y="6355080"/>
+            <a:ext cx="1033272" cy="246888"/>
+          </a:xfrm>
+          <a:prstGeom prst="rect">
+            <a:avLst/>
+          </a:prstGeom>
+        </p:spPr>
+      </p:pic>
+      <p:sp>
+        <p:nvSpPr>
+          <p:cNvPr id="4" name="Text 1"/>
+          <p:cNvSpPr/>
+          <p:nvPr/>
+        </p:nvSpPr>
+        <p:spPr>
+          <a:xfrm>
+            <a:off x="566928" y="384048"/>
+            <a:ext cx="11055096" cy="292608"/>
+          </a:xfrm>
+          <a:prstGeom prst="rect">
+            <a:avLst/>
+          </a:prstGeom>
+          <a:noFill/>
+          <a:ln/>
+        </p:spPr>
+        <p:txBody>
+          <a:bodyPr wrap="square" rtlCol="0" anchor="ctr"/>
+          <a:lstStyle/>
+          <a:p>
+            <a:pPr algn="l" indent="0" marL="0">
+              <a:buNone/>
+            </a:pPr>
+            <a:r>
+              <a:rPr lang="en-US" sz="1200" b="1" spc="400" kern="0" dirty="0">
+                <a:solidFill>
+                  <a:srgbClr val="EE0000"/>
+                </a:solidFill>
+                <a:latin typeface="Overpass" pitchFamily="34" charset="0"/>
+                <a:ea typeface="Overpass" pitchFamily="34" charset="-122"/>
+                <a:cs typeface="Overpass" pitchFamily="34" charset="-120"/>
+              </a:rPr>
+              <a:t>SUPPLY CHAIN · THE ANSWER</a:t>
+            </a:r>
+            <a:endParaRPr lang="en-US" sz="1200" dirty="0"/>
+          </a:p>
+        </p:txBody>
+      </p:sp>
+      <p:sp>
+        <p:nvSpPr>
+          <p:cNvPr id="5" name="Text 2"/>
+          <p:cNvSpPr/>
+          <p:nvPr/>
+        </p:nvSpPr>
+        <p:spPr>
+          <a:xfrm>
+            <a:off x="566928" y="676656"/>
+            <a:ext cx="11055096" cy="1005840"/>
+          </a:xfrm>
+          <a:prstGeom prst="rect">
+            <a:avLst/>
+          </a:prstGeom>
+          <a:noFill/>
+          <a:ln/>
+        </p:spPr>
+        <p:txBody>
+          <a:bodyPr wrap="square" rtlCol="0" anchor="t"/>
+          <a:lstStyle/>
+          <a:p>
+            <a:pPr algn="l" indent="0" marL="0">
+              <a:buNone/>
+            </a:pPr>
+            <a:r>
+              <a:rPr lang="en-US" sz="3000" b="1" dirty="0">
+                <a:solidFill>
+                  <a:srgbClr val="151515"/>
+                </a:solidFill>
+                <a:latin typeface="Overpass" pitchFamily="34" charset="0"/>
+                <a:ea typeface="Overpass" pitchFamily="34" charset="-122"/>
+                <a:cs typeface="Overpass" pitchFamily="34" charset="-120"/>
+              </a:rPr>
+              <a:t>The same chain, with the Hummingbird answer</a:t>
+            </a:r>
+            <a:endParaRPr lang="en-US" sz="3000" dirty="0"/>
+          </a:p>
+        </p:txBody>
+      </p:sp>
+      <p:pic>
+        <p:nvPicPr>
+          <p:cNvPr id="6" name="Image 1" descr="./png/18-supply-chain-security-attack-vectors.png">    </p:cNvPr>
+          <p:cNvPicPr>
+            <a:picLocks noChangeAspect="1"/>
+          </p:cNvPicPr>
+          <p:nvPr/>
+        </p:nvPicPr>
+        <p:blipFill>
+          <a:blip r:embed="rId2"/>
+          <a:srcRect l="0" r="0" t="0" b="0"/>
+          <a:stretch/>
+        </p:blipFill>
+        <p:spPr>
+          <a:xfrm>
+            <a:off x="1645920" y="1600200"/>
+            <a:ext cx="8906256" cy="4343400"/>
+          </a:xfrm>
+          <a:prstGeom prst="rect">
+            <a:avLst/>
+          </a:prstGeom>
+        </p:spPr>
+      </p:pic>
+      <p:sp>
+        <p:nvSpPr>
+          <p:cNvPr id="7" name="Text 3"/>
+          <p:cNvSpPr/>
+          <p:nvPr/>
+        </p:nvSpPr>
+        <p:spPr>
+          <a:xfrm>
+            <a:off x="566928" y="5943600"/>
+            <a:ext cx="11055096" cy="310896"/>
+          </a:xfrm>
+          <a:prstGeom prst="rect">
+            <a:avLst/>
+          </a:prstGeom>
+          <a:noFill/>
+          <a:ln/>
+        </p:spPr>
+        <p:txBody>
+          <a:bodyPr wrap="square" rtlCol="0" anchor="ctr"/>
+          <a:lstStyle/>
+          <a:p>
+            <a:pPr algn="ctr" indent="0" marL="0">
+              <a:buNone/>
+            </a:pPr>
+            <a:r>
+              <a:rPr lang="en-US" sz="1300" i="1" dirty="0">
+                <a:solidFill>
+                  <a:srgbClr val="5A5A5A"/>
+                </a:solidFill>
+                <a:latin typeface="Red Hat Text" pitchFamily="34" charset="0"/>
+                <a:ea typeface="Red Hat Text" pitchFamily="34" charset="-122"/>
+                <a:cs typeface="Red Hat Text" pitchFamily="34" charset="-120"/>
+              </a:rPr>
+              <a:t>Figure 18.2 — Attack vectors and the Hummingbird answer at each stage, on Podman/Konflux/OpenShift.</a:t>
+            </a:r>
+            <a:endParaRPr lang="en-US" sz="1300" dirty="0"/>
+          </a:p>
+        </p:txBody>
+      </p:sp>
+    </p:spTree>
+  </p:cSld>
+  <p:clrMapOvr>
+    <a:masterClrMapping/>
+  </p:clrMapOvr>
+</p:sld>
+</file>
+
+<file path=ppt/slides/slide4.xml><?xml version="1.0" encoding="utf-8"?>
+<p:sld xmlns:a="http://schemas.openxmlformats.org/drawingml/2006/main" xmlns:r="http://schemas.openxmlformats.org/officeDocument/2006/relationships" xmlns:p="http://schemas.openxmlformats.org/presentationml/2006/main">
+  <p:cSld name="Slide 4">
+    <p:spTree>
+      <p:nvGrpSpPr>
+        <p:cNvPr id="1" name=""/>
+        <p:cNvGrpSpPr/>
+        <p:nvPr/>
+      </p:nvGrpSpPr>
+      <p:grpSpPr>
+        <a:xfrm>
+          <a:off x="0" y="0"/>
+          <a:ext cx="0" cy="0"/>
+          <a:chOff x="0" y="0"/>
+          <a:chExt cx="0" cy="0"/>
+        </a:xfrm>
+      </p:grpSpPr>
+      <p:sp>
+        <p:nvSpPr>
+          <p:cNvPr id="2" name="Text 0"/>
+          <p:cNvSpPr/>
+          <p:nvPr/>
+        </p:nvSpPr>
+        <p:spPr>
+          <a:xfrm>
+            <a:off x="566928" y="6364224"/>
+            <a:ext cx="914400" cy="274320"/>
+          </a:xfrm>
+          <a:prstGeom prst="rect">
+            <a:avLst/>
+          </a:prstGeom>
+          <a:noFill/>
+          <a:ln/>
+        </p:spPr>
+        <p:txBody>
+          <a:bodyPr wrap="square" rtlCol="0" anchor="ctr"/>
+          <a:lstStyle/>
+          <a:p>
+            <a:pPr algn="l" indent="0" marL="0">
+              <a:buNone/>
+            </a:pPr>
+            <a:r>
+              <a:rPr lang="en-US" sz="1000" dirty="0">
+                <a:solidFill>
+                  <a:srgbClr val="8A8A8A"/>
+                </a:solidFill>
+                <a:latin typeface="Red Hat Text" pitchFamily="34" charset="0"/>
+                <a:ea typeface="Red Hat Text" pitchFamily="34" charset="-122"/>
+                <a:cs typeface="Red Hat Text" pitchFamily="34" charset="-120"/>
+              </a:rPr>
+              <a:t>4</a:t>
+            </a:r>
+            <a:endParaRPr lang="en-US" sz="1000" dirty="0"/>
+          </a:p>
+        </p:txBody>
+      </p:sp>
+      <p:pic>
+        <p:nvPicPr>
+          <p:cNvPr id="3" name="Image 0" descr="./assets/logo-candidate-2.png">    </p:cNvPr>
+          <p:cNvPicPr>
+            <a:picLocks noChangeAspect="1"/>
+          </p:cNvPicPr>
+          <p:nvPr/>
+        </p:nvPicPr>
+        <p:blipFill>
+          <a:blip r:embed="rId1"/>
+          <a:stretch>
+            <a:fillRect/>
+          </a:stretch>
+        </p:blipFill>
+        <p:spPr>
+          <a:xfrm>
+            <a:off x="10561320" y="6355080"/>
+            <a:ext cx="1033272" cy="246888"/>
+          </a:xfrm>
+          <a:prstGeom prst="rect">
+            <a:avLst/>
+          </a:prstGeom>
+        </p:spPr>
+      </p:pic>
+      <p:sp>
+        <p:nvSpPr>
+          <p:cNvPr id="4" name="Text 1"/>
+          <p:cNvSpPr/>
+          <p:nvPr/>
+        </p:nvSpPr>
+        <p:spPr>
+          <a:xfrm>
+            <a:off x="566928" y="384048"/>
+            <a:ext cx="11055096" cy="292608"/>
+          </a:xfrm>
+          <a:prstGeom prst="rect">
+            <a:avLst/>
+          </a:prstGeom>
+          <a:noFill/>
+          <a:ln/>
+        </p:spPr>
+        <p:txBody>
+          <a:bodyPr wrap="square" rtlCol="0" anchor="ctr"/>
+          <a:lstStyle/>
+          <a:p>
+            <a:pPr algn="l" indent="0" marL="0">
+              <a:buNone/>
+            </a:pPr>
+            <a:r>
+              <a:rPr lang="en-US" sz="1200" b="1" spc="400" kern="0" dirty="0">
+                <a:solidFill>
+                  <a:srgbClr val="EE0000"/>
+                </a:solidFill>
+                <a:latin typeface="Overpass" pitchFamily="34" charset="0"/>
+                <a:ea typeface="Overpass" pitchFamily="34" charset="-122"/>
+                <a:cs typeface="Overpass" pitchFamily="34" charset="-120"/>
+              </a:rPr>
+              <a:t>WHAT IS HUMMINGBIRD · OVERVIEW</a:t>
+            </a:r>
+            <a:endParaRPr lang="en-US" sz="1200" dirty="0"/>
+          </a:p>
+        </p:txBody>
+      </p:sp>
+      <p:sp>
+        <p:nvSpPr>
+          <p:cNvPr id="5" name="Text 2"/>
+          <p:cNvSpPr/>
+          <p:nvPr/>
+        </p:nvSpPr>
+        <p:spPr>
+          <a:xfrm>
+            <a:off x="566928" y="676656"/>
+            <a:ext cx="11055096" cy="1005840"/>
+          </a:xfrm>
+          <a:prstGeom prst="rect">
+            <a:avLst/>
+          </a:prstGeom>
+          <a:noFill/>
+          <a:ln/>
+        </p:spPr>
+        <p:txBody>
+          <a:bodyPr wrap="square" rtlCol="0" anchor="t"/>
+          <a:lstStyle/>
+          <a:p>
+            <a:pPr algn="l" indent="0" marL="0">
+              <a:buNone/>
+            </a:pPr>
+            <a:r>
+              <a:rPr lang="en-US" sz="3000" b="1" dirty="0">
+                <a:solidFill>
+                  <a:srgbClr val="151515"/>
+                </a:solidFill>
+                <a:latin typeface="Overpass" pitchFamily="34" charset="0"/>
+                <a:ea typeface="Overpass" pitchFamily="34" charset="-122"/>
+                <a:cs typeface="Overpass" pitchFamily="34" charset="-120"/>
+              </a:rPr>
+              <a:t>A catalog of minimal, hardened images</a:t>
+            </a:r>
+            <a:endParaRPr lang="en-US" sz="3000" dirty="0"/>
+          </a:p>
+        </p:txBody>
+      </p:sp>
+      <p:sp>
+        <p:nvSpPr>
+          <p:cNvPr id="6" name="Text 3"/>
+          <p:cNvSpPr/>
+          <p:nvPr/>
+        </p:nvSpPr>
+        <p:spPr>
+          <a:xfrm>
+            <a:off x="566928" y="1691640"/>
+            <a:ext cx="11055096" cy="4434840"/>
+          </a:xfrm>
+          <a:prstGeom prst="rect">
+            <a:avLst/>
+          </a:prstGeom>
+          <a:noFill/>
+          <a:ln/>
+        </p:spPr>
+        <p:txBody>
+          <a:bodyPr wrap="square" rtlCol="0" anchor="t"/>
+          <a:lstStyle/>
+          <a:p>
+            <a:pPr algn="l" marL="342900" indent="-342900">
+              <a:lnSpc>
+                <a:spcPct val="115000"/>
+              </a:lnSpc>
+              <a:spcAft>
+                <a:spcPts val="200"/>
+              </a:spcAft>
+              <a:buSzPct val="100000"/>
+              <a:buChar char="●"/>
+            </a:pPr>
+            <a:r>
+              <a:rPr lang="en-US" sz="1500" b="1" dirty="0">
+                <a:solidFill>
+                  <a:srgbClr val="242424"/>
+                </a:solidFill>
+                <a:latin typeface="Red Hat Text" pitchFamily="34" charset="0"/>
+                <a:ea typeface="Red Hat Text" pitchFamily="34" charset="-122"/>
+                <a:cs typeface="Red Hat Text" pitchFamily="34" charset="-120"/>
+              </a:rPr>
+              <a:t>Red Hat's catalog of minimal, hardened container images, built to mitigate as many known vulnerabilities as possible at release time.</a:t>
+            </a:r>
+            <a:endParaRPr lang="en-US" sz="1500" dirty="0"/>
+          </a:p>
+          <a:p>
+            <a:pPr algn="l" lvl="1" indent="0" marL="0">
+              <a:lnSpc>
+                <a:spcPct val="115000"/>
+              </a:lnSpc>
+              <a:spcAft>
+                <a:spcPts val="1200"/>
+              </a:spcAft>
+              <a:buNone/>
+            </a:pPr>
+            <a:r>
+              <a:rPr lang="en-US" sz="1300" dirty="0">
+                <a:solidFill>
+                  <a:srgbClr val="5A5A5A"/>
+                </a:solidFill>
+                <a:latin typeface="Red Hat Text" pitchFamily="34" charset="0"/>
+                <a:ea typeface="Red Hat Text" pitchFamily="34" charset="-122"/>
+                <a:cs typeface="Red Hat Text" pitchFamily="34" charset="-120"/>
+              </a:rPr>
+              <a:t>Red Hat Hardened Images (RHHI) is the product; Project Hummingbird was the early-access program and continues as the upstream innovation engine that produces it.</a:t>
+            </a:r>
+            <a:endParaRPr lang="en-US" sz="1500" dirty="0"/>
+          </a:p>
+          <a:p>
+            <a:pPr algn="l" marL="342900" indent="-342900">
+              <a:lnSpc>
+                <a:spcPct val="115000"/>
+              </a:lnSpc>
+              <a:spcAft>
+                <a:spcPts val="400"/>
+              </a:spcAft>
+              <a:buSzPct val="100000"/>
+              <a:buChar char="●"/>
+            </a:pPr>
+            <a:r>
+              <a:rPr lang="en-US" sz="1500" dirty="0">
+                <a:solidFill>
+                  <a:srgbClr val="242424"/>
+                </a:solidFill>
+                <a:latin typeface="Red Hat Text" pitchFamily="34" charset="0"/>
+                <a:ea typeface="Red Hat Text" pitchFamily="34" charset="-122"/>
+                <a:cs typeface="Red Hat Text" pitchFamily="34" charset="-120"/>
+              </a:rPr>
+              <a:t>Generally available since May 12, 2026 (Red Hat Summit), after an early-access run with hundreds of users; built on Red Hat's SLSA 3 (Konflux) pipeline.</a:t>
+            </a:r>
+            <a:endParaRPr lang="en-US" sz="1500" dirty="0"/>
+          </a:p>
+          <a:p>
+            <a:pPr algn="l" marL="342900" indent="-342900">
+              <a:lnSpc>
+                <a:spcPct val="115000"/>
+              </a:lnSpc>
+              <a:spcAft>
+                <a:spcPts val="400"/>
+              </a:spcAft>
+              <a:buSzPct val="100000"/>
+              <a:buChar char="●"/>
+            </a:pPr>
+            <a:r>
+              <a:rPr lang="en-US" sz="1500" dirty="0">
+                <a:solidFill>
+                  <a:srgbClr val="242424"/>
+                </a:solidFill>
+                <a:latin typeface="Red Hat Text" pitchFamily="34" charset="0"/>
+                <a:ea typeface="Red Hat Text" pitchFamily="34" charset="-122"/>
+                <a:cs typeface="Red Hat Text" pitchFamily="34" charset="-120"/>
+              </a:rPr>
+              <a:t>Free to use on any Linux distribution, Kubernetes, or container engine — vendor-neutral, no subscription. Optional long-term-support (LTS) images are planned via subscription.</a:t>
+            </a:r>
+            <a:endParaRPr lang="en-US" sz="1500" dirty="0"/>
+          </a:p>
+          <a:p>
+            <a:pPr algn="l" marL="342900" indent="-342900">
+              <a:lnSpc>
+                <a:spcPct val="115000"/>
+              </a:lnSpc>
+              <a:spcAft>
+                <a:spcPts val="400"/>
+              </a:spcAft>
+              <a:buSzPct val="100000"/>
+              <a:buChar char="●"/>
+            </a:pPr>
+            <a:r>
+              <a:rPr lang="en-US" sz="1500" dirty="0">
+                <a:solidFill>
+                  <a:srgbClr val="242424"/>
+                </a:solidFill>
+                <a:latin typeface="Red Hat Text" pitchFamily="34" charset="0"/>
+                <a:ea typeface="Red Hat Text" pitchFamily="34" charset="-122"/>
+                <a:cs typeface="Red Hat Text" pitchFamily="34" charset="-120"/>
+              </a:rPr>
+              <a:t>Over 45 images and 150+ variants: languages/runtimes (Python, Node.js, Go, Java, .NET), databases (PostgreSQL, Valkey), web servers/proxies (Nginx, HAProxy), and utilities.</a:t>
+            </a:r>
+            <a:endParaRPr lang="en-US" sz="1500" dirty="0"/>
+          </a:p>
+        </p:txBody>
+      </p:sp>
+    </p:spTree>
+  </p:cSld>
+  <p:clrMapOvr>
+    <a:masterClrMapping/>
+  </p:clrMapOvr>
+</p:sld>
+</file>
+
+<file path=ppt/slides/slide40.xml><?xml version="1.0" encoding="utf-8"?>
+<p:sld xmlns:a="http://schemas.openxmlformats.org/drawingml/2006/main" xmlns:r="http://schemas.openxmlformats.org/officeDocument/2006/relationships" xmlns:p="http://schemas.openxmlformats.org/presentationml/2006/main">
+  <p:cSld name="Slide 40">
+    <p:spTree>
+      <p:nvGrpSpPr>
+        <p:cNvPr id="1" name=""/>
+        <p:cNvGrpSpPr/>
+        <p:nvPr/>
+      </p:nvGrpSpPr>
+      <p:grpSpPr>
+        <a:xfrm>
+          <a:off x="0" y="0"/>
+          <a:ext cx="0" cy="0"/>
+          <a:chOff x="0" y="0"/>
+          <a:chExt cx="0" cy="0"/>
+        </a:xfrm>
+      </p:grpSpPr>
+      <p:sp>
+        <p:nvSpPr>
+          <p:cNvPr id="2" name="Text 0"/>
+          <p:cNvSpPr/>
+          <p:nvPr/>
+        </p:nvSpPr>
+        <p:spPr>
+          <a:xfrm>
+            <a:off x="566928" y="6364224"/>
+            <a:ext cx="914400" cy="274320"/>
+          </a:xfrm>
+          <a:prstGeom prst="rect">
+            <a:avLst/>
+          </a:prstGeom>
+          <a:noFill/>
+          <a:ln/>
+        </p:spPr>
+        <p:txBody>
+          <a:bodyPr wrap="square" rtlCol="0" anchor="ctr"/>
+          <a:lstStyle/>
+          <a:p>
+            <a:pPr algn="l" indent="0" marL="0">
+              <a:buNone/>
+            </a:pPr>
+            <a:r>
+              <a:rPr lang="en-US" sz="1000" dirty="0">
+                <a:solidFill>
+                  <a:srgbClr val="8A8A8A"/>
+                </a:solidFill>
+                <a:latin typeface="Red Hat Text" pitchFamily="34" charset="0"/>
+                <a:ea typeface="Red Hat Text" pitchFamily="34" charset="-122"/>
+                <a:cs typeface="Red Hat Text" pitchFamily="34" charset="-120"/>
+              </a:rPr>
+              <a:t>40</a:t>
+            </a:r>
+            <a:endParaRPr lang="en-US" sz="1000" dirty="0"/>
+          </a:p>
+        </p:txBody>
+      </p:sp>
+      <p:pic>
+        <p:nvPicPr>
+          <p:cNvPr id="3" name="Image 0" descr="./assets/logo-candidate-2.png">    </p:cNvPr>
+          <p:cNvPicPr>
+            <a:picLocks noChangeAspect="1"/>
+          </p:cNvPicPr>
+          <p:nvPr/>
+        </p:nvPicPr>
+        <p:blipFill>
+          <a:blip r:embed="rId1"/>
+          <a:stretch>
+            <a:fillRect/>
+          </a:stretch>
+        </p:blipFill>
+        <p:spPr>
+          <a:xfrm>
+            <a:off x="10561320" y="6355080"/>
+            <a:ext cx="1033272" cy="246888"/>
+          </a:xfrm>
+          <a:prstGeom prst="rect">
+            <a:avLst/>
+          </a:prstGeom>
+        </p:spPr>
+      </p:pic>
+      <p:sp>
+        <p:nvSpPr>
+          <p:cNvPr id="4" name="Text 1"/>
+          <p:cNvSpPr/>
+          <p:nvPr/>
+        </p:nvSpPr>
+        <p:spPr>
+          <a:xfrm>
+            <a:off x="566928" y="384048"/>
+            <a:ext cx="11055096" cy="292608"/>
+          </a:xfrm>
+          <a:prstGeom prst="rect">
+            <a:avLst/>
+          </a:prstGeom>
+          <a:noFill/>
+          <a:ln/>
+        </p:spPr>
+        <p:txBody>
+          <a:bodyPr wrap="square" rtlCol="0" anchor="ctr"/>
+          <a:lstStyle/>
+          <a:p>
+            <a:pPr algn="l" indent="0" marL="0">
+              <a:buNone/>
+            </a:pPr>
+            <a:r>
+              <a:rPr lang="en-US" sz="1200" b="1" spc="400" kern="0" dirty="0">
+                <a:solidFill>
+                  <a:srgbClr val="EE0000"/>
+                </a:solidFill>
+                <a:latin typeface="Overpass" pitchFamily="34" charset="0"/>
+                <a:ea typeface="Overpass" pitchFamily="34" charset="-122"/>
+                <a:cs typeface="Overpass" pitchFamily="34" charset="-120"/>
+              </a:rPr>
+              <a:t>SUPPLY CHAIN · RUNTIME SURFACE</a:t>
+            </a:r>
+            <a:endParaRPr lang="en-US" sz="1200" dirty="0"/>
+          </a:p>
+        </p:txBody>
+      </p:sp>
+      <p:sp>
+        <p:nvSpPr>
+          <p:cNvPr id="5" name="Text 2"/>
+          <p:cNvSpPr/>
+          <p:nvPr/>
+        </p:nvSpPr>
+        <p:spPr>
+          <a:xfrm>
+            <a:off x="566928" y="676656"/>
+            <a:ext cx="11055096" cy="1005840"/>
+          </a:xfrm>
+          <a:prstGeom prst="rect">
+            <a:avLst/>
+          </a:prstGeom>
+          <a:noFill/>
+          <a:ln/>
+        </p:spPr>
+        <p:txBody>
+          <a:bodyPr wrap="square" rtlCol="0" anchor="t"/>
+          <a:lstStyle/>
+          <a:p>
+            <a:pPr algn="l" indent="0" marL="0">
+              <a:buNone/>
+            </a:pPr>
+            <a:r>
+              <a:rPr lang="en-US" sz="3000" b="1" dirty="0">
+                <a:solidFill>
+                  <a:srgbClr val="151515"/>
+                </a:solidFill>
+                <a:latin typeface="Overpass" pitchFamily="34" charset="0"/>
+                <a:ea typeface="Overpass" pitchFamily="34" charset="-122"/>
+                <a:cs typeface="Overpass" pitchFamily="34" charset="-120"/>
+              </a:rPr>
+              <a:t>Defense in depth — and where the image helps</a:t>
+            </a:r>
+            <a:endParaRPr lang="en-US" sz="3000" dirty="0"/>
+          </a:p>
+        </p:txBody>
+      </p:sp>
+      <p:pic>
+        <p:nvPicPr>
+          <p:cNvPr id="6" name="Image 1" descr="./png/18-supply-chain-security-layers.png">    </p:cNvPr>
+          <p:cNvPicPr>
+            <a:picLocks noChangeAspect="1"/>
+          </p:cNvPicPr>
+          <p:nvPr/>
+        </p:nvPicPr>
+        <p:blipFill>
+          <a:blip r:embed="rId2"/>
+          <a:srcRect l="0" r="0" t="0" b="0"/>
+          <a:stretch/>
+        </p:blipFill>
+        <p:spPr>
+          <a:xfrm>
+            <a:off x="1645920" y="1600200"/>
+            <a:ext cx="8906256" cy="4343400"/>
+          </a:xfrm>
+          <a:prstGeom prst="rect">
+            <a:avLst/>
+          </a:prstGeom>
+        </p:spPr>
+      </p:pic>
+      <p:sp>
+        <p:nvSpPr>
+          <p:cNvPr id="7" name="Text 3"/>
+          <p:cNvSpPr/>
+          <p:nvPr/>
+        </p:nvSpPr>
+        <p:spPr>
+          <a:xfrm>
+            <a:off x="566928" y="5943600"/>
+            <a:ext cx="11055096" cy="310896"/>
+          </a:xfrm>
+          <a:prstGeom prst="rect">
+            <a:avLst/>
+          </a:prstGeom>
+          <a:noFill/>
+          <a:ln/>
+        </p:spPr>
+        <p:txBody>
+          <a:bodyPr wrap="square" rtlCol="0" anchor="ctr"/>
+          <a:lstStyle/>
+          <a:p>
+            <a:pPr algn="ctr" indent="0" marL="0">
+              <a:buNone/>
+            </a:pPr>
+            <a:r>
+              <a:rPr lang="en-US" sz="1300" i="1" dirty="0">
+                <a:solidFill>
+                  <a:srgbClr val="5A5A5A"/>
+                </a:solidFill>
+                <a:latin typeface="Red Hat Text" pitchFamily="34" charset="0"/>
+                <a:ea typeface="Red Hat Text" pitchFamily="34" charset="-122"/>
+                <a:cs typeface="Red Hat Text" pitchFamily="34" charset="-120"/>
+              </a:rPr>
+              <a:t>Figure 18.3 — The layered runtime attack surface; the hardened image shrinks the image-and-app cluster, not the platform.</a:t>
+            </a:r>
+            <a:endParaRPr lang="en-US" sz="1300" dirty="0"/>
+          </a:p>
+        </p:txBody>
+      </p:sp>
+    </p:spTree>
+  </p:cSld>
+  <p:clrMapOvr>
+    <a:masterClrMapping/>
+  </p:clrMapOvr>
+</p:sld>
+</file>
+
+<file path=ppt/slides/slide41.xml><?xml version="1.0" encoding="utf-8"?>
+<p:sld xmlns:a="http://schemas.openxmlformats.org/drawingml/2006/main" xmlns:r="http://schemas.openxmlformats.org/officeDocument/2006/relationships" xmlns:p="http://schemas.openxmlformats.org/presentationml/2006/main">
+  <p:cSld name="Slide 41">
+    <p:spTree>
+      <p:nvGrpSpPr>
+        <p:cNvPr id="1" name=""/>
+        <p:cNvGrpSpPr/>
+        <p:nvPr/>
+      </p:nvGrpSpPr>
+      <p:grpSpPr>
+        <a:xfrm>
+          <a:off x="0" y="0"/>
+          <a:ext cx="0" cy="0"/>
+          <a:chOff x="0" y="0"/>
+          <a:chExt cx="0" cy="0"/>
+        </a:xfrm>
+      </p:grpSpPr>
+      <p:sp>
+        <p:nvSpPr>
+          <p:cNvPr id="2" name="Text 0"/>
+          <p:cNvSpPr/>
+          <p:nvPr/>
+        </p:nvSpPr>
+        <p:spPr>
+          <a:xfrm>
+            <a:off x="566928" y="6364224"/>
+            <a:ext cx="914400" cy="274320"/>
+          </a:xfrm>
+          <a:prstGeom prst="rect">
+            <a:avLst/>
+          </a:prstGeom>
+          <a:noFill/>
+          <a:ln/>
+        </p:spPr>
+        <p:txBody>
+          <a:bodyPr wrap="square" rtlCol="0" anchor="ctr"/>
+          <a:lstStyle/>
+          <a:p>
+            <a:pPr algn="l" indent="0" marL="0">
+              <a:buNone/>
+            </a:pPr>
+            <a:r>
+              <a:rPr lang="en-US" sz="1000" dirty="0">
+                <a:solidFill>
+                  <a:srgbClr val="8A8A8A"/>
+                </a:solidFill>
+                <a:latin typeface="Red Hat Text" pitchFamily="34" charset="0"/>
+                <a:ea typeface="Red Hat Text" pitchFamily="34" charset="-122"/>
+                <a:cs typeface="Red Hat Text" pitchFamily="34" charset="-120"/>
+              </a:rPr>
+              <a:t>41</a:t>
+            </a:r>
+            <a:endParaRPr lang="en-US" sz="1000" dirty="0"/>
+          </a:p>
+        </p:txBody>
+      </p:sp>
+      <p:pic>
+        <p:nvPicPr>
+          <p:cNvPr id="3" name="Image 0" descr="./assets/logo-candidate-2.png">    </p:cNvPr>
+          <p:cNvPicPr>
+            <a:picLocks noChangeAspect="1"/>
+          </p:cNvPicPr>
+          <p:nvPr/>
+        </p:nvPicPr>
+        <p:blipFill>
+          <a:blip r:embed="rId1"/>
+          <a:stretch>
+            <a:fillRect/>
+          </a:stretch>
+        </p:blipFill>
+        <p:spPr>
+          <a:xfrm>
+            <a:off x="10561320" y="6355080"/>
+            <a:ext cx="1033272" cy="246888"/>
+          </a:xfrm>
+          <a:prstGeom prst="rect">
+            <a:avLst/>
+          </a:prstGeom>
+        </p:spPr>
+      </p:pic>
+      <p:sp>
+        <p:nvSpPr>
+          <p:cNvPr id="4" name="Text 1"/>
+          <p:cNvSpPr/>
+          <p:nvPr/>
+        </p:nvSpPr>
+        <p:spPr>
+          <a:xfrm>
+            <a:off x="566928" y="384048"/>
+            <a:ext cx="11055096" cy="292608"/>
+          </a:xfrm>
+          <a:prstGeom prst="rect">
+            <a:avLst/>
+          </a:prstGeom>
+          <a:noFill/>
+          <a:ln/>
+        </p:spPr>
+        <p:txBody>
+          <a:bodyPr wrap="square" rtlCol="0" anchor="ctr"/>
+          <a:lstStyle/>
+          <a:p>
+            <a:pPr algn="l" indent="0" marL="0">
+              <a:buNone/>
+            </a:pPr>
+            <a:r>
+              <a:rPr lang="en-US" sz="1200" b="1" spc="400" kern="0" dirty="0">
+                <a:solidFill>
+                  <a:srgbClr val="EE0000"/>
+                </a:solidFill>
+                <a:latin typeface="Overpass" pitchFamily="34" charset="0"/>
+                <a:ea typeface="Overpass" pitchFamily="34" charset="-122"/>
+                <a:cs typeface="Overpass" pitchFamily="34" charset="-120"/>
+              </a:rPr>
+              <a:t>SUPPLY CHAIN · DIVISION OF LABOUR</a:t>
+            </a:r>
+            <a:endParaRPr lang="en-US" sz="1200" dirty="0"/>
+          </a:p>
+        </p:txBody>
+      </p:sp>
+      <p:sp>
+        <p:nvSpPr>
+          <p:cNvPr id="5" name="Text 2"/>
+          <p:cNvSpPr/>
+          <p:nvPr/>
+        </p:nvSpPr>
+        <p:spPr>
+          <a:xfrm>
+            <a:off x="566928" y="676656"/>
+            <a:ext cx="11055096" cy="1005840"/>
+          </a:xfrm>
+          <a:prstGeom prst="rect">
+            <a:avLst/>
+          </a:prstGeom>
+          <a:noFill/>
+          <a:ln/>
+        </p:spPr>
+        <p:txBody>
+          <a:bodyPr wrap="square" rtlCol="0" anchor="t"/>
+          <a:lstStyle/>
+          <a:p>
+            <a:pPr algn="l" indent="0" marL="0">
+              <a:buNone/>
+            </a:pPr>
+            <a:r>
+              <a:rPr lang="en-US" sz="3000" b="1" dirty="0">
+                <a:solidFill>
+                  <a:srgbClr val="151515"/>
+                </a:solidFill>
+                <a:latin typeface="Overpass" pitchFamily="34" charset="0"/>
+                <a:ea typeface="Overpass" pitchFamily="34" charset="-122"/>
+                <a:cs typeface="Overpass" pitchFamily="34" charset="-120"/>
+              </a:rPr>
               <a:t>What Hummingbird closes — and what's still yours</a:t>
             </a:r>
             <a:endParaRPr lang="en-US" sz="3000" dirty="0"/>
@@ -15749,7 +17604,7 @@
       </p:sp>
       <p:graphicFrame>
         <p:nvGraphicFramePr>
-          <p:cNvPr id="39" name="Table 0"/>
+          <p:cNvPr id="42" name="Table 0"/>
           <p:cNvGraphicFramePr>
             <a:graphicFrameLocks noGrp="1"/>
           </p:cNvGraphicFramePr>
@@ -17007,9 +18862,9 @@
 </p:sld>
 </file>
 
-<file path=ppt/slides/slide39.xml><?xml version="1.0" encoding="utf-8"?>
+<file path=ppt/slides/slide42.xml><?xml version="1.0" encoding="utf-8"?>
 <p:sld xmlns:a="http://schemas.openxmlformats.org/drawingml/2006/main" xmlns:r="http://schemas.openxmlformats.org/officeDocument/2006/relationships" xmlns:p="http://schemas.openxmlformats.org/presentationml/2006/main">
-  <p:cSld name="Slide 39">
+  <p:cSld name="Slide 42">
     <p:spTree>
       <p:nvGrpSpPr>
         <p:cNvPr id="1" name=""/>
@@ -17057,7 +18912,7 @@
                 <a:ea typeface="Red Hat Text" pitchFamily="34" charset="-122"/>
                 <a:cs typeface="Red Hat Text" pitchFamily="34" charset="-120"/>
               </a:rPr>
-              <a:t>39</a:t>
+              <a:t>42</a:t>
             </a:r>
             <a:endParaRPr lang="en-US" sz="1000" dirty="0"/>
           </a:p>
@@ -17314,316 +19169,9 @@
 </p:sld>
 </file>
 
-<file path=ppt/slides/slide4.xml><?xml version="1.0" encoding="utf-8"?>
+<file path=ppt/slides/slide43.xml><?xml version="1.0" encoding="utf-8"?>
 <p:sld xmlns:a="http://schemas.openxmlformats.org/drawingml/2006/main" xmlns:r="http://schemas.openxmlformats.org/officeDocument/2006/relationships" xmlns:p="http://schemas.openxmlformats.org/presentationml/2006/main">
-  <p:cSld name="Slide 4">
-    <p:spTree>
-      <p:nvGrpSpPr>
-        <p:cNvPr id="1" name=""/>
-        <p:cNvGrpSpPr/>
-        <p:nvPr/>
-      </p:nvGrpSpPr>
-      <p:grpSpPr>
-        <a:xfrm>
-          <a:off x="0" y="0"/>
-          <a:ext cx="0" cy="0"/>
-          <a:chOff x="0" y="0"/>
-          <a:chExt cx="0" cy="0"/>
-        </a:xfrm>
-      </p:grpSpPr>
-      <p:sp>
-        <p:nvSpPr>
-          <p:cNvPr id="2" name="Text 0"/>
-          <p:cNvSpPr/>
-          <p:nvPr/>
-        </p:nvSpPr>
-        <p:spPr>
-          <a:xfrm>
-            <a:off x="566928" y="6364224"/>
-            <a:ext cx="914400" cy="274320"/>
-          </a:xfrm>
-          <a:prstGeom prst="rect">
-            <a:avLst/>
-          </a:prstGeom>
-          <a:noFill/>
-          <a:ln/>
-        </p:spPr>
-        <p:txBody>
-          <a:bodyPr wrap="square" rtlCol="0" anchor="ctr"/>
-          <a:lstStyle/>
-          <a:p>
-            <a:pPr algn="l" indent="0" marL="0">
-              <a:buNone/>
-            </a:pPr>
-            <a:r>
-              <a:rPr lang="en-US" sz="1000" dirty="0">
-                <a:solidFill>
-                  <a:srgbClr val="8A8A8A"/>
-                </a:solidFill>
-                <a:latin typeface="Red Hat Text" pitchFamily="34" charset="0"/>
-                <a:ea typeface="Red Hat Text" pitchFamily="34" charset="-122"/>
-                <a:cs typeface="Red Hat Text" pitchFamily="34" charset="-120"/>
-              </a:rPr>
-              <a:t>4</a:t>
-            </a:r>
-            <a:endParaRPr lang="en-US" sz="1000" dirty="0"/>
-          </a:p>
-        </p:txBody>
-      </p:sp>
-      <p:pic>
-        <p:nvPicPr>
-          <p:cNvPr id="3" name="Image 0" descr="./assets/logo-candidate-2.png">    </p:cNvPr>
-          <p:cNvPicPr>
-            <a:picLocks noChangeAspect="1"/>
-          </p:cNvPicPr>
-          <p:nvPr/>
-        </p:nvPicPr>
-        <p:blipFill>
-          <a:blip r:embed="rId1"/>
-          <a:stretch>
-            <a:fillRect/>
-          </a:stretch>
-        </p:blipFill>
-        <p:spPr>
-          <a:xfrm>
-            <a:off x="10561320" y="6355080"/>
-            <a:ext cx="1033272" cy="246888"/>
-          </a:xfrm>
-          <a:prstGeom prst="rect">
-            <a:avLst/>
-          </a:prstGeom>
-        </p:spPr>
-      </p:pic>
-      <p:sp>
-        <p:nvSpPr>
-          <p:cNvPr id="4" name="Text 1"/>
-          <p:cNvSpPr/>
-          <p:nvPr/>
-        </p:nvSpPr>
-        <p:spPr>
-          <a:xfrm>
-            <a:off x="566928" y="384048"/>
-            <a:ext cx="11055096" cy="292608"/>
-          </a:xfrm>
-          <a:prstGeom prst="rect">
-            <a:avLst/>
-          </a:prstGeom>
-          <a:noFill/>
-          <a:ln/>
-        </p:spPr>
-        <p:txBody>
-          <a:bodyPr wrap="square" rtlCol="0" anchor="ctr"/>
-          <a:lstStyle/>
-          <a:p>
-            <a:pPr algn="l" indent="0" marL="0">
-              <a:buNone/>
-            </a:pPr>
-            <a:r>
-              <a:rPr lang="en-US" sz="1200" b="1" spc="400" kern="0" dirty="0">
-                <a:solidFill>
-                  <a:srgbClr val="EE0000"/>
-                </a:solidFill>
-                <a:latin typeface="Overpass" pitchFamily="34" charset="0"/>
-                <a:ea typeface="Overpass" pitchFamily="34" charset="-122"/>
-                <a:cs typeface="Overpass" pitchFamily="34" charset="-120"/>
-              </a:rPr>
-              <a:t>WHAT IS HUMMINGBIRD · OVERVIEW</a:t>
-            </a:r>
-            <a:endParaRPr lang="en-US" sz="1200" dirty="0"/>
-          </a:p>
-        </p:txBody>
-      </p:sp>
-      <p:sp>
-        <p:nvSpPr>
-          <p:cNvPr id="5" name="Text 2"/>
-          <p:cNvSpPr/>
-          <p:nvPr/>
-        </p:nvSpPr>
-        <p:spPr>
-          <a:xfrm>
-            <a:off x="566928" y="676656"/>
-            <a:ext cx="11055096" cy="1005840"/>
-          </a:xfrm>
-          <a:prstGeom prst="rect">
-            <a:avLst/>
-          </a:prstGeom>
-          <a:noFill/>
-          <a:ln/>
-        </p:spPr>
-        <p:txBody>
-          <a:bodyPr wrap="square" rtlCol="0" anchor="t"/>
-          <a:lstStyle/>
-          <a:p>
-            <a:pPr algn="l" indent="0" marL="0">
-              <a:buNone/>
-            </a:pPr>
-            <a:r>
-              <a:rPr lang="en-US" sz="3000" b="1" dirty="0">
-                <a:solidFill>
-                  <a:srgbClr val="151515"/>
-                </a:solidFill>
-                <a:latin typeface="Overpass" pitchFamily="34" charset="0"/>
-                <a:ea typeface="Overpass" pitchFamily="34" charset="-122"/>
-                <a:cs typeface="Overpass" pitchFamily="34" charset="-120"/>
-              </a:rPr>
-              <a:t>A catalog of minimal, hardened images</a:t>
-            </a:r>
-            <a:endParaRPr lang="en-US" sz="3000" dirty="0"/>
-          </a:p>
-        </p:txBody>
-      </p:sp>
-      <p:sp>
-        <p:nvSpPr>
-          <p:cNvPr id="6" name="Text 3"/>
-          <p:cNvSpPr/>
-          <p:nvPr/>
-        </p:nvSpPr>
-        <p:spPr>
-          <a:xfrm>
-            <a:off x="566928" y="1691640"/>
-            <a:ext cx="11055096" cy="4434840"/>
-          </a:xfrm>
-          <a:prstGeom prst="rect">
-            <a:avLst/>
-          </a:prstGeom>
-          <a:noFill/>
-          <a:ln/>
-        </p:spPr>
-        <p:txBody>
-          <a:bodyPr wrap="square" rtlCol="0" anchor="t"/>
-          <a:lstStyle/>
-          <a:p>
-            <a:pPr algn="l" marL="342900" indent="-342900">
-              <a:lnSpc>
-                <a:spcPct val="115000"/>
-              </a:lnSpc>
-              <a:spcAft>
-                <a:spcPts val="200"/>
-              </a:spcAft>
-              <a:buSzPct val="100000"/>
-              <a:buChar char="●"/>
-            </a:pPr>
-            <a:r>
-              <a:rPr lang="en-US" sz="1500" b="1" dirty="0">
-                <a:solidFill>
-                  <a:srgbClr val="242424"/>
-                </a:solidFill>
-                <a:latin typeface="Red Hat Text" pitchFamily="34" charset="0"/>
-                <a:ea typeface="Red Hat Text" pitchFamily="34" charset="-122"/>
-                <a:cs typeface="Red Hat Text" pitchFamily="34" charset="-120"/>
-              </a:rPr>
-              <a:t>Red Hat's catalog of minimal, hardened container images, built to mitigate as many known vulnerabilities as possible at release time.</a:t>
-            </a:r>
-            <a:endParaRPr lang="en-US" sz="1500" dirty="0"/>
-          </a:p>
-          <a:p>
-            <a:pPr algn="l" lvl="1" indent="0" marL="0">
-              <a:lnSpc>
-                <a:spcPct val="115000"/>
-              </a:lnSpc>
-              <a:spcAft>
-                <a:spcPts val="1200"/>
-              </a:spcAft>
-              <a:buNone/>
-            </a:pPr>
-            <a:r>
-              <a:rPr lang="en-US" sz="1300" dirty="0">
-                <a:solidFill>
-                  <a:srgbClr val="5A5A5A"/>
-                </a:solidFill>
-                <a:latin typeface="Red Hat Text" pitchFamily="34" charset="0"/>
-                <a:ea typeface="Red Hat Text" pitchFamily="34" charset="-122"/>
-                <a:cs typeface="Red Hat Text" pitchFamily="34" charset="-120"/>
-              </a:rPr>
-              <a:t>Red Hat Hardened Images (RHHI) is the product; Project Hummingbird was the early-access program and continues as the upstream innovation engine that produces it.</a:t>
-            </a:r>
-            <a:endParaRPr lang="en-US" sz="1500" dirty="0"/>
-          </a:p>
-          <a:p>
-            <a:pPr algn="l" marL="342900" indent="-342900">
-              <a:lnSpc>
-                <a:spcPct val="115000"/>
-              </a:lnSpc>
-              <a:spcAft>
-                <a:spcPts val="400"/>
-              </a:spcAft>
-              <a:buSzPct val="100000"/>
-              <a:buChar char="●"/>
-            </a:pPr>
-            <a:r>
-              <a:rPr lang="en-US" sz="1500" dirty="0">
-                <a:solidFill>
-                  <a:srgbClr val="242424"/>
-                </a:solidFill>
-                <a:latin typeface="Red Hat Text" pitchFamily="34" charset="0"/>
-                <a:ea typeface="Red Hat Text" pitchFamily="34" charset="-122"/>
-                <a:cs typeface="Red Hat Text" pitchFamily="34" charset="-120"/>
-              </a:rPr>
-              <a:t>Generally available since May 12, 2026 (Red Hat Summit), after an early-access run with hundreds of users; built on Red Hat's SLSA 3 (Konflux) pipeline.</a:t>
-            </a:r>
-            <a:endParaRPr lang="en-US" sz="1500" dirty="0"/>
-          </a:p>
-          <a:p>
-            <a:pPr algn="l" marL="342900" indent="-342900">
-              <a:lnSpc>
-                <a:spcPct val="115000"/>
-              </a:lnSpc>
-              <a:spcAft>
-                <a:spcPts val="400"/>
-              </a:spcAft>
-              <a:buSzPct val="100000"/>
-              <a:buChar char="●"/>
-            </a:pPr>
-            <a:r>
-              <a:rPr lang="en-US" sz="1500" dirty="0">
-                <a:solidFill>
-                  <a:srgbClr val="242424"/>
-                </a:solidFill>
-                <a:latin typeface="Red Hat Text" pitchFamily="34" charset="0"/>
-                <a:ea typeface="Red Hat Text" pitchFamily="34" charset="-122"/>
-                <a:cs typeface="Red Hat Text" pitchFamily="34" charset="-120"/>
-              </a:rPr>
-              <a:t>Free to use on any Linux distribution, Kubernetes, or container engine — vendor-neutral, no subscription. Optional long-term-support (LTS) images are planned via subscription.</a:t>
-            </a:r>
-            <a:endParaRPr lang="en-US" sz="1500" dirty="0"/>
-          </a:p>
-          <a:p>
-            <a:pPr algn="l" marL="342900" indent="-342900">
-              <a:lnSpc>
-                <a:spcPct val="115000"/>
-              </a:lnSpc>
-              <a:spcAft>
-                <a:spcPts val="400"/>
-              </a:spcAft>
-              <a:buSzPct val="100000"/>
-              <a:buChar char="●"/>
-            </a:pPr>
-            <a:r>
-              <a:rPr lang="en-US" sz="1500" dirty="0">
-                <a:solidFill>
-                  <a:srgbClr val="242424"/>
-                </a:solidFill>
-                <a:latin typeface="Red Hat Text" pitchFamily="34" charset="0"/>
-                <a:ea typeface="Red Hat Text" pitchFamily="34" charset="-122"/>
-                <a:cs typeface="Red Hat Text" pitchFamily="34" charset="-120"/>
-              </a:rPr>
-              <a:t>Over 45 images and 150+ variants: languages/runtimes (Python, Node.js, Go, Java, .NET), databases (PostgreSQL, Valkey), web servers/proxies (Nginx, HAProxy), and utilities.</a:t>
-            </a:r>
-            <a:endParaRPr lang="en-US" sz="1500" dirty="0"/>
-          </a:p>
-        </p:txBody>
-      </p:sp>
-    </p:spTree>
-  </p:cSld>
-  <p:clrMapOvr>
-    <a:masterClrMapping/>
-  </p:clrMapOvr>
-</p:sld>
-</file>
-
-<file path=ppt/slides/slide40.xml><?xml version="1.0" encoding="utf-8"?>
-<p:sld xmlns:a="http://schemas.openxmlformats.org/drawingml/2006/main" xmlns:r="http://schemas.openxmlformats.org/officeDocument/2006/relationships" xmlns:p="http://schemas.openxmlformats.org/presentationml/2006/main">
-  <p:cSld name="Slide 40">
+  <p:cSld name="Slide 43">
     <p:bg>
       <p:bgPr>
         <a:solidFill>
@@ -17848,48 +19396,9 @@
           </a:p>
         </p:txBody>
       </p:sp>
-      <p:sp>
-        <p:nvSpPr>
-          <p:cNvPr id="7" name="Text 4"/>
-          <p:cNvSpPr/>
-          <p:nvPr/>
-        </p:nvSpPr>
-        <p:spPr>
-          <a:xfrm>
-            <a:off x="10835640" y="5349240"/>
-            <a:ext cx="868680" cy="274320"/>
-          </a:xfrm>
-          <a:prstGeom prst="rect">
-            <a:avLst/>
-          </a:prstGeom>
-          <a:noFill/>
-          <a:ln/>
-        </p:spPr>
-        <p:txBody>
-          <a:bodyPr wrap="square" rtlCol="0" anchor="ctr"/>
-          <a:lstStyle/>
-          <a:p>
-            <a:pPr algn="r" indent="0" marL="0">
-              <a:buNone/>
-            </a:pPr>
-            <a:r>
-              <a:rPr lang="en-US" sz="1100" dirty="0">
-                <a:solidFill>
-                  <a:srgbClr val="5A5A5A"/>
-                </a:solidFill>
-                <a:latin typeface="Red Hat Mono" pitchFamily="34" charset="0"/>
-                <a:ea typeface="Red Hat Mono" pitchFamily="34" charset="-122"/>
-                <a:cs typeface="Red Hat Mono" pitchFamily="34" charset="-120"/>
-              </a:rPr>
-              <a:t>r01.6</a:t>
-            </a:r>
-            <a:endParaRPr lang="en-US" sz="1100" dirty="0"/>
-          </a:p>
-        </p:txBody>
-      </p:sp>
       <p:pic>
         <p:nvPicPr>
-          <p:cNvPr id="8" name="Image 1" descr="./assets/logo-candidate-2.png">    </p:cNvPr>
+          <p:cNvPr id="7" name="Image 1" descr="./assets/logo-candidate-2.png">    </p:cNvPr>
           <p:cNvPicPr>
             <a:picLocks noChangeAspect="1"/>
           </p:cNvPicPr>
